--- a/docs/Nhom12_SlideBaoCaoCuoiKy.pptx
+++ b/docs/Nhom12_SlideBaoCaoCuoiKy.pptx
@@ -5,7 +5,7 @@
     <p:sldMasterId id="2147483648" r:id="rId1"/>
   </p:sldMasterIdLst>
   <p:notesMasterIdLst>
-    <p:notesMasterId r:id="rId20"/>
+    <p:notesMasterId r:id="rId22"/>
   </p:notesMasterIdLst>
   <p:sldIdLst>
     <p:sldId id="256" r:id="rId2"/>
@@ -23,21 +23,23 @@
     <p:sldId id="312" r:id="rId14"/>
     <p:sldId id="313" r:id="rId15"/>
     <p:sldId id="302" r:id="rId16"/>
-    <p:sldId id="303" r:id="rId17"/>
-    <p:sldId id="304" r:id="rId18"/>
-    <p:sldId id="297" r:id="rId19"/>
+    <p:sldId id="314" r:id="rId17"/>
+    <p:sldId id="315" r:id="rId18"/>
+    <p:sldId id="303" r:id="rId19"/>
+    <p:sldId id="304" r:id="rId20"/>
+    <p:sldId id="297" r:id="rId21"/>
   </p:sldIdLst>
   <p:sldSz cx="5753100" cy="3238500"/>
   <p:notesSz cx="6858000" cy="9144000"/>
   <p:embeddedFontLst>
     <p:embeddedFont>
       <p:font typeface="Cambria Math" panose="02040503050406030204" pitchFamily="18" charset="0"/>
-      <p:regular r:id="rId21"/>
+      <p:regular r:id="rId23"/>
     </p:embeddedFont>
     <p:embeddedFont>
       <p:font typeface="Tahoma" panose="020B0604030504040204" pitchFamily="34" charset="0"/>
-      <p:regular r:id="rId22"/>
-      <p:bold r:id="rId23"/>
+      <p:regular r:id="rId24"/>
+      <p:bold r:id="rId25"/>
     </p:embeddedFont>
   </p:embeddedFontLst>
   <p:defaultTextStyle>
@@ -930,6 +932,409 @@
         </p:txBody>
       </p:sp>
     </p:spTree>
+  </p:cSld>
+  <p:clrMapOvr>
+    <a:masterClrMapping/>
+  </p:clrMapOvr>
+</p:notes>
+</file>
+
+<file path=ppt/notesSlides/notesSlide3.xml><?xml version="1.0" encoding="utf-8"?>
+<p:notes xmlns:a="http://schemas.openxmlformats.org/drawingml/2006/main" xmlns:r="http://schemas.openxmlformats.org/officeDocument/2006/relationships" xmlns:p="http://schemas.openxmlformats.org/presentationml/2006/main">
+  <p:cSld>
+    <p:spTree>
+      <p:nvGrpSpPr>
+        <p:cNvPr id="1" name=""/>
+        <p:cNvGrpSpPr/>
+        <p:nvPr/>
+      </p:nvGrpSpPr>
+      <p:grpSpPr>
+        <a:xfrm>
+          <a:off x="0" y="0"/>
+          <a:ext cx="0" cy="0"/>
+          <a:chOff x="0" y="0"/>
+          <a:chExt cx="0" cy="0"/>
+        </a:xfrm>
+      </p:grpSpPr>
+      <p:sp>
+        <p:nvSpPr>
+          <p:cNvPr id="2" name="Slide Image Placeholder 1"/>
+          <p:cNvSpPr>
+            <a:spLocks noGrp="1" noRot="1" noChangeAspect="1"/>
+          </p:cNvSpPr>
+          <p:nvPr>
+            <p:ph type="sldImg"/>
+          </p:nvPr>
+        </p:nvSpPr>
+        <p:spPr>
+          <a:xfrm>
+            <a:off x="2292350" y="512763"/>
+            <a:ext cx="4559300" cy="2566987"/>
+          </a:xfrm>
+        </p:spPr>
+      </p:sp>
+      <p:sp>
+        <p:nvSpPr>
+          <p:cNvPr id="3" name="Notes Placeholder 2"/>
+          <p:cNvSpPr>
+            <a:spLocks noGrp="1"/>
+          </p:cNvSpPr>
+          <p:nvPr>
+            <p:ph type="body" idx="1"/>
+          </p:nvPr>
+        </p:nvSpPr>
+        <p:spPr/>
+        <p:txBody>
+          <a:bodyPr/>
+          <a:lstStyle/>
+          <a:p>
+            <a:pPr marL="171450" indent="-171450">
+              <a:buFont typeface="Arial" panose="020B0604020202020204" pitchFamily="34" charset="0"/>
+              <a:buChar char="•"/>
+            </a:pPr>
+            <a:r>
+              <a:rPr lang="vi-VN" dirty="0"/>
+              <a:t>Ở phần này, em giới thiệu mô hình Sequence-to-Sequence, hay còn gọi là Seq2Seq, một kiến trúc rất quan trọng trong xử lý ngôn ngữ tự nhiên, đặc biệt là trong bài toán dịch máy.</a:t>
+            </a:r>
+          </a:p>
+          <a:p>
+            <a:pPr marL="171450" indent="-171450">
+              <a:buFont typeface="Arial" panose="020B0604020202020204" pitchFamily="34" charset="0"/>
+              <a:buChar char="•"/>
+            </a:pPr>
+            <a:r>
+              <a:rPr lang="vi-VN" dirty="0"/>
+              <a:t>Ý tưởng chính của mô hình là chuyển đổi một chuỗi đầu vào sang một chuỗi đầu ra, ví dụ như dịch từ tiếng Anh sang tiếng Việt, trong đó độ dài hai chuỗi có thể khác nhau.</a:t>
+            </a:r>
+          </a:p>
+          <a:p>
+            <a:pPr marL="171450" indent="-171450">
+              <a:buFont typeface="Arial" panose="020B0604020202020204" pitchFamily="34" charset="0"/>
+              <a:buChar char="•"/>
+            </a:pPr>
+            <a:r>
+              <a:rPr lang="vi-VN" dirty="0"/>
+              <a:t>Mô hình Seq2Seq gồm hai thành phần chính là Encoder và Decoder.</a:t>
+            </a:r>
+          </a:p>
+          <a:p>
+            <a:pPr marL="171450" indent="-171450">
+              <a:buFont typeface="Arial" panose="020B0604020202020204" pitchFamily="34" charset="0"/>
+              <a:buChar char="•"/>
+            </a:pPr>
+            <a:r>
+              <a:rPr lang="vi-VN" dirty="0"/>
+              <a:t>Encoder có nhiệm vụ đọc toàn bộ câu đầu vào và mã hóa nó thành một vector gọi là context vector. Vector này được xem như một dạng biểu diễn cô đọng toàn bộ ý nghĩa của câu.</a:t>
+            </a:r>
+          </a:p>
+          <a:p>
+            <a:pPr marL="171450" indent="-171450">
+              <a:buFont typeface="Arial" panose="020B0604020202020204" pitchFamily="34" charset="0"/>
+              <a:buChar char="•"/>
+            </a:pPr>
+            <a:r>
+              <a:rPr lang="vi-VN" dirty="0"/>
+              <a:t>Sau đó, Decoder sẽ sử dụng vector này để sinh ra câu đầu ra từng từ một. Quá trình sinh diễn ra tuần tự, bắt đầu từ token </a:t>
+            </a:r>
+            <a:r>
+              <a:rPr lang="vi-VN" sz="1200" kern="1200" dirty="0">
+                <a:solidFill>
+                  <a:schemeClr val="tx1"/>
+                </a:solidFill>
+                <a:latin typeface="+mn-lt"/>
+                <a:ea typeface="+mn-ea"/>
+                <a:cs typeface="+mn-cs"/>
+              </a:rPr>
+              <a:t>&lt;sos&gt;</a:t>
+            </a:r>
+            <a:r>
+              <a:rPr lang="vi-VN" dirty="0"/>
+              <a:t> và kết thúc khi sinh ra </a:t>
+            </a:r>
+            <a:r>
+              <a:rPr lang="vi-VN" sz="1200" kern="1200" dirty="0">
+                <a:solidFill>
+                  <a:schemeClr val="tx1"/>
+                </a:solidFill>
+                <a:latin typeface="+mn-lt"/>
+                <a:ea typeface="+mn-ea"/>
+                <a:cs typeface="+mn-cs"/>
+              </a:rPr>
+              <a:t>&lt;eos&gt;</a:t>
+            </a:r>
+            <a:r>
+              <a:rPr lang="vi-VN" dirty="0"/>
+              <a:t>.</a:t>
+            </a:r>
+          </a:p>
+          <a:p>
+            <a:pPr marL="171450" indent="-171450">
+              <a:buFont typeface="Arial" panose="020B0604020202020204" pitchFamily="34" charset="0"/>
+              <a:buChar char="•"/>
+            </a:pPr>
+            <a:r>
+              <a:rPr lang="vi-VN" dirty="0"/>
+              <a:t>Trong quá trình này, mô hình hoạt động theo dạng autoregressive, tức là mỗi từ sinh ra sẽ phụ thuộc vào các từ đã sinh trước đó.</a:t>
+            </a:r>
+          </a:p>
+          <a:p>
+            <a:pPr marL="171450" indent="-171450">
+              <a:buFont typeface="Arial" panose="020B0604020202020204" pitchFamily="34" charset="0"/>
+              <a:buChar char="•"/>
+            </a:pPr>
+            <a:r>
+              <a:rPr lang="vi-VN" dirty="0"/>
+              <a:t>Tuy nhiên, điểm hạn chế lớn của Seq2Seq là việc nén toàn bộ thông tin của câu vào một vector duy nhất, dẫn đến mất thông tin khi câu quá dài, đồng thời mô hình phải xử lý tuần tự nên không thể song song hóa.</a:t>
+            </a:r>
+          </a:p>
+          <a:p>
+            <a:pPr marL="171450" indent="-171450">
+              <a:buFont typeface="Arial" panose="020B0604020202020204" pitchFamily="34" charset="0"/>
+              <a:buChar char="•"/>
+            </a:pPr>
+            <a:r>
+              <a:rPr lang="vi-VN" dirty="0"/>
+              <a:t>Chính vì những hạn chế này, các phương pháp cải tiến như Attention và sau này là Transformer đã được đề xuất để khắc phục</a:t>
+            </a:r>
+          </a:p>
+          <a:p>
+            <a:pPr marL="171450" indent="-171450">
+              <a:buFont typeface="Arial" panose="020B0604020202020204" pitchFamily="34" charset="0"/>
+              <a:buChar char="•"/>
+            </a:pPr>
+            <a:endParaRPr lang="en-US" dirty="0"/>
+          </a:p>
+        </p:txBody>
+      </p:sp>
+      <p:sp>
+        <p:nvSpPr>
+          <p:cNvPr id="4" name="Slide Number Placeholder 3"/>
+          <p:cNvSpPr>
+            <a:spLocks noGrp="1"/>
+          </p:cNvSpPr>
+          <p:nvPr>
+            <p:ph type="sldNum" sz="quarter" idx="5"/>
+          </p:nvPr>
+        </p:nvSpPr>
+        <p:spPr/>
+        <p:txBody>
+          <a:bodyPr/>
+          <a:lstStyle/>
+          <a:p>
+            <a:fld id="{871B2431-D351-4C6E-A3CF-9DFAC0E3E050}" type="slidenum">
+              <a:rPr lang="cs-CZ" smtClean="0"/>
+              <a:t>16</a:t>
+            </a:fld>
+            <a:endParaRPr lang="cs-CZ"/>
+          </a:p>
+        </p:txBody>
+      </p:sp>
+    </p:spTree>
+    <p:extLst>
+      <p:ext uri="{BB962C8B-B14F-4D97-AF65-F5344CB8AC3E}">
+        <p14:creationId xmlns:p14="http://schemas.microsoft.com/office/powerpoint/2010/main" val="2962039876"/>
+      </p:ext>
+    </p:extLst>
+  </p:cSld>
+  <p:clrMapOvr>
+    <a:masterClrMapping/>
+  </p:clrMapOvr>
+</p:notes>
+</file>
+
+<file path=ppt/notesSlides/notesSlide4.xml><?xml version="1.0" encoding="utf-8"?>
+<p:notes xmlns:a="http://schemas.openxmlformats.org/drawingml/2006/main" xmlns:r="http://schemas.openxmlformats.org/officeDocument/2006/relationships" xmlns:p="http://schemas.openxmlformats.org/presentationml/2006/main">
+  <p:cSld>
+    <p:spTree>
+      <p:nvGrpSpPr>
+        <p:cNvPr id="1" name="">
+          <a:extLst>
+            <a:ext uri="{FF2B5EF4-FFF2-40B4-BE49-F238E27FC236}">
+              <a16:creationId xmlns:a16="http://schemas.microsoft.com/office/drawing/2014/main" id="{4BF6DD60-EBD2-3F82-D1D3-ACC729FDEE4C}"/>
+            </a:ext>
+          </a:extLst>
+        </p:cNvPr>
+        <p:cNvGrpSpPr/>
+        <p:nvPr/>
+      </p:nvGrpSpPr>
+      <p:grpSpPr>
+        <a:xfrm>
+          <a:off x="0" y="0"/>
+          <a:ext cx="0" cy="0"/>
+          <a:chOff x="0" y="0"/>
+          <a:chExt cx="0" cy="0"/>
+        </a:xfrm>
+      </p:grpSpPr>
+      <p:sp>
+        <p:nvSpPr>
+          <p:cNvPr id="2" name="Slide Image Placeholder 1">
+            <a:extLst>
+              <a:ext uri="{FF2B5EF4-FFF2-40B4-BE49-F238E27FC236}">
+                <a16:creationId xmlns:a16="http://schemas.microsoft.com/office/drawing/2014/main" id="{E66F2444-70AE-E7B8-983D-7143EE904981}"/>
+              </a:ext>
+            </a:extLst>
+          </p:cNvPr>
+          <p:cNvSpPr>
+            <a:spLocks noGrp="1" noRot="1" noChangeAspect="1"/>
+          </p:cNvSpPr>
+          <p:nvPr>
+            <p:ph type="sldImg"/>
+          </p:nvPr>
+        </p:nvSpPr>
+        <p:spPr>
+          <a:xfrm>
+            <a:off x="2292350" y="512763"/>
+            <a:ext cx="4559300" cy="2566987"/>
+          </a:xfrm>
+        </p:spPr>
+      </p:sp>
+      <p:sp>
+        <p:nvSpPr>
+          <p:cNvPr id="3" name="Notes Placeholder 2">
+            <a:extLst>
+              <a:ext uri="{FF2B5EF4-FFF2-40B4-BE49-F238E27FC236}">
+                <a16:creationId xmlns:a16="http://schemas.microsoft.com/office/drawing/2014/main" id="{AE41DEE6-2FA2-A203-1665-1347FADBD16F}"/>
+              </a:ext>
+            </a:extLst>
+          </p:cNvPr>
+          <p:cNvSpPr>
+            <a:spLocks noGrp="1"/>
+          </p:cNvSpPr>
+          <p:nvPr>
+            <p:ph type="body" idx="1"/>
+          </p:nvPr>
+        </p:nvSpPr>
+        <p:spPr/>
+        <p:txBody>
+          <a:bodyPr/>
+          <a:lstStyle/>
+          <a:p>
+            <a:pPr marL="171450" indent="-171450">
+              <a:buFont typeface="Arial" panose="020B0604020202020204" pitchFamily="34" charset="0"/>
+              <a:buChar char="•"/>
+            </a:pPr>
+            <a:r>
+              <a:rPr lang="vi-VN" dirty="0"/>
+              <a:t>Ở phần này, em trình bày về mô hình Transformer, một kiến trúc hiện đại được đề xuất nhằm khắc phục hạn chế của các mô hình tuần tự như RNN hay Seq2Seq.</a:t>
+            </a:r>
+          </a:p>
+          <a:p>
+            <a:pPr marL="171450" indent="-171450">
+              <a:buFont typeface="Arial" panose="020B0604020202020204" pitchFamily="34" charset="0"/>
+              <a:buChar char="•"/>
+            </a:pPr>
+            <a:r>
+              <a:rPr lang="vi-VN" dirty="0"/>
+              <a:t>Khác với các mô hình trước đó, Transformer không sử dụng RNN mà hoàn toàn dựa trên cơ chế Attention. Điều này giúp mô hình có thể xử lý song song toàn bộ chuỗi đầu vào, từ đó tăng tốc độ huấn luyện và cải thiện khả năng học phụ thuộc dài hạn trong câu.</a:t>
+            </a:r>
+          </a:p>
+          <a:p>
+            <a:pPr marL="171450" indent="-171450">
+              <a:buFont typeface="Arial" panose="020B0604020202020204" pitchFamily="34" charset="0"/>
+              <a:buChar char="•"/>
+            </a:pPr>
+            <a:r>
+              <a:rPr lang="vi-VN" dirty="0"/>
+              <a:t>Kiến trúc Transformer gồm hai thành phần chính là Encoder và Decoder.</a:t>
+            </a:r>
+          </a:p>
+          <a:p>
+            <a:pPr marL="171450" indent="-171450">
+              <a:buFont typeface="Arial" panose="020B0604020202020204" pitchFamily="34" charset="0"/>
+              <a:buChar char="•"/>
+            </a:pPr>
+            <a:r>
+              <a:rPr lang="vi-VN" dirty="0"/>
+              <a:t>Encoder có nhiệm vụ chuyển câu đầu vào thành các biểu diễn ngữ nghĩa giàu thông tin thông qua cơ chế Self-Attention. Decoder sử dụng các biểu diễn này để sinh ra câu đầu ra.</a:t>
+            </a:r>
+          </a:p>
+          <a:p>
+            <a:pPr marL="171450" indent="-171450">
+              <a:buFont typeface="Arial" panose="020B0604020202020204" pitchFamily="34" charset="0"/>
+              <a:buChar char="•"/>
+            </a:pPr>
+            <a:r>
+              <a:rPr lang="vi-VN" dirty="0"/>
+              <a:t>Điểm cốt lõi của Transformer là cơ chế Self-Attention, cho phép mỗi từ trong câu có thể “nhìn” và tính mức độ liên quan với tất cả các từ còn lại, từ đó tạo ra biểu diễn ngữ cảnh tốt hơn so với việc chỉ xử lý tuần tự.</a:t>
+            </a:r>
+          </a:p>
+          <a:p>
+            <a:pPr marL="171450" indent="-171450">
+              <a:buFont typeface="Arial" panose="020B0604020202020204" pitchFamily="34" charset="0"/>
+              <a:buChar char="•"/>
+            </a:pPr>
+            <a:r>
+              <a:rPr lang="vi-VN" dirty="0"/>
+              <a:t>Ngoài ra, mỗi từ được biểu diễn thông qua ba vector là Query, Key và Value. Các vector này giúp mô hình xác định mức độ liên quan giữa các từ và tổng hợp thông tin phù hợp cho từng vị trí.</a:t>
+            </a:r>
+          </a:p>
+          <a:p>
+            <a:pPr marL="171450" indent="-171450">
+              <a:buFont typeface="Arial" panose="020B0604020202020204" pitchFamily="34" charset="0"/>
+              <a:buChar char="•"/>
+            </a:pPr>
+            <a:r>
+              <a:rPr lang="vi-VN" dirty="0"/>
+              <a:t>Transformer cũng sử dụng Multi-Head Attention, tức là nhiều cơ chế attention song song, giúp mô hình học được nhiều kiểu quan hệ khác nhau trong câu như ngữ pháp, ngữ nghĩa hoặc phụ thuộc xa.</a:t>
+            </a:r>
+          </a:p>
+          <a:p>
+            <a:pPr marL="171450" indent="-171450">
+              <a:buFont typeface="Arial" panose="020B0604020202020204" pitchFamily="34" charset="0"/>
+              <a:buChar char="•"/>
+            </a:pPr>
+            <a:r>
+              <a:rPr lang="vi-VN" dirty="0"/>
+              <a:t>Ở phía Decoder, ngoài Self-Attention còn có thêm Encoder–Decoder Attention để kết nối thông tin giữa câu nguồn và câu đích. Đồng thời, cơ chế masking được sử dụng để đảm bảo mô hình chỉ nhìn các từ đã sinh trước đó, tránh “nhìn trước” tương lai.</a:t>
+            </a:r>
+          </a:p>
+          <a:p>
+            <a:pPr marL="171450" indent="-171450">
+              <a:buFont typeface="Arial" panose="020B0604020202020204" pitchFamily="34" charset="0"/>
+              <a:buChar char="•"/>
+            </a:pPr>
+            <a:r>
+              <a:rPr lang="vi-VN" dirty="0"/>
+              <a:t>Nhờ những cải tiến này, Transformer đã trở thành nền tảng cho các mô hình hiện đại như BERT, GPT và các hệ thống dịch máy tiên tiến.</a:t>
+            </a:r>
+          </a:p>
+        </p:txBody>
+      </p:sp>
+      <p:sp>
+        <p:nvSpPr>
+          <p:cNvPr id="4" name="Slide Number Placeholder 3">
+            <a:extLst>
+              <a:ext uri="{FF2B5EF4-FFF2-40B4-BE49-F238E27FC236}">
+                <a16:creationId xmlns:a16="http://schemas.microsoft.com/office/drawing/2014/main" id="{994BFEB6-D76E-6992-F80E-9948773492F4}"/>
+              </a:ext>
+            </a:extLst>
+          </p:cNvPr>
+          <p:cNvSpPr>
+            <a:spLocks noGrp="1"/>
+          </p:cNvSpPr>
+          <p:nvPr>
+            <p:ph type="sldNum" sz="quarter" idx="5"/>
+          </p:nvPr>
+        </p:nvSpPr>
+        <p:spPr/>
+        <p:txBody>
+          <a:bodyPr/>
+          <a:lstStyle/>
+          <a:p>
+            <a:fld id="{871B2431-D351-4C6E-A3CF-9DFAC0E3E050}" type="slidenum">
+              <a:rPr lang="cs-CZ" smtClean="0"/>
+              <a:t>17</a:t>
+            </a:fld>
+            <a:endParaRPr lang="cs-CZ"/>
+          </a:p>
+        </p:txBody>
+      </p:sp>
+    </p:spTree>
+    <p:extLst>
+      <p:ext uri="{BB962C8B-B14F-4D97-AF65-F5344CB8AC3E}">
+        <p14:creationId xmlns:p14="http://schemas.microsoft.com/office/powerpoint/2010/main" val="4170018140"/>
+      </p:ext>
+    </p:extLst>
   </p:cSld>
   <p:clrMapOvr>
     <a:masterClrMapping/>
@@ -5573,8 +5978,8 @@
           </a:p>
         </p:txBody>
       </p:sp>
-      <mc:AlternateContent xmlns:mc="http://schemas.openxmlformats.org/markup-compatibility/2006">
-        <mc:Choice xmlns:a14="http://schemas.microsoft.com/office/drawing/2010/main" Requires="a14">
+      <mc:AlternateContent xmlns:mc="http://schemas.openxmlformats.org/markup-compatibility/2006" xmlns:a14="http://schemas.microsoft.com/office/drawing/2010/main">
+        <mc:Choice Requires="a14">
           <p:sp>
             <p:nvSpPr>
               <p:cNvPr id="9" name="TextBox 8">
@@ -6028,7 +6433,7 @@
             </p:txBody>
           </p:sp>
         </mc:Choice>
-        <mc:Fallback>
+        <mc:Fallback xmlns="">
           <p:sp>
             <p:nvSpPr>
               <p:cNvPr id="9" name="TextBox 8">
@@ -6732,8 +7137,8 @@
           </a:p>
         </p:txBody>
       </p:sp>
-      <mc:AlternateContent xmlns:mc="http://schemas.openxmlformats.org/markup-compatibility/2006">
-        <mc:Choice xmlns:a14="http://schemas.microsoft.com/office/drawing/2010/main" Requires="a14">
+      <mc:AlternateContent xmlns:mc="http://schemas.openxmlformats.org/markup-compatibility/2006" xmlns:a14="http://schemas.microsoft.com/office/drawing/2010/main">
+        <mc:Choice Requires="a14">
           <p:sp>
             <p:nvSpPr>
               <p:cNvPr id="9" name="TextBox 8">
@@ -6847,30 +7252,42 @@
                         <m:t>𝐵</m:t>
                       </m:r>
                       <m:r>
-                        <a:rPr lang="en-US" sz="900" i="1"/>
+                        <a:rPr lang="en-US" sz="900" i="1">
+                          <a:latin typeface="Cambria Math" panose="02040503050406030204" pitchFamily="18" charset="0"/>
+                        </a:rPr>
                         <m:t>𝐿𝐸𝑈</m:t>
                       </m:r>
                       <m:r>
-                        <a:rPr lang="en-US" sz="900" i="1"/>
+                        <a:rPr lang="en-US" sz="900" i="1">
+                          <a:latin typeface="Cambria Math" panose="02040503050406030204" pitchFamily="18" charset="0"/>
+                        </a:rPr>
                         <m:t>=</m:t>
                       </m:r>
                       <m:r>
-                        <a:rPr lang="en-US" sz="900" i="1"/>
+                        <a:rPr lang="en-US" sz="900" i="1">
+                          <a:latin typeface="Cambria Math" panose="02040503050406030204" pitchFamily="18" charset="0"/>
+                        </a:rPr>
                         <m:t>𝐵𝑃</m:t>
                       </m:r>
                       <m:r>
-                        <a:rPr lang="en-US" sz="900" i="1"/>
+                        <a:rPr lang="en-US" sz="900" i="1">
+                          <a:latin typeface="Cambria Math" panose="02040503050406030204" pitchFamily="18" charset="0"/>
+                        </a:rPr>
                         <m:t>∙</m:t>
                       </m:r>
                       <m:r>
                         <m:rPr>
                           <m:sty m:val="p"/>
                         </m:rPr>
-                        <a:rPr lang="en-US" sz="900"/>
+                        <a:rPr lang="en-US" sz="900">
+                          <a:latin typeface="Cambria Math" panose="02040503050406030204" pitchFamily="18" charset="0"/>
+                        </a:rPr>
                         <m:t>exp</m:t>
                       </m:r>
                       <m:r>
-                        <a:rPr lang="en-US" sz="900" i="1"/>
+                        <a:rPr lang="en-US" sz="900" i="1">
+                          <a:latin typeface="Cambria Math" panose="02040503050406030204" pitchFamily="18" charset="0"/>
+                        </a:rPr>
                         <m:t>(</m:t>
                       </m:r>
                       <m:nary>
@@ -6878,22 +7295,30 @@
                           <m:chr m:val="∑"/>
                           <m:limLoc m:val="undOvr"/>
                           <m:ctrlPr>
-                            <a:rPr lang="en-US" sz="900" i="1"/>
+                            <a:rPr lang="en-US" sz="900" i="1">
+                              <a:latin typeface="Cambria Math" panose="02040503050406030204" pitchFamily="18" charset="0"/>
+                            </a:rPr>
                           </m:ctrlPr>
                         </m:naryPr>
                         <m:sub>
                           <m:r>
-                            <a:rPr lang="en-US" sz="900" i="1"/>
+                            <a:rPr lang="en-US" sz="900" i="1">
+                              <a:latin typeface="Cambria Math" panose="02040503050406030204" pitchFamily="18" charset="0"/>
+                            </a:rPr>
                             <m:t>𝑛</m:t>
                           </m:r>
                           <m:r>
-                            <a:rPr lang="en-US" sz="900" i="1"/>
+                            <a:rPr lang="en-US" sz="900" i="1">
+                              <a:latin typeface="Cambria Math" panose="02040503050406030204" pitchFamily="18" charset="0"/>
+                            </a:rPr>
                             <m:t>=1</m:t>
                           </m:r>
                         </m:sub>
                         <m:sup>
                           <m:r>
-                            <a:rPr lang="en-US" sz="900" i="1"/>
+                            <a:rPr lang="en-US" sz="900" i="1">
+                              <a:latin typeface="Cambria Math" panose="02040503050406030204" pitchFamily="18" charset="0"/>
+                            </a:rPr>
                             <m:t>𝑁</m:t>
                           </m:r>
                         </m:sup>
@@ -6901,18 +7326,24 @@
                           <m:sSub>
                             <m:sSubPr>
                               <m:ctrlPr>
-                                <a:rPr lang="en-US" sz="900" i="1"/>
+                                <a:rPr lang="en-US" sz="900" i="1">
+                                  <a:latin typeface="Cambria Math" panose="02040503050406030204" pitchFamily="18" charset="0"/>
+                                </a:rPr>
                               </m:ctrlPr>
                             </m:sSubPr>
                             <m:e>
                               <m:r>
-                                <a:rPr lang="en-US" sz="900" i="1"/>
+                                <a:rPr lang="en-US" sz="900" i="1">
+                                  <a:latin typeface="Cambria Math" panose="02040503050406030204" pitchFamily="18" charset="0"/>
+                                </a:rPr>
                                 <m:t>𝑤</m:t>
                               </m:r>
                             </m:e>
                             <m:sub>
                               <m:r>
-                                <a:rPr lang="en-US" sz="900" i="1"/>
+                                <a:rPr lang="en-US" sz="900" i="1">
+                                  <a:latin typeface="Cambria Math" panose="02040503050406030204" pitchFamily="18" charset="0"/>
+                                </a:rPr>
                                 <m:t>𝑛</m:t>
                               </m:r>
                             </m:sub>
@@ -6920,7 +7351,9 @@
                           <m:func>
                             <m:funcPr>
                               <m:ctrlPr>
-                                <a:rPr lang="en-US" sz="900" i="1"/>
+                                <a:rPr lang="en-US" sz="900" i="1">
+                                  <a:latin typeface="Cambria Math" panose="02040503050406030204" pitchFamily="18" charset="0"/>
+                                </a:rPr>
                               </m:ctrlPr>
                             </m:funcPr>
                             <m:fName>
@@ -6928,7 +7361,9 @@
                                 <m:rPr>
                                   <m:sty m:val="p"/>
                                 </m:rPr>
-                                <a:rPr lang="en-US" sz="900"/>
+                                <a:rPr lang="en-US" sz="900">
+                                  <a:latin typeface="Cambria Math" panose="02040503050406030204" pitchFamily="18" charset="0"/>
+                                </a:rPr>
                                 <m:t>log</m:t>
                               </m:r>
                             </m:fName>
@@ -6936,18 +7371,24 @@
                               <m:sSub>
                                 <m:sSubPr>
                                   <m:ctrlPr>
-                                    <a:rPr lang="en-US" sz="900" i="1"/>
+                                    <a:rPr lang="en-US" sz="900" i="1">
+                                      <a:latin typeface="Cambria Math" panose="02040503050406030204" pitchFamily="18" charset="0"/>
+                                    </a:rPr>
                                   </m:ctrlPr>
                                 </m:sSubPr>
                                 <m:e>
                                   <m:r>
-                                    <a:rPr lang="en-US" sz="900" i="1"/>
+                                    <a:rPr lang="en-US" sz="900" i="1">
+                                      <a:latin typeface="Cambria Math" panose="02040503050406030204" pitchFamily="18" charset="0"/>
+                                    </a:rPr>
                                     <m:t>𝑝</m:t>
                                   </m:r>
                                 </m:e>
                                 <m:sub>
                                   <m:r>
-                                    <a:rPr lang="en-US" sz="900" i="1"/>
+                                    <a:rPr lang="en-US" sz="900" i="1">
+                                      <a:latin typeface="Cambria Math" panose="02040503050406030204" pitchFamily="18" charset="0"/>
+                                    </a:rPr>
                                     <m:t>𝑛</m:t>
                                   </m:r>
                                 </m:sub>
@@ -6957,7 +7398,9 @@
                         </m:e>
                       </m:nary>
                       <m:r>
-                        <a:rPr lang="en-US" sz="900" i="1"/>
+                        <a:rPr lang="en-US" sz="900" i="1">
+                          <a:latin typeface="Cambria Math" panose="02040503050406030204" pitchFamily="18" charset="0"/>
+                        </a:rPr>
                         <m:t>)</m:t>
                       </m:r>
                     </m:oMath>
@@ -7093,7 +7536,7 @@
             </p:txBody>
           </p:sp>
         </mc:Choice>
-        <mc:Fallback>
+        <mc:Fallback xmlns="">
           <p:sp>
             <p:nvSpPr>
               <p:cNvPr id="9" name="TextBox 8">
@@ -7468,7 +7911,7 @@
                 <a:cs typeface="Tahoma" panose="020B0604030504040204" pitchFamily="34" charset="0"/>
                 <a:sym typeface="Canva Sans"/>
               </a:rPr>
-              <a:t>10</a:t>
+              <a:t>14</a:t>
             </a:r>
             <a:endParaRPr lang="en-US" sz="800" dirty="0">
               <a:latin typeface="Tahoma" panose="020B0604030504040204" pitchFamily="34" charset="0"/>
@@ -7492,6 +7935,1246 @@
 </file>
 
 <file path=ppt/slides/slide16.xml><?xml version="1.0" encoding="utf-8"?>
+<p:sld xmlns:a="http://schemas.openxmlformats.org/drawingml/2006/main" xmlns:r="http://schemas.openxmlformats.org/officeDocument/2006/relationships" xmlns:p="http://schemas.openxmlformats.org/presentationml/2006/main">
+  <p:cSld>
+    <p:spTree>
+      <p:nvGrpSpPr>
+        <p:cNvPr id="1" name="">
+          <a:extLst>
+            <a:ext uri="{FF2B5EF4-FFF2-40B4-BE49-F238E27FC236}">
+              <a16:creationId xmlns:a16="http://schemas.microsoft.com/office/drawing/2014/main" id="{D0A7287E-DED4-7C48-DE93-69DA3FA67272}"/>
+            </a:ext>
+          </a:extLst>
+        </p:cNvPr>
+        <p:cNvGrpSpPr/>
+        <p:nvPr/>
+      </p:nvGrpSpPr>
+      <p:grpSpPr>
+        <a:xfrm>
+          <a:off x="0" y="0"/>
+          <a:ext cx="0" cy="0"/>
+          <a:chOff x="0" y="0"/>
+          <a:chExt cx="0" cy="0"/>
+        </a:xfrm>
+      </p:grpSpPr>
+      <p:sp>
+        <p:nvSpPr>
+          <p:cNvPr id="2" name="TextBox 2">
+            <a:extLst>
+              <a:ext uri="{FF2B5EF4-FFF2-40B4-BE49-F238E27FC236}">
+                <a16:creationId xmlns:a16="http://schemas.microsoft.com/office/drawing/2014/main" id="{9EA1CA48-D3E9-215E-48E1-D3C04EBBEB2C}"/>
+              </a:ext>
+            </a:extLst>
+          </p:cNvPr>
+          <p:cNvSpPr txBox="1"/>
+          <p:nvPr/>
+        </p:nvSpPr>
+        <p:spPr>
+          <a:xfrm>
+            <a:off x="277092" y="277825"/>
+            <a:ext cx="2675658" cy="241476"/>
+          </a:xfrm>
+          <a:prstGeom prst="rect">
+            <a:avLst/>
+          </a:prstGeom>
+        </p:spPr>
+        <p:txBody>
+          <a:bodyPr wrap="square" lIns="0" tIns="0" rIns="0" bIns="0" rtlCol="0" anchor="t">
+            <a:spAutoFit/>
+          </a:bodyPr>
+          <a:lstStyle/>
+          <a:p>
+            <a:pPr algn="l">
+              <a:lnSpc>
+                <a:spcPts val="2100"/>
+              </a:lnSpc>
+            </a:pPr>
+            <a:r>
+              <a:rPr lang="en-US" sz="1500" b="1" spc="-4" dirty="0">
+                <a:solidFill>
+                  <a:srgbClr val="2B4D7B"/>
+                </a:solidFill>
+                <a:latin typeface="Tahoma" panose="020B0604030504040204" pitchFamily="34" charset="0"/>
+                <a:ea typeface="Tahoma" panose="020B0604030504040204" pitchFamily="34" charset="0"/>
+                <a:cs typeface="Tahoma" panose="020B0604030504040204" pitchFamily="34" charset="0"/>
+                <a:sym typeface="Canva Sans Bold"/>
+              </a:rPr>
+              <a:t>4. Phương </a:t>
+            </a:r>
+            <a:r>
+              <a:rPr lang="en-US" sz="1500" b="1" spc="-4" dirty="0" err="1">
+                <a:solidFill>
+                  <a:srgbClr val="2B4D7B"/>
+                </a:solidFill>
+                <a:latin typeface="Tahoma" panose="020B0604030504040204" pitchFamily="34" charset="0"/>
+                <a:ea typeface="Tahoma" panose="020B0604030504040204" pitchFamily="34" charset="0"/>
+                <a:cs typeface="Tahoma" panose="020B0604030504040204" pitchFamily="34" charset="0"/>
+                <a:sym typeface="Canva Sans Bold"/>
+              </a:rPr>
+              <a:t>pháp</a:t>
+            </a:r>
+            <a:endParaRPr lang="en-US" sz="1500" b="1" spc="-4" dirty="0">
+              <a:solidFill>
+                <a:srgbClr val="2B4D7B"/>
+              </a:solidFill>
+              <a:latin typeface="Tahoma" panose="020B0604030504040204" pitchFamily="34" charset="0"/>
+              <a:ea typeface="Tahoma" panose="020B0604030504040204" pitchFamily="34" charset="0"/>
+              <a:cs typeface="Tahoma" panose="020B0604030504040204" pitchFamily="34" charset="0"/>
+              <a:sym typeface="Canva Sans Bold"/>
+            </a:endParaRPr>
+          </a:p>
+        </p:txBody>
+      </p:sp>
+      <p:sp>
+        <p:nvSpPr>
+          <p:cNvPr id="10" name="TextBox 9">
+            <a:extLst>
+              <a:ext uri="{FF2B5EF4-FFF2-40B4-BE49-F238E27FC236}">
+                <a16:creationId xmlns:a16="http://schemas.microsoft.com/office/drawing/2014/main" id="{429209CC-65AD-7F37-B55E-3C4E039919AB}"/>
+              </a:ext>
+            </a:extLst>
+          </p:cNvPr>
+          <p:cNvSpPr txBox="1"/>
+          <p:nvPr/>
+        </p:nvSpPr>
+        <p:spPr>
+          <a:xfrm>
+            <a:off x="5314950" y="2914650"/>
+            <a:ext cx="295275" cy="215444"/>
+          </a:xfrm>
+          <a:prstGeom prst="rect">
+            <a:avLst/>
+          </a:prstGeom>
+          <a:noFill/>
+        </p:spPr>
+        <p:txBody>
+          <a:bodyPr wrap="square">
+            <a:spAutoFit/>
+          </a:bodyPr>
+          <a:lstStyle/>
+          <a:p>
+            <a:pPr algn="r"/>
+            <a:r>
+              <a:rPr lang="en-US" sz="800" dirty="0">
+                <a:solidFill>
+                  <a:srgbClr val="1C1C1A"/>
+                </a:solidFill>
+                <a:latin typeface="Tahoma" panose="020B0604030504040204" pitchFamily="34" charset="0"/>
+                <a:ea typeface="Tahoma" panose="020B0604030504040204" pitchFamily="34" charset="0"/>
+                <a:cs typeface="Tahoma" panose="020B0604030504040204" pitchFamily="34" charset="0"/>
+                <a:sym typeface="Canva Sans"/>
+              </a:rPr>
+              <a:t>15</a:t>
+            </a:r>
+            <a:endParaRPr lang="en-US" sz="800" dirty="0">
+              <a:latin typeface="Tahoma" panose="020B0604030504040204" pitchFamily="34" charset="0"/>
+              <a:ea typeface="Tahoma" panose="020B0604030504040204" pitchFamily="34" charset="0"/>
+              <a:cs typeface="Tahoma" panose="020B0604030504040204" pitchFamily="34" charset="0"/>
+            </a:endParaRPr>
+          </a:p>
+        </p:txBody>
+      </p:sp>
+      <p:sp>
+        <p:nvSpPr>
+          <p:cNvPr id="9" name="TextBox 8">
+            <a:extLst>
+              <a:ext uri="{FF2B5EF4-FFF2-40B4-BE49-F238E27FC236}">
+                <a16:creationId xmlns:a16="http://schemas.microsoft.com/office/drawing/2014/main" id="{48612569-DF7E-D17A-3F35-BF17D9640968}"/>
+              </a:ext>
+            </a:extLst>
+          </p:cNvPr>
+          <p:cNvSpPr txBox="1"/>
+          <p:nvPr/>
+        </p:nvSpPr>
+        <p:spPr>
+          <a:xfrm>
+            <a:off x="277092" y="519301"/>
+            <a:ext cx="2675658" cy="251094"/>
+          </a:xfrm>
+          <a:prstGeom prst="rect">
+            <a:avLst/>
+          </a:prstGeom>
+          <a:noFill/>
+        </p:spPr>
+        <p:txBody>
+          <a:bodyPr wrap="square" rtlCol="0">
+            <a:spAutoFit/>
+          </a:bodyPr>
+          <a:lstStyle/>
+          <a:p>
+            <a:pPr algn="just">
+              <a:lnSpc>
+                <a:spcPct val="130000"/>
+              </a:lnSpc>
+            </a:pPr>
+            <a:r>
+              <a:rPr lang="en-US" sz="900" u="sng" dirty="0">
+                <a:solidFill>
+                  <a:srgbClr val="00B050"/>
+                </a:solidFill>
+                <a:latin typeface="Tahoma" panose="020B0604030504040204" pitchFamily="34" charset="0"/>
+                <a:ea typeface="Tahoma" panose="020B0604030504040204" pitchFamily="34" charset="0"/>
+                <a:cs typeface="Tahoma" panose="020B0604030504040204" pitchFamily="34" charset="0"/>
+              </a:rPr>
+              <a:t>4.1. </a:t>
+            </a:r>
+            <a:r>
+              <a:rPr lang="en-US" sz="900" u="sng" dirty="0" err="1">
+                <a:solidFill>
+                  <a:srgbClr val="00B050"/>
+                </a:solidFill>
+                <a:latin typeface="Tahoma" panose="020B0604030504040204" pitchFamily="34" charset="0"/>
+                <a:ea typeface="Tahoma" panose="020B0604030504040204" pitchFamily="34" charset="0"/>
+                <a:cs typeface="Tahoma" panose="020B0604030504040204" pitchFamily="34" charset="0"/>
+              </a:rPr>
+              <a:t>Mô</a:t>
+            </a:r>
+            <a:r>
+              <a:rPr lang="en-US" sz="900" u="sng" dirty="0">
+                <a:solidFill>
+                  <a:srgbClr val="00B050"/>
+                </a:solidFill>
+                <a:latin typeface="Tahoma" panose="020B0604030504040204" pitchFamily="34" charset="0"/>
+                <a:ea typeface="Tahoma" panose="020B0604030504040204" pitchFamily="34" charset="0"/>
+                <a:cs typeface="Tahoma" panose="020B0604030504040204" pitchFamily="34" charset="0"/>
+              </a:rPr>
+              <a:t> </a:t>
+            </a:r>
+            <a:r>
+              <a:rPr lang="en-US" sz="900" u="sng" dirty="0" err="1">
+                <a:solidFill>
+                  <a:srgbClr val="00B050"/>
+                </a:solidFill>
+                <a:latin typeface="Tahoma" panose="020B0604030504040204" pitchFamily="34" charset="0"/>
+                <a:ea typeface="Tahoma" panose="020B0604030504040204" pitchFamily="34" charset="0"/>
+                <a:cs typeface="Tahoma" panose="020B0604030504040204" pitchFamily="34" charset="0"/>
+              </a:rPr>
+              <a:t>hình</a:t>
+            </a:r>
+            <a:r>
+              <a:rPr lang="en-US" sz="900" u="sng" dirty="0">
+                <a:solidFill>
+                  <a:srgbClr val="00B050"/>
+                </a:solidFill>
+                <a:latin typeface="Tahoma" panose="020B0604030504040204" pitchFamily="34" charset="0"/>
+                <a:ea typeface="Tahoma" panose="020B0604030504040204" pitchFamily="34" charset="0"/>
+                <a:cs typeface="Tahoma" panose="020B0604030504040204" pitchFamily="34" charset="0"/>
+              </a:rPr>
+              <a:t> Sequence to Sequence</a:t>
+            </a:r>
+            <a:endParaRPr lang="vi-VN" sz="900" u="sng" dirty="0">
+              <a:solidFill>
+                <a:srgbClr val="00B050"/>
+              </a:solidFill>
+              <a:latin typeface="Tahoma" panose="020B0604030504040204" pitchFamily="34" charset="0"/>
+              <a:ea typeface="Tahoma" panose="020B0604030504040204" pitchFamily="34" charset="0"/>
+              <a:cs typeface="Tahoma" panose="020B0604030504040204" pitchFamily="34" charset="0"/>
+            </a:endParaRPr>
+          </a:p>
+        </p:txBody>
+      </p:sp>
+      <p:sp>
+        <p:nvSpPr>
+          <p:cNvPr id="3" name="TextBox 2">
+            <a:extLst>
+              <a:ext uri="{FF2B5EF4-FFF2-40B4-BE49-F238E27FC236}">
+                <a16:creationId xmlns:a16="http://schemas.microsoft.com/office/drawing/2014/main" id="{4BEC7CDA-4FF9-AD9C-25CD-CA344FD59D52}"/>
+              </a:ext>
+            </a:extLst>
+          </p:cNvPr>
+          <p:cNvSpPr txBox="1"/>
+          <p:nvPr/>
+        </p:nvSpPr>
+        <p:spPr>
+          <a:xfrm>
+            <a:off x="277092" y="760777"/>
+            <a:ext cx="2675658" cy="1673792"/>
+          </a:xfrm>
+          <a:prstGeom prst="rect">
+            <a:avLst/>
+          </a:prstGeom>
+          <a:noFill/>
+        </p:spPr>
+        <p:txBody>
+          <a:bodyPr wrap="square" rtlCol="0">
+            <a:spAutoFit/>
+          </a:bodyPr>
+          <a:lstStyle/>
+          <a:p>
+            <a:pPr algn="just">
+              <a:lnSpc>
+                <a:spcPct val="130000"/>
+              </a:lnSpc>
+            </a:pPr>
+            <a:r>
+              <a:rPr lang="vi-VN" sz="800" dirty="0">
+                <a:latin typeface="Tahoma" panose="020B0604030504040204" pitchFamily="34" charset="0"/>
+                <a:ea typeface="Tahoma" panose="020B0604030504040204" pitchFamily="34" charset="0"/>
+                <a:cs typeface="Tahoma" panose="020B0604030504040204" pitchFamily="34" charset="0"/>
+              </a:rPr>
+              <a:t>Mô hình Seq2Seq (Sequence-to-Sequence) được thiết kế để chuyển đổi một chuỗi dữ liệu đầu vào thành một chuỗi dữ liệu đầu ra khác.</a:t>
+            </a:r>
+            <a:endParaRPr lang="en-US" sz="800" dirty="0">
+              <a:latin typeface="Tahoma" panose="020B0604030504040204" pitchFamily="34" charset="0"/>
+              <a:ea typeface="Tahoma" panose="020B0604030504040204" pitchFamily="34" charset="0"/>
+              <a:cs typeface="Tahoma" panose="020B0604030504040204" pitchFamily="34" charset="0"/>
+            </a:endParaRPr>
+          </a:p>
+          <a:p>
+            <a:pPr algn="just">
+              <a:lnSpc>
+                <a:spcPct val="130000"/>
+              </a:lnSpc>
+            </a:pPr>
+            <a:endParaRPr lang="en-US" sz="800" dirty="0">
+              <a:latin typeface="Tahoma" panose="020B0604030504040204" pitchFamily="34" charset="0"/>
+              <a:ea typeface="Tahoma" panose="020B0604030504040204" pitchFamily="34" charset="0"/>
+              <a:cs typeface="Tahoma" panose="020B0604030504040204" pitchFamily="34" charset="0"/>
+            </a:endParaRPr>
+          </a:p>
+          <a:p>
+            <a:pPr algn="just">
+              <a:lnSpc>
+                <a:spcPct val="130000"/>
+              </a:lnSpc>
+            </a:pPr>
+            <a:r>
+              <a:rPr lang="vi-VN" sz="800" dirty="0">
+                <a:latin typeface="Tahoma" panose="020B0604030504040204" pitchFamily="34" charset="0"/>
+                <a:ea typeface="Tahoma" panose="020B0604030504040204" pitchFamily="34" charset="0"/>
+                <a:cs typeface="Tahoma" panose="020B0604030504040204" pitchFamily="34" charset="0"/>
+              </a:rPr>
+              <a:t>Các mô hình Seq2Seq được xây dựng theo kiến trúc Encoder–Decoder</a:t>
+            </a:r>
+            <a:r>
+              <a:rPr lang="en-US" sz="800" dirty="0">
+                <a:latin typeface="Tahoma" panose="020B0604030504040204" pitchFamily="34" charset="0"/>
+                <a:ea typeface="Tahoma" panose="020B0604030504040204" pitchFamily="34" charset="0"/>
+                <a:cs typeface="Tahoma" panose="020B0604030504040204" pitchFamily="34" charset="0"/>
+              </a:rPr>
+              <a:t>:</a:t>
+            </a:r>
+          </a:p>
+          <a:p>
+            <a:pPr marL="285750" indent="-171450" algn="just">
+              <a:lnSpc>
+                <a:spcPct val="130000"/>
+              </a:lnSpc>
+              <a:buFont typeface="Arial" panose="020B0604020202020204" pitchFamily="34" charset="0"/>
+              <a:buChar char="•"/>
+            </a:pPr>
+            <a:r>
+              <a:rPr lang="vi-VN" sz="800" dirty="0">
+                <a:latin typeface="Tahoma" panose="020B0604030504040204" pitchFamily="34" charset="0"/>
+                <a:ea typeface="Tahoma" panose="020B0604030504040204" pitchFamily="34" charset="0"/>
+                <a:cs typeface="Tahoma" panose="020B0604030504040204" pitchFamily="34" charset="0"/>
+              </a:rPr>
+              <a:t>Encoder: mã hóa chuỗi đầu vào thành một vector biểu diễn liên tục gọi là context vector.</a:t>
+            </a:r>
+          </a:p>
+          <a:p>
+            <a:pPr marL="285750" indent="-171450" algn="just">
+              <a:lnSpc>
+                <a:spcPct val="130000"/>
+              </a:lnSpc>
+              <a:buFont typeface="Arial" panose="020B0604020202020204" pitchFamily="34" charset="0"/>
+              <a:buChar char="•"/>
+            </a:pPr>
+            <a:r>
+              <a:rPr lang="vi-VN" sz="800" dirty="0">
+                <a:latin typeface="Tahoma" panose="020B0604030504040204" pitchFamily="34" charset="0"/>
+                <a:ea typeface="Tahoma" panose="020B0604030504040204" pitchFamily="34" charset="0"/>
+                <a:cs typeface="Tahoma" panose="020B0604030504040204" pitchFamily="34" charset="0"/>
+              </a:rPr>
+              <a:t>Decoder: sử dụng context vector để sinh ra chuỗi đầu ra theo từng bước thời gian.</a:t>
+            </a:r>
+          </a:p>
+        </p:txBody>
+      </p:sp>
+      <p:pic>
+        <p:nvPicPr>
+          <p:cNvPr id="5" name="Picture 4">
+            <a:extLst>
+              <a:ext uri="{FF2B5EF4-FFF2-40B4-BE49-F238E27FC236}">
+                <a16:creationId xmlns:a16="http://schemas.microsoft.com/office/drawing/2014/main" id="{F99FAABA-1688-F84C-98EA-BE1E73F1F35D}"/>
+              </a:ext>
+            </a:extLst>
+          </p:cNvPr>
+          <p:cNvPicPr>
+            <a:picLocks noChangeAspect="1"/>
+          </p:cNvPicPr>
+          <p:nvPr/>
+        </p:nvPicPr>
+        <p:blipFill>
+          <a:blip r:embed="rId3"/>
+          <a:stretch>
+            <a:fillRect/>
+          </a:stretch>
+        </p:blipFill>
+        <p:spPr>
+          <a:xfrm>
+            <a:off x="2952750" y="711880"/>
+            <a:ext cx="2581610" cy="1814740"/>
+          </a:xfrm>
+          <a:prstGeom prst="rect">
+            <a:avLst/>
+          </a:prstGeom>
+        </p:spPr>
+      </p:pic>
+    </p:spTree>
+    <p:extLst>
+      <p:ext uri="{BB962C8B-B14F-4D97-AF65-F5344CB8AC3E}">
+        <p14:creationId xmlns:p14="http://schemas.microsoft.com/office/powerpoint/2010/main" val="3607679162"/>
+      </p:ext>
+    </p:extLst>
+  </p:cSld>
+  <p:clrMapOvr>
+    <a:masterClrMapping/>
+  </p:clrMapOvr>
+</p:sld>
+</file>
+
+<file path=ppt/slides/slide17.xml><?xml version="1.0" encoding="utf-8"?>
+<p:sld xmlns:a="http://schemas.openxmlformats.org/drawingml/2006/main" xmlns:r="http://schemas.openxmlformats.org/officeDocument/2006/relationships" xmlns:p="http://schemas.openxmlformats.org/presentationml/2006/main">
+  <p:cSld>
+    <p:spTree>
+      <p:nvGrpSpPr>
+        <p:cNvPr id="1" name="">
+          <a:extLst>
+            <a:ext uri="{FF2B5EF4-FFF2-40B4-BE49-F238E27FC236}">
+              <a16:creationId xmlns:a16="http://schemas.microsoft.com/office/drawing/2014/main" id="{33A8699D-6D8B-757A-C92A-F603D919962D}"/>
+            </a:ext>
+          </a:extLst>
+        </p:cNvPr>
+        <p:cNvGrpSpPr/>
+        <p:nvPr/>
+      </p:nvGrpSpPr>
+      <p:grpSpPr>
+        <a:xfrm>
+          <a:off x="0" y="0"/>
+          <a:ext cx="0" cy="0"/>
+          <a:chOff x="0" y="0"/>
+          <a:chExt cx="0" cy="0"/>
+        </a:xfrm>
+      </p:grpSpPr>
+      <p:pic>
+        <p:nvPicPr>
+          <p:cNvPr id="7" name="Picture 6">
+            <a:extLst>
+              <a:ext uri="{FF2B5EF4-FFF2-40B4-BE49-F238E27FC236}">
+                <a16:creationId xmlns:a16="http://schemas.microsoft.com/office/drawing/2014/main" id="{48D3A572-CBF2-4C05-7872-854C67FD2F9D}"/>
+              </a:ext>
+            </a:extLst>
+          </p:cNvPr>
+          <p:cNvPicPr>
+            <a:picLocks noChangeAspect="1"/>
+          </p:cNvPicPr>
+          <p:nvPr/>
+        </p:nvPicPr>
+        <p:blipFill>
+          <a:blip r:embed="rId3"/>
+          <a:stretch>
+            <a:fillRect/>
+          </a:stretch>
+        </p:blipFill>
+        <p:spPr>
+          <a:xfrm>
+            <a:off x="3867150" y="288239"/>
+            <a:ext cx="1802397" cy="2527072"/>
+          </a:xfrm>
+          <a:prstGeom prst="rect">
+            <a:avLst/>
+          </a:prstGeom>
+        </p:spPr>
+      </p:pic>
+      <p:sp>
+        <p:nvSpPr>
+          <p:cNvPr id="2" name="TextBox 2">
+            <a:extLst>
+              <a:ext uri="{FF2B5EF4-FFF2-40B4-BE49-F238E27FC236}">
+                <a16:creationId xmlns:a16="http://schemas.microsoft.com/office/drawing/2014/main" id="{129229F1-D112-01B9-2DC0-65EED89C66DF}"/>
+              </a:ext>
+            </a:extLst>
+          </p:cNvPr>
+          <p:cNvSpPr txBox="1"/>
+          <p:nvPr/>
+        </p:nvSpPr>
+        <p:spPr>
+          <a:xfrm>
+            <a:off x="277092" y="277825"/>
+            <a:ext cx="2675658" cy="241476"/>
+          </a:xfrm>
+          <a:prstGeom prst="rect">
+            <a:avLst/>
+          </a:prstGeom>
+        </p:spPr>
+        <p:txBody>
+          <a:bodyPr wrap="square" lIns="0" tIns="0" rIns="0" bIns="0" rtlCol="0" anchor="t">
+            <a:spAutoFit/>
+          </a:bodyPr>
+          <a:lstStyle/>
+          <a:p>
+            <a:pPr algn="l">
+              <a:lnSpc>
+                <a:spcPts val="2100"/>
+              </a:lnSpc>
+            </a:pPr>
+            <a:r>
+              <a:rPr lang="en-US" sz="1500" b="1" spc="-4" dirty="0">
+                <a:solidFill>
+                  <a:srgbClr val="2B4D7B"/>
+                </a:solidFill>
+                <a:latin typeface="Tahoma" panose="020B0604030504040204" pitchFamily="34" charset="0"/>
+                <a:ea typeface="Tahoma" panose="020B0604030504040204" pitchFamily="34" charset="0"/>
+                <a:cs typeface="Tahoma" panose="020B0604030504040204" pitchFamily="34" charset="0"/>
+                <a:sym typeface="Canva Sans Bold"/>
+              </a:rPr>
+              <a:t>4. Phương </a:t>
+            </a:r>
+            <a:r>
+              <a:rPr lang="en-US" sz="1500" b="1" spc="-4" dirty="0" err="1">
+                <a:solidFill>
+                  <a:srgbClr val="2B4D7B"/>
+                </a:solidFill>
+                <a:latin typeface="Tahoma" panose="020B0604030504040204" pitchFamily="34" charset="0"/>
+                <a:ea typeface="Tahoma" panose="020B0604030504040204" pitchFamily="34" charset="0"/>
+                <a:cs typeface="Tahoma" panose="020B0604030504040204" pitchFamily="34" charset="0"/>
+                <a:sym typeface="Canva Sans Bold"/>
+              </a:rPr>
+              <a:t>pháp</a:t>
+            </a:r>
+            <a:endParaRPr lang="en-US" sz="1500" b="1" spc="-4" dirty="0">
+              <a:solidFill>
+                <a:srgbClr val="2B4D7B"/>
+              </a:solidFill>
+              <a:latin typeface="Tahoma" panose="020B0604030504040204" pitchFamily="34" charset="0"/>
+              <a:ea typeface="Tahoma" panose="020B0604030504040204" pitchFamily="34" charset="0"/>
+              <a:cs typeface="Tahoma" panose="020B0604030504040204" pitchFamily="34" charset="0"/>
+              <a:sym typeface="Canva Sans Bold"/>
+            </a:endParaRPr>
+          </a:p>
+        </p:txBody>
+      </p:sp>
+      <p:sp>
+        <p:nvSpPr>
+          <p:cNvPr id="10" name="TextBox 9">
+            <a:extLst>
+              <a:ext uri="{FF2B5EF4-FFF2-40B4-BE49-F238E27FC236}">
+                <a16:creationId xmlns:a16="http://schemas.microsoft.com/office/drawing/2014/main" id="{7BF2B829-B41D-7143-A7D7-50866E4D4B85}"/>
+              </a:ext>
+            </a:extLst>
+          </p:cNvPr>
+          <p:cNvSpPr txBox="1"/>
+          <p:nvPr/>
+        </p:nvSpPr>
+        <p:spPr>
+          <a:xfrm>
+            <a:off x="5314950" y="2914650"/>
+            <a:ext cx="295275" cy="215444"/>
+          </a:xfrm>
+          <a:prstGeom prst="rect">
+            <a:avLst/>
+          </a:prstGeom>
+          <a:noFill/>
+        </p:spPr>
+        <p:txBody>
+          <a:bodyPr wrap="square">
+            <a:spAutoFit/>
+          </a:bodyPr>
+          <a:lstStyle/>
+          <a:p>
+            <a:pPr algn="r"/>
+            <a:r>
+              <a:rPr lang="en-US" sz="800" dirty="0">
+                <a:solidFill>
+                  <a:srgbClr val="1C1C1A"/>
+                </a:solidFill>
+                <a:latin typeface="Tahoma" panose="020B0604030504040204" pitchFamily="34" charset="0"/>
+                <a:ea typeface="Tahoma" panose="020B0604030504040204" pitchFamily="34" charset="0"/>
+                <a:cs typeface="Tahoma" panose="020B0604030504040204" pitchFamily="34" charset="0"/>
+                <a:sym typeface="Canva Sans"/>
+              </a:rPr>
+              <a:t>16</a:t>
+            </a:r>
+            <a:endParaRPr lang="en-US" sz="800" dirty="0">
+              <a:latin typeface="Tahoma" panose="020B0604030504040204" pitchFamily="34" charset="0"/>
+              <a:ea typeface="Tahoma" panose="020B0604030504040204" pitchFamily="34" charset="0"/>
+              <a:cs typeface="Tahoma" panose="020B0604030504040204" pitchFamily="34" charset="0"/>
+            </a:endParaRPr>
+          </a:p>
+        </p:txBody>
+      </p:sp>
+      <p:sp>
+        <p:nvSpPr>
+          <p:cNvPr id="9" name="TextBox 8">
+            <a:extLst>
+              <a:ext uri="{FF2B5EF4-FFF2-40B4-BE49-F238E27FC236}">
+                <a16:creationId xmlns:a16="http://schemas.microsoft.com/office/drawing/2014/main" id="{0553F640-A8EE-DA8E-99BB-9A9CC7E19BB5}"/>
+              </a:ext>
+            </a:extLst>
+          </p:cNvPr>
+          <p:cNvSpPr txBox="1"/>
+          <p:nvPr/>
+        </p:nvSpPr>
+        <p:spPr>
+          <a:xfrm>
+            <a:off x="277092" y="519301"/>
+            <a:ext cx="2675658" cy="251094"/>
+          </a:xfrm>
+          <a:prstGeom prst="rect">
+            <a:avLst/>
+          </a:prstGeom>
+          <a:noFill/>
+        </p:spPr>
+        <p:txBody>
+          <a:bodyPr wrap="square" rtlCol="0">
+            <a:spAutoFit/>
+          </a:bodyPr>
+          <a:lstStyle/>
+          <a:p>
+            <a:pPr algn="just">
+              <a:lnSpc>
+                <a:spcPct val="130000"/>
+              </a:lnSpc>
+            </a:pPr>
+            <a:r>
+              <a:rPr lang="en-US" sz="900" u="sng" dirty="0">
+                <a:solidFill>
+                  <a:srgbClr val="00B050"/>
+                </a:solidFill>
+                <a:latin typeface="Tahoma" panose="020B0604030504040204" pitchFamily="34" charset="0"/>
+                <a:ea typeface="Tahoma" panose="020B0604030504040204" pitchFamily="34" charset="0"/>
+                <a:cs typeface="Tahoma" panose="020B0604030504040204" pitchFamily="34" charset="0"/>
+              </a:rPr>
+              <a:t>4.1. </a:t>
+            </a:r>
+            <a:r>
+              <a:rPr lang="en-US" sz="900" u="sng" dirty="0" err="1">
+                <a:solidFill>
+                  <a:srgbClr val="00B050"/>
+                </a:solidFill>
+                <a:latin typeface="Tahoma" panose="020B0604030504040204" pitchFamily="34" charset="0"/>
+                <a:ea typeface="Tahoma" panose="020B0604030504040204" pitchFamily="34" charset="0"/>
+                <a:cs typeface="Tahoma" panose="020B0604030504040204" pitchFamily="34" charset="0"/>
+              </a:rPr>
+              <a:t>Mô</a:t>
+            </a:r>
+            <a:r>
+              <a:rPr lang="en-US" sz="900" u="sng" dirty="0">
+                <a:solidFill>
+                  <a:srgbClr val="00B050"/>
+                </a:solidFill>
+                <a:latin typeface="Tahoma" panose="020B0604030504040204" pitchFamily="34" charset="0"/>
+                <a:ea typeface="Tahoma" panose="020B0604030504040204" pitchFamily="34" charset="0"/>
+                <a:cs typeface="Tahoma" panose="020B0604030504040204" pitchFamily="34" charset="0"/>
+              </a:rPr>
+              <a:t> </a:t>
+            </a:r>
+            <a:r>
+              <a:rPr lang="en-US" sz="900" u="sng" dirty="0" err="1">
+                <a:solidFill>
+                  <a:srgbClr val="00B050"/>
+                </a:solidFill>
+                <a:latin typeface="Tahoma" panose="020B0604030504040204" pitchFamily="34" charset="0"/>
+                <a:ea typeface="Tahoma" panose="020B0604030504040204" pitchFamily="34" charset="0"/>
+                <a:cs typeface="Tahoma" panose="020B0604030504040204" pitchFamily="34" charset="0"/>
+              </a:rPr>
+              <a:t>hình</a:t>
+            </a:r>
+            <a:r>
+              <a:rPr lang="en-US" sz="900" u="sng" dirty="0">
+                <a:solidFill>
+                  <a:srgbClr val="00B050"/>
+                </a:solidFill>
+                <a:latin typeface="Tahoma" panose="020B0604030504040204" pitchFamily="34" charset="0"/>
+                <a:ea typeface="Tahoma" panose="020B0604030504040204" pitchFamily="34" charset="0"/>
+                <a:cs typeface="Tahoma" panose="020B0604030504040204" pitchFamily="34" charset="0"/>
+              </a:rPr>
+              <a:t> Transformer</a:t>
+            </a:r>
+            <a:endParaRPr lang="vi-VN" sz="900" u="sng" dirty="0">
+              <a:solidFill>
+                <a:srgbClr val="00B050"/>
+              </a:solidFill>
+              <a:latin typeface="Tahoma" panose="020B0604030504040204" pitchFamily="34" charset="0"/>
+              <a:ea typeface="Tahoma" panose="020B0604030504040204" pitchFamily="34" charset="0"/>
+              <a:cs typeface="Tahoma" panose="020B0604030504040204" pitchFamily="34" charset="0"/>
+            </a:endParaRPr>
+          </a:p>
+        </p:txBody>
+      </p:sp>
+      <p:sp>
+        <p:nvSpPr>
+          <p:cNvPr id="3" name="TextBox 2">
+            <a:extLst>
+              <a:ext uri="{FF2B5EF4-FFF2-40B4-BE49-F238E27FC236}">
+                <a16:creationId xmlns:a16="http://schemas.microsoft.com/office/drawing/2014/main" id="{0D645298-74A0-F713-AB39-8FDF133FE67E}"/>
+              </a:ext>
+            </a:extLst>
+          </p:cNvPr>
+          <p:cNvSpPr txBox="1"/>
+          <p:nvPr/>
+        </p:nvSpPr>
+        <p:spPr>
+          <a:xfrm>
+            <a:off x="277092" y="760777"/>
+            <a:ext cx="3513858" cy="2313967"/>
+          </a:xfrm>
+          <a:prstGeom prst="rect">
+            <a:avLst/>
+          </a:prstGeom>
+          <a:noFill/>
+        </p:spPr>
+        <p:txBody>
+          <a:bodyPr wrap="square" rtlCol="0">
+            <a:spAutoFit/>
+          </a:bodyPr>
+          <a:lstStyle/>
+          <a:p>
+            <a:pPr algn="just">
+              <a:lnSpc>
+                <a:spcPct val="130000"/>
+              </a:lnSpc>
+            </a:pPr>
+            <a:r>
+              <a:rPr lang="en-US" sz="800" dirty="0">
+                <a:latin typeface="Tahoma" panose="020B0604030504040204" pitchFamily="34" charset="0"/>
+                <a:ea typeface="Tahoma" panose="020B0604030504040204" pitchFamily="34" charset="0"/>
+                <a:cs typeface="Tahoma" panose="020B0604030504040204" pitchFamily="34" charset="0"/>
+              </a:rPr>
+              <a:t>Transformer </a:t>
+            </a:r>
+            <a:r>
+              <a:rPr lang="en-US" sz="800" dirty="0" err="1">
+                <a:latin typeface="Tahoma" panose="020B0604030504040204" pitchFamily="34" charset="0"/>
+                <a:ea typeface="Tahoma" panose="020B0604030504040204" pitchFamily="34" charset="0"/>
+                <a:cs typeface="Tahoma" panose="020B0604030504040204" pitchFamily="34" charset="0"/>
+              </a:rPr>
+              <a:t>là</a:t>
+            </a:r>
+            <a:r>
+              <a:rPr lang="en-US" sz="800" dirty="0">
+                <a:latin typeface="Tahoma" panose="020B0604030504040204" pitchFamily="34" charset="0"/>
+                <a:ea typeface="Tahoma" panose="020B0604030504040204" pitchFamily="34" charset="0"/>
+                <a:cs typeface="Tahoma" panose="020B0604030504040204" pitchFamily="34" charset="0"/>
+              </a:rPr>
+              <a:t> </a:t>
+            </a:r>
+            <a:r>
+              <a:rPr lang="en-US" sz="800" dirty="0" err="1">
+                <a:latin typeface="Tahoma" panose="020B0604030504040204" pitchFamily="34" charset="0"/>
+                <a:ea typeface="Tahoma" panose="020B0604030504040204" pitchFamily="34" charset="0"/>
+                <a:cs typeface="Tahoma" panose="020B0604030504040204" pitchFamily="34" charset="0"/>
+              </a:rPr>
+              <a:t>mô</a:t>
+            </a:r>
+            <a:r>
+              <a:rPr lang="en-US" sz="800" dirty="0">
+                <a:latin typeface="Tahoma" panose="020B0604030504040204" pitchFamily="34" charset="0"/>
+                <a:ea typeface="Tahoma" panose="020B0604030504040204" pitchFamily="34" charset="0"/>
+                <a:cs typeface="Tahoma" panose="020B0604030504040204" pitchFamily="34" charset="0"/>
+              </a:rPr>
+              <a:t> </a:t>
+            </a:r>
+            <a:r>
+              <a:rPr lang="en-US" sz="800" dirty="0" err="1">
+                <a:latin typeface="Tahoma" panose="020B0604030504040204" pitchFamily="34" charset="0"/>
+                <a:ea typeface="Tahoma" panose="020B0604030504040204" pitchFamily="34" charset="0"/>
+                <a:cs typeface="Tahoma" panose="020B0604030504040204" pitchFamily="34" charset="0"/>
+              </a:rPr>
+              <a:t>hình</a:t>
+            </a:r>
+            <a:r>
+              <a:rPr lang="en-US" sz="800" dirty="0">
+                <a:latin typeface="Tahoma" panose="020B0604030504040204" pitchFamily="34" charset="0"/>
+                <a:ea typeface="Tahoma" panose="020B0604030504040204" pitchFamily="34" charset="0"/>
+                <a:cs typeface="Tahoma" panose="020B0604030504040204" pitchFamily="34" charset="0"/>
+              </a:rPr>
+              <a:t> Encoder–Decoder </a:t>
+            </a:r>
+            <a:r>
+              <a:rPr lang="en-US" sz="800" dirty="0" err="1">
+                <a:latin typeface="Tahoma" panose="020B0604030504040204" pitchFamily="34" charset="0"/>
+                <a:ea typeface="Tahoma" panose="020B0604030504040204" pitchFamily="34" charset="0"/>
+                <a:cs typeface="Tahoma" panose="020B0604030504040204" pitchFamily="34" charset="0"/>
+              </a:rPr>
+              <a:t>dựa</a:t>
+            </a:r>
+            <a:r>
+              <a:rPr lang="en-US" sz="800" dirty="0">
+                <a:latin typeface="Tahoma" panose="020B0604030504040204" pitchFamily="34" charset="0"/>
+                <a:ea typeface="Tahoma" panose="020B0604030504040204" pitchFamily="34" charset="0"/>
+                <a:cs typeface="Tahoma" panose="020B0604030504040204" pitchFamily="34" charset="0"/>
+              </a:rPr>
+              <a:t> </a:t>
+            </a:r>
+            <a:r>
+              <a:rPr lang="en-US" sz="800" dirty="0" err="1">
+                <a:latin typeface="Tahoma" panose="020B0604030504040204" pitchFamily="34" charset="0"/>
+                <a:ea typeface="Tahoma" panose="020B0604030504040204" pitchFamily="34" charset="0"/>
+                <a:cs typeface="Tahoma" panose="020B0604030504040204" pitchFamily="34" charset="0"/>
+              </a:rPr>
+              <a:t>hoàn</a:t>
+            </a:r>
+            <a:r>
+              <a:rPr lang="en-US" sz="800" dirty="0">
+                <a:latin typeface="Tahoma" panose="020B0604030504040204" pitchFamily="34" charset="0"/>
+                <a:ea typeface="Tahoma" panose="020B0604030504040204" pitchFamily="34" charset="0"/>
+                <a:cs typeface="Tahoma" panose="020B0604030504040204" pitchFamily="34" charset="0"/>
+              </a:rPr>
+              <a:t> </a:t>
+            </a:r>
+            <a:r>
+              <a:rPr lang="en-US" sz="800" dirty="0" err="1">
+                <a:latin typeface="Tahoma" panose="020B0604030504040204" pitchFamily="34" charset="0"/>
+                <a:ea typeface="Tahoma" panose="020B0604030504040204" pitchFamily="34" charset="0"/>
+                <a:cs typeface="Tahoma" panose="020B0604030504040204" pitchFamily="34" charset="0"/>
+              </a:rPr>
+              <a:t>toàn</a:t>
+            </a:r>
+            <a:r>
+              <a:rPr lang="en-US" sz="800" dirty="0">
+                <a:latin typeface="Tahoma" panose="020B0604030504040204" pitchFamily="34" charset="0"/>
+                <a:ea typeface="Tahoma" panose="020B0604030504040204" pitchFamily="34" charset="0"/>
+                <a:cs typeface="Tahoma" panose="020B0604030504040204" pitchFamily="34" charset="0"/>
+              </a:rPr>
+              <a:t> </a:t>
+            </a:r>
+            <a:r>
+              <a:rPr lang="en-US" sz="800" dirty="0" err="1">
+                <a:latin typeface="Tahoma" panose="020B0604030504040204" pitchFamily="34" charset="0"/>
+                <a:ea typeface="Tahoma" panose="020B0604030504040204" pitchFamily="34" charset="0"/>
+                <a:cs typeface="Tahoma" panose="020B0604030504040204" pitchFamily="34" charset="0"/>
+              </a:rPr>
+              <a:t>trên</a:t>
+            </a:r>
+            <a:r>
+              <a:rPr lang="en-US" sz="800" dirty="0">
+                <a:latin typeface="Tahoma" panose="020B0604030504040204" pitchFamily="34" charset="0"/>
+                <a:ea typeface="Tahoma" panose="020B0604030504040204" pitchFamily="34" charset="0"/>
+                <a:cs typeface="Tahoma" panose="020B0604030504040204" pitchFamily="34" charset="0"/>
+              </a:rPr>
+              <a:t> Attention, </a:t>
+            </a:r>
+            <a:r>
+              <a:rPr lang="en-US" sz="800" dirty="0" err="1">
+                <a:latin typeface="Tahoma" panose="020B0604030504040204" pitchFamily="34" charset="0"/>
+                <a:ea typeface="Tahoma" panose="020B0604030504040204" pitchFamily="34" charset="0"/>
+                <a:cs typeface="Tahoma" panose="020B0604030504040204" pitchFamily="34" charset="0"/>
+              </a:rPr>
+              <a:t>không</a:t>
+            </a:r>
+            <a:r>
+              <a:rPr lang="en-US" sz="800" dirty="0">
+                <a:latin typeface="Tahoma" panose="020B0604030504040204" pitchFamily="34" charset="0"/>
+                <a:ea typeface="Tahoma" panose="020B0604030504040204" pitchFamily="34" charset="0"/>
+                <a:cs typeface="Tahoma" panose="020B0604030504040204" pitchFamily="34" charset="0"/>
+              </a:rPr>
+              <a:t> </a:t>
+            </a:r>
+            <a:r>
+              <a:rPr lang="en-US" sz="800" dirty="0" err="1">
+                <a:latin typeface="Tahoma" panose="020B0604030504040204" pitchFamily="34" charset="0"/>
+                <a:ea typeface="Tahoma" panose="020B0604030504040204" pitchFamily="34" charset="0"/>
+                <a:cs typeface="Tahoma" panose="020B0604030504040204" pitchFamily="34" charset="0"/>
+              </a:rPr>
+              <a:t>sử</a:t>
+            </a:r>
+            <a:r>
+              <a:rPr lang="en-US" sz="800" dirty="0">
+                <a:latin typeface="Tahoma" panose="020B0604030504040204" pitchFamily="34" charset="0"/>
+                <a:ea typeface="Tahoma" panose="020B0604030504040204" pitchFamily="34" charset="0"/>
+                <a:cs typeface="Tahoma" panose="020B0604030504040204" pitchFamily="34" charset="0"/>
+              </a:rPr>
+              <a:t> </a:t>
+            </a:r>
+            <a:r>
+              <a:rPr lang="en-US" sz="800" dirty="0" err="1">
+                <a:latin typeface="Tahoma" panose="020B0604030504040204" pitchFamily="34" charset="0"/>
+                <a:ea typeface="Tahoma" panose="020B0604030504040204" pitchFamily="34" charset="0"/>
+                <a:cs typeface="Tahoma" panose="020B0604030504040204" pitchFamily="34" charset="0"/>
+              </a:rPr>
+              <a:t>dụng</a:t>
+            </a:r>
+            <a:r>
+              <a:rPr lang="en-US" sz="800" dirty="0">
+                <a:latin typeface="Tahoma" panose="020B0604030504040204" pitchFamily="34" charset="0"/>
+                <a:ea typeface="Tahoma" panose="020B0604030504040204" pitchFamily="34" charset="0"/>
+                <a:cs typeface="Tahoma" panose="020B0604030504040204" pitchFamily="34" charset="0"/>
+              </a:rPr>
+              <a:t> RNN.</a:t>
+            </a:r>
+          </a:p>
+          <a:p>
+            <a:pPr algn="just">
+              <a:lnSpc>
+                <a:spcPct val="130000"/>
+              </a:lnSpc>
+            </a:pPr>
+            <a:r>
+              <a:rPr lang="en-US" sz="800" dirty="0">
+                <a:latin typeface="Tahoma" panose="020B0604030504040204" pitchFamily="34" charset="0"/>
+                <a:ea typeface="Tahoma" panose="020B0604030504040204" pitchFamily="34" charset="0"/>
+                <a:cs typeface="Tahoma" panose="020B0604030504040204" pitchFamily="34" charset="0"/>
+              </a:rPr>
+              <a:t>→ Cho </a:t>
+            </a:r>
+            <a:r>
+              <a:rPr lang="en-US" sz="800" dirty="0" err="1">
+                <a:latin typeface="Tahoma" panose="020B0604030504040204" pitchFamily="34" charset="0"/>
+                <a:ea typeface="Tahoma" panose="020B0604030504040204" pitchFamily="34" charset="0"/>
+                <a:cs typeface="Tahoma" panose="020B0604030504040204" pitchFamily="34" charset="0"/>
+              </a:rPr>
+              <a:t>phép</a:t>
+            </a:r>
+            <a:r>
+              <a:rPr lang="en-US" sz="800" dirty="0">
+                <a:latin typeface="Tahoma" panose="020B0604030504040204" pitchFamily="34" charset="0"/>
+                <a:ea typeface="Tahoma" panose="020B0604030504040204" pitchFamily="34" charset="0"/>
+                <a:cs typeface="Tahoma" panose="020B0604030504040204" pitchFamily="34" charset="0"/>
+              </a:rPr>
+              <a:t> </a:t>
+            </a:r>
+            <a:r>
+              <a:rPr lang="en-US" sz="800" dirty="0" err="1">
+                <a:latin typeface="Tahoma" panose="020B0604030504040204" pitchFamily="34" charset="0"/>
+                <a:ea typeface="Tahoma" panose="020B0604030504040204" pitchFamily="34" charset="0"/>
+                <a:cs typeface="Tahoma" panose="020B0604030504040204" pitchFamily="34" charset="0"/>
+              </a:rPr>
+              <a:t>xử</a:t>
+            </a:r>
+            <a:r>
+              <a:rPr lang="en-US" sz="800" dirty="0">
+                <a:latin typeface="Tahoma" panose="020B0604030504040204" pitchFamily="34" charset="0"/>
+                <a:ea typeface="Tahoma" panose="020B0604030504040204" pitchFamily="34" charset="0"/>
+                <a:cs typeface="Tahoma" panose="020B0604030504040204" pitchFamily="34" charset="0"/>
+              </a:rPr>
+              <a:t> </a:t>
+            </a:r>
+            <a:r>
+              <a:rPr lang="en-US" sz="800" dirty="0" err="1">
+                <a:latin typeface="Tahoma" panose="020B0604030504040204" pitchFamily="34" charset="0"/>
+                <a:ea typeface="Tahoma" panose="020B0604030504040204" pitchFamily="34" charset="0"/>
+                <a:cs typeface="Tahoma" panose="020B0604030504040204" pitchFamily="34" charset="0"/>
+              </a:rPr>
+              <a:t>lý</a:t>
+            </a:r>
+            <a:r>
+              <a:rPr lang="en-US" sz="800" dirty="0">
+                <a:latin typeface="Tahoma" panose="020B0604030504040204" pitchFamily="34" charset="0"/>
+                <a:ea typeface="Tahoma" panose="020B0604030504040204" pitchFamily="34" charset="0"/>
+                <a:cs typeface="Tahoma" panose="020B0604030504040204" pitchFamily="34" charset="0"/>
+              </a:rPr>
+              <a:t> song </a:t>
+            </a:r>
+            <a:r>
+              <a:rPr lang="en-US" sz="800" dirty="0" err="1">
+                <a:latin typeface="Tahoma" panose="020B0604030504040204" pitchFamily="34" charset="0"/>
+                <a:ea typeface="Tahoma" panose="020B0604030504040204" pitchFamily="34" charset="0"/>
+                <a:cs typeface="Tahoma" panose="020B0604030504040204" pitchFamily="34" charset="0"/>
+              </a:rPr>
+              <a:t>song</a:t>
+            </a:r>
+            <a:r>
+              <a:rPr lang="en-US" sz="800" dirty="0">
+                <a:latin typeface="Tahoma" panose="020B0604030504040204" pitchFamily="34" charset="0"/>
+                <a:ea typeface="Tahoma" panose="020B0604030504040204" pitchFamily="34" charset="0"/>
+                <a:cs typeface="Tahoma" panose="020B0604030504040204" pitchFamily="34" charset="0"/>
+              </a:rPr>
+              <a:t> </a:t>
+            </a:r>
+            <a:r>
+              <a:rPr lang="en-US" sz="800" dirty="0" err="1">
+                <a:latin typeface="Tahoma" panose="020B0604030504040204" pitchFamily="34" charset="0"/>
+                <a:ea typeface="Tahoma" panose="020B0604030504040204" pitchFamily="34" charset="0"/>
+                <a:cs typeface="Tahoma" panose="020B0604030504040204" pitchFamily="34" charset="0"/>
+              </a:rPr>
+              <a:t>và</a:t>
+            </a:r>
+            <a:r>
+              <a:rPr lang="en-US" sz="800" dirty="0">
+                <a:latin typeface="Tahoma" panose="020B0604030504040204" pitchFamily="34" charset="0"/>
+                <a:ea typeface="Tahoma" panose="020B0604030504040204" pitchFamily="34" charset="0"/>
+                <a:cs typeface="Tahoma" panose="020B0604030504040204" pitchFamily="34" charset="0"/>
+              </a:rPr>
+              <a:t> </a:t>
+            </a:r>
+            <a:r>
+              <a:rPr lang="en-US" sz="800" dirty="0" err="1">
+                <a:latin typeface="Tahoma" panose="020B0604030504040204" pitchFamily="34" charset="0"/>
+                <a:ea typeface="Tahoma" panose="020B0604030504040204" pitchFamily="34" charset="0"/>
+                <a:cs typeface="Tahoma" panose="020B0604030504040204" pitchFamily="34" charset="0"/>
+              </a:rPr>
+              <a:t>học</a:t>
+            </a:r>
+            <a:r>
+              <a:rPr lang="en-US" sz="800" dirty="0">
+                <a:latin typeface="Tahoma" panose="020B0604030504040204" pitchFamily="34" charset="0"/>
+                <a:ea typeface="Tahoma" panose="020B0604030504040204" pitchFamily="34" charset="0"/>
+                <a:cs typeface="Tahoma" panose="020B0604030504040204" pitchFamily="34" charset="0"/>
+              </a:rPr>
+              <a:t> </a:t>
+            </a:r>
+            <a:r>
+              <a:rPr lang="en-US" sz="800" dirty="0" err="1">
+                <a:latin typeface="Tahoma" panose="020B0604030504040204" pitchFamily="34" charset="0"/>
+                <a:ea typeface="Tahoma" panose="020B0604030504040204" pitchFamily="34" charset="0"/>
+                <a:cs typeface="Tahoma" panose="020B0604030504040204" pitchFamily="34" charset="0"/>
+              </a:rPr>
+              <a:t>tốt</a:t>
+            </a:r>
+            <a:r>
+              <a:rPr lang="en-US" sz="800" dirty="0">
+                <a:latin typeface="Tahoma" panose="020B0604030504040204" pitchFamily="34" charset="0"/>
+                <a:ea typeface="Tahoma" panose="020B0604030504040204" pitchFamily="34" charset="0"/>
+                <a:cs typeface="Tahoma" panose="020B0604030504040204" pitchFamily="34" charset="0"/>
+              </a:rPr>
+              <a:t> </a:t>
+            </a:r>
+            <a:r>
+              <a:rPr lang="en-US" sz="800" dirty="0" err="1">
+                <a:latin typeface="Tahoma" panose="020B0604030504040204" pitchFamily="34" charset="0"/>
+                <a:ea typeface="Tahoma" panose="020B0604030504040204" pitchFamily="34" charset="0"/>
+                <a:cs typeface="Tahoma" panose="020B0604030504040204" pitchFamily="34" charset="0"/>
+              </a:rPr>
+              <a:t>các</a:t>
+            </a:r>
+            <a:r>
+              <a:rPr lang="en-US" sz="800" dirty="0">
+                <a:latin typeface="Tahoma" panose="020B0604030504040204" pitchFamily="34" charset="0"/>
+                <a:ea typeface="Tahoma" panose="020B0604030504040204" pitchFamily="34" charset="0"/>
+                <a:cs typeface="Tahoma" panose="020B0604030504040204" pitchFamily="34" charset="0"/>
+              </a:rPr>
+              <a:t> </a:t>
+            </a:r>
+            <a:r>
+              <a:rPr lang="en-US" sz="800" dirty="0" err="1">
+                <a:latin typeface="Tahoma" panose="020B0604030504040204" pitchFamily="34" charset="0"/>
+                <a:ea typeface="Tahoma" panose="020B0604030504040204" pitchFamily="34" charset="0"/>
+                <a:cs typeface="Tahoma" panose="020B0604030504040204" pitchFamily="34" charset="0"/>
+              </a:rPr>
+              <a:t>phụ</a:t>
+            </a:r>
+            <a:r>
+              <a:rPr lang="en-US" sz="800" dirty="0">
+                <a:latin typeface="Tahoma" panose="020B0604030504040204" pitchFamily="34" charset="0"/>
+                <a:ea typeface="Tahoma" panose="020B0604030504040204" pitchFamily="34" charset="0"/>
+                <a:cs typeface="Tahoma" panose="020B0604030504040204" pitchFamily="34" charset="0"/>
+              </a:rPr>
+              <a:t> </a:t>
+            </a:r>
+            <a:r>
+              <a:rPr lang="en-US" sz="800" dirty="0" err="1">
+                <a:latin typeface="Tahoma" panose="020B0604030504040204" pitchFamily="34" charset="0"/>
+                <a:ea typeface="Tahoma" panose="020B0604030504040204" pitchFamily="34" charset="0"/>
+                <a:cs typeface="Tahoma" panose="020B0604030504040204" pitchFamily="34" charset="0"/>
+              </a:rPr>
+              <a:t>thuộc</a:t>
+            </a:r>
+            <a:r>
+              <a:rPr lang="en-US" sz="800" dirty="0">
+                <a:latin typeface="Tahoma" panose="020B0604030504040204" pitchFamily="34" charset="0"/>
+                <a:ea typeface="Tahoma" panose="020B0604030504040204" pitchFamily="34" charset="0"/>
+                <a:cs typeface="Tahoma" panose="020B0604030504040204" pitchFamily="34" charset="0"/>
+              </a:rPr>
+              <a:t> </a:t>
+            </a:r>
+            <a:r>
+              <a:rPr lang="en-US" sz="800" dirty="0" err="1">
+                <a:latin typeface="Tahoma" panose="020B0604030504040204" pitchFamily="34" charset="0"/>
+                <a:ea typeface="Tahoma" panose="020B0604030504040204" pitchFamily="34" charset="0"/>
+                <a:cs typeface="Tahoma" panose="020B0604030504040204" pitchFamily="34" charset="0"/>
+              </a:rPr>
+              <a:t>dài</a:t>
+            </a:r>
+            <a:r>
+              <a:rPr lang="en-US" sz="800" dirty="0">
+                <a:latin typeface="Tahoma" panose="020B0604030504040204" pitchFamily="34" charset="0"/>
+                <a:ea typeface="Tahoma" panose="020B0604030504040204" pitchFamily="34" charset="0"/>
+                <a:cs typeface="Tahoma" panose="020B0604030504040204" pitchFamily="34" charset="0"/>
+              </a:rPr>
+              <a:t> </a:t>
+            </a:r>
+            <a:r>
+              <a:rPr lang="en-US" sz="800" dirty="0" err="1">
+                <a:latin typeface="Tahoma" panose="020B0604030504040204" pitchFamily="34" charset="0"/>
+                <a:ea typeface="Tahoma" panose="020B0604030504040204" pitchFamily="34" charset="0"/>
+                <a:cs typeface="Tahoma" panose="020B0604030504040204" pitchFamily="34" charset="0"/>
+              </a:rPr>
+              <a:t>hạn</a:t>
+            </a:r>
+            <a:r>
+              <a:rPr lang="en-US" sz="800" dirty="0">
+                <a:latin typeface="Tahoma" panose="020B0604030504040204" pitchFamily="34" charset="0"/>
+                <a:ea typeface="Tahoma" panose="020B0604030504040204" pitchFamily="34" charset="0"/>
+                <a:cs typeface="Tahoma" panose="020B0604030504040204" pitchFamily="34" charset="0"/>
+              </a:rPr>
+              <a:t> </a:t>
+            </a:r>
+            <a:r>
+              <a:rPr lang="en-US" sz="800" dirty="0" err="1">
+                <a:latin typeface="Tahoma" panose="020B0604030504040204" pitchFamily="34" charset="0"/>
+                <a:ea typeface="Tahoma" panose="020B0604030504040204" pitchFamily="34" charset="0"/>
+                <a:cs typeface="Tahoma" panose="020B0604030504040204" pitchFamily="34" charset="0"/>
+              </a:rPr>
+              <a:t>trong</a:t>
+            </a:r>
+            <a:r>
+              <a:rPr lang="en-US" sz="800" dirty="0">
+                <a:latin typeface="Tahoma" panose="020B0604030504040204" pitchFamily="34" charset="0"/>
+                <a:ea typeface="Tahoma" panose="020B0604030504040204" pitchFamily="34" charset="0"/>
+                <a:cs typeface="Tahoma" panose="020B0604030504040204" pitchFamily="34" charset="0"/>
+              </a:rPr>
+              <a:t> </a:t>
+            </a:r>
+            <a:r>
+              <a:rPr lang="en-US" sz="800" dirty="0" err="1">
+                <a:latin typeface="Tahoma" panose="020B0604030504040204" pitchFamily="34" charset="0"/>
+                <a:ea typeface="Tahoma" panose="020B0604030504040204" pitchFamily="34" charset="0"/>
+                <a:cs typeface="Tahoma" panose="020B0604030504040204" pitchFamily="34" charset="0"/>
+              </a:rPr>
+              <a:t>câu</a:t>
+            </a:r>
+            <a:r>
+              <a:rPr lang="en-US" sz="800" dirty="0">
+                <a:latin typeface="Tahoma" panose="020B0604030504040204" pitchFamily="34" charset="0"/>
+                <a:ea typeface="Tahoma" panose="020B0604030504040204" pitchFamily="34" charset="0"/>
+                <a:cs typeface="Tahoma" panose="020B0604030504040204" pitchFamily="34" charset="0"/>
+              </a:rPr>
+              <a:t>.</a:t>
+            </a:r>
+          </a:p>
+          <a:p>
+            <a:pPr algn="just">
+              <a:lnSpc>
+                <a:spcPct val="130000"/>
+              </a:lnSpc>
+            </a:pPr>
+            <a:endParaRPr lang="en-US" sz="800" dirty="0">
+              <a:latin typeface="Tahoma" panose="020B0604030504040204" pitchFamily="34" charset="0"/>
+              <a:ea typeface="Tahoma" panose="020B0604030504040204" pitchFamily="34" charset="0"/>
+              <a:cs typeface="Tahoma" panose="020B0604030504040204" pitchFamily="34" charset="0"/>
+            </a:endParaRPr>
+          </a:p>
+          <a:p>
+            <a:pPr algn="just">
+              <a:lnSpc>
+                <a:spcPct val="130000"/>
+              </a:lnSpc>
+            </a:pPr>
+            <a:r>
+              <a:rPr lang="vi-VN" sz="800" dirty="0">
+                <a:latin typeface="Tahoma" panose="020B0604030504040204" pitchFamily="34" charset="0"/>
+                <a:ea typeface="Tahoma" panose="020B0604030504040204" pitchFamily="34" charset="0"/>
+                <a:cs typeface="Tahoma" panose="020B0604030504040204" pitchFamily="34" charset="0"/>
+              </a:rPr>
+              <a:t>Kiến trúc Transformer gồm Encoder và Decoder, cùng với các thành phần chính sau:</a:t>
+            </a:r>
+            <a:endParaRPr lang="en-US" sz="800" dirty="0">
+              <a:latin typeface="Tahoma" panose="020B0604030504040204" pitchFamily="34" charset="0"/>
+              <a:ea typeface="Tahoma" panose="020B0604030504040204" pitchFamily="34" charset="0"/>
+              <a:cs typeface="Tahoma" panose="020B0604030504040204" pitchFamily="34" charset="0"/>
+            </a:endParaRPr>
+          </a:p>
+          <a:p>
+            <a:pPr marL="285750" indent="-171450" algn="just">
+              <a:lnSpc>
+                <a:spcPct val="130000"/>
+              </a:lnSpc>
+              <a:buFont typeface="Arial" panose="020B0604020202020204" pitchFamily="34" charset="0"/>
+              <a:buChar char="•"/>
+            </a:pPr>
+            <a:r>
+              <a:rPr lang="vi-VN" sz="800" dirty="0">
+                <a:latin typeface="Tahoma" panose="020B0604030504040204" pitchFamily="34" charset="0"/>
+                <a:ea typeface="Tahoma" panose="020B0604030504040204" pitchFamily="34" charset="0"/>
+                <a:cs typeface="Tahoma" panose="020B0604030504040204" pitchFamily="34" charset="0"/>
+              </a:rPr>
+              <a:t>Positional Encoding: bổ sung thông tin vị trí của từ trong câu trước khi đưa vào Encoder</a:t>
+            </a:r>
+            <a:endParaRPr lang="en-US" sz="800" dirty="0">
+              <a:latin typeface="Tahoma" panose="020B0604030504040204" pitchFamily="34" charset="0"/>
+              <a:ea typeface="Tahoma" panose="020B0604030504040204" pitchFamily="34" charset="0"/>
+              <a:cs typeface="Tahoma" panose="020B0604030504040204" pitchFamily="34" charset="0"/>
+            </a:endParaRPr>
+          </a:p>
+          <a:p>
+            <a:pPr marL="285750" indent="-171450" algn="just">
+              <a:lnSpc>
+                <a:spcPct val="130000"/>
+              </a:lnSpc>
+              <a:buFont typeface="Arial" panose="020B0604020202020204" pitchFamily="34" charset="0"/>
+              <a:buChar char="•"/>
+            </a:pPr>
+            <a:r>
+              <a:rPr lang="vi-VN" sz="800" dirty="0">
+                <a:latin typeface="Tahoma" panose="020B0604030504040204" pitchFamily="34" charset="0"/>
+                <a:ea typeface="Tahoma" panose="020B0604030504040204" pitchFamily="34" charset="0"/>
+                <a:cs typeface="Tahoma" panose="020B0604030504040204" pitchFamily="34" charset="0"/>
+              </a:rPr>
+              <a:t>Self-Attention: mỗi từ có thể liên hệ với toàn bộ các từ còn lại để học ngữ cảnh</a:t>
+            </a:r>
+            <a:endParaRPr lang="en-US" sz="800" dirty="0">
+              <a:latin typeface="Tahoma" panose="020B0604030504040204" pitchFamily="34" charset="0"/>
+              <a:ea typeface="Tahoma" panose="020B0604030504040204" pitchFamily="34" charset="0"/>
+              <a:cs typeface="Tahoma" panose="020B0604030504040204" pitchFamily="34" charset="0"/>
+            </a:endParaRPr>
+          </a:p>
+          <a:p>
+            <a:pPr marL="285750" indent="-171450" algn="just">
+              <a:lnSpc>
+                <a:spcPct val="130000"/>
+              </a:lnSpc>
+              <a:buFont typeface="Arial" panose="020B0604020202020204" pitchFamily="34" charset="0"/>
+              <a:buChar char="•"/>
+            </a:pPr>
+            <a:r>
+              <a:rPr lang="vi-VN" sz="800" dirty="0">
+                <a:latin typeface="Tahoma" panose="020B0604030504040204" pitchFamily="34" charset="0"/>
+                <a:ea typeface="Tahoma" panose="020B0604030504040204" pitchFamily="34" charset="0"/>
+                <a:cs typeface="Tahoma" panose="020B0604030504040204" pitchFamily="34" charset="0"/>
+              </a:rPr>
+              <a:t>Multi-Head Attention: nhiều cơ chế attention song song, giúp học nhiều kiểu quan hệ khác nhau</a:t>
+            </a:r>
+            <a:endParaRPr lang="en-US" sz="800" dirty="0">
+              <a:latin typeface="Tahoma" panose="020B0604030504040204" pitchFamily="34" charset="0"/>
+              <a:ea typeface="Tahoma" panose="020B0604030504040204" pitchFamily="34" charset="0"/>
+              <a:cs typeface="Tahoma" panose="020B0604030504040204" pitchFamily="34" charset="0"/>
+            </a:endParaRPr>
+          </a:p>
+          <a:p>
+            <a:pPr marL="285750" indent="-171450" algn="just">
+              <a:lnSpc>
+                <a:spcPct val="130000"/>
+              </a:lnSpc>
+              <a:buFont typeface="Arial" panose="020B0604020202020204" pitchFamily="34" charset="0"/>
+              <a:buChar char="•"/>
+            </a:pPr>
+            <a:r>
+              <a:rPr lang="vi-VN" sz="800" dirty="0">
+                <a:latin typeface="Tahoma" panose="020B0604030504040204" pitchFamily="34" charset="0"/>
+                <a:ea typeface="Tahoma" panose="020B0604030504040204" pitchFamily="34" charset="0"/>
+                <a:cs typeface="Tahoma" panose="020B0604030504040204" pitchFamily="34" charset="0"/>
+              </a:rPr>
+              <a:t>Masking (Decoder): che thông tin tương lai, đảm bảo quá trình sinh chuỗi diễn ra theo thứ tự từ trái → phải</a:t>
+            </a:r>
+          </a:p>
+        </p:txBody>
+      </p:sp>
+    </p:spTree>
+    <p:extLst>
+      <p:ext uri="{BB962C8B-B14F-4D97-AF65-F5344CB8AC3E}">
+        <p14:creationId xmlns:p14="http://schemas.microsoft.com/office/powerpoint/2010/main" val="3385537471"/>
+      </p:ext>
+    </p:extLst>
+  </p:cSld>
+  <p:clrMapOvr>
+    <a:masterClrMapping/>
+  </p:clrMapOvr>
+</p:sld>
+</file>
+
+<file path=ppt/slides/slide18.xml><?xml version="1.0" encoding="utf-8"?>
 <p:sld xmlns:a="http://schemas.openxmlformats.org/drawingml/2006/main" xmlns:r="http://schemas.openxmlformats.org/officeDocument/2006/relationships" xmlns:p="http://schemas.openxmlformats.org/presentationml/2006/main">
   <p:cSld>
     <p:spTree>
@@ -7862,7 +9545,7 @@
 </p:sld>
 </file>
 
-<file path=ppt/slides/slide17.xml><?xml version="1.0" encoding="utf-8"?>
+<file path=ppt/slides/slide19.xml><?xml version="1.0" encoding="utf-8"?>
 <p:sld xmlns:a="http://schemas.openxmlformats.org/drawingml/2006/main" xmlns:r="http://schemas.openxmlformats.org/officeDocument/2006/relationships" xmlns:p="http://schemas.openxmlformats.org/presentationml/2006/main">
   <p:cSld>
     <p:spTree>
@@ -8185,7 +9868,590 @@
 </p:sld>
 </file>
 
-<file path=ppt/slides/slide18.xml><?xml version="1.0" encoding="utf-8"?>
+<file path=ppt/slides/slide2.xml><?xml version="1.0" encoding="utf-8"?>
+<p:sld xmlns:a="http://schemas.openxmlformats.org/drawingml/2006/main" xmlns:r="http://schemas.openxmlformats.org/officeDocument/2006/relationships" xmlns:p="http://schemas.openxmlformats.org/presentationml/2006/main">
+  <p:cSld>
+    <p:bg>
+      <p:bgPr>
+        <a:solidFill>
+          <a:srgbClr val="F4F8FF"/>
+        </a:solidFill>
+        <a:effectLst/>
+      </p:bgPr>
+    </p:bg>
+    <p:spTree>
+      <p:nvGrpSpPr>
+        <p:cNvPr id="1" name=""/>
+        <p:cNvGrpSpPr/>
+        <p:nvPr/>
+      </p:nvGrpSpPr>
+      <p:grpSpPr>
+        <a:xfrm>
+          <a:off x="0" y="0"/>
+          <a:ext cx="0" cy="0"/>
+          <a:chOff x="0" y="0"/>
+          <a:chExt cx="0" cy="0"/>
+        </a:xfrm>
+      </p:grpSpPr>
+      <p:sp>
+        <p:nvSpPr>
+          <p:cNvPr id="2" name="TextBox 2"/>
+          <p:cNvSpPr txBox="1"/>
+          <p:nvPr/>
+        </p:nvSpPr>
+        <p:spPr>
+          <a:xfrm>
+            <a:off x="323849" y="182553"/>
+            <a:ext cx="1562101" cy="332848"/>
+          </a:xfrm>
+          <a:prstGeom prst="rect">
+            <a:avLst/>
+          </a:prstGeom>
+        </p:spPr>
+        <p:txBody>
+          <a:bodyPr wrap="square" lIns="0" tIns="0" rIns="0" bIns="0" rtlCol="0" anchor="t">
+            <a:spAutoFit/>
+          </a:bodyPr>
+          <a:lstStyle/>
+          <a:p>
+            <a:pPr algn="l">
+              <a:lnSpc>
+                <a:spcPts val="2869"/>
+              </a:lnSpc>
+            </a:pPr>
+            <a:r>
+              <a:rPr lang="en-US" sz="2049" b="1" dirty="0" err="1">
+                <a:solidFill>
+                  <a:srgbClr val="2B4D7B"/>
+                </a:solidFill>
+                <a:latin typeface="Tahoma" panose="020B0604030504040204" pitchFamily="34" charset="0"/>
+                <a:ea typeface="Tahoma" panose="020B0604030504040204" pitchFamily="34" charset="0"/>
+                <a:cs typeface="Tahoma" panose="020B0604030504040204" pitchFamily="34" charset="0"/>
+                <a:sym typeface="Canva Sans Bold"/>
+              </a:rPr>
+              <a:t>Nội</a:t>
+            </a:r>
+            <a:r>
+              <a:rPr lang="en-US" sz="2049" b="1" dirty="0">
+                <a:solidFill>
+                  <a:srgbClr val="2B4D7B"/>
+                </a:solidFill>
+                <a:latin typeface="Tahoma" panose="020B0604030504040204" pitchFamily="34" charset="0"/>
+                <a:ea typeface="Tahoma" panose="020B0604030504040204" pitchFamily="34" charset="0"/>
+                <a:cs typeface="Tahoma" panose="020B0604030504040204" pitchFamily="34" charset="0"/>
+                <a:sym typeface="Canva Sans Bold"/>
+              </a:rPr>
+              <a:t> dung</a:t>
+            </a:r>
+          </a:p>
+        </p:txBody>
+      </p:sp>
+      <p:sp>
+        <p:nvSpPr>
+          <p:cNvPr id="3" name="TextBox 3"/>
+          <p:cNvSpPr txBox="1"/>
+          <p:nvPr/>
+        </p:nvSpPr>
+        <p:spPr>
+          <a:xfrm>
+            <a:off x="349411" y="731635"/>
+            <a:ext cx="3227945" cy="1736437"/>
+          </a:xfrm>
+          <a:prstGeom prst="rect">
+            <a:avLst/>
+          </a:prstGeom>
+        </p:spPr>
+        <p:txBody>
+          <a:bodyPr wrap="square" lIns="0" tIns="0" rIns="0" bIns="0" rtlCol="0" anchor="t">
+            <a:spAutoFit/>
+          </a:bodyPr>
+          <a:lstStyle/>
+          <a:p>
+            <a:pPr marL="228600" indent="-228600" algn="l">
+              <a:lnSpc>
+                <a:spcPts val="2304"/>
+              </a:lnSpc>
+              <a:buAutoNum type="arabicPeriod"/>
+            </a:pPr>
+            <a:r>
+              <a:rPr lang="en-US" sz="1200" b="1" dirty="0" err="1">
+                <a:solidFill>
+                  <a:srgbClr val="2B4D7B"/>
+                </a:solidFill>
+                <a:latin typeface="Tahoma" panose="020B0604030504040204" pitchFamily="34" charset="0"/>
+                <a:ea typeface="Tahoma" panose="020B0604030504040204" pitchFamily="34" charset="0"/>
+                <a:cs typeface="Tahoma" panose="020B0604030504040204" pitchFamily="34" charset="0"/>
+                <a:sym typeface="Canva Sans Bold"/>
+              </a:rPr>
+              <a:t>Giới</a:t>
+            </a:r>
+            <a:r>
+              <a:rPr lang="en-US" sz="1200" b="1" dirty="0">
+                <a:solidFill>
+                  <a:srgbClr val="2B4D7B"/>
+                </a:solidFill>
+                <a:latin typeface="Tahoma" panose="020B0604030504040204" pitchFamily="34" charset="0"/>
+                <a:ea typeface="Tahoma" panose="020B0604030504040204" pitchFamily="34" charset="0"/>
+                <a:cs typeface="Tahoma" panose="020B0604030504040204" pitchFamily="34" charset="0"/>
+                <a:sym typeface="Canva Sans Bold"/>
+              </a:rPr>
+              <a:t> </a:t>
+            </a:r>
+            <a:r>
+              <a:rPr lang="en-US" sz="1200" b="1" dirty="0" err="1">
+                <a:solidFill>
+                  <a:srgbClr val="2B4D7B"/>
+                </a:solidFill>
+                <a:latin typeface="Tahoma" panose="020B0604030504040204" pitchFamily="34" charset="0"/>
+                <a:ea typeface="Tahoma" panose="020B0604030504040204" pitchFamily="34" charset="0"/>
+                <a:cs typeface="Tahoma" panose="020B0604030504040204" pitchFamily="34" charset="0"/>
+                <a:sym typeface="Canva Sans Bold"/>
+              </a:rPr>
+              <a:t>thiệu</a:t>
+            </a:r>
+            <a:endParaRPr lang="en-US" sz="1200" b="1" dirty="0">
+              <a:solidFill>
+                <a:srgbClr val="2B4D7B"/>
+              </a:solidFill>
+              <a:latin typeface="Tahoma" panose="020B0604030504040204" pitchFamily="34" charset="0"/>
+              <a:ea typeface="Tahoma" panose="020B0604030504040204" pitchFamily="34" charset="0"/>
+              <a:cs typeface="Tahoma" panose="020B0604030504040204" pitchFamily="34" charset="0"/>
+              <a:sym typeface="Canva Sans Bold"/>
+            </a:endParaRPr>
+          </a:p>
+          <a:p>
+            <a:pPr marL="228600" indent="-228600" algn="l">
+              <a:lnSpc>
+                <a:spcPts val="2304"/>
+              </a:lnSpc>
+              <a:buAutoNum type="arabicPeriod"/>
+            </a:pPr>
+            <a:r>
+              <a:rPr lang="en-US" sz="1200" b="1" dirty="0" err="1">
+                <a:solidFill>
+                  <a:srgbClr val="2B4D7B"/>
+                </a:solidFill>
+                <a:latin typeface="Tahoma" panose="020B0604030504040204" pitchFamily="34" charset="0"/>
+                <a:ea typeface="Tahoma" panose="020B0604030504040204" pitchFamily="34" charset="0"/>
+                <a:cs typeface="Tahoma" panose="020B0604030504040204" pitchFamily="34" charset="0"/>
+                <a:sym typeface="Canva Sans Bold"/>
+              </a:rPr>
+              <a:t>Bộ</a:t>
+            </a:r>
+            <a:r>
+              <a:rPr lang="en-US" sz="1200" b="1" dirty="0">
+                <a:solidFill>
+                  <a:srgbClr val="2B4D7B"/>
+                </a:solidFill>
+                <a:latin typeface="Tahoma" panose="020B0604030504040204" pitchFamily="34" charset="0"/>
+                <a:ea typeface="Tahoma" panose="020B0604030504040204" pitchFamily="34" charset="0"/>
+                <a:cs typeface="Tahoma" panose="020B0604030504040204" pitchFamily="34" charset="0"/>
+                <a:sym typeface="Canva Sans Bold"/>
+              </a:rPr>
+              <a:t> </a:t>
+            </a:r>
+            <a:r>
+              <a:rPr lang="en-US" sz="1200" b="1" dirty="0" err="1">
+                <a:solidFill>
+                  <a:srgbClr val="2B4D7B"/>
+                </a:solidFill>
+                <a:latin typeface="Tahoma" panose="020B0604030504040204" pitchFamily="34" charset="0"/>
+                <a:ea typeface="Tahoma" panose="020B0604030504040204" pitchFamily="34" charset="0"/>
+                <a:cs typeface="Tahoma" panose="020B0604030504040204" pitchFamily="34" charset="0"/>
+                <a:sym typeface="Canva Sans Bold"/>
+              </a:rPr>
+              <a:t>dữ</a:t>
+            </a:r>
+            <a:r>
+              <a:rPr lang="en-US" sz="1200" b="1" dirty="0">
+                <a:solidFill>
+                  <a:srgbClr val="2B4D7B"/>
+                </a:solidFill>
+                <a:latin typeface="Tahoma" panose="020B0604030504040204" pitchFamily="34" charset="0"/>
+                <a:ea typeface="Tahoma" panose="020B0604030504040204" pitchFamily="34" charset="0"/>
+                <a:cs typeface="Tahoma" panose="020B0604030504040204" pitchFamily="34" charset="0"/>
+                <a:sym typeface="Canva Sans Bold"/>
+              </a:rPr>
+              <a:t> </a:t>
+            </a:r>
+            <a:r>
+              <a:rPr lang="en-US" sz="1200" b="1" dirty="0" err="1">
+                <a:solidFill>
+                  <a:srgbClr val="2B4D7B"/>
+                </a:solidFill>
+                <a:latin typeface="Tahoma" panose="020B0604030504040204" pitchFamily="34" charset="0"/>
+                <a:ea typeface="Tahoma" panose="020B0604030504040204" pitchFamily="34" charset="0"/>
+                <a:cs typeface="Tahoma" panose="020B0604030504040204" pitchFamily="34" charset="0"/>
+                <a:sym typeface="Canva Sans Bold"/>
+              </a:rPr>
+              <a:t>liệu</a:t>
+            </a:r>
+            <a:endParaRPr lang="en-US" sz="1200" b="1" dirty="0">
+              <a:solidFill>
+                <a:srgbClr val="2B4D7B"/>
+              </a:solidFill>
+              <a:latin typeface="Tahoma" panose="020B0604030504040204" pitchFamily="34" charset="0"/>
+              <a:ea typeface="Tahoma" panose="020B0604030504040204" pitchFamily="34" charset="0"/>
+              <a:cs typeface="Tahoma" panose="020B0604030504040204" pitchFamily="34" charset="0"/>
+              <a:sym typeface="Canva Sans Bold"/>
+            </a:endParaRPr>
+          </a:p>
+          <a:p>
+            <a:pPr marL="228600" indent="-228600" algn="l">
+              <a:lnSpc>
+                <a:spcPts val="2304"/>
+              </a:lnSpc>
+              <a:buAutoNum type="arabicPeriod"/>
+            </a:pPr>
+            <a:r>
+              <a:rPr lang="en-US" sz="1200" b="1" dirty="0" err="1">
+                <a:solidFill>
+                  <a:srgbClr val="2B4D7B"/>
+                </a:solidFill>
+                <a:latin typeface="Tahoma" panose="020B0604030504040204" pitchFamily="34" charset="0"/>
+                <a:ea typeface="Tahoma" panose="020B0604030504040204" pitchFamily="34" charset="0"/>
+                <a:cs typeface="Tahoma" panose="020B0604030504040204" pitchFamily="34" charset="0"/>
+                <a:sym typeface="Canva Sans Bold"/>
+              </a:rPr>
+              <a:t>Chỉ</a:t>
+            </a:r>
+            <a:r>
+              <a:rPr lang="en-US" sz="1200" b="1" dirty="0">
+                <a:solidFill>
+                  <a:srgbClr val="2B4D7B"/>
+                </a:solidFill>
+                <a:latin typeface="Tahoma" panose="020B0604030504040204" pitchFamily="34" charset="0"/>
+                <a:ea typeface="Tahoma" panose="020B0604030504040204" pitchFamily="34" charset="0"/>
+                <a:cs typeface="Tahoma" panose="020B0604030504040204" pitchFamily="34" charset="0"/>
+                <a:sym typeface="Canva Sans Bold"/>
+              </a:rPr>
+              <a:t> </a:t>
+            </a:r>
+            <a:r>
+              <a:rPr lang="en-US" sz="1200" b="1" dirty="0" err="1">
+                <a:solidFill>
+                  <a:srgbClr val="2B4D7B"/>
+                </a:solidFill>
+                <a:latin typeface="Tahoma" panose="020B0604030504040204" pitchFamily="34" charset="0"/>
+                <a:ea typeface="Tahoma" panose="020B0604030504040204" pitchFamily="34" charset="0"/>
+                <a:cs typeface="Tahoma" panose="020B0604030504040204" pitchFamily="34" charset="0"/>
+                <a:sym typeface="Canva Sans Bold"/>
+              </a:rPr>
+              <a:t>số</a:t>
+            </a:r>
+            <a:r>
+              <a:rPr lang="en-US" sz="1200" b="1" dirty="0">
+                <a:solidFill>
+                  <a:srgbClr val="2B4D7B"/>
+                </a:solidFill>
+                <a:latin typeface="Tahoma" panose="020B0604030504040204" pitchFamily="34" charset="0"/>
+                <a:ea typeface="Tahoma" panose="020B0604030504040204" pitchFamily="34" charset="0"/>
+                <a:cs typeface="Tahoma" panose="020B0604030504040204" pitchFamily="34" charset="0"/>
+                <a:sym typeface="Canva Sans Bold"/>
+              </a:rPr>
+              <a:t> </a:t>
+            </a:r>
+            <a:r>
+              <a:rPr lang="en-US" sz="1200" b="1" dirty="0" err="1">
+                <a:solidFill>
+                  <a:srgbClr val="2B4D7B"/>
+                </a:solidFill>
+                <a:latin typeface="Tahoma" panose="020B0604030504040204" pitchFamily="34" charset="0"/>
+                <a:ea typeface="Tahoma" panose="020B0604030504040204" pitchFamily="34" charset="0"/>
+                <a:cs typeface="Tahoma" panose="020B0604030504040204" pitchFamily="34" charset="0"/>
+                <a:sym typeface="Canva Sans Bold"/>
+              </a:rPr>
+              <a:t>đánh</a:t>
+            </a:r>
+            <a:r>
+              <a:rPr lang="en-US" sz="1200" b="1" dirty="0">
+                <a:solidFill>
+                  <a:srgbClr val="2B4D7B"/>
+                </a:solidFill>
+                <a:latin typeface="Tahoma" panose="020B0604030504040204" pitchFamily="34" charset="0"/>
+                <a:ea typeface="Tahoma" panose="020B0604030504040204" pitchFamily="34" charset="0"/>
+                <a:cs typeface="Tahoma" panose="020B0604030504040204" pitchFamily="34" charset="0"/>
+                <a:sym typeface="Canva Sans Bold"/>
+              </a:rPr>
+              <a:t> </a:t>
+            </a:r>
+            <a:r>
+              <a:rPr lang="en-US" sz="1200" b="1" dirty="0" err="1">
+                <a:solidFill>
+                  <a:srgbClr val="2B4D7B"/>
+                </a:solidFill>
+                <a:latin typeface="Tahoma" panose="020B0604030504040204" pitchFamily="34" charset="0"/>
+                <a:ea typeface="Tahoma" panose="020B0604030504040204" pitchFamily="34" charset="0"/>
+                <a:cs typeface="Tahoma" panose="020B0604030504040204" pitchFamily="34" charset="0"/>
+                <a:sym typeface="Canva Sans Bold"/>
+              </a:rPr>
+              <a:t>giá</a:t>
+            </a:r>
+            <a:endParaRPr lang="en-US" sz="1200" b="1" dirty="0">
+              <a:solidFill>
+                <a:srgbClr val="2B4D7B"/>
+              </a:solidFill>
+              <a:latin typeface="Tahoma" panose="020B0604030504040204" pitchFamily="34" charset="0"/>
+              <a:ea typeface="Tahoma" panose="020B0604030504040204" pitchFamily="34" charset="0"/>
+              <a:cs typeface="Tahoma" panose="020B0604030504040204" pitchFamily="34" charset="0"/>
+              <a:sym typeface="Canva Sans Bold"/>
+            </a:endParaRPr>
+          </a:p>
+          <a:p>
+            <a:pPr marL="228600" indent="-228600" algn="l">
+              <a:lnSpc>
+                <a:spcPts val="2304"/>
+              </a:lnSpc>
+              <a:buAutoNum type="arabicPeriod"/>
+            </a:pPr>
+            <a:r>
+              <a:rPr lang="en-US" sz="1200" b="1" dirty="0">
+                <a:solidFill>
+                  <a:srgbClr val="2B4D7B"/>
+                </a:solidFill>
+                <a:latin typeface="Tahoma" panose="020B0604030504040204" pitchFamily="34" charset="0"/>
+                <a:ea typeface="Tahoma" panose="020B0604030504040204" pitchFamily="34" charset="0"/>
+                <a:cs typeface="Tahoma" panose="020B0604030504040204" pitchFamily="34" charset="0"/>
+                <a:sym typeface="Canva Sans Bold"/>
+              </a:rPr>
+              <a:t>Phương </a:t>
+            </a:r>
+            <a:r>
+              <a:rPr lang="en-US" sz="1200" b="1" dirty="0" err="1">
+                <a:solidFill>
+                  <a:srgbClr val="2B4D7B"/>
+                </a:solidFill>
+                <a:latin typeface="Tahoma" panose="020B0604030504040204" pitchFamily="34" charset="0"/>
+                <a:ea typeface="Tahoma" panose="020B0604030504040204" pitchFamily="34" charset="0"/>
+                <a:cs typeface="Tahoma" panose="020B0604030504040204" pitchFamily="34" charset="0"/>
+                <a:sym typeface="Canva Sans Bold"/>
+              </a:rPr>
+              <a:t>pháp</a:t>
+            </a:r>
+            <a:endParaRPr lang="en-US" sz="1200" b="1" dirty="0">
+              <a:solidFill>
+                <a:srgbClr val="2B4D7B"/>
+              </a:solidFill>
+              <a:latin typeface="Tahoma" panose="020B0604030504040204" pitchFamily="34" charset="0"/>
+              <a:ea typeface="Tahoma" panose="020B0604030504040204" pitchFamily="34" charset="0"/>
+              <a:cs typeface="Tahoma" panose="020B0604030504040204" pitchFamily="34" charset="0"/>
+              <a:sym typeface="Canva Sans Bold"/>
+            </a:endParaRPr>
+          </a:p>
+          <a:p>
+            <a:pPr marL="228600" indent="-228600" algn="l">
+              <a:lnSpc>
+                <a:spcPts val="2304"/>
+              </a:lnSpc>
+              <a:buAutoNum type="arabicPeriod"/>
+            </a:pPr>
+            <a:r>
+              <a:rPr lang="en-US" sz="1200" b="1" dirty="0" err="1">
+                <a:solidFill>
+                  <a:srgbClr val="2B4D7B"/>
+                </a:solidFill>
+                <a:latin typeface="Tahoma" panose="020B0604030504040204" pitchFamily="34" charset="0"/>
+                <a:ea typeface="Tahoma" panose="020B0604030504040204" pitchFamily="34" charset="0"/>
+                <a:cs typeface="Tahoma" panose="020B0604030504040204" pitchFamily="34" charset="0"/>
+                <a:sym typeface="Canva Sans Bold"/>
+              </a:rPr>
+              <a:t>Kết</a:t>
+            </a:r>
+            <a:r>
+              <a:rPr lang="en-US" sz="1200" b="1" dirty="0">
+                <a:solidFill>
+                  <a:srgbClr val="2B4D7B"/>
+                </a:solidFill>
+                <a:latin typeface="Tahoma" panose="020B0604030504040204" pitchFamily="34" charset="0"/>
+                <a:ea typeface="Tahoma" panose="020B0604030504040204" pitchFamily="34" charset="0"/>
+                <a:cs typeface="Tahoma" panose="020B0604030504040204" pitchFamily="34" charset="0"/>
+                <a:sym typeface="Canva Sans Bold"/>
+              </a:rPr>
+              <a:t> </a:t>
+            </a:r>
+            <a:r>
+              <a:rPr lang="en-US" sz="1200" b="1" dirty="0" err="1">
+                <a:solidFill>
+                  <a:srgbClr val="2B4D7B"/>
+                </a:solidFill>
+                <a:latin typeface="Tahoma" panose="020B0604030504040204" pitchFamily="34" charset="0"/>
+                <a:ea typeface="Tahoma" panose="020B0604030504040204" pitchFamily="34" charset="0"/>
+                <a:cs typeface="Tahoma" panose="020B0604030504040204" pitchFamily="34" charset="0"/>
+                <a:sym typeface="Canva Sans Bold"/>
+              </a:rPr>
+              <a:t>quả</a:t>
+            </a:r>
+            <a:r>
+              <a:rPr lang="en-US" sz="1200" b="1" dirty="0">
+                <a:solidFill>
+                  <a:srgbClr val="2B4D7B"/>
+                </a:solidFill>
+                <a:latin typeface="Tahoma" panose="020B0604030504040204" pitchFamily="34" charset="0"/>
+                <a:ea typeface="Tahoma" panose="020B0604030504040204" pitchFamily="34" charset="0"/>
+                <a:cs typeface="Tahoma" panose="020B0604030504040204" pitchFamily="34" charset="0"/>
+                <a:sym typeface="Canva Sans Bold"/>
+              </a:rPr>
+              <a:t> </a:t>
+            </a:r>
+            <a:r>
+              <a:rPr lang="en-US" sz="1200" b="1" dirty="0" err="1">
+                <a:solidFill>
+                  <a:srgbClr val="2B4D7B"/>
+                </a:solidFill>
+                <a:latin typeface="Tahoma" panose="020B0604030504040204" pitchFamily="34" charset="0"/>
+                <a:ea typeface="Tahoma" panose="020B0604030504040204" pitchFamily="34" charset="0"/>
+                <a:cs typeface="Tahoma" panose="020B0604030504040204" pitchFamily="34" charset="0"/>
+                <a:sym typeface="Canva Sans Bold"/>
+              </a:rPr>
+              <a:t>thực</a:t>
+            </a:r>
+            <a:r>
+              <a:rPr lang="en-US" sz="1200" b="1" dirty="0">
+                <a:solidFill>
+                  <a:srgbClr val="2B4D7B"/>
+                </a:solidFill>
+                <a:latin typeface="Tahoma" panose="020B0604030504040204" pitchFamily="34" charset="0"/>
+                <a:ea typeface="Tahoma" panose="020B0604030504040204" pitchFamily="34" charset="0"/>
+                <a:cs typeface="Tahoma" panose="020B0604030504040204" pitchFamily="34" charset="0"/>
+                <a:sym typeface="Canva Sans Bold"/>
+              </a:rPr>
+              <a:t> </a:t>
+            </a:r>
+            <a:r>
+              <a:rPr lang="en-US" sz="1200" b="1" dirty="0" err="1">
+                <a:solidFill>
+                  <a:srgbClr val="2B4D7B"/>
+                </a:solidFill>
+                <a:latin typeface="Tahoma" panose="020B0604030504040204" pitchFamily="34" charset="0"/>
+                <a:ea typeface="Tahoma" panose="020B0604030504040204" pitchFamily="34" charset="0"/>
+                <a:cs typeface="Tahoma" panose="020B0604030504040204" pitchFamily="34" charset="0"/>
+                <a:sym typeface="Canva Sans Bold"/>
+              </a:rPr>
+              <a:t>nghiệm</a:t>
+            </a:r>
+            <a:endParaRPr lang="en-US" sz="1200" b="1" dirty="0">
+              <a:solidFill>
+                <a:srgbClr val="2B4D7B"/>
+              </a:solidFill>
+              <a:latin typeface="Tahoma" panose="020B0604030504040204" pitchFamily="34" charset="0"/>
+              <a:ea typeface="Tahoma" panose="020B0604030504040204" pitchFamily="34" charset="0"/>
+              <a:cs typeface="Tahoma" panose="020B0604030504040204" pitchFamily="34" charset="0"/>
+              <a:sym typeface="Canva Sans Bold"/>
+            </a:endParaRPr>
+          </a:p>
+          <a:p>
+            <a:pPr marL="228600" indent="-228600" algn="l">
+              <a:lnSpc>
+                <a:spcPts val="2304"/>
+              </a:lnSpc>
+              <a:buAutoNum type="arabicPeriod"/>
+            </a:pPr>
+            <a:r>
+              <a:rPr lang="en-US" sz="1200" b="1" dirty="0" err="1">
+                <a:solidFill>
+                  <a:srgbClr val="2B4D7B"/>
+                </a:solidFill>
+                <a:latin typeface="Tahoma" panose="020B0604030504040204" pitchFamily="34" charset="0"/>
+                <a:ea typeface="Tahoma" panose="020B0604030504040204" pitchFamily="34" charset="0"/>
+                <a:cs typeface="Tahoma" panose="020B0604030504040204" pitchFamily="34" charset="0"/>
+                <a:sym typeface="Canva Sans Bold"/>
+              </a:rPr>
+              <a:t>Kết</a:t>
+            </a:r>
+            <a:r>
+              <a:rPr lang="en-US" sz="1200" b="1" dirty="0">
+                <a:solidFill>
+                  <a:srgbClr val="2B4D7B"/>
+                </a:solidFill>
+                <a:latin typeface="Tahoma" panose="020B0604030504040204" pitchFamily="34" charset="0"/>
+                <a:ea typeface="Tahoma" panose="020B0604030504040204" pitchFamily="34" charset="0"/>
+                <a:cs typeface="Tahoma" panose="020B0604030504040204" pitchFamily="34" charset="0"/>
+                <a:sym typeface="Canva Sans Bold"/>
+              </a:rPr>
+              <a:t> </a:t>
+            </a:r>
+            <a:r>
+              <a:rPr lang="en-US" sz="1200" b="1" dirty="0" err="1">
+                <a:solidFill>
+                  <a:srgbClr val="2B4D7B"/>
+                </a:solidFill>
+                <a:latin typeface="Tahoma" panose="020B0604030504040204" pitchFamily="34" charset="0"/>
+                <a:ea typeface="Tahoma" panose="020B0604030504040204" pitchFamily="34" charset="0"/>
+                <a:cs typeface="Tahoma" panose="020B0604030504040204" pitchFamily="34" charset="0"/>
+                <a:sym typeface="Canva Sans Bold"/>
+              </a:rPr>
+              <a:t>luận</a:t>
+            </a:r>
+            <a:endParaRPr lang="en-US" sz="1200" b="1" dirty="0">
+              <a:solidFill>
+                <a:srgbClr val="2B4D7B"/>
+              </a:solidFill>
+              <a:latin typeface="Tahoma" panose="020B0604030504040204" pitchFamily="34" charset="0"/>
+              <a:ea typeface="Tahoma" panose="020B0604030504040204" pitchFamily="34" charset="0"/>
+              <a:cs typeface="Tahoma" panose="020B0604030504040204" pitchFamily="34" charset="0"/>
+              <a:sym typeface="Canva Sans Bold"/>
+            </a:endParaRPr>
+          </a:p>
+        </p:txBody>
+      </p:sp>
+      <p:sp>
+        <p:nvSpPr>
+          <p:cNvPr id="6" name="TextBox 5">
+            <a:extLst>
+              <a:ext uri="{FF2B5EF4-FFF2-40B4-BE49-F238E27FC236}">
+                <a16:creationId xmlns:a16="http://schemas.microsoft.com/office/drawing/2014/main" id="{1A3B45B4-54EB-D63C-8B42-A98CADA42C8D}"/>
+              </a:ext>
+            </a:extLst>
+          </p:cNvPr>
+          <p:cNvSpPr txBox="1"/>
+          <p:nvPr/>
+        </p:nvSpPr>
+        <p:spPr>
+          <a:xfrm>
+            <a:off x="5391150" y="2914650"/>
+            <a:ext cx="219075" cy="215444"/>
+          </a:xfrm>
+          <a:prstGeom prst="rect">
+            <a:avLst/>
+          </a:prstGeom>
+          <a:noFill/>
+        </p:spPr>
+        <p:txBody>
+          <a:bodyPr wrap="square">
+            <a:spAutoFit/>
+          </a:bodyPr>
+          <a:lstStyle/>
+          <a:p>
+            <a:pPr algn="r"/>
+            <a:r>
+              <a:rPr lang="en-US" sz="800" dirty="0">
+                <a:solidFill>
+                  <a:srgbClr val="1C1C1A"/>
+                </a:solidFill>
+                <a:latin typeface="Tahoma" panose="020B0604030504040204" pitchFamily="34" charset="0"/>
+                <a:ea typeface="Tahoma" panose="020B0604030504040204" pitchFamily="34" charset="0"/>
+                <a:cs typeface="Tahoma" panose="020B0604030504040204" pitchFamily="34" charset="0"/>
+                <a:sym typeface="Canva Sans"/>
+              </a:rPr>
+              <a:t>1</a:t>
+            </a:r>
+            <a:endParaRPr lang="en-US" sz="800" dirty="0">
+              <a:latin typeface="Tahoma" panose="020B0604030504040204" pitchFamily="34" charset="0"/>
+              <a:ea typeface="Tahoma" panose="020B0604030504040204" pitchFamily="34" charset="0"/>
+              <a:cs typeface="Tahoma" panose="020B0604030504040204" pitchFamily="34" charset="0"/>
+            </a:endParaRPr>
+          </a:p>
+        </p:txBody>
+      </p:sp>
+    </p:spTree>
+  </p:cSld>
+  <p:clrMapOvr>
+    <a:masterClrMapping/>
+  </p:clrMapOvr>
+</p:sld>
+</file>
+
+<file path=ppt/slides/slide20.xml><?xml version="1.0" encoding="utf-8"?>
 <p:sld xmlns:a="http://schemas.openxmlformats.org/drawingml/2006/main" xmlns:r="http://schemas.openxmlformats.org/officeDocument/2006/relationships" xmlns:p="http://schemas.openxmlformats.org/presentationml/2006/main">
   <p:cSld>
     <p:spTree>
@@ -8638,589 +10904,6 @@
               </a:rPr>
               <a:t>!</a:t>
             </a:r>
-          </a:p>
-        </p:txBody>
-      </p:sp>
-    </p:spTree>
-  </p:cSld>
-  <p:clrMapOvr>
-    <a:masterClrMapping/>
-  </p:clrMapOvr>
-</p:sld>
-</file>
-
-<file path=ppt/slides/slide2.xml><?xml version="1.0" encoding="utf-8"?>
-<p:sld xmlns:a="http://schemas.openxmlformats.org/drawingml/2006/main" xmlns:r="http://schemas.openxmlformats.org/officeDocument/2006/relationships" xmlns:p="http://schemas.openxmlformats.org/presentationml/2006/main">
-  <p:cSld>
-    <p:bg>
-      <p:bgPr>
-        <a:solidFill>
-          <a:srgbClr val="F4F8FF"/>
-        </a:solidFill>
-        <a:effectLst/>
-      </p:bgPr>
-    </p:bg>
-    <p:spTree>
-      <p:nvGrpSpPr>
-        <p:cNvPr id="1" name=""/>
-        <p:cNvGrpSpPr/>
-        <p:nvPr/>
-      </p:nvGrpSpPr>
-      <p:grpSpPr>
-        <a:xfrm>
-          <a:off x="0" y="0"/>
-          <a:ext cx="0" cy="0"/>
-          <a:chOff x="0" y="0"/>
-          <a:chExt cx="0" cy="0"/>
-        </a:xfrm>
-      </p:grpSpPr>
-      <p:sp>
-        <p:nvSpPr>
-          <p:cNvPr id="2" name="TextBox 2"/>
-          <p:cNvSpPr txBox="1"/>
-          <p:nvPr/>
-        </p:nvSpPr>
-        <p:spPr>
-          <a:xfrm>
-            <a:off x="323849" y="182553"/>
-            <a:ext cx="1562101" cy="332848"/>
-          </a:xfrm>
-          <a:prstGeom prst="rect">
-            <a:avLst/>
-          </a:prstGeom>
-        </p:spPr>
-        <p:txBody>
-          <a:bodyPr wrap="square" lIns="0" tIns="0" rIns="0" bIns="0" rtlCol="0" anchor="t">
-            <a:spAutoFit/>
-          </a:bodyPr>
-          <a:lstStyle/>
-          <a:p>
-            <a:pPr algn="l">
-              <a:lnSpc>
-                <a:spcPts val="2869"/>
-              </a:lnSpc>
-            </a:pPr>
-            <a:r>
-              <a:rPr lang="en-US" sz="2049" b="1" dirty="0" err="1">
-                <a:solidFill>
-                  <a:srgbClr val="2B4D7B"/>
-                </a:solidFill>
-                <a:latin typeface="Tahoma" panose="020B0604030504040204" pitchFamily="34" charset="0"/>
-                <a:ea typeface="Tahoma" panose="020B0604030504040204" pitchFamily="34" charset="0"/>
-                <a:cs typeface="Tahoma" panose="020B0604030504040204" pitchFamily="34" charset="0"/>
-                <a:sym typeface="Canva Sans Bold"/>
-              </a:rPr>
-              <a:t>Nội</a:t>
-            </a:r>
-            <a:r>
-              <a:rPr lang="en-US" sz="2049" b="1" dirty="0">
-                <a:solidFill>
-                  <a:srgbClr val="2B4D7B"/>
-                </a:solidFill>
-                <a:latin typeface="Tahoma" panose="020B0604030504040204" pitchFamily="34" charset="0"/>
-                <a:ea typeface="Tahoma" panose="020B0604030504040204" pitchFamily="34" charset="0"/>
-                <a:cs typeface="Tahoma" panose="020B0604030504040204" pitchFamily="34" charset="0"/>
-                <a:sym typeface="Canva Sans Bold"/>
-              </a:rPr>
-              <a:t> dung</a:t>
-            </a:r>
-          </a:p>
-        </p:txBody>
-      </p:sp>
-      <p:sp>
-        <p:nvSpPr>
-          <p:cNvPr id="3" name="TextBox 3"/>
-          <p:cNvSpPr txBox="1"/>
-          <p:nvPr/>
-        </p:nvSpPr>
-        <p:spPr>
-          <a:xfrm>
-            <a:off x="349411" y="731635"/>
-            <a:ext cx="3227945" cy="1736437"/>
-          </a:xfrm>
-          <a:prstGeom prst="rect">
-            <a:avLst/>
-          </a:prstGeom>
-        </p:spPr>
-        <p:txBody>
-          <a:bodyPr wrap="square" lIns="0" tIns="0" rIns="0" bIns="0" rtlCol="0" anchor="t">
-            <a:spAutoFit/>
-          </a:bodyPr>
-          <a:lstStyle/>
-          <a:p>
-            <a:pPr marL="228600" indent="-228600" algn="l">
-              <a:lnSpc>
-                <a:spcPts val="2304"/>
-              </a:lnSpc>
-              <a:buAutoNum type="arabicPeriod"/>
-            </a:pPr>
-            <a:r>
-              <a:rPr lang="en-US" sz="1200" b="1" dirty="0" err="1">
-                <a:solidFill>
-                  <a:srgbClr val="2B4D7B"/>
-                </a:solidFill>
-                <a:latin typeface="Tahoma" panose="020B0604030504040204" pitchFamily="34" charset="0"/>
-                <a:ea typeface="Tahoma" panose="020B0604030504040204" pitchFamily="34" charset="0"/>
-                <a:cs typeface="Tahoma" panose="020B0604030504040204" pitchFamily="34" charset="0"/>
-                <a:sym typeface="Canva Sans Bold"/>
-              </a:rPr>
-              <a:t>Giới</a:t>
-            </a:r>
-            <a:r>
-              <a:rPr lang="en-US" sz="1200" b="1" dirty="0">
-                <a:solidFill>
-                  <a:srgbClr val="2B4D7B"/>
-                </a:solidFill>
-                <a:latin typeface="Tahoma" panose="020B0604030504040204" pitchFamily="34" charset="0"/>
-                <a:ea typeface="Tahoma" panose="020B0604030504040204" pitchFamily="34" charset="0"/>
-                <a:cs typeface="Tahoma" panose="020B0604030504040204" pitchFamily="34" charset="0"/>
-                <a:sym typeface="Canva Sans Bold"/>
-              </a:rPr>
-              <a:t> </a:t>
-            </a:r>
-            <a:r>
-              <a:rPr lang="en-US" sz="1200" b="1" dirty="0" err="1">
-                <a:solidFill>
-                  <a:srgbClr val="2B4D7B"/>
-                </a:solidFill>
-                <a:latin typeface="Tahoma" panose="020B0604030504040204" pitchFamily="34" charset="0"/>
-                <a:ea typeface="Tahoma" panose="020B0604030504040204" pitchFamily="34" charset="0"/>
-                <a:cs typeface="Tahoma" panose="020B0604030504040204" pitchFamily="34" charset="0"/>
-                <a:sym typeface="Canva Sans Bold"/>
-              </a:rPr>
-              <a:t>thiệu</a:t>
-            </a:r>
-            <a:endParaRPr lang="en-US" sz="1200" b="1" dirty="0">
-              <a:solidFill>
-                <a:srgbClr val="2B4D7B"/>
-              </a:solidFill>
-              <a:latin typeface="Tahoma" panose="020B0604030504040204" pitchFamily="34" charset="0"/>
-              <a:ea typeface="Tahoma" panose="020B0604030504040204" pitchFamily="34" charset="0"/>
-              <a:cs typeface="Tahoma" panose="020B0604030504040204" pitchFamily="34" charset="0"/>
-              <a:sym typeface="Canva Sans Bold"/>
-            </a:endParaRPr>
-          </a:p>
-          <a:p>
-            <a:pPr marL="228600" indent="-228600" algn="l">
-              <a:lnSpc>
-                <a:spcPts val="2304"/>
-              </a:lnSpc>
-              <a:buAutoNum type="arabicPeriod"/>
-            </a:pPr>
-            <a:r>
-              <a:rPr lang="en-US" sz="1200" b="1" dirty="0" err="1">
-                <a:solidFill>
-                  <a:srgbClr val="2B4D7B"/>
-                </a:solidFill>
-                <a:latin typeface="Tahoma" panose="020B0604030504040204" pitchFamily="34" charset="0"/>
-                <a:ea typeface="Tahoma" panose="020B0604030504040204" pitchFamily="34" charset="0"/>
-                <a:cs typeface="Tahoma" panose="020B0604030504040204" pitchFamily="34" charset="0"/>
-                <a:sym typeface="Canva Sans Bold"/>
-              </a:rPr>
-              <a:t>Bộ</a:t>
-            </a:r>
-            <a:r>
-              <a:rPr lang="en-US" sz="1200" b="1" dirty="0">
-                <a:solidFill>
-                  <a:srgbClr val="2B4D7B"/>
-                </a:solidFill>
-                <a:latin typeface="Tahoma" panose="020B0604030504040204" pitchFamily="34" charset="0"/>
-                <a:ea typeface="Tahoma" panose="020B0604030504040204" pitchFamily="34" charset="0"/>
-                <a:cs typeface="Tahoma" panose="020B0604030504040204" pitchFamily="34" charset="0"/>
-                <a:sym typeface="Canva Sans Bold"/>
-              </a:rPr>
-              <a:t> </a:t>
-            </a:r>
-            <a:r>
-              <a:rPr lang="en-US" sz="1200" b="1" dirty="0" err="1">
-                <a:solidFill>
-                  <a:srgbClr val="2B4D7B"/>
-                </a:solidFill>
-                <a:latin typeface="Tahoma" panose="020B0604030504040204" pitchFamily="34" charset="0"/>
-                <a:ea typeface="Tahoma" panose="020B0604030504040204" pitchFamily="34" charset="0"/>
-                <a:cs typeface="Tahoma" panose="020B0604030504040204" pitchFamily="34" charset="0"/>
-                <a:sym typeface="Canva Sans Bold"/>
-              </a:rPr>
-              <a:t>dữ</a:t>
-            </a:r>
-            <a:r>
-              <a:rPr lang="en-US" sz="1200" b="1" dirty="0">
-                <a:solidFill>
-                  <a:srgbClr val="2B4D7B"/>
-                </a:solidFill>
-                <a:latin typeface="Tahoma" panose="020B0604030504040204" pitchFamily="34" charset="0"/>
-                <a:ea typeface="Tahoma" panose="020B0604030504040204" pitchFamily="34" charset="0"/>
-                <a:cs typeface="Tahoma" panose="020B0604030504040204" pitchFamily="34" charset="0"/>
-                <a:sym typeface="Canva Sans Bold"/>
-              </a:rPr>
-              <a:t> </a:t>
-            </a:r>
-            <a:r>
-              <a:rPr lang="en-US" sz="1200" b="1" dirty="0" err="1">
-                <a:solidFill>
-                  <a:srgbClr val="2B4D7B"/>
-                </a:solidFill>
-                <a:latin typeface="Tahoma" panose="020B0604030504040204" pitchFamily="34" charset="0"/>
-                <a:ea typeface="Tahoma" panose="020B0604030504040204" pitchFamily="34" charset="0"/>
-                <a:cs typeface="Tahoma" panose="020B0604030504040204" pitchFamily="34" charset="0"/>
-                <a:sym typeface="Canva Sans Bold"/>
-              </a:rPr>
-              <a:t>liệu</a:t>
-            </a:r>
-            <a:endParaRPr lang="en-US" sz="1200" b="1" dirty="0">
-              <a:solidFill>
-                <a:srgbClr val="2B4D7B"/>
-              </a:solidFill>
-              <a:latin typeface="Tahoma" panose="020B0604030504040204" pitchFamily="34" charset="0"/>
-              <a:ea typeface="Tahoma" panose="020B0604030504040204" pitchFamily="34" charset="0"/>
-              <a:cs typeface="Tahoma" panose="020B0604030504040204" pitchFamily="34" charset="0"/>
-              <a:sym typeface="Canva Sans Bold"/>
-            </a:endParaRPr>
-          </a:p>
-          <a:p>
-            <a:pPr marL="228600" indent="-228600" algn="l">
-              <a:lnSpc>
-                <a:spcPts val="2304"/>
-              </a:lnSpc>
-              <a:buAutoNum type="arabicPeriod"/>
-            </a:pPr>
-            <a:r>
-              <a:rPr lang="en-US" sz="1200" b="1" dirty="0" err="1">
-                <a:solidFill>
-                  <a:srgbClr val="2B4D7B"/>
-                </a:solidFill>
-                <a:latin typeface="Tahoma" panose="020B0604030504040204" pitchFamily="34" charset="0"/>
-                <a:ea typeface="Tahoma" panose="020B0604030504040204" pitchFamily="34" charset="0"/>
-                <a:cs typeface="Tahoma" panose="020B0604030504040204" pitchFamily="34" charset="0"/>
-                <a:sym typeface="Canva Sans Bold"/>
-              </a:rPr>
-              <a:t>Chỉ</a:t>
-            </a:r>
-            <a:r>
-              <a:rPr lang="en-US" sz="1200" b="1" dirty="0">
-                <a:solidFill>
-                  <a:srgbClr val="2B4D7B"/>
-                </a:solidFill>
-                <a:latin typeface="Tahoma" panose="020B0604030504040204" pitchFamily="34" charset="0"/>
-                <a:ea typeface="Tahoma" panose="020B0604030504040204" pitchFamily="34" charset="0"/>
-                <a:cs typeface="Tahoma" panose="020B0604030504040204" pitchFamily="34" charset="0"/>
-                <a:sym typeface="Canva Sans Bold"/>
-              </a:rPr>
-              <a:t> </a:t>
-            </a:r>
-            <a:r>
-              <a:rPr lang="en-US" sz="1200" b="1" dirty="0" err="1">
-                <a:solidFill>
-                  <a:srgbClr val="2B4D7B"/>
-                </a:solidFill>
-                <a:latin typeface="Tahoma" panose="020B0604030504040204" pitchFamily="34" charset="0"/>
-                <a:ea typeface="Tahoma" panose="020B0604030504040204" pitchFamily="34" charset="0"/>
-                <a:cs typeface="Tahoma" panose="020B0604030504040204" pitchFamily="34" charset="0"/>
-                <a:sym typeface="Canva Sans Bold"/>
-              </a:rPr>
-              <a:t>số</a:t>
-            </a:r>
-            <a:r>
-              <a:rPr lang="en-US" sz="1200" b="1" dirty="0">
-                <a:solidFill>
-                  <a:srgbClr val="2B4D7B"/>
-                </a:solidFill>
-                <a:latin typeface="Tahoma" panose="020B0604030504040204" pitchFamily="34" charset="0"/>
-                <a:ea typeface="Tahoma" panose="020B0604030504040204" pitchFamily="34" charset="0"/>
-                <a:cs typeface="Tahoma" panose="020B0604030504040204" pitchFamily="34" charset="0"/>
-                <a:sym typeface="Canva Sans Bold"/>
-              </a:rPr>
-              <a:t> </a:t>
-            </a:r>
-            <a:r>
-              <a:rPr lang="en-US" sz="1200" b="1" dirty="0" err="1">
-                <a:solidFill>
-                  <a:srgbClr val="2B4D7B"/>
-                </a:solidFill>
-                <a:latin typeface="Tahoma" panose="020B0604030504040204" pitchFamily="34" charset="0"/>
-                <a:ea typeface="Tahoma" panose="020B0604030504040204" pitchFamily="34" charset="0"/>
-                <a:cs typeface="Tahoma" panose="020B0604030504040204" pitchFamily="34" charset="0"/>
-                <a:sym typeface="Canva Sans Bold"/>
-              </a:rPr>
-              <a:t>đánh</a:t>
-            </a:r>
-            <a:r>
-              <a:rPr lang="en-US" sz="1200" b="1" dirty="0">
-                <a:solidFill>
-                  <a:srgbClr val="2B4D7B"/>
-                </a:solidFill>
-                <a:latin typeface="Tahoma" panose="020B0604030504040204" pitchFamily="34" charset="0"/>
-                <a:ea typeface="Tahoma" panose="020B0604030504040204" pitchFamily="34" charset="0"/>
-                <a:cs typeface="Tahoma" panose="020B0604030504040204" pitchFamily="34" charset="0"/>
-                <a:sym typeface="Canva Sans Bold"/>
-              </a:rPr>
-              <a:t> </a:t>
-            </a:r>
-            <a:r>
-              <a:rPr lang="en-US" sz="1200" b="1" dirty="0" err="1">
-                <a:solidFill>
-                  <a:srgbClr val="2B4D7B"/>
-                </a:solidFill>
-                <a:latin typeface="Tahoma" panose="020B0604030504040204" pitchFamily="34" charset="0"/>
-                <a:ea typeface="Tahoma" panose="020B0604030504040204" pitchFamily="34" charset="0"/>
-                <a:cs typeface="Tahoma" panose="020B0604030504040204" pitchFamily="34" charset="0"/>
-                <a:sym typeface="Canva Sans Bold"/>
-              </a:rPr>
-              <a:t>giá</a:t>
-            </a:r>
-            <a:endParaRPr lang="en-US" sz="1200" b="1" dirty="0">
-              <a:solidFill>
-                <a:srgbClr val="2B4D7B"/>
-              </a:solidFill>
-              <a:latin typeface="Tahoma" panose="020B0604030504040204" pitchFamily="34" charset="0"/>
-              <a:ea typeface="Tahoma" panose="020B0604030504040204" pitchFamily="34" charset="0"/>
-              <a:cs typeface="Tahoma" panose="020B0604030504040204" pitchFamily="34" charset="0"/>
-              <a:sym typeface="Canva Sans Bold"/>
-            </a:endParaRPr>
-          </a:p>
-          <a:p>
-            <a:pPr marL="228600" indent="-228600" algn="l">
-              <a:lnSpc>
-                <a:spcPts val="2304"/>
-              </a:lnSpc>
-              <a:buAutoNum type="arabicPeriod"/>
-            </a:pPr>
-            <a:r>
-              <a:rPr lang="en-US" sz="1200" b="1" dirty="0">
-                <a:solidFill>
-                  <a:srgbClr val="2B4D7B"/>
-                </a:solidFill>
-                <a:latin typeface="Tahoma" panose="020B0604030504040204" pitchFamily="34" charset="0"/>
-                <a:ea typeface="Tahoma" panose="020B0604030504040204" pitchFamily="34" charset="0"/>
-                <a:cs typeface="Tahoma" panose="020B0604030504040204" pitchFamily="34" charset="0"/>
-                <a:sym typeface="Canva Sans Bold"/>
-              </a:rPr>
-              <a:t>Phương </a:t>
-            </a:r>
-            <a:r>
-              <a:rPr lang="en-US" sz="1200" b="1" dirty="0" err="1">
-                <a:solidFill>
-                  <a:srgbClr val="2B4D7B"/>
-                </a:solidFill>
-                <a:latin typeface="Tahoma" panose="020B0604030504040204" pitchFamily="34" charset="0"/>
-                <a:ea typeface="Tahoma" panose="020B0604030504040204" pitchFamily="34" charset="0"/>
-                <a:cs typeface="Tahoma" panose="020B0604030504040204" pitchFamily="34" charset="0"/>
-                <a:sym typeface="Canva Sans Bold"/>
-              </a:rPr>
-              <a:t>pháp</a:t>
-            </a:r>
-            <a:endParaRPr lang="en-US" sz="1200" b="1" dirty="0">
-              <a:solidFill>
-                <a:srgbClr val="2B4D7B"/>
-              </a:solidFill>
-              <a:latin typeface="Tahoma" panose="020B0604030504040204" pitchFamily="34" charset="0"/>
-              <a:ea typeface="Tahoma" panose="020B0604030504040204" pitchFamily="34" charset="0"/>
-              <a:cs typeface="Tahoma" panose="020B0604030504040204" pitchFamily="34" charset="0"/>
-              <a:sym typeface="Canva Sans Bold"/>
-            </a:endParaRPr>
-          </a:p>
-          <a:p>
-            <a:pPr marL="228600" indent="-228600" algn="l">
-              <a:lnSpc>
-                <a:spcPts val="2304"/>
-              </a:lnSpc>
-              <a:buAutoNum type="arabicPeriod"/>
-            </a:pPr>
-            <a:r>
-              <a:rPr lang="en-US" sz="1200" b="1" dirty="0" err="1">
-                <a:solidFill>
-                  <a:srgbClr val="2B4D7B"/>
-                </a:solidFill>
-                <a:latin typeface="Tahoma" panose="020B0604030504040204" pitchFamily="34" charset="0"/>
-                <a:ea typeface="Tahoma" panose="020B0604030504040204" pitchFamily="34" charset="0"/>
-                <a:cs typeface="Tahoma" panose="020B0604030504040204" pitchFamily="34" charset="0"/>
-                <a:sym typeface="Canva Sans Bold"/>
-              </a:rPr>
-              <a:t>Kết</a:t>
-            </a:r>
-            <a:r>
-              <a:rPr lang="en-US" sz="1200" b="1" dirty="0">
-                <a:solidFill>
-                  <a:srgbClr val="2B4D7B"/>
-                </a:solidFill>
-                <a:latin typeface="Tahoma" panose="020B0604030504040204" pitchFamily="34" charset="0"/>
-                <a:ea typeface="Tahoma" panose="020B0604030504040204" pitchFamily="34" charset="0"/>
-                <a:cs typeface="Tahoma" panose="020B0604030504040204" pitchFamily="34" charset="0"/>
-                <a:sym typeface="Canva Sans Bold"/>
-              </a:rPr>
-              <a:t> </a:t>
-            </a:r>
-            <a:r>
-              <a:rPr lang="en-US" sz="1200" b="1" dirty="0" err="1">
-                <a:solidFill>
-                  <a:srgbClr val="2B4D7B"/>
-                </a:solidFill>
-                <a:latin typeface="Tahoma" panose="020B0604030504040204" pitchFamily="34" charset="0"/>
-                <a:ea typeface="Tahoma" panose="020B0604030504040204" pitchFamily="34" charset="0"/>
-                <a:cs typeface="Tahoma" panose="020B0604030504040204" pitchFamily="34" charset="0"/>
-                <a:sym typeface="Canva Sans Bold"/>
-              </a:rPr>
-              <a:t>quả</a:t>
-            </a:r>
-            <a:r>
-              <a:rPr lang="en-US" sz="1200" b="1" dirty="0">
-                <a:solidFill>
-                  <a:srgbClr val="2B4D7B"/>
-                </a:solidFill>
-                <a:latin typeface="Tahoma" panose="020B0604030504040204" pitchFamily="34" charset="0"/>
-                <a:ea typeface="Tahoma" panose="020B0604030504040204" pitchFamily="34" charset="0"/>
-                <a:cs typeface="Tahoma" panose="020B0604030504040204" pitchFamily="34" charset="0"/>
-                <a:sym typeface="Canva Sans Bold"/>
-              </a:rPr>
-              <a:t> </a:t>
-            </a:r>
-            <a:r>
-              <a:rPr lang="en-US" sz="1200" b="1" dirty="0" err="1">
-                <a:solidFill>
-                  <a:srgbClr val="2B4D7B"/>
-                </a:solidFill>
-                <a:latin typeface="Tahoma" panose="020B0604030504040204" pitchFamily="34" charset="0"/>
-                <a:ea typeface="Tahoma" panose="020B0604030504040204" pitchFamily="34" charset="0"/>
-                <a:cs typeface="Tahoma" panose="020B0604030504040204" pitchFamily="34" charset="0"/>
-                <a:sym typeface="Canva Sans Bold"/>
-              </a:rPr>
-              <a:t>thực</a:t>
-            </a:r>
-            <a:r>
-              <a:rPr lang="en-US" sz="1200" b="1" dirty="0">
-                <a:solidFill>
-                  <a:srgbClr val="2B4D7B"/>
-                </a:solidFill>
-                <a:latin typeface="Tahoma" panose="020B0604030504040204" pitchFamily="34" charset="0"/>
-                <a:ea typeface="Tahoma" panose="020B0604030504040204" pitchFamily="34" charset="0"/>
-                <a:cs typeface="Tahoma" panose="020B0604030504040204" pitchFamily="34" charset="0"/>
-                <a:sym typeface="Canva Sans Bold"/>
-              </a:rPr>
-              <a:t> </a:t>
-            </a:r>
-            <a:r>
-              <a:rPr lang="en-US" sz="1200" b="1" dirty="0" err="1">
-                <a:solidFill>
-                  <a:srgbClr val="2B4D7B"/>
-                </a:solidFill>
-                <a:latin typeface="Tahoma" panose="020B0604030504040204" pitchFamily="34" charset="0"/>
-                <a:ea typeface="Tahoma" panose="020B0604030504040204" pitchFamily="34" charset="0"/>
-                <a:cs typeface="Tahoma" panose="020B0604030504040204" pitchFamily="34" charset="0"/>
-                <a:sym typeface="Canva Sans Bold"/>
-              </a:rPr>
-              <a:t>nghiệm</a:t>
-            </a:r>
-            <a:endParaRPr lang="en-US" sz="1200" b="1" dirty="0">
-              <a:solidFill>
-                <a:srgbClr val="2B4D7B"/>
-              </a:solidFill>
-              <a:latin typeface="Tahoma" panose="020B0604030504040204" pitchFamily="34" charset="0"/>
-              <a:ea typeface="Tahoma" panose="020B0604030504040204" pitchFamily="34" charset="0"/>
-              <a:cs typeface="Tahoma" panose="020B0604030504040204" pitchFamily="34" charset="0"/>
-              <a:sym typeface="Canva Sans Bold"/>
-            </a:endParaRPr>
-          </a:p>
-          <a:p>
-            <a:pPr marL="228600" indent="-228600" algn="l">
-              <a:lnSpc>
-                <a:spcPts val="2304"/>
-              </a:lnSpc>
-              <a:buAutoNum type="arabicPeriod"/>
-            </a:pPr>
-            <a:r>
-              <a:rPr lang="en-US" sz="1200" b="1" dirty="0" err="1">
-                <a:solidFill>
-                  <a:srgbClr val="2B4D7B"/>
-                </a:solidFill>
-                <a:latin typeface="Tahoma" panose="020B0604030504040204" pitchFamily="34" charset="0"/>
-                <a:ea typeface="Tahoma" panose="020B0604030504040204" pitchFamily="34" charset="0"/>
-                <a:cs typeface="Tahoma" panose="020B0604030504040204" pitchFamily="34" charset="0"/>
-                <a:sym typeface="Canva Sans Bold"/>
-              </a:rPr>
-              <a:t>Kết</a:t>
-            </a:r>
-            <a:r>
-              <a:rPr lang="en-US" sz="1200" b="1" dirty="0">
-                <a:solidFill>
-                  <a:srgbClr val="2B4D7B"/>
-                </a:solidFill>
-                <a:latin typeface="Tahoma" panose="020B0604030504040204" pitchFamily="34" charset="0"/>
-                <a:ea typeface="Tahoma" panose="020B0604030504040204" pitchFamily="34" charset="0"/>
-                <a:cs typeface="Tahoma" panose="020B0604030504040204" pitchFamily="34" charset="0"/>
-                <a:sym typeface="Canva Sans Bold"/>
-              </a:rPr>
-              <a:t> </a:t>
-            </a:r>
-            <a:r>
-              <a:rPr lang="en-US" sz="1200" b="1" dirty="0" err="1">
-                <a:solidFill>
-                  <a:srgbClr val="2B4D7B"/>
-                </a:solidFill>
-                <a:latin typeface="Tahoma" panose="020B0604030504040204" pitchFamily="34" charset="0"/>
-                <a:ea typeface="Tahoma" panose="020B0604030504040204" pitchFamily="34" charset="0"/>
-                <a:cs typeface="Tahoma" panose="020B0604030504040204" pitchFamily="34" charset="0"/>
-                <a:sym typeface="Canva Sans Bold"/>
-              </a:rPr>
-              <a:t>luận</a:t>
-            </a:r>
-            <a:endParaRPr lang="en-US" sz="1200" b="1" dirty="0">
-              <a:solidFill>
-                <a:srgbClr val="2B4D7B"/>
-              </a:solidFill>
-              <a:latin typeface="Tahoma" panose="020B0604030504040204" pitchFamily="34" charset="0"/>
-              <a:ea typeface="Tahoma" panose="020B0604030504040204" pitchFamily="34" charset="0"/>
-              <a:cs typeface="Tahoma" panose="020B0604030504040204" pitchFamily="34" charset="0"/>
-              <a:sym typeface="Canva Sans Bold"/>
-            </a:endParaRPr>
-          </a:p>
-        </p:txBody>
-      </p:sp>
-      <p:sp>
-        <p:nvSpPr>
-          <p:cNvPr id="6" name="TextBox 5">
-            <a:extLst>
-              <a:ext uri="{FF2B5EF4-FFF2-40B4-BE49-F238E27FC236}">
-                <a16:creationId xmlns:a16="http://schemas.microsoft.com/office/drawing/2014/main" id="{1A3B45B4-54EB-D63C-8B42-A98CADA42C8D}"/>
-              </a:ext>
-            </a:extLst>
-          </p:cNvPr>
-          <p:cNvSpPr txBox="1"/>
-          <p:nvPr/>
-        </p:nvSpPr>
-        <p:spPr>
-          <a:xfrm>
-            <a:off x="5391150" y="2914650"/>
-            <a:ext cx="219075" cy="215444"/>
-          </a:xfrm>
-          <a:prstGeom prst="rect">
-            <a:avLst/>
-          </a:prstGeom>
-          <a:noFill/>
-        </p:spPr>
-        <p:txBody>
-          <a:bodyPr wrap="square">
-            <a:spAutoFit/>
-          </a:bodyPr>
-          <a:lstStyle/>
-          <a:p>
-            <a:pPr algn="r"/>
-            <a:r>
-              <a:rPr lang="en-US" sz="800" dirty="0">
-                <a:solidFill>
-                  <a:srgbClr val="1C1C1A"/>
-                </a:solidFill>
-                <a:latin typeface="Tahoma" panose="020B0604030504040204" pitchFamily="34" charset="0"/>
-                <a:ea typeface="Tahoma" panose="020B0604030504040204" pitchFamily="34" charset="0"/>
-                <a:cs typeface="Tahoma" panose="020B0604030504040204" pitchFamily="34" charset="0"/>
-                <a:sym typeface="Canva Sans"/>
-              </a:rPr>
-              <a:t>1</a:t>
-            </a:r>
-            <a:endParaRPr lang="en-US" sz="800" dirty="0">
-              <a:latin typeface="Tahoma" panose="020B0604030504040204" pitchFamily="34" charset="0"/>
-              <a:ea typeface="Tahoma" panose="020B0604030504040204" pitchFamily="34" charset="0"/>
-              <a:cs typeface="Tahoma" panose="020B0604030504040204" pitchFamily="34" charset="0"/>
-            </a:endParaRPr>
           </a:p>
         </p:txBody>
       </p:sp>

--- a/docs/Nhom12_SlideBaoCaoCuoiKy.pptx
+++ b/docs/Nhom12_SlideBaoCaoCuoiKy.pptx
@@ -5,7 +5,7 @@
     <p:sldMasterId id="2147483648" r:id="rId1"/>
   </p:sldMasterIdLst>
   <p:notesMasterIdLst>
-    <p:notesMasterId r:id="rId22"/>
+    <p:notesMasterId r:id="rId27"/>
   </p:notesMasterIdLst>
   <p:sldIdLst>
     <p:sldId id="256" r:id="rId2"/>
@@ -26,20 +26,25 @@
     <p:sldId id="314" r:id="rId17"/>
     <p:sldId id="315" r:id="rId18"/>
     <p:sldId id="303" r:id="rId19"/>
-    <p:sldId id="304" r:id="rId20"/>
-    <p:sldId id="297" r:id="rId21"/>
+    <p:sldId id="316" r:id="rId20"/>
+    <p:sldId id="317" r:id="rId21"/>
+    <p:sldId id="318" r:id="rId22"/>
+    <p:sldId id="319" r:id="rId23"/>
+    <p:sldId id="304" r:id="rId24"/>
+    <p:sldId id="320" r:id="rId25"/>
+    <p:sldId id="297" r:id="rId26"/>
   </p:sldIdLst>
   <p:sldSz cx="5753100" cy="3238500"/>
   <p:notesSz cx="6858000" cy="9144000"/>
   <p:embeddedFontLst>
     <p:embeddedFont>
       <p:font typeface="Cambria Math" panose="02040503050406030204" pitchFamily="18" charset="0"/>
-      <p:regular r:id="rId23"/>
+      <p:regular r:id="rId28"/>
     </p:embeddedFont>
     <p:embeddedFont>
       <p:font typeface="Tahoma" panose="020B0604030504040204" pitchFamily="34" charset="0"/>
-      <p:regular r:id="rId24"/>
-      <p:bold r:id="rId25"/>
+      <p:regular r:id="rId29"/>
+      <p:bold r:id="rId30"/>
     </p:embeddedFont>
   </p:embeddedFontLst>
   <p:defaultTextStyle>
@@ -238,7 +243,7 @@
           <a:p>
             <a:fld id="{B7268E1E-0E44-426D-905E-8AD9B19D2182}" type="datetimeFigureOut">
               <a:rPr lang="cs-CZ" smtClean="0"/>
-              <a:t>27.04.2026</a:t>
+              <a:t>28.04.2026</a:t>
             </a:fld>
             <a:endParaRPr lang="cs-CZ"/>
           </a:p>
@@ -1342,6 +1347,2028 @@
 </p:notes>
 </file>
 
+<file path=ppt/notesSlides/notesSlide5.xml><?xml version="1.0" encoding="utf-8"?>
+<p:notes xmlns:a="http://schemas.openxmlformats.org/drawingml/2006/main" xmlns:r="http://schemas.openxmlformats.org/officeDocument/2006/relationships" xmlns:p="http://schemas.openxmlformats.org/presentationml/2006/main">
+  <p:cSld>
+    <p:spTree>
+      <p:nvGrpSpPr>
+        <p:cNvPr id="1" name="">
+          <a:extLst>
+            <a:ext uri="{FF2B5EF4-FFF2-40B4-BE49-F238E27FC236}">
+              <a16:creationId xmlns:a16="http://schemas.microsoft.com/office/drawing/2014/main" id="{0C5C0B14-05A4-48B6-3683-5D40516285A2}"/>
+            </a:ext>
+          </a:extLst>
+        </p:cNvPr>
+        <p:cNvGrpSpPr/>
+        <p:nvPr/>
+      </p:nvGrpSpPr>
+      <p:grpSpPr>
+        <a:xfrm>
+          <a:off x="0" y="0"/>
+          <a:ext cx="0" cy="0"/>
+          <a:chOff x="0" y="0"/>
+          <a:chExt cx="0" cy="0"/>
+        </a:xfrm>
+      </p:grpSpPr>
+      <p:sp>
+        <p:nvSpPr>
+          <p:cNvPr id="2" name="Slide Image Placeholder 1">
+            <a:extLst>
+              <a:ext uri="{FF2B5EF4-FFF2-40B4-BE49-F238E27FC236}">
+                <a16:creationId xmlns:a16="http://schemas.microsoft.com/office/drawing/2014/main" id="{12FBE8C1-112D-7E9D-75EC-75C3E0190037}"/>
+              </a:ext>
+            </a:extLst>
+          </p:cNvPr>
+          <p:cNvSpPr>
+            <a:spLocks noGrp="1" noRot="1" noChangeAspect="1"/>
+          </p:cNvSpPr>
+          <p:nvPr>
+            <p:ph type="sldImg"/>
+          </p:nvPr>
+        </p:nvSpPr>
+        <p:spPr>
+          <a:xfrm>
+            <a:off x="2292350" y="512763"/>
+            <a:ext cx="4559300" cy="2566987"/>
+          </a:xfrm>
+        </p:spPr>
+      </p:sp>
+      <mc:AlternateContent xmlns:mc="http://schemas.openxmlformats.org/markup-compatibility/2006">
+        <mc:Choice xmlns:a14="http://schemas.microsoft.com/office/drawing/2010/main" Requires="a14">
+          <p:sp>
+            <p:nvSpPr>
+              <p:cNvPr id="3" name="Notes Placeholder 2">
+                <a:extLst>
+                  <a:ext uri="{FF2B5EF4-FFF2-40B4-BE49-F238E27FC236}">
+                    <a16:creationId xmlns:a16="http://schemas.microsoft.com/office/drawing/2014/main" id="{ACC12A4B-0030-964C-FBF1-ED1DA0042473}"/>
+                  </a:ext>
+                </a:extLst>
+              </p:cNvPr>
+              <p:cNvSpPr>
+                <a:spLocks noGrp="1"/>
+              </p:cNvSpPr>
+              <p:nvPr>
+                <p:ph type="body" idx="1"/>
+              </p:nvPr>
+            </p:nvSpPr>
+            <p:spPr/>
+            <p:txBody>
+              <a:bodyPr/>
+              <a:lstStyle/>
+              <a:p>
+                <a:r>
+                  <a:rPr lang="vi-VN" sz="1200" kern="1200" dirty="0">
+                    <a:solidFill>
+                      <a:schemeClr val="tx1"/>
+                    </a:solidFill>
+                    <a:effectLst/>
+                    <a:latin typeface="+mn-lt"/>
+                    <a:ea typeface="+mn-ea"/>
+                    <a:cs typeface="+mn-cs"/>
+                  </a:rPr>
+                  <a:t>Ngôn ngữ nguồn được xử lý bằng bộ tách từ </a:t>
+                </a:r>
+                <a14:m>
+                  <m:oMath xmlns:m="http://schemas.openxmlformats.org/officeDocument/2006/math">
+                    <m:r>
+                      <a:rPr lang="vi-VN" sz="1200" i="1" kern="1200">
+                        <a:solidFill>
+                          <a:schemeClr val="tx1"/>
+                        </a:solidFill>
+                        <a:effectLst/>
+                        <a:latin typeface="+mn-lt"/>
+                        <a:ea typeface="+mn-ea"/>
+                        <a:cs typeface="+mn-cs"/>
+                      </a:rPr>
+                      <m:t>𝑒𝑛</m:t>
+                    </m:r>
+                    <m:r>
+                      <a:rPr lang="vi-VN" sz="1200" i="1" kern="1200">
+                        <a:solidFill>
+                          <a:schemeClr val="tx1"/>
+                        </a:solidFill>
+                        <a:effectLst/>
+                        <a:latin typeface="+mn-lt"/>
+                        <a:ea typeface="+mn-ea"/>
+                        <a:cs typeface="+mn-cs"/>
+                      </a:rPr>
+                      <m:t>_</m:t>
+                    </m:r>
+                    <m:r>
+                      <a:rPr lang="vi-VN" sz="1200" i="1" kern="1200">
+                        <a:solidFill>
+                          <a:schemeClr val="tx1"/>
+                        </a:solidFill>
+                        <a:effectLst/>
+                        <a:latin typeface="+mn-lt"/>
+                        <a:ea typeface="+mn-ea"/>
+                        <a:cs typeface="+mn-cs"/>
+                      </a:rPr>
+                      <m:t>𝑐𝑜𝑟𝑒</m:t>
+                    </m:r>
+                    <m:r>
+                      <a:rPr lang="vi-VN" sz="1200" i="1" kern="1200">
+                        <a:solidFill>
+                          <a:schemeClr val="tx1"/>
+                        </a:solidFill>
+                        <a:effectLst/>
+                        <a:latin typeface="+mn-lt"/>
+                        <a:ea typeface="+mn-ea"/>
+                        <a:cs typeface="+mn-cs"/>
+                      </a:rPr>
+                      <m:t>_</m:t>
+                    </m:r>
+                    <m:r>
+                      <a:rPr lang="vi-VN" sz="1200" i="1" kern="1200">
+                        <a:solidFill>
+                          <a:schemeClr val="tx1"/>
+                        </a:solidFill>
+                        <a:effectLst/>
+                        <a:latin typeface="+mn-lt"/>
+                        <a:ea typeface="+mn-ea"/>
+                        <a:cs typeface="+mn-cs"/>
+                      </a:rPr>
+                      <m:t>𝑤𝑒𝑏</m:t>
+                    </m:r>
+                    <m:r>
+                      <a:rPr lang="vi-VN" sz="1200" i="1" kern="1200">
+                        <a:solidFill>
+                          <a:schemeClr val="tx1"/>
+                        </a:solidFill>
+                        <a:effectLst/>
+                        <a:latin typeface="+mn-lt"/>
+                        <a:ea typeface="+mn-ea"/>
+                        <a:cs typeface="+mn-cs"/>
+                      </a:rPr>
+                      <m:t>_</m:t>
+                    </m:r>
+                    <m:r>
+                      <a:rPr lang="vi-VN" sz="1200" i="1" kern="1200">
+                        <a:solidFill>
+                          <a:schemeClr val="tx1"/>
+                        </a:solidFill>
+                        <a:effectLst/>
+                        <a:latin typeface="+mn-lt"/>
+                        <a:ea typeface="+mn-ea"/>
+                        <a:cs typeface="+mn-cs"/>
+                      </a:rPr>
+                      <m:t>𝑠𝑚</m:t>
+                    </m:r>
+                  </m:oMath>
+                </a14:m>
+                <a:r>
+                  <a:rPr lang="vi-VN" sz="1200" kern="1200" dirty="0">
+                    <a:solidFill>
+                      <a:schemeClr val="tx1"/>
+                    </a:solidFill>
+                    <a:effectLst/>
+                    <a:latin typeface="+mn-lt"/>
+                    <a:ea typeface="+mn-ea"/>
+                    <a:cs typeface="+mn-cs"/>
+                  </a:rPr>
+                  <a:t>, trong khi ngôn ngữ đích sử dụng </a:t>
+                </a:r>
+                <a14:m>
+                  <m:oMath xmlns:m="http://schemas.openxmlformats.org/officeDocument/2006/math">
+                    <m:r>
+                      <a:rPr lang="vi-VN" sz="1200" i="1" kern="1200">
+                        <a:solidFill>
+                          <a:schemeClr val="tx1"/>
+                        </a:solidFill>
+                        <a:effectLst/>
+                        <a:latin typeface="+mn-lt"/>
+                        <a:ea typeface="+mn-ea"/>
+                        <a:cs typeface="+mn-cs"/>
+                      </a:rPr>
+                      <m:t>𝑣𝑖</m:t>
+                    </m:r>
+                    <m:r>
+                      <a:rPr lang="vi-VN" sz="1200" i="1" kern="1200">
+                        <a:solidFill>
+                          <a:schemeClr val="tx1"/>
+                        </a:solidFill>
+                        <a:effectLst/>
+                        <a:latin typeface="+mn-lt"/>
+                        <a:ea typeface="+mn-ea"/>
+                        <a:cs typeface="+mn-cs"/>
+                      </a:rPr>
+                      <m:t>_</m:t>
+                    </m:r>
+                    <m:r>
+                      <a:rPr lang="vi-VN" sz="1200" i="1" kern="1200">
+                        <a:solidFill>
+                          <a:schemeClr val="tx1"/>
+                        </a:solidFill>
+                        <a:effectLst/>
+                        <a:latin typeface="+mn-lt"/>
+                        <a:ea typeface="+mn-ea"/>
+                        <a:cs typeface="+mn-cs"/>
+                      </a:rPr>
+                      <m:t>𝑐𝑜𝑟𝑒</m:t>
+                    </m:r>
+                    <m:r>
+                      <a:rPr lang="vi-VN" sz="1200" i="1" kern="1200">
+                        <a:solidFill>
+                          <a:schemeClr val="tx1"/>
+                        </a:solidFill>
+                        <a:effectLst/>
+                        <a:latin typeface="+mn-lt"/>
+                        <a:ea typeface="+mn-ea"/>
+                        <a:cs typeface="+mn-cs"/>
+                      </a:rPr>
+                      <m:t>_</m:t>
+                    </m:r>
+                    <m:r>
+                      <a:rPr lang="vi-VN" sz="1200" i="1" kern="1200">
+                        <a:solidFill>
+                          <a:schemeClr val="tx1"/>
+                        </a:solidFill>
+                        <a:effectLst/>
+                        <a:latin typeface="+mn-lt"/>
+                        <a:ea typeface="+mn-ea"/>
+                        <a:cs typeface="+mn-cs"/>
+                      </a:rPr>
+                      <m:t>𝑛𝑒𝑤𝑠</m:t>
+                    </m:r>
+                    <m:r>
+                      <a:rPr lang="vi-VN" sz="1200" i="1" kern="1200">
+                        <a:solidFill>
+                          <a:schemeClr val="tx1"/>
+                        </a:solidFill>
+                        <a:effectLst/>
+                        <a:latin typeface="+mn-lt"/>
+                        <a:ea typeface="+mn-ea"/>
+                        <a:cs typeface="+mn-cs"/>
+                      </a:rPr>
+                      <m:t>_</m:t>
+                    </m:r>
+                    <m:r>
+                      <a:rPr lang="vi-VN" sz="1200" i="1" kern="1200">
+                        <a:solidFill>
+                          <a:schemeClr val="tx1"/>
+                        </a:solidFill>
+                        <a:effectLst/>
+                        <a:latin typeface="+mn-lt"/>
+                        <a:ea typeface="+mn-ea"/>
+                        <a:cs typeface="+mn-cs"/>
+                      </a:rPr>
+                      <m:t>𝑙𝑔</m:t>
+                    </m:r>
+                  </m:oMath>
+                </a14:m>
+                <a:r>
+                  <a:rPr lang="vi-VN" sz="1200" kern="1200" dirty="0">
+                    <a:solidFill>
+                      <a:schemeClr val="tx1"/>
+                    </a:solidFill>
+                    <a:effectLst/>
+                    <a:latin typeface="+mn-lt"/>
+                    <a:ea typeface="+mn-ea"/>
+                    <a:cs typeface="+mn-cs"/>
+                  </a:rPr>
+                  <a:t> nhằm đảm bảo việc phân tách từ phù hợp với đặc trưng của từng ngôn ngữ. Độ dài tối đa của mỗi câu được giới hạn ở </a:t>
+                </a:r>
+                <a14:m>
+                  <m:oMath xmlns:m="http://schemas.openxmlformats.org/officeDocument/2006/math">
+                    <m:r>
+                      <a:rPr lang="vi-VN" sz="1200" i="1" kern="1200">
+                        <a:solidFill>
+                          <a:schemeClr val="tx1"/>
+                        </a:solidFill>
+                        <a:effectLst/>
+                        <a:latin typeface="+mn-lt"/>
+                        <a:ea typeface="+mn-ea"/>
+                        <a:cs typeface="+mn-cs"/>
+                      </a:rPr>
+                      <m:t>160 </m:t>
+                    </m:r>
+                    <m:r>
+                      <a:rPr lang="vi-VN" sz="1200" i="1" kern="1200">
+                        <a:solidFill>
+                          <a:schemeClr val="tx1"/>
+                        </a:solidFill>
+                        <a:effectLst/>
+                        <a:latin typeface="+mn-lt"/>
+                        <a:ea typeface="+mn-ea"/>
+                        <a:cs typeface="+mn-cs"/>
+                      </a:rPr>
+                      <m:t>𝑡𝑜𝑘𝑒𝑛</m:t>
+                    </m:r>
+                  </m:oMath>
+                </a14:m>
+                <a:r>
+                  <a:rPr lang="vi-VN" sz="1200" kern="1200" dirty="0">
+                    <a:solidFill>
+                      <a:schemeClr val="tx1"/>
+                    </a:solidFill>
+                    <a:effectLst/>
+                    <a:latin typeface="+mn-lt"/>
+                    <a:ea typeface="+mn-ea"/>
+                    <a:cs typeface="+mn-cs"/>
+                  </a:rPr>
+                  <a:t>, giúp kiểm soát kích thước đầu vào và đầu ra trong quá trình huấn luyện.</a:t>
+                </a:r>
+                <a:endParaRPr lang="en-US" sz="1200" kern="1200" dirty="0">
+                  <a:solidFill>
+                    <a:schemeClr val="tx1"/>
+                  </a:solidFill>
+                  <a:effectLst/>
+                  <a:latin typeface="+mn-lt"/>
+                  <a:ea typeface="+mn-ea"/>
+                  <a:cs typeface="+mn-cs"/>
+                </a:endParaRPr>
+              </a:p>
+              <a:p>
+                <a:r>
+                  <a:rPr lang="vi-VN" sz="1200" kern="1200" dirty="0">
+                    <a:solidFill>
+                      <a:schemeClr val="tx1"/>
+                    </a:solidFill>
+                    <a:effectLst/>
+                    <a:latin typeface="+mn-lt"/>
+                    <a:ea typeface="+mn-ea"/>
+                    <a:cs typeface="+mn-cs"/>
+                  </a:rPr>
+                  <a:t>Dữ liệu được chia theo batch với kích thước </a:t>
+                </a:r>
+                <a14:m>
+                  <m:oMath xmlns:m="http://schemas.openxmlformats.org/officeDocument/2006/math">
+                    <m:r>
+                      <a:rPr lang="vi-VN" sz="1200" i="1" kern="1200">
+                        <a:solidFill>
+                          <a:schemeClr val="tx1"/>
+                        </a:solidFill>
+                        <a:effectLst/>
+                        <a:latin typeface="+mn-lt"/>
+                        <a:ea typeface="+mn-ea"/>
+                        <a:cs typeface="+mn-cs"/>
+                      </a:rPr>
+                      <m:t>1500</m:t>
+                    </m:r>
+                  </m:oMath>
+                </a14:m>
+                <a:r>
+                  <a:rPr lang="vi-VN" sz="1200" kern="1200" dirty="0">
+                    <a:solidFill>
+                      <a:schemeClr val="tx1"/>
+                    </a:solidFill>
+                    <a:effectLst/>
+                    <a:latin typeface="+mn-lt"/>
+                    <a:ea typeface="+mn-ea"/>
+                    <a:cs typeface="+mn-cs"/>
+                  </a:rPr>
+                  <a:t>, và toàn bộ quá trình huấn luyện được thực hiện trên GPU (CUDA) nhằm tăng tốc độ tính toán.</a:t>
+                </a:r>
+                <a:endParaRPr lang="en-US" sz="1200" kern="1200" dirty="0">
+                  <a:solidFill>
+                    <a:schemeClr val="tx1"/>
+                  </a:solidFill>
+                  <a:effectLst/>
+                  <a:latin typeface="+mn-lt"/>
+                  <a:ea typeface="+mn-ea"/>
+                  <a:cs typeface="+mn-cs"/>
+                </a:endParaRPr>
+              </a:p>
+              <a:p>
+                <a:r>
+                  <a:rPr lang="vi-VN" sz="1200" kern="1200" dirty="0">
+                    <a:solidFill>
+                      <a:schemeClr val="tx1"/>
+                    </a:solidFill>
+                    <a:effectLst/>
+                    <a:latin typeface="+mn-lt"/>
+                    <a:ea typeface="+mn-ea"/>
+                    <a:cs typeface="+mn-cs"/>
+                  </a:rPr>
+                  <a:t>Về kiến trúc mô hình, vector embedding của encoder và decoder đều có kích thước </a:t>
+                </a:r>
+                <a14:m>
+                  <m:oMath xmlns:m="http://schemas.openxmlformats.org/officeDocument/2006/math">
+                    <m:r>
+                      <a:rPr lang="vi-VN" sz="1200" i="1" kern="1200">
+                        <a:solidFill>
+                          <a:schemeClr val="tx1"/>
+                        </a:solidFill>
+                        <a:effectLst/>
+                        <a:latin typeface="+mn-lt"/>
+                        <a:ea typeface="+mn-ea"/>
+                        <a:cs typeface="+mn-cs"/>
+                      </a:rPr>
+                      <m:t>256</m:t>
+                    </m:r>
+                  </m:oMath>
+                </a14:m>
+                <a:r>
+                  <a:rPr lang="vi-VN" sz="1200" kern="1200" dirty="0">
+                    <a:solidFill>
+                      <a:schemeClr val="tx1"/>
+                    </a:solidFill>
+                    <a:effectLst/>
+                    <a:latin typeface="+mn-lt"/>
+                    <a:ea typeface="+mn-ea"/>
+                    <a:cs typeface="+mn-cs"/>
+                  </a:rPr>
+                  <a:t> chiều, trong khi hidden state được thiết lập ở mức </a:t>
+                </a:r>
+                <a14:m>
+                  <m:oMath xmlns:m="http://schemas.openxmlformats.org/officeDocument/2006/math">
+                    <m:r>
+                      <a:rPr lang="vi-VN" sz="1200" i="1" kern="1200">
+                        <a:solidFill>
+                          <a:schemeClr val="tx1"/>
+                        </a:solidFill>
+                        <a:effectLst/>
+                        <a:latin typeface="+mn-lt"/>
+                        <a:ea typeface="+mn-ea"/>
+                        <a:cs typeface="+mn-cs"/>
+                      </a:rPr>
+                      <m:t>512</m:t>
+                    </m:r>
+                  </m:oMath>
+                </a14:m>
+                <a:r>
+                  <a:rPr lang="vi-VN" sz="1200" kern="1200" dirty="0">
+                    <a:solidFill>
+                      <a:schemeClr val="tx1"/>
+                    </a:solidFill>
+                    <a:effectLst/>
+                    <a:latin typeface="+mn-lt"/>
+                    <a:ea typeface="+mn-ea"/>
+                    <a:cs typeface="+mn-cs"/>
+                  </a:rPr>
+                  <a:t> chiều. Mô hình bao gồm </a:t>
+                </a:r>
+                <a14:m>
+                  <m:oMath xmlns:m="http://schemas.openxmlformats.org/officeDocument/2006/math">
+                    <m:r>
+                      <a:rPr lang="vi-VN" sz="1200" i="1" kern="1200">
+                        <a:solidFill>
+                          <a:schemeClr val="tx1"/>
+                        </a:solidFill>
+                        <a:effectLst/>
+                        <a:latin typeface="+mn-lt"/>
+                        <a:ea typeface="+mn-ea"/>
+                        <a:cs typeface="+mn-cs"/>
+                      </a:rPr>
+                      <m:t>2</m:t>
+                    </m:r>
+                  </m:oMath>
+                </a14:m>
+                <a:r>
+                  <a:rPr lang="vi-VN" sz="1200" kern="1200" dirty="0">
+                    <a:solidFill>
+                      <a:schemeClr val="tx1"/>
+                    </a:solidFill>
+                    <a:effectLst/>
+                    <a:latin typeface="+mn-lt"/>
+                    <a:ea typeface="+mn-ea"/>
+                    <a:cs typeface="+mn-cs"/>
+                  </a:rPr>
+                  <a:t> lớp (layers) cho cả encoder và decoder. Để giảm hiện tượng overfitting, dropout được áp dụng với tỷ lệ </a:t>
+                </a:r>
+                <a14:m>
+                  <m:oMath xmlns:m="http://schemas.openxmlformats.org/officeDocument/2006/math">
+                    <m:r>
+                      <a:rPr lang="vi-VN" sz="1200" i="1" kern="1200">
+                        <a:solidFill>
+                          <a:schemeClr val="tx1"/>
+                        </a:solidFill>
+                        <a:effectLst/>
+                        <a:latin typeface="+mn-lt"/>
+                        <a:ea typeface="+mn-ea"/>
+                        <a:cs typeface="+mn-cs"/>
+                      </a:rPr>
+                      <m:t>0.5</m:t>
+                    </m:r>
+                  </m:oMath>
+                </a14:m>
+                <a:r>
+                  <a:rPr lang="vi-VN" sz="1200" kern="1200" dirty="0">
+                    <a:solidFill>
+                      <a:schemeClr val="tx1"/>
+                    </a:solidFill>
+                    <a:effectLst/>
+                    <a:latin typeface="+mn-lt"/>
+                    <a:ea typeface="+mn-ea"/>
+                    <a:cs typeface="+mn-cs"/>
+                  </a:rPr>
+                  <a:t> cho cả hai phía encoder và decoder.</a:t>
+                </a:r>
+                <a:endParaRPr lang="en-US" sz="1200" kern="1200" dirty="0">
+                  <a:solidFill>
+                    <a:schemeClr val="tx1"/>
+                  </a:solidFill>
+                  <a:effectLst/>
+                  <a:latin typeface="+mn-lt"/>
+                  <a:ea typeface="+mn-ea"/>
+                  <a:cs typeface="+mn-cs"/>
+                </a:endParaRPr>
+              </a:p>
+              <a:p>
+                <a:r>
+                  <a:rPr lang="vi-VN" sz="1200" kern="1200" dirty="0">
+                    <a:solidFill>
+                      <a:schemeClr val="tx1"/>
+                    </a:solidFill>
+                    <a:effectLst/>
+                    <a:latin typeface="+mn-lt"/>
+                    <a:ea typeface="+mn-ea"/>
+                    <a:cs typeface="+mn-cs"/>
+                  </a:rPr>
+                  <a:t>Quá trình tối ưu sử dụng learning rate </a:t>
+                </a:r>
+                <a14:m>
+                  <m:oMath xmlns:m="http://schemas.openxmlformats.org/officeDocument/2006/math">
+                    <m:r>
+                      <a:rPr lang="vi-VN" sz="1200" i="1" kern="1200">
+                        <a:solidFill>
+                          <a:schemeClr val="tx1"/>
+                        </a:solidFill>
+                        <a:effectLst/>
+                        <a:latin typeface="+mn-lt"/>
+                        <a:ea typeface="+mn-ea"/>
+                        <a:cs typeface="+mn-cs"/>
+                      </a:rPr>
+                      <m:t>0.001</m:t>
+                    </m:r>
+                  </m:oMath>
+                </a14:m>
+                <a:r>
+                  <a:rPr lang="vi-VN" sz="1200" kern="1200" dirty="0">
+                    <a:solidFill>
+                      <a:schemeClr val="tx1"/>
+                    </a:solidFill>
+                    <a:effectLst/>
+                    <a:latin typeface="+mn-lt"/>
+                    <a:ea typeface="+mn-ea"/>
+                    <a:cs typeface="+mn-cs"/>
+                  </a:rPr>
+                  <a:t>, với tổng số </a:t>
+                </a:r>
+                <a14:m>
+                  <m:oMath xmlns:m="http://schemas.openxmlformats.org/officeDocument/2006/math">
+                    <m:r>
+                      <a:rPr lang="vi-VN" sz="1200" i="1" kern="1200">
+                        <a:solidFill>
+                          <a:schemeClr val="tx1"/>
+                        </a:solidFill>
+                        <a:effectLst/>
+                        <a:latin typeface="+mn-lt"/>
+                        <a:ea typeface="+mn-ea"/>
+                        <a:cs typeface="+mn-cs"/>
+                      </a:rPr>
+                      <m:t>11</m:t>
+                    </m:r>
+                  </m:oMath>
+                </a14:m>
+                <a:r>
+                  <a:rPr lang="vi-VN" sz="1200" kern="1200" dirty="0">
+                    <a:solidFill>
+                      <a:schemeClr val="tx1"/>
+                    </a:solidFill>
+                    <a:effectLst/>
+                    <a:latin typeface="+mn-lt"/>
+                    <a:ea typeface="+mn-ea"/>
+                    <a:cs typeface="+mn-cs"/>
+                  </a:rPr>
+                  <a:t> epochs huấn luyện. Ngoài ra, gradient clipping với giá trị </a:t>
+                </a:r>
+                <a14:m>
+                  <m:oMath xmlns:m="http://schemas.openxmlformats.org/officeDocument/2006/math">
+                    <m:r>
+                      <a:rPr lang="vi-VN" sz="1200" i="1" kern="1200">
+                        <a:solidFill>
+                          <a:schemeClr val="tx1"/>
+                        </a:solidFill>
+                        <a:effectLst/>
+                        <a:latin typeface="+mn-lt"/>
+                        <a:ea typeface="+mn-ea"/>
+                        <a:cs typeface="+mn-cs"/>
+                      </a:rPr>
+                      <m:t>1.0</m:t>
+                    </m:r>
+                  </m:oMath>
+                </a14:m>
+                <a:r>
+                  <a:rPr lang="vi-VN" sz="1200" kern="1200" dirty="0">
+                    <a:solidFill>
+                      <a:schemeClr val="tx1"/>
+                    </a:solidFill>
+                    <a:effectLst/>
+                    <a:latin typeface="+mn-lt"/>
+                    <a:ea typeface="+mn-ea"/>
+                    <a:cs typeface="+mn-cs"/>
+                  </a:rPr>
+                  <a:t> được áp dụng nhằm ổn định quá trình lan truyền ngược. Trong quá trình huấn luyện, kỹ thuật teacher forcing được sử dụng với tỷ lệ </a:t>
+                </a:r>
+                <a14:m>
+                  <m:oMath xmlns:m="http://schemas.openxmlformats.org/officeDocument/2006/math">
+                    <m:r>
+                      <a:rPr lang="vi-VN" sz="1200" i="1" kern="1200">
+                        <a:solidFill>
+                          <a:schemeClr val="tx1"/>
+                        </a:solidFill>
+                        <a:effectLst/>
+                        <a:latin typeface="+mn-lt"/>
+                        <a:ea typeface="+mn-ea"/>
+                        <a:cs typeface="+mn-cs"/>
+                      </a:rPr>
+                      <m:t>0.5</m:t>
+                    </m:r>
+                  </m:oMath>
+                </a14:m>
+                <a:r>
+                  <a:rPr lang="vi-VN" sz="1200" kern="1200" dirty="0">
+                    <a:solidFill>
+                      <a:schemeClr val="tx1"/>
+                    </a:solidFill>
+                    <a:effectLst/>
+                    <a:latin typeface="+mn-lt"/>
+                    <a:ea typeface="+mn-ea"/>
+                    <a:cs typeface="+mn-cs"/>
+                  </a:rPr>
+                  <a:t> để cải thiện khả năng hội tụ của mô hình.</a:t>
+                </a:r>
+                <a:endParaRPr lang="en-US" sz="1200" kern="1200" dirty="0">
+                  <a:solidFill>
+                    <a:schemeClr val="tx1"/>
+                  </a:solidFill>
+                  <a:effectLst/>
+                  <a:latin typeface="+mn-lt"/>
+                  <a:ea typeface="+mn-ea"/>
+                  <a:cs typeface="+mn-cs"/>
+                </a:endParaRPr>
+              </a:p>
+              <a:p>
+                <a:r>
+                  <a:rPr lang="vi-VN" sz="1200" kern="1200" dirty="0">
+                    <a:solidFill>
+                      <a:schemeClr val="tx1"/>
+                    </a:solidFill>
+                    <a:effectLst/>
+                    <a:latin typeface="+mn-lt"/>
+                    <a:ea typeface="+mn-ea"/>
+                    <a:cs typeface="+mn-cs"/>
+                  </a:rPr>
+                  <a:t> </a:t>
+                </a:r>
+                <a:endParaRPr lang="en-US" sz="1200" kern="1200" dirty="0">
+                  <a:solidFill>
+                    <a:schemeClr val="tx1"/>
+                  </a:solidFill>
+                  <a:effectLst/>
+                  <a:latin typeface="+mn-lt"/>
+                  <a:ea typeface="+mn-ea"/>
+                  <a:cs typeface="+mn-cs"/>
+                </a:endParaRPr>
+              </a:p>
+              <a:p>
+                <a:r>
+                  <a:rPr lang="vi-VN" sz="1200" kern="1200" dirty="0">
+                    <a:solidFill>
+                      <a:schemeClr val="tx1"/>
+                    </a:solidFill>
+                    <a:effectLst/>
+                    <a:latin typeface="+mn-lt"/>
+                    <a:ea typeface="+mn-ea"/>
+                    <a:cs typeface="+mn-cs"/>
+                  </a:rPr>
+                  <a:t>Kết quả thử nghiệm: BLEU trên tập Test = 0.</a:t>
+                </a:r>
+                <a14:m>
+                  <m:oMath xmlns:m="http://schemas.openxmlformats.org/officeDocument/2006/math">
+                    <m:r>
+                      <a:rPr lang="vi-VN" sz="1200" i="1" kern="1200">
+                        <a:solidFill>
+                          <a:schemeClr val="tx1"/>
+                        </a:solidFill>
+                        <a:effectLst/>
+                        <a:latin typeface="+mn-lt"/>
+                        <a:ea typeface="+mn-ea"/>
+                        <a:cs typeface="+mn-cs"/>
+                      </a:rPr>
+                      <m:t>0378</m:t>
+                    </m:r>
+                  </m:oMath>
+                </a14:m>
+                <a:endParaRPr lang="en-US" sz="1200" kern="1200" dirty="0">
+                  <a:solidFill>
+                    <a:schemeClr val="tx1"/>
+                  </a:solidFill>
+                  <a:effectLst/>
+                  <a:latin typeface="+mn-lt"/>
+                  <a:ea typeface="+mn-ea"/>
+                  <a:cs typeface="+mn-cs"/>
+                </a:endParaRPr>
+              </a:p>
+            </p:txBody>
+          </p:sp>
+        </mc:Choice>
+        <mc:Fallback>
+          <p:sp>
+            <p:nvSpPr>
+              <p:cNvPr id="3" name="Notes Placeholder 2">
+                <a:extLst>
+                  <a:ext uri="{FF2B5EF4-FFF2-40B4-BE49-F238E27FC236}">
+                    <a16:creationId xmlns:a16="http://schemas.microsoft.com/office/drawing/2014/main" id="{ACC12A4B-0030-964C-FBF1-ED1DA0042473}"/>
+                  </a:ext>
+                </a:extLst>
+              </p:cNvPr>
+              <p:cNvSpPr>
+                <a:spLocks noGrp="1"/>
+              </p:cNvSpPr>
+              <p:nvPr>
+                <p:ph type="body" idx="1"/>
+              </p:nvPr>
+            </p:nvSpPr>
+            <p:spPr/>
+            <p:txBody>
+              <a:bodyPr/>
+              <a:lstStyle/>
+              <a:p>
+                <a:r>
+                  <a:rPr lang="vi-VN" sz="1200" kern="1200" dirty="0">
+                    <a:solidFill>
+                      <a:schemeClr val="tx1"/>
+                    </a:solidFill>
+                    <a:effectLst/>
+                    <a:latin typeface="+mn-lt"/>
+                    <a:ea typeface="+mn-ea"/>
+                    <a:cs typeface="+mn-cs"/>
+                  </a:rPr>
+                  <a:t>Ngôn ngữ nguồn được xử lý bằng bộ tách từ </a:t>
+                </a:r>
+                <a:r>
+                  <a:rPr lang="vi-VN" sz="1200" i="0" kern="1200">
+                    <a:solidFill>
+                      <a:schemeClr val="tx1"/>
+                    </a:solidFill>
+                    <a:effectLst/>
+                    <a:latin typeface="+mn-lt"/>
+                    <a:ea typeface="+mn-ea"/>
+                    <a:cs typeface="+mn-cs"/>
+                  </a:rPr>
+                  <a:t>𝑒𝑛_𝑐𝑜𝑟𝑒_𝑤𝑒𝑏_𝑠𝑚</a:t>
+                </a:r>
+                <a:r>
+                  <a:rPr lang="vi-VN" sz="1200" kern="1200" dirty="0">
+                    <a:solidFill>
+                      <a:schemeClr val="tx1"/>
+                    </a:solidFill>
+                    <a:effectLst/>
+                    <a:latin typeface="+mn-lt"/>
+                    <a:ea typeface="+mn-ea"/>
+                    <a:cs typeface="+mn-cs"/>
+                  </a:rPr>
+                  <a:t>, trong khi ngôn ngữ đích sử dụng </a:t>
+                </a:r>
+                <a:r>
+                  <a:rPr lang="vi-VN" sz="1200" i="0" kern="1200">
+                    <a:solidFill>
+                      <a:schemeClr val="tx1"/>
+                    </a:solidFill>
+                    <a:effectLst/>
+                    <a:latin typeface="+mn-lt"/>
+                    <a:ea typeface="+mn-ea"/>
+                    <a:cs typeface="+mn-cs"/>
+                  </a:rPr>
+                  <a:t>𝑣𝑖_𝑐𝑜𝑟𝑒_𝑛𝑒𝑤𝑠_𝑙𝑔</a:t>
+                </a:r>
+                <a:r>
+                  <a:rPr lang="vi-VN" sz="1200" kern="1200" dirty="0">
+                    <a:solidFill>
+                      <a:schemeClr val="tx1"/>
+                    </a:solidFill>
+                    <a:effectLst/>
+                    <a:latin typeface="+mn-lt"/>
+                    <a:ea typeface="+mn-ea"/>
+                    <a:cs typeface="+mn-cs"/>
+                  </a:rPr>
+                  <a:t> nhằm đảm bảo việc phân tách từ phù hợp với đặc trưng của từng ngôn ngữ. Độ dài tối đa của mỗi câu được giới hạn ở </a:t>
+                </a:r>
+                <a:r>
+                  <a:rPr lang="vi-VN" sz="1200" i="0" kern="1200">
+                    <a:solidFill>
+                      <a:schemeClr val="tx1"/>
+                    </a:solidFill>
+                    <a:effectLst/>
+                    <a:latin typeface="+mn-lt"/>
+                    <a:ea typeface="+mn-ea"/>
+                    <a:cs typeface="+mn-cs"/>
+                  </a:rPr>
+                  <a:t>160 𝑡𝑜𝑘𝑒𝑛</a:t>
+                </a:r>
+                <a:r>
+                  <a:rPr lang="vi-VN" sz="1200" kern="1200" dirty="0">
+                    <a:solidFill>
+                      <a:schemeClr val="tx1"/>
+                    </a:solidFill>
+                    <a:effectLst/>
+                    <a:latin typeface="+mn-lt"/>
+                    <a:ea typeface="+mn-ea"/>
+                    <a:cs typeface="+mn-cs"/>
+                  </a:rPr>
+                  <a:t>, giúp kiểm soát kích thước đầu vào và đầu ra trong quá trình huấn luyện.</a:t>
+                </a:r>
+                <a:endParaRPr lang="en-US" sz="1200" kern="1200" dirty="0">
+                  <a:solidFill>
+                    <a:schemeClr val="tx1"/>
+                  </a:solidFill>
+                  <a:effectLst/>
+                  <a:latin typeface="+mn-lt"/>
+                  <a:ea typeface="+mn-ea"/>
+                  <a:cs typeface="+mn-cs"/>
+                </a:endParaRPr>
+              </a:p>
+              <a:p>
+                <a:r>
+                  <a:rPr lang="vi-VN" sz="1200" kern="1200" dirty="0">
+                    <a:solidFill>
+                      <a:schemeClr val="tx1"/>
+                    </a:solidFill>
+                    <a:effectLst/>
+                    <a:latin typeface="+mn-lt"/>
+                    <a:ea typeface="+mn-ea"/>
+                    <a:cs typeface="+mn-cs"/>
+                  </a:rPr>
+                  <a:t>Dữ liệu được chia theo batch với kích thước </a:t>
+                </a:r>
+                <a:r>
+                  <a:rPr lang="vi-VN" sz="1200" i="0" kern="1200">
+                    <a:solidFill>
+                      <a:schemeClr val="tx1"/>
+                    </a:solidFill>
+                    <a:effectLst/>
+                    <a:latin typeface="+mn-lt"/>
+                    <a:ea typeface="+mn-ea"/>
+                    <a:cs typeface="+mn-cs"/>
+                  </a:rPr>
+                  <a:t>1500</a:t>
+                </a:r>
+                <a:r>
+                  <a:rPr lang="vi-VN" sz="1200" kern="1200" dirty="0">
+                    <a:solidFill>
+                      <a:schemeClr val="tx1"/>
+                    </a:solidFill>
+                    <a:effectLst/>
+                    <a:latin typeface="+mn-lt"/>
+                    <a:ea typeface="+mn-ea"/>
+                    <a:cs typeface="+mn-cs"/>
+                  </a:rPr>
+                  <a:t>, và toàn bộ quá trình huấn luyện được thực hiện trên GPU (CUDA) nhằm tăng tốc độ tính toán.</a:t>
+                </a:r>
+                <a:endParaRPr lang="en-US" sz="1200" kern="1200" dirty="0">
+                  <a:solidFill>
+                    <a:schemeClr val="tx1"/>
+                  </a:solidFill>
+                  <a:effectLst/>
+                  <a:latin typeface="+mn-lt"/>
+                  <a:ea typeface="+mn-ea"/>
+                  <a:cs typeface="+mn-cs"/>
+                </a:endParaRPr>
+              </a:p>
+              <a:p>
+                <a:r>
+                  <a:rPr lang="vi-VN" sz="1200" kern="1200" dirty="0">
+                    <a:solidFill>
+                      <a:schemeClr val="tx1"/>
+                    </a:solidFill>
+                    <a:effectLst/>
+                    <a:latin typeface="+mn-lt"/>
+                    <a:ea typeface="+mn-ea"/>
+                    <a:cs typeface="+mn-cs"/>
+                  </a:rPr>
+                  <a:t>Về kiến trúc mô hình, vector embedding của encoder và decoder đều có kích thước </a:t>
+                </a:r>
+                <a:r>
+                  <a:rPr lang="vi-VN" sz="1200" i="0" kern="1200">
+                    <a:solidFill>
+                      <a:schemeClr val="tx1"/>
+                    </a:solidFill>
+                    <a:effectLst/>
+                    <a:latin typeface="+mn-lt"/>
+                    <a:ea typeface="+mn-ea"/>
+                    <a:cs typeface="+mn-cs"/>
+                  </a:rPr>
+                  <a:t>256</a:t>
+                </a:r>
+                <a:r>
+                  <a:rPr lang="vi-VN" sz="1200" kern="1200" dirty="0">
+                    <a:solidFill>
+                      <a:schemeClr val="tx1"/>
+                    </a:solidFill>
+                    <a:effectLst/>
+                    <a:latin typeface="+mn-lt"/>
+                    <a:ea typeface="+mn-ea"/>
+                    <a:cs typeface="+mn-cs"/>
+                  </a:rPr>
+                  <a:t> chiều, trong khi hidden state được thiết lập ở mức </a:t>
+                </a:r>
+                <a:r>
+                  <a:rPr lang="vi-VN" sz="1200" i="0" kern="1200">
+                    <a:solidFill>
+                      <a:schemeClr val="tx1"/>
+                    </a:solidFill>
+                    <a:effectLst/>
+                    <a:latin typeface="+mn-lt"/>
+                    <a:ea typeface="+mn-ea"/>
+                    <a:cs typeface="+mn-cs"/>
+                  </a:rPr>
+                  <a:t>512</a:t>
+                </a:r>
+                <a:r>
+                  <a:rPr lang="vi-VN" sz="1200" kern="1200" dirty="0">
+                    <a:solidFill>
+                      <a:schemeClr val="tx1"/>
+                    </a:solidFill>
+                    <a:effectLst/>
+                    <a:latin typeface="+mn-lt"/>
+                    <a:ea typeface="+mn-ea"/>
+                    <a:cs typeface="+mn-cs"/>
+                  </a:rPr>
+                  <a:t> chiều. Mô hình bao gồm </a:t>
+                </a:r>
+                <a:r>
+                  <a:rPr lang="vi-VN" sz="1200" i="0" kern="1200">
+                    <a:solidFill>
+                      <a:schemeClr val="tx1"/>
+                    </a:solidFill>
+                    <a:effectLst/>
+                    <a:latin typeface="+mn-lt"/>
+                    <a:ea typeface="+mn-ea"/>
+                    <a:cs typeface="+mn-cs"/>
+                  </a:rPr>
+                  <a:t>2</a:t>
+                </a:r>
+                <a:r>
+                  <a:rPr lang="vi-VN" sz="1200" kern="1200" dirty="0">
+                    <a:solidFill>
+                      <a:schemeClr val="tx1"/>
+                    </a:solidFill>
+                    <a:effectLst/>
+                    <a:latin typeface="+mn-lt"/>
+                    <a:ea typeface="+mn-ea"/>
+                    <a:cs typeface="+mn-cs"/>
+                  </a:rPr>
+                  <a:t> lớp (layers) cho cả encoder và decoder. Để giảm hiện tượng overfitting, dropout được áp dụng với tỷ lệ </a:t>
+                </a:r>
+                <a:r>
+                  <a:rPr lang="vi-VN" sz="1200" i="0" kern="1200">
+                    <a:solidFill>
+                      <a:schemeClr val="tx1"/>
+                    </a:solidFill>
+                    <a:effectLst/>
+                    <a:latin typeface="+mn-lt"/>
+                    <a:ea typeface="+mn-ea"/>
+                    <a:cs typeface="+mn-cs"/>
+                  </a:rPr>
+                  <a:t>0.5</a:t>
+                </a:r>
+                <a:r>
+                  <a:rPr lang="vi-VN" sz="1200" kern="1200" dirty="0">
+                    <a:solidFill>
+                      <a:schemeClr val="tx1"/>
+                    </a:solidFill>
+                    <a:effectLst/>
+                    <a:latin typeface="+mn-lt"/>
+                    <a:ea typeface="+mn-ea"/>
+                    <a:cs typeface="+mn-cs"/>
+                  </a:rPr>
+                  <a:t> cho cả hai phía encoder và decoder.</a:t>
+                </a:r>
+                <a:endParaRPr lang="en-US" sz="1200" kern="1200" dirty="0">
+                  <a:solidFill>
+                    <a:schemeClr val="tx1"/>
+                  </a:solidFill>
+                  <a:effectLst/>
+                  <a:latin typeface="+mn-lt"/>
+                  <a:ea typeface="+mn-ea"/>
+                  <a:cs typeface="+mn-cs"/>
+                </a:endParaRPr>
+              </a:p>
+              <a:p>
+                <a:r>
+                  <a:rPr lang="vi-VN" sz="1200" kern="1200" dirty="0">
+                    <a:solidFill>
+                      <a:schemeClr val="tx1"/>
+                    </a:solidFill>
+                    <a:effectLst/>
+                    <a:latin typeface="+mn-lt"/>
+                    <a:ea typeface="+mn-ea"/>
+                    <a:cs typeface="+mn-cs"/>
+                  </a:rPr>
+                  <a:t>Quá trình tối ưu sử dụng learning rate </a:t>
+                </a:r>
+                <a:r>
+                  <a:rPr lang="vi-VN" sz="1200" i="0" kern="1200">
+                    <a:solidFill>
+                      <a:schemeClr val="tx1"/>
+                    </a:solidFill>
+                    <a:effectLst/>
+                    <a:latin typeface="+mn-lt"/>
+                    <a:ea typeface="+mn-ea"/>
+                    <a:cs typeface="+mn-cs"/>
+                  </a:rPr>
+                  <a:t>0.001</a:t>
+                </a:r>
+                <a:r>
+                  <a:rPr lang="vi-VN" sz="1200" kern="1200" dirty="0">
+                    <a:solidFill>
+                      <a:schemeClr val="tx1"/>
+                    </a:solidFill>
+                    <a:effectLst/>
+                    <a:latin typeface="+mn-lt"/>
+                    <a:ea typeface="+mn-ea"/>
+                    <a:cs typeface="+mn-cs"/>
+                  </a:rPr>
+                  <a:t>, với tổng số </a:t>
+                </a:r>
+                <a:r>
+                  <a:rPr lang="vi-VN" sz="1200" i="0" kern="1200">
+                    <a:solidFill>
+                      <a:schemeClr val="tx1"/>
+                    </a:solidFill>
+                    <a:effectLst/>
+                    <a:latin typeface="+mn-lt"/>
+                    <a:ea typeface="+mn-ea"/>
+                    <a:cs typeface="+mn-cs"/>
+                  </a:rPr>
+                  <a:t>11</a:t>
+                </a:r>
+                <a:r>
+                  <a:rPr lang="vi-VN" sz="1200" kern="1200" dirty="0">
+                    <a:solidFill>
+                      <a:schemeClr val="tx1"/>
+                    </a:solidFill>
+                    <a:effectLst/>
+                    <a:latin typeface="+mn-lt"/>
+                    <a:ea typeface="+mn-ea"/>
+                    <a:cs typeface="+mn-cs"/>
+                  </a:rPr>
+                  <a:t> epochs huấn luyện. Ngoài ra, gradient clipping với giá trị </a:t>
+                </a:r>
+                <a:r>
+                  <a:rPr lang="vi-VN" sz="1200" i="0" kern="1200">
+                    <a:solidFill>
+                      <a:schemeClr val="tx1"/>
+                    </a:solidFill>
+                    <a:effectLst/>
+                    <a:latin typeface="+mn-lt"/>
+                    <a:ea typeface="+mn-ea"/>
+                    <a:cs typeface="+mn-cs"/>
+                  </a:rPr>
+                  <a:t>1.0</a:t>
+                </a:r>
+                <a:r>
+                  <a:rPr lang="vi-VN" sz="1200" kern="1200" dirty="0">
+                    <a:solidFill>
+                      <a:schemeClr val="tx1"/>
+                    </a:solidFill>
+                    <a:effectLst/>
+                    <a:latin typeface="+mn-lt"/>
+                    <a:ea typeface="+mn-ea"/>
+                    <a:cs typeface="+mn-cs"/>
+                  </a:rPr>
+                  <a:t> được áp dụng nhằm ổn định quá trình lan truyền ngược. Trong quá trình huấn luyện, kỹ thuật teacher forcing được sử dụng với tỷ lệ </a:t>
+                </a:r>
+                <a:r>
+                  <a:rPr lang="vi-VN" sz="1200" i="0" kern="1200">
+                    <a:solidFill>
+                      <a:schemeClr val="tx1"/>
+                    </a:solidFill>
+                    <a:effectLst/>
+                    <a:latin typeface="+mn-lt"/>
+                    <a:ea typeface="+mn-ea"/>
+                    <a:cs typeface="+mn-cs"/>
+                  </a:rPr>
+                  <a:t>0.5</a:t>
+                </a:r>
+                <a:r>
+                  <a:rPr lang="vi-VN" sz="1200" kern="1200" dirty="0">
+                    <a:solidFill>
+                      <a:schemeClr val="tx1"/>
+                    </a:solidFill>
+                    <a:effectLst/>
+                    <a:latin typeface="+mn-lt"/>
+                    <a:ea typeface="+mn-ea"/>
+                    <a:cs typeface="+mn-cs"/>
+                  </a:rPr>
+                  <a:t> để cải thiện khả năng hội tụ của mô hình.</a:t>
+                </a:r>
+                <a:endParaRPr lang="en-US" sz="1200" kern="1200" dirty="0">
+                  <a:solidFill>
+                    <a:schemeClr val="tx1"/>
+                  </a:solidFill>
+                  <a:effectLst/>
+                  <a:latin typeface="+mn-lt"/>
+                  <a:ea typeface="+mn-ea"/>
+                  <a:cs typeface="+mn-cs"/>
+                </a:endParaRPr>
+              </a:p>
+              <a:p>
+                <a:r>
+                  <a:rPr lang="vi-VN" sz="1200" kern="1200" dirty="0">
+                    <a:solidFill>
+                      <a:schemeClr val="tx1"/>
+                    </a:solidFill>
+                    <a:effectLst/>
+                    <a:latin typeface="+mn-lt"/>
+                    <a:ea typeface="+mn-ea"/>
+                    <a:cs typeface="+mn-cs"/>
+                  </a:rPr>
+                  <a:t> </a:t>
+                </a:r>
+                <a:endParaRPr lang="en-US" sz="1200" kern="1200" dirty="0">
+                  <a:solidFill>
+                    <a:schemeClr val="tx1"/>
+                  </a:solidFill>
+                  <a:effectLst/>
+                  <a:latin typeface="+mn-lt"/>
+                  <a:ea typeface="+mn-ea"/>
+                  <a:cs typeface="+mn-cs"/>
+                </a:endParaRPr>
+              </a:p>
+              <a:p>
+                <a:r>
+                  <a:rPr lang="vi-VN" sz="1200" kern="1200" dirty="0">
+                    <a:solidFill>
+                      <a:schemeClr val="tx1"/>
+                    </a:solidFill>
+                    <a:effectLst/>
+                    <a:latin typeface="+mn-lt"/>
+                    <a:ea typeface="+mn-ea"/>
+                    <a:cs typeface="+mn-cs"/>
+                  </a:rPr>
+                  <a:t>Kết quả thử nghiệm: BLEU trên tập Test = 0.</a:t>
+                </a:r>
+                <a:r>
+                  <a:rPr lang="vi-VN" sz="1200" i="0" kern="1200">
+                    <a:solidFill>
+                      <a:schemeClr val="tx1"/>
+                    </a:solidFill>
+                    <a:effectLst/>
+                    <a:latin typeface="+mn-lt"/>
+                    <a:ea typeface="+mn-ea"/>
+                    <a:cs typeface="+mn-cs"/>
+                  </a:rPr>
+                  <a:t>0378</a:t>
+                </a:r>
+                <a:endParaRPr lang="en-US" sz="1200" kern="1200" dirty="0">
+                  <a:solidFill>
+                    <a:schemeClr val="tx1"/>
+                  </a:solidFill>
+                  <a:effectLst/>
+                  <a:latin typeface="+mn-lt"/>
+                  <a:ea typeface="+mn-ea"/>
+                  <a:cs typeface="+mn-cs"/>
+                </a:endParaRPr>
+              </a:p>
+            </p:txBody>
+          </p:sp>
+        </mc:Fallback>
+      </mc:AlternateContent>
+      <p:sp>
+        <p:nvSpPr>
+          <p:cNvPr id="4" name="Slide Number Placeholder 3">
+            <a:extLst>
+              <a:ext uri="{FF2B5EF4-FFF2-40B4-BE49-F238E27FC236}">
+                <a16:creationId xmlns:a16="http://schemas.microsoft.com/office/drawing/2014/main" id="{23BA2642-59EF-0201-31A5-C1055B59AD44}"/>
+              </a:ext>
+            </a:extLst>
+          </p:cNvPr>
+          <p:cNvSpPr>
+            <a:spLocks noGrp="1"/>
+          </p:cNvSpPr>
+          <p:nvPr>
+            <p:ph type="sldNum" sz="quarter" idx="5"/>
+          </p:nvPr>
+        </p:nvSpPr>
+        <p:spPr/>
+        <p:txBody>
+          <a:bodyPr/>
+          <a:lstStyle/>
+          <a:p>
+            <a:fld id="{871B2431-D351-4C6E-A3CF-9DFAC0E3E050}" type="slidenum">
+              <a:rPr lang="cs-CZ" smtClean="0"/>
+              <a:t>19</a:t>
+            </a:fld>
+            <a:endParaRPr lang="cs-CZ"/>
+          </a:p>
+        </p:txBody>
+      </p:sp>
+    </p:spTree>
+    <p:extLst>
+      <p:ext uri="{BB962C8B-B14F-4D97-AF65-F5344CB8AC3E}">
+        <p14:creationId xmlns:p14="http://schemas.microsoft.com/office/powerpoint/2010/main" val="1337619662"/>
+      </p:ext>
+    </p:extLst>
+  </p:cSld>
+  <p:clrMapOvr>
+    <a:masterClrMapping/>
+  </p:clrMapOvr>
+</p:notes>
+</file>
+
+<file path=ppt/notesSlides/notesSlide6.xml><?xml version="1.0" encoding="utf-8"?>
+<p:notes xmlns:a="http://schemas.openxmlformats.org/drawingml/2006/main" xmlns:r="http://schemas.openxmlformats.org/officeDocument/2006/relationships" xmlns:p="http://schemas.openxmlformats.org/presentationml/2006/main">
+  <p:cSld>
+    <p:spTree>
+      <p:nvGrpSpPr>
+        <p:cNvPr id="1" name="">
+          <a:extLst>
+            <a:ext uri="{FF2B5EF4-FFF2-40B4-BE49-F238E27FC236}">
+              <a16:creationId xmlns:a16="http://schemas.microsoft.com/office/drawing/2014/main" id="{0F9601A6-2650-BBB0-2A98-07A57EA9FA1A}"/>
+            </a:ext>
+          </a:extLst>
+        </p:cNvPr>
+        <p:cNvGrpSpPr/>
+        <p:nvPr/>
+      </p:nvGrpSpPr>
+      <p:grpSpPr>
+        <a:xfrm>
+          <a:off x="0" y="0"/>
+          <a:ext cx="0" cy="0"/>
+          <a:chOff x="0" y="0"/>
+          <a:chExt cx="0" cy="0"/>
+        </a:xfrm>
+      </p:grpSpPr>
+      <p:sp>
+        <p:nvSpPr>
+          <p:cNvPr id="2" name="Slide Image Placeholder 1">
+            <a:extLst>
+              <a:ext uri="{FF2B5EF4-FFF2-40B4-BE49-F238E27FC236}">
+                <a16:creationId xmlns:a16="http://schemas.microsoft.com/office/drawing/2014/main" id="{1CEE7A31-810B-36AF-4676-6526FF810ACA}"/>
+              </a:ext>
+            </a:extLst>
+          </p:cNvPr>
+          <p:cNvSpPr>
+            <a:spLocks noGrp="1" noRot="1" noChangeAspect="1"/>
+          </p:cNvSpPr>
+          <p:nvPr>
+            <p:ph type="sldImg"/>
+          </p:nvPr>
+        </p:nvSpPr>
+        <p:spPr>
+          <a:xfrm>
+            <a:off x="2292350" y="512763"/>
+            <a:ext cx="4559300" cy="2566987"/>
+          </a:xfrm>
+        </p:spPr>
+      </p:sp>
+      <p:sp>
+        <p:nvSpPr>
+          <p:cNvPr id="3" name="Notes Placeholder 2">
+            <a:extLst>
+              <a:ext uri="{FF2B5EF4-FFF2-40B4-BE49-F238E27FC236}">
+                <a16:creationId xmlns:a16="http://schemas.microsoft.com/office/drawing/2014/main" id="{71A04416-7F5E-89C1-5CB4-F3268C5E5048}"/>
+              </a:ext>
+            </a:extLst>
+          </p:cNvPr>
+          <p:cNvSpPr>
+            <a:spLocks noGrp="1"/>
+          </p:cNvSpPr>
+          <p:nvPr>
+            <p:ph type="body" idx="1"/>
+          </p:nvPr>
+        </p:nvSpPr>
+        <p:spPr/>
+        <p:txBody>
+          <a:bodyPr/>
+          <a:lstStyle/>
+          <a:p>
+            <a:r>
+              <a:rPr lang="vi-VN" sz="1200" kern="1200" dirty="0">
+                <a:solidFill>
+                  <a:schemeClr val="tx1"/>
+                </a:solidFill>
+                <a:effectLst/>
+                <a:latin typeface="+mn-lt"/>
+                <a:ea typeface="+mn-ea"/>
+                <a:cs typeface="+mn-cs"/>
+              </a:rPr>
+              <a:t>Mô hình Transformer trong kịch bản thử nghiệm thứ 1 được xây dựng với các tham số như sau:</a:t>
+            </a:r>
+            <a:endParaRPr lang="en-US" sz="1200" kern="1200" dirty="0">
+              <a:solidFill>
+                <a:schemeClr val="tx1"/>
+              </a:solidFill>
+              <a:effectLst/>
+              <a:latin typeface="+mn-lt"/>
+              <a:ea typeface="+mn-ea"/>
+              <a:cs typeface="+mn-cs"/>
+            </a:endParaRPr>
+          </a:p>
+          <a:p>
+            <a:pPr marL="171450" lvl="0" indent="-171450">
+              <a:buFont typeface="Arial" panose="020B0604020202020204" pitchFamily="34" charset="0"/>
+              <a:buChar char="•"/>
+            </a:pPr>
+            <a:r>
+              <a:rPr lang="vi-VN" sz="1200" kern="1200" dirty="0">
+                <a:solidFill>
+                  <a:schemeClr val="tx1"/>
+                </a:solidFill>
+                <a:effectLst/>
+                <a:latin typeface="+mn-lt"/>
+                <a:ea typeface="+mn-ea"/>
+                <a:cs typeface="+mn-cs"/>
+              </a:rPr>
+              <a:t>Ngôn ngữ nguồn được xử lý bằng tokenizer en_core_web_sm, trong khi ngôn ngữ đích sử dụng vi_core_news_lg từ thư viện spaCy nhằm phục vụ quá trình tách từ và tiền xử lý văn bản.</a:t>
+            </a:r>
+            <a:endParaRPr lang="en-US" sz="1200" kern="1200" dirty="0">
+              <a:solidFill>
+                <a:schemeClr val="tx1"/>
+              </a:solidFill>
+              <a:effectLst/>
+              <a:latin typeface="+mn-lt"/>
+              <a:ea typeface="+mn-ea"/>
+              <a:cs typeface="+mn-cs"/>
+            </a:endParaRPr>
+          </a:p>
+          <a:p>
+            <a:pPr marL="171450" lvl="0" indent="-171450">
+              <a:buFont typeface="Arial" panose="020B0604020202020204" pitchFamily="34" charset="0"/>
+              <a:buChar char="•"/>
+            </a:pPr>
+            <a:r>
+              <a:rPr lang="vi-VN" sz="1200" kern="1200" dirty="0">
+                <a:solidFill>
+                  <a:schemeClr val="tx1"/>
+                </a:solidFill>
+                <a:effectLst/>
+                <a:latin typeface="+mn-lt"/>
+                <a:ea typeface="+mn-ea"/>
+                <a:cs typeface="+mn-cs"/>
+              </a:rPr>
+              <a:t>Độ dài tối đa của câu được giới hạn ở 160 token, giúp kiểm soát chi phí tính toán và tránh các chuỗi quá dài trong quá trình huấn luyện. Dữ liệu được chia theo batch với kích thước 1500 token, và toàn bộ quá trình huấn luyện được thực hiện trên GPU (CUDA) để tăng tốc độ xử lý.</a:t>
+            </a:r>
+            <a:endParaRPr lang="en-US" sz="1200" kern="1200" dirty="0">
+              <a:solidFill>
+                <a:schemeClr val="tx1"/>
+              </a:solidFill>
+              <a:effectLst/>
+              <a:latin typeface="+mn-lt"/>
+              <a:ea typeface="+mn-ea"/>
+              <a:cs typeface="+mn-cs"/>
+            </a:endParaRPr>
+          </a:p>
+          <a:p>
+            <a:pPr marL="171450" lvl="0" indent="-171450">
+              <a:buFont typeface="Arial" panose="020B0604020202020204" pitchFamily="34" charset="0"/>
+              <a:buChar char="•"/>
+            </a:pPr>
+            <a:r>
+              <a:rPr lang="vi-VN" sz="1200" kern="1200" dirty="0">
+                <a:solidFill>
+                  <a:schemeClr val="tx1"/>
+                </a:solidFill>
+                <a:effectLst/>
+                <a:latin typeface="+mn-lt"/>
+                <a:ea typeface="+mn-ea"/>
+                <a:cs typeface="+mn-cs"/>
+              </a:rPr>
+              <a:t>Về kiến trúc mô hình, Transformer sử dụng vector embedding với kích thước d_model = 512, gồm 6 lớp (layers) và 8 attention heads. Tỷ lệ dropout được thiết lập ở mức 0.1 nhằm giảm hiện tượng overfitting và cải thiện khả năng tổng quát hóa của mô hình.</a:t>
+            </a:r>
+            <a:endParaRPr lang="en-US" sz="1200" kern="1200" dirty="0">
+              <a:solidFill>
+                <a:schemeClr val="tx1"/>
+              </a:solidFill>
+              <a:effectLst/>
+              <a:latin typeface="+mn-lt"/>
+              <a:ea typeface="+mn-ea"/>
+              <a:cs typeface="+mn-cs"/>
+            </a:endParaRPr>
+          </a:p>
+          <a:p>
+            <a:pPr marL="171450" lvl="0" indent="-171450">
+              <a:buFont typeface="Arial" panose="020B0604020202020204" pitchFamily="34" charset="0"/>
+              <a:buChar char="•"/>
+            </a:pPr>
+            <a:r>
+              <a:rPr lang="vi-VN" sz="1200" kern="1200" dirty="0">
+                <a:solidFill>
+                  <a:schemeClr val="tx1"/>
+                </a:solidFill>
+                <a:effectLst/>
+                <a:latin typeface="+mn-lt"/>
+                <a:ea typeface="+mn-ea"/>
+                <a:cs typeface="+mn-cs"/>
+              </a:rPr>
+              <a:t>Quá trình tối ưu sử dụng learning rate 0.0001 với tổng số 12 epochs huấn luyện. Trong giai đoạn suy luận, phương pháp beam search được áp dụng với beam size k = 5, giúp mô hình xem xét nhiều phương án đầu ra đồng thời và cải thiện chất lượng bản dịch.</a:t>
+            </a:r>
+            <a:endParaRPr lang="en-US" sz="1200" kern="1200" dirty="0">
+              <a:solidFill>
+                <a:schemeClr val="tx1"/>
+              </a:solidFill>
+              <a:effectLst/>
+              <a:latin typeface="+mn-lt"/>
+              <a:ea typeface="+mn-ea"/>
+              <a:cs typeface="+mn-cs"/>
+            </a:endParaRPr>
+          </a:p>
+          <a:p>
+            <a:r>
+              <a:rPr lang="vi-VN" sz="1200" kern="1200" dirty="0">
+                <a:solidFill>
+                  <a:schemeClr val="tx1"/>
+                </a:solidFill>
+                <a:effectLst/>
+                <a:latin typeface="+mn-lt"/>
+                <a:ea typeface="+mn-ea"/>
+                <a:cs typeface="+mn-cs"/>
+              </a:rPr>
+              <a:t> </a:t>
+            </a:r>
+            <a:endParaRPr lang="en-US" sz="1200" kern="1200" dirty="0">
+              <a:solidFill>
+                <a:schemeClr val="tx1"/>
+              </a:solidFill>
+              <a:effectLst/>
+              <a:latin typeface="+mn-lt"/>
+              <a:ea typeface="+mn-ea"/>
+              <a:cs typeface="+mn-cs"/>
+            </a:endParaRPr>
+          </a:p>
+          <a:p>
+            <a:r>
+              <a:rPr lang="vi-VN" sz="1200" kern="1200" dirty="0">
+                <a:solidFill>
+                  <a:schemeClr val="tx1"/>
+                </a:solidFill>
+                <a:effectLst/>
+                <a:latin typeface="+mn-lt"/>
+                <a:ea typeface="+mn-ea"/>
+                <a:cs typeface="+mn-cs"/>
+              </a:rPr>
+              <a:t>Kết quả thử nghiệm: BLEU trên tập Test = 0.1128</a:t>
+            </a:r>
+            <a:endParaRPr lang="en-US" sz="1200" kern="1200" dirty="0">
+              <a:solidFill>
+                <a:schemeClr val="tx1"/>
+              </a:solidFill>
+              <a:effectLst/>
+              <a:latin typeface="+mn-lt"/>
+              <a:ea typeface="+mn-ea"/>
+              <a:cs typeface="+mn-cs"/>
+            </a:endParaRPr>
+          </a:p>
+        </p:txBody>
+      </p:sp>
+      <p:sp>
+        <p:nvSpPr>
+          <p:cNvPr id="4" name="Slide Number Placeholder 3">
+            <a:extLst>
+              <a:ext uri="{FF2B5EF4-FFF2-40B4-BE49-F238E27FC236}">
+                <a16:creationId xmlns:a16="http://schemas.microsoft.com/office/drawing/2014/main" id="{AA7D0F15-4261-580A-1820-74272BB9B54C}"/>
+              </a:ext>
+            </a:extLst>
+          </p:cNvPr>
+          <p:cNvSpPr>
+            <a:spLocks noGrp="1"/>
+          </p:cNvSpPr>
+          <p:nvPr>
+            <p:ph type="sldNum" sz="quarter" idx="5"/>
+          </p:nvPr>
+        </p:nvSpPr>
+        <p:spPr/>
+        <p:txBody>
+          <a:bodyPr/>
+          <a:lstStyle/>
+          <a:p>
+            <a:fld id="{871B2431-D351-4C6E-A3CF-9DFAC0E3E050}" type="slidenum">
+              <a:rPr lang="cs-CZ" smtClean="0"/>
+              <a:t>20</a:t>
+            </a:fld>
+            <a:endParaRPr lang="cs-CZ"/>
+          </a:p>
+        </p:txBody>
+      </p:sp>
+    </p:spTree>
+    <p:extLst>
+      <p:ext uri="{BB962C8B-B14F-4D97-AF65-F5344CB8AC3E}">
+        <p14:creationId xmlns:p14="http://schemas.microsoft.com/office/powerpoint/2010/main" val="3562584422"/>
+      </p:ext>
+    </p:extLst>
+  </p:cSld>
+  <p:clrMapOvr>
+    <a:masterClrMapping/>
+  </p:clrMapOvr>
+</p:notes>
+</file>
+
+<file path=ppt/notesSlides/notesSlide7.xml><?xml version="1.0" encoding="utf-8"?>
+<p:notes xmlns:a="http://schemas.openxmlformats.org/drawingml/2006/main" xmlns:r="http://schemas.openxmlformats.org/officeDocument/2006/relationships" xmlns:p="http://schemas.openxmlformats.org/presentationml/2006/main">
+  <p:cSld>
+    <p:spTree>
+      <p:nvGrpSpPr>
+        <p:cNvPr id="1" name="">
+          <a:extLst>
+            <a:ext uri="{FF2B5EF4-FFF2-40B4-BE49-F238E27FC236}">
+              <a16:creationId xmlns:a16="http://schemas.microsoft.com/office/drawing/2014/main" id="{35C0664A-366F-9D0B-D3B8-AC0B2AF47E37}"/>
+            </a:ext>
+          </a:extLst>
+        </p:cNvPr>
+        <p:cNvGrpSpPr/>
+        <p:nvPr/>
+      </p:nvGrpSpPr>
+      <p:grpSpPr>
+        <a:xfrm>
+          <a:off x="0" y="0"/>
+          <a:ext cx="0" cy="0"/>
+          <a:chOff x="0" y="0"/>
+          <a:chExt cx="0" cy="0"/>
+        </a:xfrm>
+      </p:grpSpPr>
+      <p:sp>
+        <p:nvSpPr>
+          <p:cNvPr id="2" name="Slide Image Placeholder 1">
+            <a:extLst>
+              <a:ext uri="{FF2B5EF4-FFF2-40B4-BE49-F238E27FC236}">
+                <a16:creationId xmlns:a16="http://schemas.microsoft.com/office/drawing/2014/main" id="{AD158B47-0F7A-216F-31E1-F33C4573F4C8}"/>
+              </a:ext>
+            </a:extLst>
+          </p:cNvPr>
+          <p:cNvSpPr>
+            <a:spLocks noGrp="1" noRot="1" noChangeAspect="1"/>
+          </p:cNvSpPr>
+          <p:nvPr>
+            <p:ph type="sldImg"/>
+          </p:nvPr>
+        </p:nvSpPr>
+        <p:spPr>
+          <a:xfrm>
+            <a:off x="2292350" y="512763"/>
+            <a:ext cx="4559300" cy="2566987"/>
+          </a:xfrm>
+        </p:spPr>
+      </p:sp>
+      <p:sp>
+        <p:nvSpPr>
+          <p:cNvPr id="3" name="Notes Placeholder 2">
+            <a:extLst>
+              <a:ext uri="{FF2B5EF4-FFF2-40B4-BE49-F238E27FC236}">
+                <a16:creationId xmlns:a16="http://schemas.microsoft.com/office/drawing/2014/main" id="{2A1056AB-D334-3FA3-FA2D-F15915D3CE73}"/>
+              </a:ext>
+            </a:extLst>
+          </p:cNvPr>
+          <p:cNvSpPr>
+            <a:spLocks noGrp="1"/>
+          </p:cNvSpPr>
+          <p:nvPr>
+            <p:ph type="body" idx="1"/>
+          </p:nvPr>
+        </p:nvSpPr>
+        <p:spPr/>
+        <p:txBody>
+          <a:bodyPr/>
+          <a:lstStyle/>
+          <a:p>
+            <a:r>
+              <a:rPr lang="vi-VN" sz="1200" kern="1200" dirty="0">
+                <a:solidFill>
+                  <a:schemeClr val="tx1"/>
+                </a:solidFill>
+                <a:effectLst/>
+                <a:latin typeface="+mn-lt"/>
+                <a:ea typeface="+mn-ea"/>
+                <a:cs typeface="+mn-cs"/>
+              </a:rPr>
+              <a:t>Sử dụng mô hình transformer với các tham số như sau:</a:t>
+            </a:r>
+            <a:endParaRPr lang="en-US" sz="1200" kern="1200" dirty="0">
+              <a:solidFill>
+                <a:schemeClr val="tx1"/>
+              </a:solidFill>
+              <a:effectLst/>
+              <a:latin typeface="+mn-lt"/>
+              <a:ea typeface="+mn-ea"/>
+              <a:cs typeface="+mn-cs"/>
+            </a:endParaRPr>
+          </a:p>
+          <a:p>
+            <a:pPr marL="171450" lvl="0" indent="-171450">
+              <a:buFont typeface="Arial" panose="020B0604020202020204" pitchFamily="34" charset="0"/>
+              <a:buChar char="•"/>
+            </a:pPr>
+            <a:r>
+              <a:rPr lang="vi-VN" sz="1200" kern="1200" dirty="0">
+                <a:solidFill>
+                  <a:schemeClr val="tx1"/>
+                </a:solidFill>
+                <a:effectLst/>
+                <a:latin typeface="+mn-lt"/>
+                <a:ea typeface="+mn-ea"/>
+                <a:cs typeface="+mn-cs"/>
+              </a:rPr>
+              <a:t>Ngôn ngữ nguồn được xử lý bằng tokenizer en_core_web_sm, trong khi ngôn ngữ đích sử dụng tokenizer vi_core_news_lg từ thư viện spaCy nhằm thực hiện tách từ và tiền xử lý văn bản.</a:t>
+            </a:r>
+            <a:endParaRPr lang="en-US" sz="1200" kern="1200" dirty="0">
+              <a:solidFill>
+                <a:schemeClr val="tx1"/>
+              </a:solidFill>
+              <a:effectLst/>
+              <a:latin typeface="+mn-lt"/>
+              <a:ea typeface="+mn-ea"/>
+              <a:cs typeface="+mn-cs"/>
+            </a:endParaRPr>
+          </a:p>
+          <a:p>
+            <a:pPr marL="171450" lvl="0" indent="-171450">
+              <a:buFont typeface="Arial" panose="020B0604020202020204" pitchFamily="34" charset="0"/>
+              <a:buChar char="•"/>
+            </a:pPr>
+            <a:r>
+              <a:rPr lang="vi-VN" sz="1200" kern="1200" dirty="0">
+                <a:solidFill>
+                  <a:schemeClr val="tx1"/>
+                </a:solidFill>
+                <a:effectLst/>
+                <a:latin typeface="+mn-lt"/>
+                <a:ea typeface="+mn-ea"/>
+                <a:cs typeface="+mn-cs"/>
+              </a:rPr>
+              <a:t>Độ dài tối đa của câu được giới hạn ở 160 token, nhằm kiểm soát chi phí tính toán và tránh xử lý các chuỗi quá dài. Dữ liệu được chia theo batch với kích thước 1500 token, và toàn bộ quá trình huấn luyện được thực hiện trên GPU (CUDA) để tăng tốc độ xử lý.</a:t>
+            </a:r>
+            <a:endParaRPr lang="en-US" sz="1200" kern="1200" dirty="0">
+              <a:solidFill>
+                <a:schemeClr val="tx1"/>
+              </a:solidFill>
+              <a:effectLst/>
+              <a:latin typeface="+mn-lt"/>
+              <a:ea typeface="+mn-ea"/>
+              <a:cs typeface="+mn-cs"/>
+            </a:endParaRPr>
+          </a:p>
+          <a:p>
+            <a:pPr marL="171450" lvl="0" indent="-171450">
+              <a:buFont typeface="Arial" panose="020B0604020202020204" pitchFamily="34" charset="0"/>
+              <a:buChar char="•"/>
+            </a:pPr>
+            <a:r>
+              <a:rPr lang="vi-VN" sz="1200" kern="1200" dirty="0">
+                <a:solidFill>
+                  <a:schemeClr val="tx1"/>
+                </a:solidFill>
+                <a:effectLst/>
+                <a:latin typeface="+mn-lt"/>
+                <a:ea typeface="+mn-ea"/>
+                <a:cs typeface="+mn-cs"/>
+              </a:rPr>
+              <a:t>Về kiến trúc mô hình, Transformer sử dụng vector embedding với kích thước d_model = 512, gồm 8 lớp Encoder–Decoder (n_layers = 8) và 8 attention heads. Tỷ lệ dropout được thiết lập là 0.1 nhằm giảm hiện tượng overfitting và tăng khả năng tổng quát hóa của mô hình.</a:t>
+            </a:r>
+            <a:endParaRPr lang="en-US" sz="1200" kern="1200" dirty="0">
+              <a:solidFill>
+                <a:schemeClr val="tx1"/>
+              </a:solidFill>
+              <a:effectLst/>
+              <a:latin typeface="+mn-lt"/>
+              <a:ea typeface="+mn-ea"/>
+              <a:cs typeface="+mn-cs"/>
+            </a:endParaRPr>
+          </a:p>
+          <a:p>
+            <a:pPr marL="171450" lvl="0" indent="-171450">
+              <a:buFont typeface="Arial" panose="020B0604020202020204" pitchFamily="34" charset="0"/>
+              <a:buChar char="•"/>
+            </a:pPr>
+            <a:r>
+              <a:rPr lang="vi-VN" sz="1200" kern="1200" dirty="0">
+                <a:solidFill>
+                  <a:schemeClr val="tx1"/>
+                </a:solidFill>
+                <a:effectLst/>
+                <a:latin typeface="+mn-lt"/>
+                <a:ea typeface="+mn-ea"/>
+                <a:cs typeface="+mn-cs"/>
+              </a:rPr>
+              <a:t>Quá trình huấn luyện sử dụng learning rate 0.0001 với tổng số 12 epochs. Trong giai đoạn suy luận, phương pháp beam search được áp dụng với beam size k = 5, giúp mô hình xem xét nhiều phương án đầu ra và cải thiện chất lượng bản dịch.</a:t>
+            </a:r>
+            <a:endParaRPr lang="en-US" sz="1200" kern="1200" dirty="0">
+              <a:solidFill>
+                <a:schemeClr val="tx1"/>
+              </a:solidFill>
+              <a:effectLst/>
+              <a:latin typeface="+mn-lt"/>
+              <a:ea typeface="+mn-ea"/>
+              <a:cs typeface="+mn-cs"/>
+            </a:endParaRPr>
+          </a:p>
+          <a:p>
+            <a:pPr marL="0" indent="0">
+              <a:buFont typeface="Arial" panose="020B0604020202020204" pitchFamily="34" charset="0"/>
+              <a:buNone/>
+            </a:pPr>
+            <a:endParaRPr lang="en-US" sz="1200" kern="1200" dirty="0">
+              <a:solidFill>
+                <a:schemeClr val="tx1"/>
+              </a:solidFill>
+              <a:effectLst/>
+              <a:latin typeface="+mn-lt"/>
+              <a:ea typeface="+mn-ea"/>
+              <a:cs typeface="+mn-cs"/>
+            </a:endParaRPr>
+          </a:p>
+          <a:p>
+            <a:r>
+              <a:rPr lang="vi-VN" sz="1200" kern="1200" dirty="0">
+                <a:solidFill>
+                  <a:schemeClr val="tx1"/>
+                </a:solidFill>
+                <a:effectLst/>
+                <a:latin typeface="+mn-lt"/>
+                <a:ea typeface="+mn-ea"/>
+                <a:cs typeface="+mn-cs"/>
+              </a:rPr>
+              <a:t>Kết quả thử nghiệm: BLEU trên tập Test = 0.1092</a:t>
+            </a:r>
+            <a:endParaRPr lang="en-US" sz="1200" kern="1200" dirty="0">
+              <a:solidFill>
+                <a:schemeClr val="tx1"/>
+              </a:solidFill>
+              <a:effectLst/>
+              <a:latin typeface="+mn-lt"/>
+              <a:ea typeface="+mn-ea"/>
+              <a:cs typeface="+mn-cs"/>
+            </a:endParaRPr>
+          </a:p>
+        </p:txBody>
+      </p:sp>
+      <p:sp>
+        <p:nvSpPr>
+          <p:cNvPr id="4" name="Slide Number Placeholder 3">
+            <a:extLst>
+              <a:ext uri="{FF2B5EF4-FFF2-40B4-BE49-F238E27FC236}">
+                <a16:creationId xmlns:a16="http://schemas.microsoft.com/office/drawing/2014/main" id="{B454FA2D-9E16-EECD-23DC-468E87C59F3D}"/>
+              </a:ext>
+            </a:extLst>
+          </p:cNvPr>
+          <p:cNvSpPr>
+            <a:spLocks noGrp="1"/>
+          </p:cNvSpPr>
+          <p:nvPr>
+            <p:ph type="sldNum" sz="quarter" idx="5"/>
+          </p:nvPr>
+        </p:nvSpPr>
+        <p:spPr/>
+        <p:txBody>
+          <a:bodyPr/>
+          <a:lstStyle/>
+          <a:p>
+            <a:fld id="{871B2431-D351-4C6E-A3CF-9DFAC0E3E050}" type="slidenum">
+              <a:rPr lang="cs-CZ" smtClean="0"/>
+              <a:t>21</a:t>
+            </a:fld>
+            <a:endParaRPr lang="cs-CZ"/>
+          </a:p>
+        </p:txBody>
+      </p:sp>
+    </p:spTree>
+    <p:extLst>
+      <p:ext uri="{BB962C8B-B14F-4D97-AF65-F5344CB8AC3E}">
+        <p14:creationId xmlns:p14="http://schemas.microsoft.com/office/powerpoint/2010/main" val="1289950427"/>
+      </p:ext>
+    </p:extLst>
+  </p:cSld>
+  <p:clrMapOvr>
+    <a:masterClrMapping/>
+  </p:clrMapOvr>
+</p:notes>
+</file>
+
+<file path=ppt/notesSlides/notesSlide8.xml><?xml version="1.0" encoding="utf-8"?>
+<p:notes xmlns:a="http://schemas.openxmlformats.org/drawingml/2006/main" xmlns:r="http://schemas.openxmlformats.org/officeDocument/2006/relationships" xmlns:p="http://schemas.openxmlformats.org/presentationml/2006/main">
+  <p:cSld>
+    <p:spTree>
+      <p:nvGrpSpPr>
+        <p:cNvPr id="1" name="">
+          <a:extLst>
+            <a:ext uri="{FF2B5EF4-FFF2-40B4-BE49-F238E27FC236}">
+              <a16:creationId xmlns:a16="http://schemas.microsoft.com/office/drawing/2014/main" id="{8E4895C4-09A2-D560-B7D5-624774FD074F}"/>
+            </a:ext>
+          </a:extLst>
+        </p:cNvPr>
+        <p:cNvGrpSpPr/>
+        <p:nvPr/>
+      </p:nvGrpSpPr>
+      <p:grpSpPr>
+        <a:xfrm>
+          <a:off x="0" y="0"/>
+          <a:ext cx="0" cy="0"/>
+          <a:chOff x="0" y="0"/>
+          <a:chExt cx="0" cy="0"/>
+        </a:xfrm>
+      </p:grpSpPr>
+      <p:sp>
+        <p:nvSpPr>
+          <p:cNvPr id="2" name="Slide Image Placeholder 1">
+            <a:extLst>
+              <a:ext uri="{FF2B5EF4-FFF2-40B4-BE49-F238E27FC236}">
+                <a16:creationId xmlns:a16="http://schemas.microsoft.com/office/drawing/2014/main" id="{1034F8F4-66CA-C40D-AD71-A201957F7F29}"/>
+              </a:ext>
+            </a:extLst>
+          </p:cNvPr>
+          <p:cNvSpPr>
+            <a:spLocks noGrp="1" noRot="1" noChangeAspect="1"/>
+          </p:cNvSpPr>
+          <p:nvPr>
+            <p:ph type="sldImg"/>
+          </p:nvPr>
+        </p:nvSpPr>
+        <p:spPr>
+          <a:xfrm>
+            <a:off x="2292350" y="512763"/>
+            <a:ext cx="4559300" cy="2566987"/>
+          </a:xfrm>
+        </p:spPr>
+      </p:sp>
+      <p:sp>
+        <p:nvSpPr>
+          <p:cNvPr id="3" name="Notes Placeholder 2">
+            <a:extLst>
+              <a:ext uri="{FF2B5EF4-FFF2-40B4-BE49-F238E27FC236}">
+                <a16:creationId xmlns:a16="http://schemas.microsoft.com/office/drawing/2014/main" id="{466B3391-7E3E-872A-BAE0-0E7727DFC09A}"/>
+              </a:ext>
+            </a:extLst>
+          </p:cNvPr>
+          <p:cNvSpPr>
+            <a:spLocks noGrp="1"/>
+          </p:cNvSpPr>
+          <p:nvPr>
+            <p:ph type="body" idx="1"/>
+          </p:nvPr>
+        </p:nvSpPr>
+        <p:spPr/>
+        <p:txBody>
+          <a:bodyPr/>
+          <a:lstStyle/>
+          <a:p>
+            <a:pPr marL="171450" indent="-171450">
+              <a:buFont typeface="Arial" panose="020B0604020202020204" pitchFamily="34" charset="0"/>
+              <a:buChar char="•"/>
+            </a:pPr>
+            <a:endParaRPr lang="vi-VN" dirty="0"/>
+          </a:p>
+        </p:txBody>
+      </p:sp>
+      <p:sp>
+        <p:nvSpPr>
+          <p:cNvPr id="4" name="Slide Number Placeholder 3">
+            <a:extLst>
+              <a:ext uri="{FF2B5EF4-FFF2-40B4-BE49-F238E27FC236}">
+                <a16:creationId xmlns:a16="http://schemas.microsoft.com/office/drawing/2014/main" id="{A87FE937-4B3C-6FE1-5DC0-7DDFCBB61244}"/>
+              </a:ext>
+            </a:extLst>
+          </p:cNvPr>
+          <p:cNvSpPr>
+            <a:spLocks noGrp="1"/>
+          </p:cNvSpPr>
+          <p:nvPr>
+            <p:ph type="sldNum" sz="quarter" idx="5"/>
+          </p:nvPr>
+        </p:nvSpPr>
+        <p:spPr/>
+        <p:txBody>
+          <a:bodyPr/>
+          <a:lstStyle/>
+          <a:p>
+            <a:fld id="{871B2431-D351-4C6E-A3CF-9DFAC0E3E050}" type="slidenum">
+              <a:rPr lang="cs-CZ" smtClean="0"/>
+              <a:t>22</a:t>
+            </a:fld>
+            <a:endParaRPr lang="cs-CZ"/>
+          </a:p>
+        </p:txBody>
+      </p:sp>
+    </p:spTree>
+    <p:extLst>
+      <p:ext uri="{BB962C8B-B14F-4D97-AF65-F5344CB8AC3E}">
+        <p14:creationId xmlns:p14="http://schemas.microsoft.com/office/powerpoint/2010/main" val="2606886941"/>
+      </p:ext>
+    </p:extLst>
+  </p:cSld>
+  <p:clrMapOvr>
+    <a:masterClrMapping/>
+  </p:clrMapOvr>
+</p:notes>
+</file>
+
+<file path=ppt/notesSlides/notesSlide9.xml><?xml version="1.0" encoding="utf-8"?>
+<p:notes xmlns:a="http://schemas.openxmlformats.org/drawingml/2006/main" xmlns:r="http://schemas.openxmlformats.org/officeDocument/2006/relationships" xmlns:p="http://schemas.openxmlformats.org/presentationml/2006/main">
+  <p:cSld>
+    <p:spTree>
+      <p:nvGrpSpPr>
+        <p:cNvPr id="1" name="">
+          <a:extLst>
+            <a:ext uri="{FF2B5EF4-FFF2-40B4-BE49-F238E27FC236}">
+              <a16:creationId xmlns:a16="http://schemas.microsoft.com/office/drawing/2014/main" id="{587F9FC0-413F-86E3-1680-CF74FBC9669E}"/>
+            </a:ext>
+          </a:extLst>
+        </p:cNvPr>
+        <p:cNvGrpSpPr/>
+        <p:nvPr/>
+      </p:nvGrpSpPr>
+      <p:grpSpPr>
+        <a:xfrm>
+          <a:off x="0" y="0"/>
+          <a:ext cx="0" cy="0"/>
+          <a:chOff x="0" y="0"/>
+          <a:chExt cx="0" cy="0"/>
+        </a:xfrm>
+      </p:grpSpPr>
+      <p:sp>
+        <p:nvSpPr>
+          <p:cNvPr id="2" name="Slide Image Placeholder 1">
+            <a:extLst>
+              <a:ext uri="{FF2B5EF4-FFF2-40B4-BE49-F238E27FC236}">
+                <a16:creationId xmlns:a16="http://schemas.microsoft.com/office/drawing/2014/main" id="{239AD1EA-E9F5-8DCA-FA96-3778AA9CAA14}"/>
+              </a:ext>
+            </a:extLst>
+          </p:cNvPr>
+          <p:cNvSpPr>
+            <a:spLocks noGrp="1" noRot="1" noChangeAspect="1"/>
+          </p:cNvSpPr>
+          <p:nvPr>
+            <p:ph type="sldImg"/>
+          </p:nvPr>
+        </p:nvSpPr>
+        <p:spPr>
+          <a:xfrm>
+            <a:off x="2292350" y="512763"/>
+            <a:ext cx="4559300" cy="2566987"/>
+          </a:xfrm>
+        </p:spPr>
+      </p:sp>
+      <p:sp>
+        <p:nvSpPr>
+          <p:cNvPr id="3" name="Notes Placeholder 2">
+            <a:extLst>
+              <a:ext uri="{FF2B5EF4-FFF2-40B4-BE49-F238E27FC236}">
+                <a16:creationId xmlns:a16="http://schemas.microsoft.com/office/drawing/2014/main" id="{F3BC635C-B57B-3F8B-9892-557D8AFE551A}"/>
+              </a:ext>
+            </a:extLst>
+          </p:cNvPr>
+          <p:cNvSpPr>
+            <a:spLocks noGrp="1"/>
+          </p:cNvSpPr>
+          <p:nvPr>
+            <p:ph type="body" idx="1"/>
+          </p:nvPr>
+        </p:nvSpPr>
+        <p:spPr/>
+        <p:txBody>
+          <a:bodyPr/>
+          <a:lstStyle/>
+          <a:p>
+            <a:pPr marL="171450" indent="-171450">
+              <a:buFont typeface="Arial" panose="020B0604020202020204" pitchFamily="34" charset="0"/>
+              <a:buChar char="•"/>
+            </a:pPr>
+            <a:endParaRPr lang="en-US" dirty="0"/>
+          </a:p>
+        </p:txBody>
+      </p:sp>
+      <p:sp>
+        <p:nvSpPr>
+          <p:cNvPr id="4" name="Slide Number Placeholder 3">
+            <a:extLst>
+              <a:ext uri="{FF2B5EF4-FFF2-40B4-BE49-F238E27FC236}">
+                <a16:creationId xmlns:a16="http://schemas.microsoft.com/office/drawing/2014/main" id="{6A335E6D-7722-A59E-27FF-BE0C7CBCAB99}"/>
+              </a:ext>
+            </a:extLst>
+          </p:cNvPr>
+          <p:cNvSpPr>
+            <a:spLocks noGrp="1"/>
+          </p:cNvSpPr>
+          <p:nvPr>
+            <p:ph type="sldNum" sz="quarter" idx="5"/>
+          </p:nvPr>
+        </p:nvSpPr>
+        <p:spPr/>
+        <p:txBody>
+          <a:bodyPr/>
+          <a:lstStyle/>
+          <a:p>
+            <a:fld id="{871B2431-D351-4C6E-A3CF-9DFAC0E3E050}" type="slidenum">
+              <a:rPr lang="cs-CZ" smtClean="0"/>
+              <a:t>24</a:t>
+            </a:fld>
+            <a:endParaRPr lang="cs-CZ"/>
+          </a:p>
+        </p:txBody>
+      </p:sp>
+    </p:spTree>
+    <p:extLst>
+      <p:ext uri="{BB962C8B-B14F-4D97-AF65-F5344CB8AC3E}">
+        <p14:creationId xmlns:p14="http://schemas.microsoft.com/office/powerpoint/2010/main" val="3784874743"/>
+      </p:ext>
+    </p:extLst>
+  </p:cSld>
+  <p:clrMapOvr>
+    <a:masterClrMapping/>
+  </p:clrMapOvr>
+</p:notes>
+</file>
+
 <file path=ppt/slideLayouts/slideLayout1.xml><?xml version="1.0" encoding="utf-8"?>
 <p:sldLayout xmlns:a="http://schemas.openxmlformats.org/drawingml/2006/main" xmlns:r="http://schemas.openxmlformats.org/officeDocument/2006/relationships" xmlns:p="http://schemas.openxmlformats.org/presentationml/2006/main" type="title" preserve="1">
   <p:cSld name="Title Slide">
@@ -1522,7 +3549,7 @@
             <a:fld id="{1D8BD707-D9CF-40AE-B4C6-C98DA3205C09}" type="datetimeFigureOut">
               <a:rPr lang="en-US" smtClean="0"/>
               <a:pPr/>
-              <a:t>4/27/2026</a:t>
+              <a:t>4/28/2026</a:t>
             </a:fld>
             <a:endParaRPr lang="en-US"/>
           </a:p>
@@ -1687,7 +3714,7 @@
             <a:fld id="{1D8BD707-D9CF-40AE-B4C6-C98DA3205C09}" type="datetimeFigureOut">
               <a:rPr lang="en-US" smtClean="0"/>
               <a:pPr/>
-              <a:t>4/27/2026</a:t>
+              <a:t>4/28/2026</a:t>
             </a:fld>
             <a:endParaRPr lang="en-US"/>
           </a:p>
@@ -1862,7 +3889,7 @@
             <a:fld id="{1D8BD707-D9CF-40AE-B4C6-C98DA3205C09}" type="datetimeFigureOut">
               <a:rPr lang="en-US" smtClean="0"/>
               <a:pPr/>
-              <a:t>4/27/2026</a:t>
+              <a:t>4/28/2026</a:t>
             </a:fld>
             <a:endParaRPr lang="en-US"/>
           </a:p>
@@ -2027,7 +4054,7 @@
             <a:fld id="{1D8BD707-D9CF-40AE-B4C6-C98DA3205C09}" type="datetimeFigureOut">
               <a:rPr lang="en-US" smtClean="0"/>
               <a:pPr/>
-              <a:t>4/27/2026</a:t>
+              <a:t>4/28/2026</a:t>
             </a:fld>
             <a:endParaRPr lang="en-US"/>
           </a:p>
@@ -2269,7 +4296,7 @@
             <a:fld id="{1D8BD707-D9CF-40AE-B4C6-C98DA3205C09}" type="datetimeFigureOut">
               <a:rPr lang="en-US" smtClean="0"/>
               <a:pPr/>
-              <a:t>4/27/2026</a:t>
+              <a:t>4/28/2026</a:t>
             </a:fld>
             <a:endParaRPr lang="en-US"/>
           </a:p>
@@ -2551,7 +4578,7 @@
             <a:fld id="{1D8BD707-D9CF-40AE-B4C6-C98DA3205C09}" type="datetimeFigureOut">
               <a:rPr lang="en-US" smtClean="0"/>
               <a:pPr/>
-              <a:t>4/27/2026</a:t>
+              <a:t>4/28/2026</a:t>
             </a:fld>
             <a:endParaRPr lang="en-US"/>
           </a:p>
@@ -2967,7 +4994,7 @@
             <a:fld id="{1D8BD707-D9CF-40AE-B4C6-C98DA3205C09}" type="datetimeFigureOut">
               <a:rPr lang="en-US" smtClean="0"/>
               <a:pPr/>
-              <a:t>4/27/2026</a:t>
+              <a:t>4/28/2026</a:t>
             </a:fld>
             <a:endParaRPr lang="en-US"/>
           </a:p>
@@ -3081,7 +5108,7 @@
             <a:fld id="{1D8BD707-D9CF-40AE-B4C6-C98DA3205C09}" type="datetimeFigureOut">
               <a:rPr lang="en-US" smtClean="0"/>
               <a:pPr/>
-              <a:t>4/27/2026</a:t>
+              <a:t>4/28/2026</a:t>
             </a:fld>
             <a:endParaRPr lang="en-US"/>
           </a:p>
@@ -3173,7 +5200,7 @@
             <a:fld id="{1D8BD707-D9CF-40AE-B4C6-C98DA3205C09}" type="datetimeFigureOut">
               <a:rPr lang="en-US" smtClean="0"/>
               <a:pPr/>
-              <a:t>4/27/2026</a:t>
+              <a:t>4/28/2026</a:t>
             </a:fld>
             <a:endParaRPr lang="en-US"/>
           </a:p>
@@ -3445,7 +5472,7 @@
             <a:fld id="{1D8BD707-D9CF-40AE-B4C6-C98DA3205C09}" type="datetimeFigureOut">
               <a:rPr lang="en-US" smtClean="0"/>
               <a:pPr/>
-              <a:t>4/27/2026</a:t>
+              <a:t>4/28/2026</a:t>
             </a:fld>
             <a:endParaRPr lang="en-US"/>
           </a:p>
@@ -3694,7 +5721,7 @@
             <a:fld id="{1D8BD707-D9CF-40AE-B4C6-C98DA3205C09}" type="datetimeFigureOut">
               <a:rPr lang="en-US" smtClean="0"/>
               <a:pPr/>
-              <a:t>4/27/2026</a:t>
+              <a:t>4/28/2026</a:t>
             </a:fld>
             <a:endParaRPr lang="en-US"/>
           </a:p>
@@ -3902,7 +5929,7 @@
             <a:fld id="{1D8BD707-D9CF-40AE-B4C6-C98DA3205C09}" type="datetimeFigureOut">
               <a:rPr lang="en-US" smtClean="0"/>
               <a:pPr/>
-              <a:t>4/27/2026</a:t>
+              <a:t>4/28/2026</a:t>
             </a:fld>
             <a:endParaRPr lang="en-US"/>
           </a:p>
@@ -6020,16 +8047,22 @@
                     </m:oMathParaPr>
                     <m:oMath xmlns:m="http://schemas.openxmlformats.org/officeDocument/2006/math">
                       <m:r>
-                        <a:rPr lang="en-US" sz="900" i="1" kern="0">
+                        <m:rPr>
+                          <m:nor/>
+                        </m:rPr>
+                        <a:rPr lang="en-US" sz="900" i="0" kern="0">
                           <a:effectLst/>
                           <a:latin typeface="Cambria Math" panose="02040503050406030204" pitchFamily="18" charset="0"/>
                           <a:ea typeface="Times New Roman" panose="02020603050405020304" pitchFamily="18" charset="0"/>
                           <a:cs typeface="Times New Roman" panose="02020603050405020304" pitchFamily="18" charset="0"/>
                         </a:rPr>
-                        <m:t>𝑃𝑟𝑒𝑐𝑖𝑠𝑖𝑜𝑛</m:t>
+                        <m:t>Precision</m:t>
                       </m:r>
                       <m:r>
-                        <a:rPr lang="en-US" sz="900" i="1" kern="0">
+                        <m:rPr>
+                          <m:nor/>
+                        </m:rPr>
+                        <a:rPr lang="en-US" sz="900" i="0" kern="0">
                           <a:effectLst/>
                           <a:latin typeface="Cambria Math" panose="02040503050406030204" pitchFamily="18" charset="0"/>
                           <a:ea typeface="Times New Roman" panose="02020603050405020304" pitchFamily="18" charset="0"/>
@@ -6048,16 +8081,22 @@
                         </m:fPr>
                         <m:num>
                           <m:r>
-                            <a:rPr lang="en-US" sz="900" i="1" kern="0">
+                            <m:rPr>
+                              <m:nor/>
+                            </m:rPr>
+                            <a:rPr lang="en-US" sz="900" i="0" kern="0">
                               <a:effectLst/>
                               <a:latin typeface="Cambria Math" panose="02040503050406030204" pitchFamily="18" charset="0"/>
                               <a:ea typeface="Times New Roman" panose="02020603050405020304" pitchFamily="18" charset="0"/>
                               <a:cs typeface="Times New Roman" panose="02020603050405020304" pitchFamily="18" charset="0"/>
                             </a:rPr>
-                            <m:t>𝑆</m:t>
+                            <m:t>S</m:t>
                           </m:r>
                           <m:r>
-                            <a:rPr lang="en-US" sz="900" i="1" kern="0">
+                            <m:rPr>
+                              <m:nor/>
+                            </m:rPr>
+                            <a:rPr lang="en-US" sz="900" i="0" kern="0">
                               <a:effectLst/>
                               <a:latin typeface="Cambria Math" panose="02040503050406030204" pitchFamily="18" charset="0"/>
                               <a:ea typeface="Times New Roman" panose="02020603050405020304" pitchFamily="18" charset="0"/>
@@ -6066,16 +8105,22 @@
                             <m:t>ố </m:t>
                           </m:r>
                           <m:r>
-                            <a:rPr lang="en-US" sz="900" i="1" kern="0">
+                            <m:rPr>
+                              <m:nor/>
+                            </m:rPr>
+                            <a:rPr lang="en-US" sz="900" i="0" kern="0">
                               <a:effectLst/>
                               <a:latin typeface="Cambria Math" panose="02040503050406030204" pitchFamily="18" charset="0"/>
                               <a:ea typeface="Times New Roman" panose="02020603050405020304" pitchFamily="18" charset="0"/>
                               <a:cs typeface="Times New Roman" panose="02020603050405020304" pitchFamily="18" charset="0"/>
                             </a:rPr>
-                            <m:t>𝑡</m:t>
+                            <m:t>t</m:t>
                           </m:r>
                           <m:r>
-                            <a:rPr lang="en-US" sz="900" i="1" kern="0">
+                            <m:rPr>
+                              <m:nor/>
+                            </m:rPr>
+                            <a:rPr lang="en-US" sz="900" i="0" kern="0">
                               <a:effectLst/>
                               <a:latin typeface="Cambria Math" panose="02040503050406030204" pitchFamily="18" charset="0"/>
                               <a:ea typeface="Times New Roman" panose="02020603050405020304" pitchFamily="18" charset="0"/>
@@ -6084,16 +8129,22 @@
                             <m:t>ừ </m:t>
                           </m:r>
                           <m:r>
-                            <a:rPr lang="en-US" sz="900" i="1" kern="0">
+                            <m:rPr>
+                              <m:nor/>
+                            </m:rPr>
+                            <a:rPr lang="en-US" sz="900" i="0" kern="0">
                               <a:effectLst/>
                               <a:latin typeface="Cambria Math" panose="02040503050406030204" pitchFamily="18" charset="0"/>
                               <a:ea typeface="Times New Roman" panose="02020603050405020304" pitchFamily="18" charset="0"/>
                               <a:cs typeface="Times New Roman" panose="02020603050405020304" pitchFamily="18" charset="0"/>
                             </a:rPr>
-                            <m:t>𝑑</m:t>
+                            <m:t>d</m:t>
                           </m:r>
                           <m:r>
-                            <a:rPr lang="en-US" sz="900" i="1" kern="0">
+                            <m:rPr>
+                              <m:nor/>
+                            </m:rPr>
+                            <a:rPr lang="en-US" sz="900" i="0" kern="0">
                               <a:effectLst/>
                               <a:latin typeface="Cambria Math" panose="02040503050406030204" pitchFamily="18" charset="0"/>
                               <a:ea typeface="Times New Roman" panose="02020603050405020304" pitchFamily="18" charset="0"/>
@@ -6102,16 +8153,22 @@
                             <m:t>ự đ</m:t>
                           </m:r>
                           <m:r>
-                            <a:rPr lang="en-US" sz="900" i="1" kern="0">
+                            <m:rPr>
+                              <m:nor/>
+                            </m:rPr>
+                            <a:rPr lang="en-US" sz="900" i="0" kern="0">
                               <a:effectLst/>
                               <a:latin typeface="Cambria Math" panose="02040503050406030204" pitchFamily="18" charset="0"/>
                               <a:ea typeface="Times New Roman" panose="02020603050405020304" pitchFamily="18" charset="0"/>
                               <a:cs typeface="Times New Roman" panose="02020603050405020304" pitchFamily="18" charset="0"/>
                             </a:rPr>
-                            <m:t>𝑜</m:t>
+                            <m:t>o</m:t>
                           </m:r>
                           <m:r>
-                            <a:rPr lang="en-US" sz="900" i="1" kern="0">
+                            <m:rPr>
+                              <m:nor/>
+                            </m:rPr>
+                            <a:rPr lang="en-US" sz="900" i="0" kern="0">
                               <a:effectLst/>
                               <a:latin typeface="Cambria Math" panose="02040503050406030204" pitchFamily="18" charset="0"/>
                               <a:ea typeface="Times New Roman" panose="02020603050405020304" pitchFamily="18" charset="0"/>
@@ -6120,16 +8177,22 @@
                             <m:t>á</m:t>
                           </m:r>
                           <m:r>
-                            <a:rPr lang="en-US" sz="900" i="1" kern="0">
+                            <m:rPr>
+                              <m:nor/>
+                            </m:rPr>
+                            <a:rPr lang="en-US" sz="900" i="0" kern="0">
                               <a:effectLst/>
                               <a:latin typeface="Cambria Math" panose="02040503050406030204" pitchFamily="18" charset="0"/>
                               <a:ea typeface="Times New Roman" panose="02020603050405020304" pitchFamily="18" charset="0"/>
                               <a:cs typeface="Times New Roman" panose="02020603050405020304" pitchFamily="18" charset="0"/>
                             </a:rPr>
-                            <m:t>𝑛</m:t>
+                            <m:t>n</m:t>
                           </m:r>
                           <m:r>
-                            <a:rPr lang="en-US" sz="900" i="1" kern="0">
+                            <m:rPr>
+                              <m:nor/>
+                            </m:rPr>
+                            <a:rPr lang="en-US" sz="900" i="0" kern="0">
                               <a:effectLst/>
                               <a:latin typeface="Cambria Math" panose="02040503050406030204" pitchFamily="18" charset="0"/>
                               <a:ea typeface="Times New Roman" panose="02020603050405020304" pitchFamily="18" charset="0"/>
@@ -6138,27 +8201,36 @@
                             <m:t> đú</m:t>
                           </m:r>
                           <m:r>
-                            <a:rPr lang="en-US" sz="900" i="1" kern="0">
+                            <m:rPr>
+                              <m:nor/>
+                            </m:rPr>
+                            <a:rPr lang="en-US" sz="900" i="0" kern="0">
                               <a:effectLst/>
                               <a:latin typeface="Cambria Math" panose="02040503050406030204" pitchFamily="18" charset="0"/>
                               <a:ea typeface="Times New Roman" panose="02020603050405020304" pitchFamily="18" charset="0"/>
                               <a:cs typeface="Times New Roman" panose="02020603050405020304" pitchFamily="18" charset="0"/>
                             </a:rPr>
-                            <m:t>𝑛𝑔</m:t>
+                            <m:t>ng</m:t>
                           </m:r>
                         </m:num>
                         <m:den>
                           <m:r>
-                            <a:rPr lang="en-US" sz="900" i="1" kern="0">
+                            <m:rPr>
+                              <m:nor/>
+                            </m:rPr>
+                            <a:rPr lang="en-US" sz="900" i="0" kern="0">
                               <a:effectLst/>
                               <a:latin typeface="Cambria Math" panose="02040503050406030204" pitchFamily="18" charset="0"/>
                               <a:ea typeface="Times New Roman" panose="02020603050405020304" pitchFamily="18" charset="0"/>
                               <a:cs typeface="Times New Roman" panose="02020603050405020304" pitchFamily="18" charset="0"/>
                             </a:rPr>
-                            <m:t>𝑇</m:t>
+                            <m:t>T</m:t>
                           </m:r>
                           <m:r>
-                            <a:rPr lang="en-US" sz="900" i="1" kern="0">
+                            <m:rPr>
+                              <m:nor/>
+                            </m:rPr>
+                            <a:rPr lang="en-US" sz="900" i="0" kern="0">
                               <a:effectLst/>
                               <a:latin typeface="Cambria Math" panose="02040503050406030204" pitchFamily="18" charset="0"/>
                               <a:ea typeface="Times New Roman" panose="02020603050405020304" pitchFamily="18" charset="0"/>
@@ -6167,16 +8239,22 @@
                             <m:t>ổ</m:t>
                           </m:r>
                           <m:r>
-                            <a:rPr lang="en-US" sz="900" i="1" kern="0">
+                            <m:rPr>
+                              <m:nor/>
+                            </m:rPr>
+                            <a:rPr lang="en-US" sz="900" i="0" kern="0">
                               <a:effectLst/>
                               <a:latin typeface="Cambria Math" panose="02040503050406030204" pitchFamily="18" charset="0"/>
                               <a:ea typeface="Times New Roman" panose="02020603050405020304" pitchFamily="18" charset="0"/>
                               <a:cs typeface="Times New Roman" panose="02020603050405020304" pitchFamily="18" charset="0"/>
                             </a:rPr>
-                            <m:t>𝑛𝑔</m:t>
+                            <m:t>ng</m:t>
                           </m:r>
                           <m:r>
-                            <a:rPr lang="en-US" sz="900" i="1" kern="0">
+                            <m:rPr>
+                              <m:nor/>
+                            </m:rPr>
+                            <a:rPr lang="en-US" sz="900" i="0" kern="0">
                               <a:effectLst/>
                               <a:latin typeface="Cambria Math" panose="02040503050406030204" pitchFamily="18" charset="0"/>
                               <a:ea typeface="Times New Roman" panose="02020603050405020304" pitchFamily="18" charset="0"/>
@@ -6185,16 +8263,22 @@
                             <m:t> </m:t>
                           </m:r>
                           <m:r>
-                            <a:rPr lang="en-US" sz="900" i="1" kern="0">
+                            <m:rPr>
+                              <m:nor/>
+                            </m:rPr>
+                            <a:rPr lang="en-US" sz="900" i="0" kern="0">
                               <a:effectLst/>
                               <a:latin typeface="Cambria Math" panose="02040503050406030204" pitchFamily="18" charset="0"/>
                               <a:ea typeface="Times New Roman" panose="02020603050405020304" pitchFamily="18" charset="0"/>
                               <a:cs typeface="Times New Roman" panose="02020603050405020304" pitchFamily="18" charset="0"/>
                             </a:rPr>
-                            <m:t>𝑠</m:t>
+                            <m:t>s</m:t>
                           </m:r>
                           <m:r>
-                            <a:rPr lang="en-US" sz="900" i="1" kern="0">
+                            <m:rPr>
+                              <m:nor/>
+                            </m:rPr>
+                            <a:rPr lang="en-US" sz="900" i="0" kern="0">
                               <a:effectLst/>
                               <a:latin typeface="Cambria Math" panose="02040503050406030204" pitchFamily="18" charset="0"/>
                               <a:ea typeface="Times New Roman" panose="02020603050405020304" pitchFamily="18" charset="0"/>
@@ -6203,16 +8287,22 @@
                             <m:t>ố </m:t>
                           </m:r>
                           <m:r>
-                            <a:rPr lang="en-US" sz="900" i="1" kern="0">
+                            <m:rPr>
+                              <m:nor/>
+                            </m:rPr>
+                            <a:rPr lang="en-US" sz="900" i="0" kern="0">
                               <a:effectLst/>
                               <a:latin typeface="Cambria Math" panose="02040503050406030204" pitchFamily="18" charset="0"/>
                               <a:ea typeface="Times New Roman" panose="02020603050405020304" pitchFamily="18" charset="0"/>
                               <a:cs typeface="Times New Roman" panose="02020603050405020304" pitchFamily="18" charset="0"/>
                             </a:rPr>
-                            <m:t>𝑡</m:t>
+                            <m:t>t</m:t>
                           </m:r>
                           <m:r>
-                            <a:rPr lang="en-US" sz="900" i="1" kern="0">
+                            <m:rPr>
+                              <m:nor/>
+                            </m:rPr>
+                            <a:rPr lang="en-US" sz="900" i="0" kern="0">
                               <a:effectLst/>
                               <a:latin typeface="Cambria Math" panose="02040503050406030204" pitchFamily="18" charset="0"/>
                               <a:ea typeface="Times New Roman" panose="02020603050405020304" pitchFamily="18" charset="0"/>
@@ -6221,16 +8311,22 @@
                             <m:t>ừ </m:t>
                           </m:r>
                           <m:r>
-                            <a:rPr lang="en-US" sz="900" i="1" kern="0">
+                            <m:rPr>
+                              <m:nor/>
+                            </m:rPr>
+                            <a:rPr lang="en-US" sz="900" i="0" kern="0">
                               <a:effectLst/>
                               <a:latin typeface="Cambria Math" panose="02040503050406030204" pitchFamily="18" charset="0"/>
                               <a:ea typeface="Times New Roman" panose="02020603050405020304" pitchFamily="18" charset="0"/>
                               <a:cs typeface="Times New Roman" panose="02020603050405020304" pitchFamily="18" charset="0"/>
                             </a:rPr>
-                            <m:t>𝑡𝑟𝑜𝑛𝑔</m:t>
+                            <m:t>trong</m:t>
                           </m:r>
                           <m:r>
-                            <a:rPr lang="en-US" sz="900" i="1" kern="0">
+                            <m:rPr>
+                              <m:nor/>
+                            </m:rPr>
+                            <a:rPr lang="en-US" sz="900" i="0" kern="0">
                               <a:effectLst/>
                               <a:latin typeface="Cambria Math" panose="02040503050406030204" pitchFamily="18" charset="0"/>
                               <a:ea typeface="Times New Roman" panose="02020603050405020304" pitchFamily="18" charset="0"/>
@@ -6239,16 +8335,22 @@
                             <m:t> </m:t>
                           </m:r>
                           <m:r>
-                            <a:rPr lang="en-US" sz="900" i="1" kern="0">
+                            <m:rPr>
+                              <m:nor/>
+                            </m:rPr>
+                            <a:rPr lang="en-US" sz="900" i="0" kern="0">
                               <a:effectLst/>
                               <a:latin typeface="Cambria Math" panose="02040503050406030204" pitchFamily="18" charset="0"/>
                               <a:ea typeface="Times New Roman" panose="02020603050405020304" pitchFamily="18" charset="0"/>
                               <a:cs typeface="Times New Roman" panose="02020603050405020304" pitchFamily="18" charset="0"/>
                             </a:rPr>
-                            <m:t>𝑐</m:t>
+                            <m:t>c</m:t>
                           </m:r>
                           <m:r>
-                            <a:rPr lang="en-US" sz="900" i="1" kern="0">
+                            <m:rPr>
+                              <m:nor/>
+                            </m:rPr>
+                            <a:rPr lang="en-US" sz="900" i="0" kern="0">
                               <a:effectLst/>
                               <a:latin typeface="Cambria Math" panose="02040503050406030204" pitchFamily="18" charset="0"/>
                               <a:ea typeface="Times New Roman" panose="02020603050405020304" pitchFamily="18" charset="0"/>
@@ -6257,16 +8359,22 @@
                             <m:t>â</m:t>
                           </m:r>
                           <m:r>
-                            <a:rPr lang="en-US" sz="900" i="1" kern="0">
+                            <m:rPr>
+                              <m:nor/>
+                            </m:rPr>
+                            <a:rPr lang="en-US" sz="900" i="0" kern="0">
                               <a:effectLst/>
                               <a:latin typeface="Cambria Math" panose="02040503050406030204" pitchFamily="18" charset="0"/>
                               <a:ea typeface="Times New Roman" panose="02020603050405020304" pitchFamily="18" charset="0"/>
                               <a:cs typeface="Times New Roman" panose="02020603050405020304" pitchFamily="18" charset="0"/>
                             </a:rPr>
-                            <m:t>𝑢</m:t>
+                            <m:t>u</m:t>
                           </m:r>
                           <m:r>
-                            <a:rPr lang="en-US" sz="900" i="1" kern="0">
+                            <m:rPr>
+                              <m:nor/>
+                            </m:rPr>
+                            <a:rPr lang="en-US" sz="900" i="0" kern="0">
                               <a:effectLst/>
                               <a:latin typeface="Cambria Math" panose="02040503050406030204" pitchFamily="18" charset="0"/>
                               <a:ea typeface="Times New Roman" panose="02020603050405020304" pitchFamily="18" charset="0"/>
@@ -6275,16 +8383,22 @@
                             <m:t> </m:t>
                           </m:r>
                           <m:r>
-                            <a:rPr lang="en-US" sz="900" i="1" kern="0">
+                            <m:rPr>
+                              <m:nor/>
+                            </m:rPr>
+                            <a:rPr lang="en-US" sz="900" i="0" kern="0">
                               <a:effectLst/>
                               <a:latin typeface="Cambria Math" panose="02040503050406030204" pitchFamily="18" charset="0"/>
                               <a:ea typeface="Times New Roman" panose="02020603050405020304" pitchFamily="18" charset="0"/>
                               <a:cs typeface="Times New Roman" panose="02020603050405020304" pitchFamily="18" charset="0"/>
                             </a:rPr>
-                            <m:t>𝑑</m:t>
+                            <m:t>d</m:t>
                           </m:r>
                           <m:r>
-                            <a:rPr lang="en-US" sz="900" i="1" kern="0">
+                            <m:rPr>
+                              <m:nor/>
+                            </m:rPr>
+                            <a:rPr lang="en-US" sz="900" i="0" kern="0">
                               <a:effectLst/>
                               <a:latin typeface="Cambria Math" panose="02040503050406030204" pitchFamily="18" charset="0"/>
                               <a:ea typeface="Times New Roman" panose="02020603050405020304" pitchFamily="18" charset="0"/>
@@ -6293,16 +8407,22 @@
                             <m:t>ự đ</m:t>
                           </m:r>
                           <m:r>
-                            <a:rPr lang="en-US" sz="900" i="1" kern="0">
+                            <m:rPr>
+                              <m:nor/>
+                            </m:rPr>
+                            <a:rPr lang="en-US" sz="900" i="0" kern="0">
                               <a:effectLst/>
                               <a:latin typeface="Cambria Math" panose="02040503050406030204" pitchFamily="18" charset="0"/>
                               <a:ea typeface="Times New Roman" panose="02020603050405020304" pitchFamily="18" charset="0"/>
                               <a:cs typeface="Times New Roman" panose="02020603050405020304" pitchFamily="18" charset="0"/>
                             </a:rPr>
-                            <m:t>𝑜</m:t>
+                            <m:t>o</m:t>
                           </m:r>
                           <m:r>
-                            <a:rPr lang="en-US" sz="900" i="1" kern="0">
+                            <m:rPr>
+                              <m:nor/>
+                            </m:rPr>
+                            <a:rPr lang="en-US" sz="900" i="0" kern="0">
                               <a:effectLst/>
                               <a:latin typeface="Cambria Math" panose="02040503050406030204" pitchFamily="18" charset="0"/>
                               <a:ea typeface="Times New Roman" panose="02020603050405020304" pitchFamily="18" charset="0"/>
@@ -6311,13 +8431,16 @@
                             <m:t>á</m:t>
                           </m:r>
                           <m:r>
-                            <a:rPr lang="en-US" sz="900" i="1" kern="0">
+                            <m:rPr>
+                              <m:nor/>
+                            </m:rPr>
+                            <a:rPr lang="en-US" sz="900" i="0" kern="0">
                               <a:effectLst/>
                               <a:latin typeface="Cambria Math" panose="02040503050406030204" pitchFamily="18" charset="0"/>
                               <a:ea typeface="Times New Roman" panose="02020603050405020304" pitchFamily="18" charset="0"/>
                               <a:cs typeface="Times New Roman" panose="02020603050405020304" pitchFamily="18" charset="0"/>
                             </a:rPr>
-                            <m:t>𝑛</m:t>
+                            <m:t>n</m:t>
                           </m:r>
                         </m:den>
                       </m:f>
@@ -8546,7 +10669,7 @@
                 <a:ea typeface="Tahoma" panose="020B0604030504040204" pitchFamily="34" charset="0"/>
                 <a:cs typeface="Tahoma" panose="020B0604030504040204" pitchFamily="34" charset="0"/>
               </a:rPr>
-              <a:t>4.1. </a:t>
+              <a:t>4.2. </a:t>
             </a:r>
             <a:r>
               <a:rPr lang="en-US" sz="900" u="sng" dirty="0" err="1">
@@ -9522,7 +11645,7 @@
                 <a:cs typeface="Tahoma" panose="020B0604030504040204" pitchFamily="34" charset="0"/>
                 <a:sym typeface="Canva Sans"/>
               </a:rPr>
-              <a:t>10</a:t>
+              <a:t>17</a:t>
             </a:r>
             <a:endParaRPr lang="en-US" sz="800" dirty="0">
               <a:latin typeface="Tahoma" panose="020B0604030504040204" pitchFamily="34" charset="0"/>
@@ -9546,6 +11669,3556 @@
 </file>
 
 <file path=ppt/slides/slide19.xml><?xml version="1.0" encoding="utf-8"?>
+<p:sld xmlns:a="http://schemas.openxmlformats.org/drawingml/2006/main" xmlns:r="http://schemas.openxmlformats.org/officeDocument/2006/relationships" xmlns:p="http://schemas.openxmlformats.org/presentationml/2006/main">
+  <p:cSld>
+    <p:spTree>
+      <p:nvGrpSpPr>
+        <p:cNvPr id="1" name="">
+          <a:extLst>
+            <a:ext uri="{FF2B5EF4-FFF2-40B4-BE49-F238E27FC236}">
+              <a16:creationId xmlns:a16="http://schemas.microsoft.com/office/drawing/2014/main" id="{6138A6AF-0E97-66FC-10CE-9FBB63B60AEA}"/>
+            </a:ext>
+          </a:extLst>
+        </p:cNvPr>
+        <p:cNvGrpSpPr/>
+        <p:nvPr/>
+      </p:nvGrpSpPr>
+      <p:grpSpPr>
+        <a:xfrm>
+          <a:off x="0" y="0"/>
+          <a:ext cx="0" cy="0"/>
+          <a:chOff x="0" y="0"/>
+          <a:chExt cx="0" cy="0"/>
+        </a:xfrm>
+      </p:grpSpPr>
+      <p:sp>
+        <p:nvSpPr>
+          <p:cNvPr id="2" name="TextBox 2">
+            <a:extLst>
+              <a:ext uri="{FF2B5EF4-FFF2-40B4-BE49-F238E27FC236}">
+                <a16:creationId xmlns:a16="http://schemas.microsoft.com/office/drawing/2014/main" id="{D98969CA-4591-FB5C-329E-F9AEDCB7FD50}"/>
+              </a:ext>
+            </a:extLst>
+          </p:cNvPr>
+          <p:cNvSpPr txBox="1"/>
+          <p:nvPr/>
+        </p:nvSpPr>
+        <p:spPr>
+          <a:xfrm>
+            <a:off x="277092" y="277825"/>
+            <a:ext cx="2675658" cy="241476"/>
+          </a:xfrm>
+          <a:prstGeom prst="rect">
+            <a:avLst/>
+          </a:prstGeom>
+        </p:spPr>
+        <p:txBody>
+          <a:bodyPr wrap="square" lIns="0" tIns="0" rIns="0" bIns="0" rtlCol="0" anchor="t">
+            <a:spAutoFit/>
+          </a:bodyPr>
+          <a:lstStyle/>
+          <a:p>
+            <a:pPr algn="l">
+              <a:lnSpc>
+                <a:spcPts val="2100"/>
+              </a:lnSpc>
+            </a:pPr>
+            <a:r>
+              <a:rPr lang="en-US" sz="1500" b="1" spc="-4" dirty="0">
+                <a:solidFill>
+                  <a:srgbClr val="2B4D7B"/>
+                </a:solidFill>
+                <a:latin typeface="Tahoma" panose="020B0604030504040204" pitchFamily="34" charset="0"/>
+                <a:ea typeface="Tahoma" panose="020B0604030504040204" pitchFamily="34" charset="0"/>
+                <a:cs typeface="Tahoma" panose="020B0604030504040204" pitchFamily="34" charset="0"/>
+                <a:sym typeface="Canva Sans Bold"/>
+              </a:rPr>
+              <a:t>5. </a:t>
+            </a:r>
+            <a:r>
+              <a:rPr lang="en-US" sz="1500" b="1" spc="-4" dirty="0" err="1">
+                <a:solidFill>
+                  <a:srgbClr val="2B4D7B"/>
+                </a:solidFill>
+                <a:latin typeface="Tahoma" panose="020B0604030504040204" pitchFamily="34" charset="0"/>
+                <a:ea typeface="Tahoma" panose="020B0604030504040204" pitchFamily="34" charset="0"/>
+                <a:cs typeface="Tahoma" panose="020B0604030504040204" pitchFamily="34" charset="0"/>
+                <a:sym typeface="Canva Sans Bold"/>
+              </a:rPr>
+              <a:t>Kết</a:t>
+            </a:r>
+            <a:r>
+              <a:rPr lang="en-US" sz="1500" b="1" spc="-4" dirty="0">
+                <a:solidFill>
+                  <a:srgbClr val="2B4D7B"/>
+                </a:solidFill>
+                <a:latin typeface="Tahoma" panose="020B0604030504040204" pitchFamily="34" charset="0"/>
+                <a:ea typeface="Tahoma" panose="020B0604030504040204" pitchFamily="34" charset="0"/>
+                <a:cs typeface="Tahoma" panose="020B0604030504040204" pitchFamily="34" charset="0"/>
+                <a:sym typeface="Canva Sans Bold"/>
+              </a:rPr>
+              <a:t> </a:t>
+            </a:r>
+            <a:r>
+              <a:rPr lang="en-US" sz="1500" b="1" spc="-4" dirty="0" err="1">
+                <a:solidFill>
+                  <a:srgbClr val="2B4D7B"/>
+                </a:solidFill>
+                <a:latin typeface="Tahoma" panose="020B0604030504040204" pitchFamily="34" charset="0"/>
+                <a:ea typeface="Tahoma" panose="020B0604030504040204" pitchFamily="34" charset="0"/>
+                <a:cs typeface="Tahoma" panose="020B0604030504040204" pitchFamily="34" charset="0"/>
+                <a:sym typeface="Canva Sans Bold"/>
+              </a:rPr>
+              <a:t>quả</a:t>
+            </a:r>
+            <a:r>
+              <a:rPr lang="en-US" sz="1500" b="1" spc="-4" dirty="0">
+                <a:solidFill>
+                  <a:srgbClr val="2B4D7B"/>
+                </a:solidFill>
+                <a:latin typeface="Tahoma" panose="020B0604030504040204" pitchFamily="34" charset="0"/>
+                <a:ea typeface="Tahoma" panose="020B0604030504040204" pitchFamily="34" charset="0"/>
+                <a:cs typeface="Tahoma" panose="020B0604030504040204" pitchFamily="34" charset="0"/>
+                <a:sym typeface="Canva Sans Bold"/>
+              </a:rPr>
+              <a:t> </a:t>
+            </a:r>
+            <a:r>
+              <a:rPr lang="en-US" sz="1500" b="1" spc="-4" dirty="0" err="1">
+                <a:solidFill>
+                  <a:srgbClr val="2B4D7B"/>
+                </a:solidFill>
+                <a:latin typeface="Tahoma" panose="020B0604030504040204" pitchFamily="34" charset="0"/>
+                <a:ea typeface="Tahoma" panose="020B0604030504040204" pitchFamily="34" charset="0"/>
+                <a:cs typeface="Tahoma" panose="020B0604030504040204" pitchFamily="34" charset="0"/>
+                <a:sym typeface="Canva Sans Bold"/>
+              </a:rPr>
+              <a:t>thực</a:t>
+            </a:r>
+            <a:r>
+              <a:rPr lang="en-US" sz="1500" b="1" spc="-4" dirty="0">
+                <a:solidFill>
+                  <a:srgbClr val="2B4D7B"/>
+                </a:solidFill>
+                <a:latin typeface="Tahoma" panose="020B0604030504040204" pitchFamily="34" charset="0"/>
+                <a:ea typeface="Tahoma" panose="020B0604030504040204" pitchFamily="34" charset="0"/>
+                <a:cs typeface="Tahoma" panose="020B0604030504040204" pitchFamily="34" charset="0"/>
+                <a:sym typeface="Canva Sans Bold"/>
+              </a:rPr>
+              <a:t> </a:t>
+            </a:r>
+            <a:r>
+              <a:rPr lang="en-US" sz="1500" b="1" spc="-4" dirty="0" err="1">
+                <a:solidFill>
+                  <a:srgbClr val="2B4D7B"/>
+                </a:solidFill>
+                <a:latin typeface="Tahoma" panose="020B0604030504040204" pitchFamily="34" charset="0"/>
+                <a:ea typeface="Tahoma" panose="020B0604030504040204" pitchFamily="34" charset="0"/>
+                <a:cs typeface="Tahoma" panose="020B0604030504040204" pitchFamily="34" charset="0"/>
+                <a:sym typeface="Canva Sans Bold"/>
+              </a:rPr>
+              <a:t>nghiệm</a:t>
+            </a:r>
+            <a:endParaRPr lang="en-US" sz="1500" b="1" spc="-4" dirty="0">
+              <a:solidFill>
+                <a:srgbClr val="2B4D7B"/>
+              </a:solidFill>
+              <a:latin typeface="Tahoma" panose="020B0604030504040204" pitchFamily="34" charset="0"/>
+              <a:ea typeface="Tahoma" panose="020B0604030504040204" pitchFamily="34" charset="0"/>
+              <a:cs typeface="Tahoma" panose="020B0604030504040204" pitchFamily="34" charset="0"/>
+              <a:sym typeface="Canva Sans Bold"/>
+            </a:endParaRPr>
+          </a:p>
+        </p:txBody>
+      </p:sp>
+      <p:sp>
+        <p:nvSpPr>
+          <p:cNvPr id="10" name="TextBox 9">
+            <a:extLst>
+              <a:ext uri="{FF2B5EF4-FFF2-40B4-BE49-F238E27FC236}">
+                <a16:creationId xmlns:a16="http://schemas.microsoft.com/office/drawing/2014/main" id="{2C7FCA5C-D625-FC1E-57E5-55DAC8EFAFEA}"/>
+              </a:ext>
+            </a:extLst>
+          </p:cNvPr>
+          <p:cNvSpPr txBox="1"/>
+          <p:nvPr/>
+        </p:nvSpPr>
+        <p:spPr>
+          <a:xfrm>
+            <a:off x="5314950" y="2914650"/>
+            <a:ext cx="295275" cy="215444"/>
+          </a:xfrm>
+          <a:prstGeom prst="rect">
+            <a:avLst/>
+          </a:prstGeom>
+          <a:noFill/>
+        </p:spPr>
+        <p:txBody>
+          <a:bodyPr wrap="square">
+            <a:spAutoFit/>
+          </a:bodyPr>
+          <a:lstStyle/>
+          <a:p>
+            <a:pPr algn="r"/>
+            <a:r>
+              <a:rPr lang="en-US" sz="800" dirty="0">
+                <a:solidFill>
+                  <a:srgbClr val="1C1C1A"/>
+                </a:solidFill>
+                <a:latin typeface="Tahoma" panose="020B0604030504040204" pitchFamily="34" charset="0"/>
+                <a:ea typeface="Tahoma" panose="020B0604030504040204" pitchFamily="34" charset="0"/>
+                <a:cs typeface="Tahoma" panose="020B0604030504040204" pitchFamily="34" charset="0"/>
+                <a:sym typeface="Canva Sans"/>
+              </a:rPr>
+              <a:t>18</a:t>
+            </a:r>
+            <a:endParaRPr lang="en-US" sz="800" dirty="0">
+              <a:latin typeface="Tahoma" panose="020B0604030504040204" pitchFamily="34" charset="0"/>
+              <a:ea typeface="Tahoma" panose="020B0604030504040204" pitchFamily="34" charset="0"/>
+              <a:cs typeface="Tahoma" panose="020B0604030504040204" pitchFamily="34" charset="0"/>
+            </a:endParaRPr>
+          </a:p>
+        </p:txBody>
+      </p:sp>
+      <p:sp>
+        <p:nvSpPr>
+          <p:cNvPr id="9" name="TextBox 8">
+            <a:extLst>
+              <a:ext uri="{FF2B5EF4-FFF2-40B4-BE49-F238E27FC236}">
+                <a16:creationId xmlns:a16="http://schemas.microsoft.com/office/drawing/2014/main" id="{6BD3C5A0-67FF-E20F-8750-07A5C3DFC70D}"/>
+              </a:ext>
+            </a:extLst>
+          </p:cNvPr>
+          <p:cNvSpPr txBox="1"/>
+          <p:nvPr/>
+        </p:nvSpPr>
+        <p:spPr>
+          <a:xfrm>
+            <a:off x="277092" y="519301"/>
+            <a:ext cx="2675658" cy="251094"/>
+          </a:xfrm>
+          <a:prstGeom prst="rect">
+            <a:avLst/>
+          </a:prstGeom>
+          <a:noFill/>
+        </p:spPr>
+        <p:txBody>
+          <a:bodyPr wrap="square" rtlCol="0">
+            <a:spAutoFit/>
+          </a:bodyPr>
+          <a:lstStyle/>
+          <a:p>
+            <a:pPr algn="just">
+              <a:lnSpc>
+                <a:spcPct val="130000"/>
+              </a:lnSpc>
+            </a:pPr>
+            <a:r>
+              <a:rPr lang="en-US" sz="900" u="sng" dirty="0">
+                <a:solidFill>
+                  <a:srgbClr val="00B050"/>
+                </a:solidFill>
+                <a:latin typeface="Tahoma" panose="020B0604030504040204" pitchFamily="34" charset="0"/>
+                <a:ea typeface="Tahoma" panose="020B0604030504040204" pitchFamily="34" charset="0"/>
+                <a:cs typeface="Tahoma" panose="020B0604030504040204" pitchFamily="34" charset="0"/>
+              </a:rPr>
+              <a:t>5.1. Kịch </a:t>
+            </a:r>
+            <a:r>
+              <a:rPr lang="en-US" sz="900" u="sng" dirty="0" err="1">
+                <a:solidFill>
+                  <a:srgbClr val="00B050"/>
+                </a:solidFill>
+                <a:latin typeface="Tahoma" panose="020B0604030504040204" pitchFamily="34" charset="0"/>
+                <a:ea typeface="Tahoma" panose="020B0604030504040204" pitchFamily="34" charset="0"/>
+                <a:cs typeface="Tahoma" panose="020B0604030504040204" pitchFamily="34" charset="0"/>
+              </a:rPr>
+              <a:t>bản</a:t>
+            </a:r>
+            <a:r>
+              <a:rPr lang="en-US" sz="900" u="sng" dirty="0">
+                <a:solidFill>
+                  <a:srgbClr val="00B050"/>
+                </a:solidFill>
+                <a:latin typeface="Tahoma" panose="020B0604030504040204" pitchFamily="34" charset="0"/>
+                <a:ea typeface="Tahoma" panose="020B0604030504040204" pitchFamily="34" charset="0"/>
+                <a:cs typeface="Tahoma" panose="020B0604030504040204" pitchFamily="34" charset="0"/>
+              </a:rPr>
+              <a:t> </a:t>
+            </a:r>
+            <a:r>
+              <a:rPr lang="en-US" sz="900" u="sng" dirty="0" err="1">
+                <a:solidFill>
+                  <a:srgbClr val="00B050"/>
+                </a:solidFill>
+                <a:latin typeface="Tahoma" panose="020B0604030504040204" pitchFamily="34" charset="0"/>
+                <a:ea typeface="Tahoma" panose="020B0604030504040204" pitchFamily="34" charset="0"/>
+                <a:cs typeface="Tahoma" panose="020B0604030504040204" pitchFamily="34" charset="0"/>
+              </a:rPr>
+              <a:t>thử</a:t>
+            </a:r>
+            <a:r>
+              <a:rPr lang="en-US" sz="900" u="sng" dirty="0">
+                <a:solidFill>
+                  <a:srgbClr val="00B050"/>
+                </a:solidFill>
+                <a:latin typeface="Tahoma" panose="020B0604030504040204" pitchFamily="34" charset="0"/>
+                <a:ea typeface="Tahoma" panose="020B0604030504040204" pitchFamily="34" charset="0"/>
+                <a:cs typeface="Tahoma" panose="020B0604030504040204" pitchFamily="34" charset="0"/>
+              </a:rPr>
+              <a:t> </a:t>
+            </a:r>
+            <a:r>
+              <a:rPr lang="en-US" sz="900" u="sng" dirty="0" err="1">
+                <a:solidFill>
+                  <a:srgbClr val="00B050"/>
+                </a:solidFill>
+                <a:latin typeface="Tahoma" panose="020B0604030504040204" pitchFamily="34" charset="0"/>
+                <a:ea typeface="Tahoma" panose="020B0604030504040204" pitchFamily="34" charset="0"/>
+                <a:cs typeface="Tahoma" panose="020B0604030504040204" pitchFamily="34" charset="0"/>
+              </a:rPr>
+              <a:t>nghiệm</a:t>
+            </a:r>
+            <a:r>
+              <a:rPr lang="en-US" sz="900" u="sng" dirty="0">
+                <a:solidFill>
+                  <a:srgbClr val="00B050"/>
+                </a:solidFill>
+                <a:latin typeface="Tahoma" panose="020B0604030504040204" pitchFamily="34" charset="0"/>
+                <a:ea typeface="Tahoma" panose="020B0604030504040204" pitchFamily="34" charset="0"/>
+                <a:cs typeface="Tahoma" panose="020B0604030504040204" pitchFamily="34" charset="0"/>
+              </a:rPr>
+              <a:t> Sequence to Sequence</a:t>
+            </a:r>
+            <a:endParaRPr lang="vi-VN" sz="900" u="sng" dirty="0">
+              <a:solidFill>
+                <a:srgbClr val="00B050"/>
+              </a:solidFill>
+              <a:latin typeface="Tahoma" panose="020B0604030504040204" pitchFamily="34" charset="0"/>
+              <a:ea typeface="Tahoma" panose="020B0604030504040204" pitchFamily="34" charset="0"/>
+              <a:cs typeface="Tahoma" panose="020B0604030504040204" pitchFamily="34" charset="0"/>
+            </a:endParaRPr>
+          </a:p>
+        </p:txBody>
+      </p:sp>
+      <p:sp>
+        <p:nvSpPr>
+          <p:cNvPr id="3" name="TextBox 2">
+            <a:extLst>
+              <a:ext uri="{FF2B5EF4-FFF2-40B4-BE49-F238E27FC236}">
+                <a16:creationId xmlns:a16="http://schemas.microsoft.com/office/drawing/2014/main" id="{3B36822F-B5FD-C1F7-D454-B2D6F9628A45}"/>
+              </a:ext>
+            </a:extLst>
+          </p:cNvPr>
+          <p:cNvSpPr txBox="1"/>
+          <p:nvPr/>
+        </p:nvSpPr>
+        <p:spPr>
+          <a:xfrm>
+            <a:off x="277092" y="760777"/>
+            <a:ext cx="2828058" cy="2153923"/>
+          </a:xfrm>
+          <a:prstGeom prst="rect">
+            <a:avLst/>
+          </a:prstGeom>
+          <a:noFill/>
+        </p:spPr>
+        <p:txBody>
+          <a:bodyPr wrap="square" rtlCol="0">
+            <a:spAutoFit/>
+          </a:bodyPr>
+          <a:lstStyle/>
+          <a:p>
+            <a:pPr algn="just">
+              <a:lnSpc>
+                <a:spcPct val="130000"/>
+              </a:lnSpc>
+            </a:pPr>
+            <a:r>
+              <a:rPr lang="en-US" sz="800" dirty="0">
+                <a:latin typeface="Tahoma" panose="020B0604030504040204" pitchFamily="34" charset="0"/>
+                <a:ea typeface="Tahoma" panose="020B0604030504040204" pitchFamily="34" charset="0"/>
+                <a:cs typeface="Tahoma" panose="020B0604030504040204" pitchFamily="34" charset="0"/>
+              </a:rPr>
+              <a:t>Tokenizer: </a:t>
+            </a:r>
+            <a:r>
+              <a:rPr lang="en-US" sz="800" dirty="0" err="1">
+                <a:latin typeface="Tahoma" panose="020B0604030504040204" pitchFamily="34" charset="0"/>
+                <a:ea typeface="Tahoma" panose="020B0604030504040204" pitchFamily="34" charset="0"/>
+                <a:cs typeface="Tahoma" panose="020B0604030504040204" pitchFamily="34" charset="0"/>
+              </a:rPr>
+              <a:t>en_core_web_sm</a:t>
+            </a:r>
+            <a:r>
+              <a:rPr lang="en-US" sz="800" dirty="0">
+                <a:latin typeface="Tahoma" panose="020B0604030504040204" pitchFamily="34" charset="0"/>
+                <a:ea typeface="Tahoma" panose="020B0604030504040204" pitchFamily="34" charset="0"/>
+                <a:cs typeface="Tahoma" panose="020B0604030504040204" pitchFamily="34" charset="0"/>
+              </a:rPr>
+              <a:t> (EN), </a:t>
+            </a:r>
+            <a:r>
+              <a:rPr lang="en-US" sz="800" dirty="0" err="1">
+                <a:latin typeface="Tahoma" panose="020B0604030504040204" pitchFamily="34" charset="0"/>
+                <a:ea typeface="Tahoma" panose="020B0604030504040204" pitchFamily="34" charset="0"/>
+                <a:cs typeface="Tahoma" panose="020B0604030504040204" pitchFamily="34" charset="0"/>
+              </a:rPr>
+              <a:t>vi_core_news_lg</a:t>
+            </a:r>
+            <a:r>
+              <a:rPr lang="en-US" sz="800" dirty="0">
+                <a:latin typeface="Tahoma" panose="020B0604030504040204" pitchFamily="34" charset="0"/>
+                <a:ea typeface="Tahoma" panose="020B0604030504040204" pitchFamily="34" charset="0"/>
+                <a:cs typeface="Tahoma" panose="020B0604030504040204" pitchFamily="34" charset="0"/>
+              </a:rPr>
+              <a:t> (VI)</a:t>
+            </a:r>
+          </a:p>
+          <a:p>
+            <a:pPr algn="just">
+              <a:lnSpc>
+                <a:spcPct val="130000"/>
+              </a:lnSpc>
+            </a:pPr>
+            <a:r>
+              <a:rPr lang="en-US" sz="800" dirty="0">
+                <a:latin typeface="Tahoma" panose="020B0604030504040204" pitchFamily="34" charset="0"/>
+                <a:ea typeface="Tahoma" panose="020B0604030504040204" pitchFamily="34" charset="0"/>
+                <a:cs typeface="Tahoma" panose="020B0604030504040204" pitchFamily="34" charset="0"/>
+              </a:rPr>
+              <a:t>Giới </a:t>
+            </a:r>
+            <a:r>
+              <a:rPr lang="en-US" sz="800" dirty="0" err="1">
+                <a:latin typeface="Tahoma" panose="020B0604030504040204" pitchFamily="34" charset="0"/>
+                <a:ea typeface="Tahoma" panose="020B0604030504040204" pitchFamily="34" charset="0"/>
+                <a:cs typeface="Tahoma" panose="020B0604030504040204" pitchFamily="34" charset="0"/>
+              </a:rPr>
+              <a:t>hạn</a:t>
+            </a:r>
+            <a:r>
+              <a:rPr lang="en-US" sz="800" dirty="0">
+                <a:latin typeface="Tahoma" panose="020B0604030504040204" pitchFamily="34" charset="0"/>
+                <a:ea typeface="Tahoma" panose="020B0604030504040204" pitchFamily="34" charset="0"/>
+                <a:cs typeface="Tahoma" panose="020B0604030504040204" pitchFamily="34" charset="0"/>
+              </a:rPr>
+              <a:t> </a:t>
+            </a:r>
+            <a:r>
+              <a:rPr lang="en-US" sz="800" dirty="0" err="1">
+                <a:latin typeface="Tahoma" panose="020B0604030504040204" pitchFamily="34" charset="0"/>
+                <a:ea typeface="Tahoma" panose="020B0604030504040204" pitchFamily="34" charset="0"/>
+                <a:cs typeface="Tahoma" panose="020B0604030504040204" pitchFamily="34" charset="0"/>
+              </a:rPr>
+              <a:t>độ</a:t>
+            </a:r>
+            <a:r>
+              <a:rPr lang="en-US" sz="800" dirty="0">
+                <a:latin typeface="Tahoma" panose="020B0604030504040204" pitchFamily="34" charset="0"/>
+                <a:ea typeface="Tahoma" panose="020B0604030504040204" pitchFamily="34" charset="0"/>
+                <a:cs typeface="Tahoma" panose="020B0604030504040204" pitchFamily="34" charset="0"/>
+              </a:rPr>
+              <a:t> </a:t>
+            </a:r>
+            <a:r>
+              <a:rPr lang="en-US" sz="800" dirty="0" err="1">
+                <a:latin typeface="Tahoma" panose="020B0604030504040204" pitchFamily="34" charset="0"/>
+                <a:ea typeface="Tahoma" panose="020B0604030504040204" pitchFamily="34" charset="0"/>
+                <a:cs typeface="Tahoma" panose="020B0604030504040204" pitchFamily="34" charset="0"/>
+              </a:rPr>
+              <a:t>dài</a:t>
+            </a:r>
+            <a:r>
+              <a:rPr lang="en-US" sz="800" dirty="0">
+                <a:latin typeface="Tahoma" panose="020B0604030504040204" pitchFamily="34" charset="0"/>
+                <a:ea typeface="Tahoma" panose="020B0604030504040204" pitchFamily="34" charset="0"/>
+                <a:cs typeface="Tahoma" panose="020B0604030504040204" pitchFamily="34" charset="0"/>
+              </a:rPr>
+              <a:t> </a:t>
+            </a:r>
+            <a:r>
+              <a:rPr lang="en-US" sz="800" dirty="0" err="1">
+                <a:latin typeface="Tahoma" panose="020B0604030504040204" pitchFamily="34" charset="0"/>
+                <a:ea typeface="Tahoma" panose="020B0604030504040204" pitchFamily="34" charset="0"/>
+                <a:cs typeface="Tahoma" panose="020B0604030504040204" pitchFamily="34" charset="0"/>
+              </a:rPr>
+              <a:t>câu</a:t>
+            </a:r>
+            <a:r>
+              <a:rPr lang="en-US" sz="800" dirty="0">
+                <a:latin typeface="Tahoma" panose="020B0604030504040204" pitchFamily="34" charset="0"/>
+                <a:ea typeface="Tahoma" panose="020B0604030504040204" pitchFamily="34" charset="0"/>
+                <a:cs typeface="Tahoma" panose="020B0604030504040204" pitchFamily="34" charset="0"/>
+              </a:rPr>
+              <a:t>: 160 token</a:t>
+            </a:r>
+          </a:p>
+          <a:p>
+            <a:pPr algn="just">
+              <a:lnSpc>
+                <a:spcPct val="130000"/>
+              </a:lnSpc>
+            </a:pPr>
+            <a:r>
+              <a:rPr lang="en-US" sz="800" dirty="0">
+                <a:latin typeface="Tahoma" panose="020B0604030504040204" pitchFamily="34" charset="0"/>
+                <a:ea typeface="Tahoma" panose="020B0604030504040204" pitchFamily="34" charset="0"/>
+                <a:cs typeface="Tahoma" panose="020B0604030504040204" pitchFamily="34" charset="0"/>
+              </a:rPr>
+              <a:t>Batch size: 1500, </a:t>
+            </a:r>
+            <a:r>
+              <a:rPr lang="en-US" sz="800" dirty="0" err="1">
+                <a:latin typeface="Tahoma" panose="020B0604030504040204" pitchFamily="34" charset="0"/>
+                <a:ea typeface="Tahoma" panose="020B0604030504040204" pitchFamily="34" charset="0"/>
+                <a:cs typeface="Tahoma" panose="020B0604030504040204" pitchFamily="34" charset="0"/>
+              </a:rPr>
+              <a:t>chạy</a:t>
+            </a:r>
+            <a:r>
+              <a:rPr lang="en-US" sz="800" dirty="0">
+                <a:latin typeface="Tahoma" panose="020B0604030504040204" pitchFamily="34" charset="0"/>
+                <a:ea typeface="Tahoma" panose="020B0604030504040204" pitchFamily="34" charset="0"/>
+                <a:cs typeface="Tahoma" panose="020B0604030504040204" pitchFamily="34" charset="0"/>
+              </a:rPr>
+              <a:t> </a:t>
+            </a:r>
+            <a:r>
+              <a:rPr lang="en-US" sz="800" dirty="0" err="1">
+                <a:latin typeface="Tahoma" panose="020B0604030504040204" pitchFamily="34" charset="0"/>
+                <a:ea typeface="Tahoma" panose="020B0604030504040204" pitchFamily="34" charset="0"/>
+                <a:cs typeface="Tahoma" panose="020B0604030504040204" pitchFamily="34" charset="0"/>
+              </a:rPr>
+              <a:t>trên</a:t>
+            </a:r>
+            <a:r>
+              <a:rPr lang="en-US" sz="800" dirty="0">
+                <a:latin typeface="Tahoma" panose="020B0604030504040204" pitchFamily="34" charset="0"/>
+                <a:ea typeface="Tahoma" panose="020B0604030504040204" pitchFamily="34" charset="0"/>
+                <a:cs typeface="Tahoma" panose="020B0604030504040204" pitchFamily="34" charset="0"/>
+              </a:rPr>
+              <a:t> GPU (CUDA)</a:t>
+            </a:r>
+          </a:p>
+          <a:p>
+            <a:pPr algn="just">
+              <a:lnSpc>
+                <a:spcPct val="130000"/>
+              </a:lnSpc>
+            </a:pPr>
+            <a:r>
+              <a:rPr lang="en-US" sz="800" b="1" i="1" dirty="0" err="1">
+                <a:latin typeface="Tahoma" panose="020B0604030504040204" pitchFamily="34" charset="0"/>
+                <a:ea typeface="Tahoma" panose="020B0604030504040204" pitchFamily="34" charset="0"/>
+                <a:cs typeface="Tahoma" panose="020B0604030504040204" pitchFamily="34" charset="0"/>
+              </a:rPr>
+              <a:t>Kiến</a:t>
+            </a:r>
+            <a:r>
+              <a:rPr lang="en-US" sz="800" b="1" i="1" dirty="0">
+                <a:latin typeface="Tahoma" panose="020B0604030504040204" pitchFamily="34" charset="0"/>
+                <a:ea typeface="Tahoma" panose="020B0604030504040204" pitchFamily="34" charset="0"/>
+                <a:cs typeface="Tahoma" panose="020B0604030504040204" pitchFamily="34" charset="0"/>
+              </a:rPr>
+              <a:t> </a:t>
+            </a:r>
+            <a:r>
+              <a:rPr lang="en-US" sz="800" b="1" i="1" dirty="0" err="1">
+                <a:latin typeface="Tahoma" panose="020B0604030504040204" pitchFamily="34" charset="0"/>
+                <a:ea typeface="Tahoma" panose="020B0604030504040204" pitchFamily="34" charset="0"/>
+                <a:cs typeface="Tahoma" panose="020B0604030504040204" pitchFamily="34" charset="0"/>
+              </a:rPr>
+              <a:t>trúc</a:t>
+            </a:r>
+            <a:r>
+              <a:rPr lang="en-US" sz="800" b="1" i="1" dirty="0">
+                <a:latin typeface="Tahoma" panose="020B0604030504040204" pitchFamily="34" charset="0"/>
+                <a:ea typeface="Tahoma" panose="020B0604030504040204" pitchFamily="34" charset="0"/>
+                <a:cs typeface="Tahoma" panose="020B0604030504040204" pitchFamily="34" charset="0"/>
+              </a:rPr>
+              <a:t>:</a:t>
+            </a:r>
+          </a:p>
+          <a:p>
+            <a:pPr marL="403225" indent="-171450" algn="just">
+              <a:lnSpc>
+                <a:spcPct val="130000"/>
+              </a:lnSpc>
+              <a:buFont typeface="Arial" panose="020B0604020202020204" pitchFamily="34" charset="0"/>
+              <a:buChar char="•"/>
+            </a:pPr>
+            <a:r>
+              <a:rPr lang="en-US" sz="800" dirty="0">
+                <a:latin typeface="Tahoma" panose="020B0604030504040204" pitchFamily="34" charset="0"/>
+                <a:ea typeface="Tahoma" panose="020B0604030504040204" pitchFamily="34" charset="0"/>
+                <a:cs typeface="Tahoma" panose="020B0604030504040204" pitchFamily="34" charset="0"/>
+              </a:rPr>
+              <a:t>Embedding: 256</a:t>
+            </a:r>
+          </a:p>
+          <a:p>
+            <a:pPr marL="403225" indent="-171450" algn="just">
+              <a:lnSpc>
+                <a:spcPct val="130000"/>
+              </a:lnSpc>
+              <a:buFont typeface="Arial" panose="020B0604020202020204" pitchFamily="34" charset="0"/>
+              <a:buChar char="•"/>
+            </a:pPr>
+            <a:r>
+              <a:rPr lang="en-US" sz="800" dirty="0">
+                <a:latin typeface="Tahoma" panose="020B0604030504040204" pitchFamily="34" charset="0"/>
+                <a:ea typeface="Tahoma" panose="020B0604030504040204" pitchFamily="34" charset="0"/>
+                <a:cs typeface="Tahoma" panose="020B0604030504040204" pitchFamily="34" charset="0"/>
+              </a:rPr>
+              <a:t>Hidden state: 512</a:t>
+            </a:r>
+          </a:p>
+          <a:p>
+            <a:pPr marL="403225" indent="-171450" algn="just">
+              <a:lnSpc>
+                <a:spcPct val="130000"/>
+              </a:lnSpc>
+              <a:buFont typeface="Arial" panose="020B0604020202020204" pitchFamily="34" charset="0"/>
+              <a:buChar char="•"/>
+            </a:pPr>
+            <a:r>
+              <a:rPr lang="en-US" sz="800" dirty="0">
+                <a:latin typeface="Tahoma" panose="020B0604030504040204" pitchFamily="34" charset="0"/>
+                <a:ea typeface="Tahoma" panose="020B0604030504040204" pitchFamily="34" charset="0"/>
+                <a:cs typeface="Tahoma" panose="020B0604030504040204" pitchFamily="34" charset="0"/>
+              </a:rPr>
+              <a:t>2 layers Encoder–Decoder</a:t>
+            </a:r>
+          </a:p>
+          <a:p>
+            <a:pPr marL="403225" indent="-171450" algn="just">
+              <a:lnSpc>
+                <a:spcPct val="130000"/>
+              </a:lnSpc>
+              <a:buFont typeface="Arial" panose="020B0604020202020204" pitchFamily="34" charset="0"/>
+              <a:buChar char="•"/>
+            </a:pPr>
+            <a:r>
+              <a:rPr lang="en-US" sz="800" dirty="0">
+                <a:latin typeface="Tahoma" panose="020B0604030504040204" pitchFamily="34" charset="0"/>
+                <a:ea typeface="Tahoma" panose="020B0604030504040204" pitchFamily="34" charset="0"/>
+                <a:cs typeface="Tahoma" panose="020B0604030504040204" pitchFamily="34" charset="0"/>
+              </a:rPr>
+              <a:t>Dropout: 0.5</a:t>
+            </a:r>
+          </a:p>
+          <a:p>
+            <a:pPr algn="just">
+              <a:lnSpc>
+                <a:spcPct val="130000"/>
+              </a:lnSpc>
+            </a:pPr>
+            <a:r>
+              <a:rPr lang="en-US" sz="800" b="1" i="1" dirty="0" err="1">
+                <a:latin typeface="Tahoma" panose="020B0604030504040204" pitchFamily="34" charset="0"/>
+                <a:ea typeface="Tahoma" panose="020B0604030504040204" pitchFamily="34" charset="0"/>
+                <a:cs typeface="Tahoma" panose="020B0604030504040204" pitchFamily="34" charset="0"/>
+              </a:rPr>
+              <a:t>Huấn</a:t>
+            </a:r>
+            <a:r>
+              <a:rPr lang="en-US" sz="800" b="1" i="1" dirty="0">
+                <a:latin typeface="Tahoma" panose="020B0604030504040204" pitchFamily="34" charset="0"/>
+                <a:ea typeface="Tahoma" panose="020B0604030504040204" pitchFamily="34" charset="0"/>
+                <a:cs typeface="Tahoma" panose="020B0604030504040204" pitchFamily="34" charset="0"/>
+              </a:rPr>
+              <a:t> </a:t>
+            </a:r>
+            <a:r>
+              <a:rPr lang="en-US" sz="800" b="1" i="1" dirty="0" err="1">
+                <a:latin typeface="Tahoma" panose="020B0604030504040204" pitchFamily="34" charset="0"/>
+                <a:ea typeface="Tahoma" panose="020B0604030504040204" pitchFamily="34" charset="0"/>
+                <a:cs typeface="Tahoma" panose="020B0604030504040204" pitchFamily="34" charset="0"/>
+              </a:rPr>
+              <a:t>luyện</a:t>
+            </a:r>
+            <a:r>
+              <a:rPr lang="en-US" sz="800" b="1" i="1" dirty="0">
+                <a:latin typeface="Tahoma" panose="020B0604030504040204" pitchFamily="34" charset="0"/>
+                <a:ea typeface="Tahoma" panose="020B0604030504040204" pitchFamily="34" charset="0"/>
+                <a:cs typeface="Tahoma" panose="020B0604030504040204" pitchFamily="34" charset="0"/>
+              </a:rPr>
+              <a:t>:</a:t>
+            </a:r>
+          </a:p>
+          <a:p>
+            <a:pPr marL="403225" indent="-171450" algn="just">
+              <a:lnSpc>
+                <a:spcPct val="130000"/>
+              </a:lnSpc>
+              <a:buFont typeface="Arial" panose="020B0604020202020204" pitchFamily="34" charset="0"/>
+              <a:buChar char="•"/>
+            </a:pPr>
+            <a:r>
+              <a:rPr lang="en-US" sz="800" dirty="0">
+                <a:latin typeface="Tahoma" panose="020B0604030504040204" pitchFamily="34" charset="0"/>
+                <a:ea typeface="Tahoma" panose="020B0604030504040204" pitchFamily="34" charset="0"/>
+                <a:cs typeface="Tahoma" panose="020B0604030504040204" pitchFamily="34" charset="0"/>
+              </a:rPr>
+              <a:t>Learning rate: 0.001</a:t>
+            </a:r>
+          </a:p>
+          <a:p>
+            <a:pPr marL="403225" indent="-171450" algn="just">
+              <a:lnSpc>
+                <a:spcPct val="130000"/>
+              </a:lnSpc>
+              <a:buFont typeface="Arial" panose="020B0604020202020204" pitchFamily="34" charset="0"/>
+              <a:buChar char="•"/>
+            </a:pPr>
+            <a:r>
+              <a:rPr lang="en-US" sz="800" dirty="0">
+                <a:latin typeface="Tahoma" panose="020B0604030504040204" pitchFamily="34" charset="0"/>
+                <a:ea typeface="Tahoma" panose="020B0604030504040204" pitchFamily="34" charset="0"/>
+                <a:cs typeface="Tahoma" panose="020B0604030504040204" pitchFamily="34" charset="0"/>
+              </a:rPr>
+              <a:t>Epochs: 11</a:t>
+            </a:r>
+          </a:p>
+          <a:p>
+            <a:pPr marL="403225" indent="-171450" algn="just">
+              <a:lnSpc>
+                <a:spcPct val="130000"/>
+              </a:lnSpc>
+              <a:buFont typeface="Arial" panose="020B0604020202020204" pitchFamily="34" charset="0"/>
+              <a:buChar char="•"/>
+            </a:pPr>
+            <a:r>
+              <a:rPr lang="en-US" sz="800" dirty="0">
+                <a:latin typeface="Tahoma" panose="020B0604030504040204" pitchFamily="34" charset="0"/>
+                <a:ea typeface="Tahoma" panose="020B0604030504040204" pitchFamily="34" charset="0"/>
+                <a:cs typeface="Tahoma" panose="020B0604030504040204" pitchFamily="34" charset="0"/>
+              </a:rPr>
+              <a:t>Gradient clipping: 1.0</a:t>
+            </a:r>
+          </a:p>
+          <a:p>
+            <a:pPr marL="403225" indent="-171450" algn="just">
+              <a:lnSpc>
+                <a:spcPct val="130000"/>
+              </a:lnSpc>
+              <a:buFont typeface="Arial" panose="020B0604020202020204" pitchFamily="34" charset="0"/>
+              <a:buChar char="•"/>
+            </a:pPr>
+            <a:r>
+              <a:rPr lang="en-US" sz="800" dirty="0">
+                <a:latin typeface="Tahoma" panose="020B0604030504040204" pitchFamily="34" charset="0"/>
+                <a:ea typeface="Tahoma" panose="020B0604030504040204" pitchFamily="34" charset="0"/>
+                <a:cs typeface="Tahoma" panose="020B0604030504040204" pitchFamily="34" charset="0"/>
+              </a:rPr>
+              <a:t>Teacher forcing: 0.5</a:t>
+            </a:r>
+            <a:endParaRPr lang="vi-VN" sz="800" dirty="0">
+              <a:latin typeface="Tahoma" panose="020B0604030504040204" pitchFamily="34" charset="0"/>
+              <a:ea typeface="Tahoma" panose="020B0604030504040204" pitchFamily="34" charset="0"/>
+              <a:cs typeface="Tahoma" panose="020B0604030504040204" pitchFamily="34" charset="0"/>
+            </a:endParaRPr>
+          </a:p>
+        </p:txBody>
+      </p:sp>
+      <p:pic>
+        <p:nvPicPr>
+          <p:cNvPr id="5" name="Picture 4">
+            <a:extLst>
+              <a:ext uri="{FF2B5EF4-FFF2-40B4-BE49-F238E27FC236}">
+                <a16:creationId xmlns:a16="http://schemas.microsoft.com/office/drawing/2014/main" id="{8F336402-BA4C-35FD-5EE2-E89D2C95F17D}"/>
+              </a:ext>
+            </a:extLst>
+          </p:cNvPr>
+          <p:cNvPicPr>
+            <a:picLocks noChangeAspect="1"/>
+          </p:cNvPicPr>
+          <p:nvPr/>
+        </p:nvPicPr>
+        <p:blipFill>
+          <a:blip r:embed="rId3"/>
+          <a:stretch>
+            <a:fillRect/>
+          </a:stretch>
+        </p:blipFill>
+        <p:spPr>
+          <a:xfrm>
+            <a:off x="2012107" y="2152229"/>
+            <a:ext cx="3463901" cy="650988"/>
+          </a:xfrm>
+          <a:prstGeom prst="rect">
+            <a:avLst/>
+          </a:prstGeom>
+        </p:spPr>
+      </p:pic>
+    </p:spTree>
+    <p:extLst>
+      <p:ext uri="{BB962C8B-B14F-4D97-AF65-F5344CB8AC3E}">
+        <p14:creationId xmlns:p14="http://schemas.microsoft.com/office/powerpoint/2010/main" val="151099841"/>
+      </p:ext>
+    </p:extLst>
+  </p:cSld>
+  <p:clrMapOvr>
+    <a:masterClrMapping/>
+  </p:clrMapOvr>
+</p:sld>
+</file>
+
+<file path=ppt/slides/slide2.xml><?xml version="1.0" encoding="utf-8"?>
+<p:sld xmlns:a="http://schemas.openxmlformats.org/drawingml/2006/main" xmlns:r="http://schemas.openxmlformats.org/officeDocument/2006/relationships" xmlns:p="http://schemas.openxmlformats.org/presentationml/2006/main">
+  <p:cSld>
+    <p:bg>
+      <p:bgPr>
+        <a:solidFill>
+          <a:srgbClr val="F4F8FF"/>
+        </a:solidFill>
+        <a:effectLst/>
+      </p:bgPr>
+    </p:bg>
+    <p:spTree>
+      <p:nvGrpSpPr>
+        <p:cNvPr id="1" name=""/>
+        <p:cNvGrpSpPr/>
+        <p:nvPr/>
+      </p:nvGrpSpPr>
+      <p:grpSpPr>
+        <a:xfrm>
+          <a:off x="0" y="0"/>
+          <a:ext cx="0" cy="0"/>
+          <a:chOff x="0" y="0"/>
+          <a:chExt cx="0" cy="0"/>
+        </a:xfrm>
+      </p:grpSpPr>
+      <p:sp>
+        <p:nvSpPr>
+          <p:cNvPr id="2" name="TextBox 2"/>
+          <p:cNvSpPr txBox="1"/>
+          <p:nvPr/>
+        </p:nvSpPr>
+        <p:spPr>
+          <a:xfrm>
+            <a:off x="323849" y="182553"/>
+            <a:ext cx="1562101" cy="332848"/>
+          </a:xfrm>
+          <a:prstGeom prst="rect">
+            <a:avLst/>
+          </a:prstGeom>
+        </p:spPr>
+        <p:txBody>
+          <a:bodyPr wrap="square" lIns="0" tIns="0" rIns="0" bIns="0" rtlCol="0" anchor="t">
+            <a:spAutoFit/>
+          </a:bodyPr>
+          <a:lstStyle/>
+          <a:p>
+            <a:pPr algn="l">
+              <a:lnSpc>
+                <a:spcPts val="2869"/>
+              </a:lnSpc>
+            </a:pPr>
+            <a:r>
+              <a:rPr lang="en-US" sz="2049" b="1" dirty="0" err="1">
+                <a:solidFill>
+                  <a:srgbClr val="2B4D7B"/>
+                </a:solidFill>
+                <a:latin typeface="Tahoma" panose="020B0604030504040204" pitchFamily="34" charset="0"/>
+                <a:ea typeface="Tahoma" panose="020B0604030504040204" pitchFamily="34" charset="0"/>
+                <a:cs typeface="Tahoma" panose="020B0604030504040204" pitchFamily="34" charset="0"/>
+                <a:sym typeface="Canva Sans Bold"/>
+              </a:rPr>
+              <a:t>Nội</a:t>
+            </a:r>
+            <a:r>
+              <a:rPr lang="en-US" sz="2049" b="1" dirty="0">
+                <a:solidFill>
+                  <a:srgbClr val="2B4D7B"/>
+                </a:solidFill>
+                <a:latin typeface="Tahoma" panose="020B0604030504040204" pitchFamily="34" charset="0"/>
+                <a:ea typeface="Tahoma" panose="020B0604030504040204" pitchFamily="34" charset="0"/>
+                <a:cs typeface="Tahoma" panose="020B0604030504040204" pitchFamily="34" charset="0"/>
+                <a:sym typeface="Canva Sans Bold"/>
+              </a:rPr>
+              <a:t> dung</a:t>
+            </a:r>
+          </a:p>
+        </p:txBody>
+      </p:sp>
+      <p:sp>
+        <p:nvSpPr>
+          <p:cNvPr id="3" name="TextBox 3"/>
+          <p:cNvSpPr txBox="1"/>
+          <p:nvPr/>
+        </p:nvSpPr>
+        <p:spPr>
+          <a:xfrm>
+            <a:off x="349411" y="731635"/>
+            <a:ext cx="3227945" cy="1736437"/>
+          </a:xfrm>
+          <a:prstGeom prst="rect">
+            <a:avLst/>
+          </a:prstGeom>
+        </p:spPr>
+        <p:txBody>
+          <a:bodyPr wrap="square" lIns="0" tIns="0" rIns="0" bIns="0" rtlCol="0" anchor="t">
+            <a:spAutoFit/>
+          </a:bodyPr>
+          <a:lstStyle/>
+          <a:p>
+            <a:pPr marL="228600" indent="-228600" algn="l">
+              <a:lnSpc>
+                <a:spcPts val="2304"/>
+              </a:lnSpc>
+              <a:buAutoNum type="arabicPeriod"/>
+            </a:pPr>
+            <a:r>
+              <a:rPr lang="en-US" sz="1200" b="1" dirty="0" err="1">
+                <a:solidFill>
+                  <a:srgbClr val="2B4D7B"/>
+                </a:solidFill>
+                <a:latin typeface="Tahoma" panose="020B0604030504040204" pitchFamily="34" charset="0"/>
+                <a:ea typeface="Tahoma" panose="020B0604030504040204" pitchFamily="34" charset="0"/>
+                <a:cs typeface="Tahoma" panose="020B0604030504040204" pitchFamily="34" charset="0"/>
+                <a:sym typeface="Canva Sans Bold"/>
+              </a:rPr>
+              <a:t>Giới</a:t>
+            </a:r>
+            <a:r>
+              <a:rPr lang="en-US" sz="1200" b="1" dirty="0">
+                <a:solidFill>
+                  <a:srgbClr val="2B4D7B"/>
+                </a:solidFill>
+                <a:latin typeface="Tahoma" panose="020B0604030504040204" pitchFamily="34" charset="0"/>
+                <a:ea typeface="Tahoma" panose="020B0604030504040204" pitchFamily="34" charset="0"/>
+                <a:cs typeface="Tahoma" panose="020B0604030504040204" pitchFamily="34" charset="0"/>
+                <a:sym typeface="Canva Sans Bold"/>
+              </a:rPr>
+              <a:t> </a:t>
+            </a:r>
+            <a:r>
+              <a:rPr lang="en-US" sz="1200" b="1" dirty="0" err="1">
+                <a:solidFill>
+                  <a:srgbClr val="2B4D7B"/>
+                </a:solidFill>
+                <a:latin typeface="Tahoma" panose="020B0604030504040204" pitchFamily="34" charset="0"/>
+                <a:ea typeface="Tahoma" panose="020B0604030504040204" pitchFamily="34" charset="0"/>
+                <a:cs typeface="Tahoma" panose="020B0604030504040204" pitchFamily="34" charset="0"/>
+                <a:sym typeface="Canva Sans Bold"/>
+              </a:rPr>
+              <a:t>thiệu</a:t>
+            </a:r>
+            <a:endParaRPr lang="en-US" sz="1200" b="1" dirty="0">
+              <a:solidFill>
+                <a:srgbClr val="2B4D7B"/>
+              </a:solidFill>
+              <a:latin typeface="Tahoma" panose="020B0604030504040204" pitchFamily="34" charset="0"/>
+              <a:ea typeface="Tahoma" panose="020B0604030504040204" pitchFamily="34" charset="0"/>
+              <a:cs typeface="Tahoma" panose="020B0604030504040204" pitchFamily="34" charset="0"/>
+              <a:sym typeface="Canva Sans Bold"/>
+            </a:endParaRPr>
+          </a:p>
+          <a:p>
+            <a:pPr marL="228600" indent="-228600" algn="l">
+              <a:lnSpc>
+                <a:spcPts val="2304"/>
+              </a:lnSpc>
+              <a:buAutoNum type="arabicPeriod"/>
+            </a:pPr>
+            <a:r>
+              <a:rPr lang="en-US" sz="1200" b="1" dirty="0" err="1">
+                <a:solidFill>
+                  <a:srgbClr val="2B4D7B"/>
+                </a:solidFill>
+                <a:latin typeface="Tahoma" panose="020B0604030504040204" pitchFamily="34" charset="0"/>
+                <a:ea typeface="Tahoma" panose="020B0604030504040204" pitchFamily="34" charset="0"/>
+                <a:cs typeface="Tahoma" panose="020B0604030504040204" pitchFamily="34" charset="0"/>
+                <a:sym typeface="Canva Sans Bold"/>
+              </a:rPr>
+              <a:t>Bộ</a:t>
+            </a:r>
+            <a:r>
+              <a:rPr lang="en-US" sz="1200" b="1" dirty="0">
+                <a:solidFill>
+                  <a:srgbClr val="2B4D7B"/>
+                </a:solidFill>
+                <a:latin typeface="Tahoma" panose="020B0604030504040204" pitchFamily="34" charset="0"/>
+                <a:ea typeface="Tahoma" panose="020B0604030504040204" pitchFamily="34" charset="0"/>
+                <a:cs typeface="Tahoma" panose="020B0604030504040204" pitchFamily="34" charset="0"/>
+                <a:sym typeface="Canva Sans Bold"/>
+              </a:rPr>
+              <a:t> </a:t>
+            </a:r>
+            <a:r>
+              <a:rPr lang="en-US" sz="1200" b="1" dirty="0" err="1">
+                <a:solidFill>
+                  <a:srgbClr val="2B4D7B"/>
+                </a:solidFill>
+                <a:latin typeface="Tahoma" panose="020B0604030504040204" pitchFamily="34" charset="0"/>
+                <a:ea typeface="Tahoma" panose="020B0604030504040204" pitchFamily="34" charset="0"/>
+                <a:cs typeface="Tahoma" panose="020B0604030504040204" pitchFamily="34" charset="0"/>
+                <a:sym typeface="Canva Sans Bold"/>
+              </a:rPr>
+              <a:t>dữ</a:t>
+            </a:r>
+            <a:r>
+              <a:rPr lang="en-US" sz="1200" b="1" dirty="0">
+                <a:solidFill>
+                  <a:srgbClr val="2B4D7B"/>
+                </a:solidFill>
+                <a:latin typeface="Tahoma" panose="020B0604030504040204" pitchFamily="34" charset="0"/>
+                <a:ea typeface="Tahoma" panose="020B0604030504040204" pitchFamily="34" charset="0"/>
+                <a:cs typeface="Tahoma" panose="020B0604030504040204" pitchFamily="34" charset="0"/>
+                <a:sym typeface="Canva Sans Bold"/>
+              </a:rPr>
+              <a:t> </a:t>
+            </a:r>
+            <a:r>
+              <a:rPr lang="en-US" sz="1200" b="1" dirty="0" err="1">
+                <a:solidFill>
+                  <a:srgbClr val="2B4D7B"/>
+                </a:solidFill>
+                <a:latin typeface="Tahoma" panose="020B0604030504040204" pitchFamily="34" charset="0"/>
+                <a:ea typeface="Tahoma" panose="020B0604030504040204" pitchFamily="34" charset="0"/>
+                <a:cs typeface="Tahoma" panose="020B0604030504040204" pitchFamily="34" charset="0"/>
+                <a:sym typeface="Canva Sans Bold"/>
+              </a:rPr>
+              <a:t>liệu</a:t>
+            </a:r>
+            <a:endParaRPr lang="en-US" sz="1200" b="1" dirty="0">
+              <a:solidFill>
+                <a:srgbClr val="2B4D7B"/>
+              </a:solidFill>
+              <a:latin typeface="Tahoma" panose="020B0604030504040204" pitchFamily="34" charset="0"/>
+              <a:ea typeface="Tahoma" panose="020B0604030504040204" pitchFamily="34" charset="0"/>
+              <a:cs typeface="Tahoma" panose="020B0604030504040204" pitchFamily="34" charset="0"/>
+              <a:sym typeface="Canva Sans Bold"/>
+            </a:endParaRPr>
+          </a:p>
+          <a:p>
+            <a:pPr marL="228600" indent="-228600" algn="l">
+              <a:lnSpc>
+                <a:spcPts val="2304"/>
+              </a:lnSpc>
+              <a:buAutoNum type="arabicPeriod"/>
+            </a:pPr>
+            <a:r>
+              <a:rPr lang="en-US" sz="1200" b="1" dirty="0" err="1">
+                <a:solidFill>
+                  <a:srgbClr val="2B4D7B"/>
+                </a:solidFill>
+                <a:latin typeface="Tahoma" panose="020B0604030504040204" pitchFamily="34" charset="0"/>
+                <a:ea typeface="Tahoma" panose="020B0604030504040204" pitchFamily="34" charset="0"/>
+                <a:cs typeface="Tahoma" panose="020B0604030504040204" pitchFamily="34" charset="0"/>
+                <a:sym typeface="Canva Sans Bold"/>
+              </a:rPr>
+              <a:t>Chỉ</a:t>
+            </a:r>
+            <a:r>
+              <a:rPr lang="en-US" sz="1200" b="1" dirty="0">
+                <a:solidFill>
+                  <a:srgbClr val="2B4D7B"/>
+                </a:solidFill>
+                <a:latin typeface="Tahoma" panose="020B0604030504040204" pitchFamily="34" charset="0"/>
+                <a:ea typeface="Tahoma" panose="020B0604030504040204" pitchFamily="34" charset="0"/>
+                <a:cs typeface="Tahoma" panose="020B0604030504040204" pitchFamily="34" charset="0"/>
+                <a:sym typeface="Canva Sans Bold"/>
+              </a:rPr>
+              <a:t> </a:t>
+            </a:r>
+            <a:r>
+              <a:rPr lang="en-US" sz="1200" b="1" dirty="0" err="1">
+                <a:solidFill>
+                  <a:srgbClr val="2B4D7B"/>
+                </a:solidFill>
+                <a:latin typeface="Tahoma" panose="020B0604030504040204" pitchFamily="34" charset="0"/>
+                <a:ea typeface="Tahoma" panose="020B0604030504040204" pitchFamily="34" charset="0"/>
+                <a:cs typeface="Tahoma" panose="020B0604030504040204" pitchFamily="34" charset="0"/>
+                <a:sym typeface="Canva Sans Bold"/>
+              </a:rPr>
+              <a:t>số</a:t>
+            </a:r>
+            <a:r>
+              <a:rPr lang="en-US" sz="1200" b="1" dirty="0">
+                <a:solidFill>
+                  <a:srgbClr val="2B4D7B"/>
+                </a:solidFill>
+                <a:latin typeface="Tahoma" panose="020B0604030504040204" pitchFamily="34" charset="0"/>
+                <a:ea typeface="Tahoma" panose="020B0604030504040204" pitchFamily="34" charset="0"/>
+                <a:cs typeface="Tahoma" panose="020B0604030504040204" pitchFamily="34" charset="0"/>
+                <a:sym typeface="Canva Sans Bold"/>
+              </a:rPr>
+              <a:t> </a:t>
+            </a:r>
+            <a:r>
+              <a:rPr lang="en-US" sz="1200" b="1" dirty="0" err="1">
+                <a:solidFill>
+                  <a:srgbClr val="2B4D7B"/>
+                </a:solidFill>
+                <a:latin typeface="Tahoma" panose="020B0604030504040204" pitchFamily="34" charset="0"/>
+                <a:ea typeface="Tahoma" panose="020B0604030504040204" pitchFamily="34" charset="0"/>
+                <a:cs typeface="Tahoma" panose="020B0604030504040204" pitchFamily="34" charset="0"/>
+                <a:sym typeface="Canva Sans Bold"/>
+              </a:rPr>
+              <a:t>đánh</a:t>
+            </a:r>
+            <a:r>
+              <a:rPr lang="en-US" sz="1200" b="1" dirty="0">
+                <a:solidFill>
+                  <a:srgbClr val="2B4D7B"/>
+                </a:solidFill>
+                <a:latin typeface="Tahoma" panose="020B0604030504040204" pitchFamily="34" charset="0"/>
+                <a:ea typeface="Tahoma" panose="020B0604030504040204" pitchFamily="34" charset="0"/>
+                <a:cs typeface="Tahoma" panose="020B0604030504040204" pitchFamily="34" charset="0"/>
+                <a:sym typeface="Canva Sans Bold"/>
+              </a:rPr>
+              <a:t> </a:t>
+            </a:r>
+            <a:r>
+              <a:rPr lang="en-US" sz="1200" b="1" dirty="0" err="1">
+                <a:solidFill>
+                  <a:srgbClr val="2B4D7B"/>
+                </a:solidFill>
+                <a:latin typeface="Tahoma" panose="020B0604030504040204" pitchFamily="34" charset="0"/>
+                <a:ea typeface="Tahoma" panose="020B0604030504040204" pitchFamily="34" charset="0"/>
+                <a:cs typeface="Tahoma" panose="020B0604030504040204" pitchFamily="34" charset="0"/>
+                <a:sym typeface="Canva Sans Bold"/>
+              </a:rPr>
+              <a:t>giá</a:t>
+            </a:r>
+            <a:endParaRPr lang="en-US" sz="1200" b="1" dirty="0">
+              <a:solidFill>
+                <a:srgbClr val="2B4D7B"/>
+              </a:solidFill>
+              <a:latin typeface="Tahoma" panose="020B0604030504040204" pitchFamily="34" charset="0"/>
+              <a:ea typeface="Tahoma" panose="020B0604030504040204" pitchFamily="34" charset="0"/>
+              <a:cs typeface="Tahoma" panose="020B0604030504040204" pitchFamily="34" charset="0"/>
+              <a:sym typeface="Canva Sans Bold"/>
+            </a:endParaRPr>
+          </a:p>
+          <a:p>
+            <a:pPr marL="228600" indent="-228600" algn="l">
+              <a:lnSpc>
+                <a:spcPts val="2304"/>
+              </a:lnSpc>
+              <a:buAutoNum type="arabicPeriod"/>
+            </a:pPr>
+            <a:r>
+              <a:rPr lang="en-US" sz="1200" b="1" dirty="0">
+                <a:solidFill>
+                  <a:srgbClr val="2B4D7B"/>
+                </a:solidFill>
+                <a:latin typeface="Tahoma" panose="020B0604030504040204" pitchFamily="34" charset="0"/>
+                <a:ea typeface="Tahoma" panose="020B0604030504040204" pitchFamily="34" charset="0"/>
+                <a:cs typeface="Tahoma" panose="020B0604030504040204" pitchFamily="34" charset="0"/>
+                <a:sym typeface="Canva Sans Bold"/>
+              </a:rPr>
+              <a:t>Phương </a:t>
+            </a:r>
+            <a:r>
+              <a:rPr lang="en-US" sz="1200" b="1" dirty="0" err="1">
+                <a:solidFill>
+                  <a:srgbClr val="2B4D7B"/>
+                </a:solidFill>
+                <a:latin typeface="Tahoma" panose="020B0604030504040204" pitchFamily="34" charset="0"/>
+                <a:ea typeface="Tahoma" panose="020B0604030504040204" pitchFamily="34" charset="0"/>
+                <a:cs typeface="Tahoma" panose="020B0604030504040204" pitchFamily="34" charset="0"/>
+                <a:sym typeface="Canva Sans Bold"/>
+              </a:rPr>
+              <a:t>pháp</a:t>
+            </a:r>
+            <a:endParaRPr lang="en-US" sz="1200" b="1" dirty="0">
+              <a:solidFill>
+                <a:srgbClr val="2B4D7B"/>
+              </a:solidFill>
+              <a:latin typeface="Tahoma" panose="020B0604030504040204" pitchFamily="34" charset="0"/>
+              <a:ea typeface="Tahoma" panose="020B0604030504040204" pitchFamily="34" charset="0"/>
+              <a:cs typeface="Tahoma" panose="020B0604030504040204" pitchFamily="34" charset="0"/>
+              <a:sym typeface="Canva Sans Bold"/>
+            </a:endParaRPr>
+          </a:p>
+          <a:p>
+            <a:pPr marL="228600" indent="-228600" algn="l">
+              <a:lnSpc>
+                <a:spcPts val="2304"/>
+              </a:lnSpc>
+              <a:buAutoNum type="arabicPeriod"/>
+            </a:pPr>
+            <a:r>
+              <a:rPr lang="en-US" sz="1200" b="1" dirty="0" err="1">
+                <a:solidFill>
+                  <a:srgbClr val="2B4D7B"/>
+                </a:solidFill>
+                <a:latin typeface="Tahoma" panose="020B0604030504040204" pitchFamily="34" charset="0"/>
+                <a:ea typeface="Tahoma" panose="020B0604030504040204" pitchFamily="34" charset="0"/>
+                <a:cs typeface="Tahoma" panose="020B0604030504040204" pitchFamily="34" charset="0"/>
+                <a:sym typeface="Canva Sans Bold"/>
+              </a:rPr>
+              <a:t>Kết</a:t>
+            </a:r>
+            <a:r>
+              <a:rPr lang="en-US" sz="1200" b="1" dirty="0">
+                <a:solidFill>
+                  <a:srgbClr val="2B4D7B"/>
+                </a:solidFill>
+                <a:latin typeface="Tahoma" panose="020B0604030504040204" pitchFamily="34" charset="0"/>
+                <a:ea typeface="Tahoma" panose="020B0604030504040204" pitchFamily="34" charset="0"/>
+                <a:cs typeface="Tahoma" panose="020B0604030504040204" pitchFamily="34" charset="0"/>
+                <a:sym typeface="Canva Sans Bold"/>
+              </a:rPr>
+              <a:t> </a:t>
+            </a:r>
+            <a:r>
+              <a:rPr lang="en-US" sz="1200" b="1" dirty="0" err="1">
+                <a:solidFill>
+                  <a:srgbClr val="2B4D7B"/>
+                </a:solidFill>
+                <a:latin typeface="Tahoma" panose="020B0604030504040204" pitchFamily="34" charset="0"/>
+                <a:ea typeface="Tahoma" panose="020B0604030504040204" pitchFamily="34" charset="0"/>
+                <a:cs typeface="Tahoma" panose="020B0604030504040204" pitchFamily="34" charset="0"/>
+                <a:sym typeface="Canva Sans Bold"/>
+              </a:rPr>
+              <a:t>quả</a:t>
+            </a:r>
+            <a:r>
+              <a:rPr lang="en-US" sz="1200" b="1" dirty="0">
+                <a:solidFill>
+                  <a:srgbClr val="2B4D7B"/>
+                </a:solidFill>
+                <a:latin typeface="Tahoma" panose="020B0604030504040204" pitchFamily="34" charset="0"/>
+                <a:ea typeface="Tahoma" panose="020B0604030504040204" pitchFamily="34" charset="0"/>
+                <a:cs typeface="Tahoma" panose="020B0604030504040204" pitchFamily="34" charset="0"/>
+                <a:sym typeface="Canva Sans Bold"/>
+              </a:rPr>
+              <a:t> </a:t>
+            </a:r>
+            <a:r>
+              <a:rPr lang="en-US" sz="1200" b="1" dirty="0" err="1">
+                <a:solidFill>
+                  <a:srgbClr val="2B4D7B"/>
+                </a:solidFill>
+                <a:latin typeface="Tahoma" panose="020B0604030504040204" pitchFamily="34" charset="0"/>
+                <a:ea typeface="Tahoma" panose="020B0604030504040204" pitchFamily="34" charset="0"/>
+                <a:cs typeface="Tahoma" panose="020B0604030504040204" pitchFamily="34" charset="0"/>
+                <a:sym typeface="Canva Sans Bold"/>
+              </a:rPr>
+              <a:t>thực</a:t>
+            </a:r>
+            <a:r>
+              <a:rPr lang="en-US" sz="1200" b="1" dirty="0">
+                <a:solidFill>
+                  <a:srgbClr val="2B4D7B"/>
+                </a:solidFill>
+                <a:latin typeface="Tahoma" panose="020B0604030504040204" pitchFamily="34" charset="0"/>
+                <a:ea typeface="Tahoma" panose="020B0604030504040204" pitchFamily="34" charset="0"/>
+                <a:cs typeface="Tahoma" panose="020B0604030504040204" pitchFamily="34" charset="0"/>
+                <a:sym typeface="Canva Sans Bold"/>
+              </a:rPr>
+              <a:t> </a:t>
+            </a:r>
+            <a:r>
+              <a:rPr lang="en-US" sz="1200" b="1" dirty="0" err="1">
+                <a:solidFill>
+                  <a:srgbClr val="2B4D7B"/>
+                </a:solidFill>
+                <a:latin typeface="Tahoma" panose="020B0604030504040204" pitchFamily="34" charset="0"/>
+                <a:ea typeface="Tahoma" panose="020B0604030504040204" pitchFamily="34" charset="0"/>
+                <a:cs typeface="Tahoma" panose="020B0604030504040204" pitchFamily="34" charset="0"/>
+                <a:sym typeface="Canva Sans Bold"/>
+              </a:rPr>
+              <a:t>nghiệm</a:t>
+            </a:r>
+            <a:endParaRPr lang="en-US" sz="1200" b="1" dirty="0">
+              <a:solidFill>
+                <a:srgbClr val="2B4D7B"/>
+              </a:solidFill>
+              <a:latin typeface="Tahoma" panose="020B0604030504040204" pitchFamily="34" charset="0"/>
+              <a:ea typeface="Tahoma" panose="020B0604030504040204" pitchFamily="34" charset="0"/>
+              <a:cs typeface="Tahoma" panose="020B0604030504040204" pitchFamily="34" charset="0"/>
+              <a:sym typeface="Canva Sans Bold"/>
+            </a:endParaRPr>
+          </a:p>
+          <a:p>
+            <a:pPr marL="228600" indent="-228600" algn="l">
+              <a:lnSpc>
+                <a:spcPts val="2304"/>
+              </a:lnSpc>
+              <a:buAutoNum type="arabicPeriod"/>
+            </a:pPr>
+            <a:r>
+              <a:rPr lang="en-US" sz="1200" b="1" dirty="0" err="1">
+                <a:solidFill>
+                  <a:srgbClr val="2B4D7B"/>
+                </a:solidFill>
+                <a:latin typeface="Tahoma" panose="020B0604030504040204" pitchFamily="34" charset="0"/>
+                <a:ea typeface="Tahoma" panose="020B0604030504040204" pitchFamily="34" charset="0"/>
+                <a:cs typeface="Tahoma" panose="020B0604030504040204" pitchFamily="34" charset="0"/>
+                <a:sym typeface="Canva Sans Bold"/>
+              </a:rPr>
+              <a:t>Kết</a:t>
+            </a:r>
+            <a:r>
+              <a:rPr lang="en-US" sz="1200" b="1" dirty="0">
+                <a:solidFill>
+                  <a:srgbClr val="2B4D7B"/>
+                </a:solidFill>
+                <a:latin typeface="Tahoma" panose="020B0604030504040204" pitchFamily="34" charset="0"/>
+                <a:ea typeface="Tahoma" panose="020B0604030504040204" pitchFamily="34" charset="0"/>
+                <a:cs typeface="Tahoma" panose="020B0604030504040204" pitchFamily="34" charset="0"/>
+                <a:sym typeface="Canva Sans Bold"/>
+              </a:rPr>
+              <a:t> </a:t>
+            </a:r>
+            <a:r>
+              <a:rPr lang="en-US" sz="1200" b="1" dirty="0" err="1">
+                <a:solidFill>
+                  <a:srgbClr val="2B4D7B"/>
+                </a:solidFill>
+                <a:latin typeface="Tahoma" panose="020B0604030504040204" pitchFamily="34" charset="0"/>
+                <a:ea typeface="Tahoma" panose="020B0604030504040204" pitchFamily="34" charset="0"/>
+                <a:cs typeface="Tahoma" panose="020B0604030504040204" pitchFamily="34" charset="0"/>
+                <a:sym typeface="Canva Sans Bold"/>
+              </a:rPr>
+              <a:t>luận</a:t>
+            </a:r>
+            <a:endParaRPr lang="en-US" sz="1200" b="1" dirty="0">
+              <a:solidFill>
+                <a:srgbClr val="2B4D7B"/>
+              </a:solidFill>
+              <a:latin typeface="Tahoma" panose="020B0604030504040204" pitchFamily="34" charset="0"/>
+              <a:ea typeface="Tahoma" panose="020B0604030504040204" pitchFamily="34" charset="0"/>
+              <a:cs typeface="Tahoma" panose="020B0604030504040204" pitchFamily="34" charset="0"/>
+              <a:sym typeface="Canva Sans Bold"/>
+            </a:endParaRPr>
+          </a:p>
+        </p:txBody>
+      </p:sp>
+      <p:sp>
+        <p:nvSpPr>
+          <p:cNvPr id="6" name="TextBox 5">
+            <a:extLst>
+              <a:ext uri="{FF2B5EF4-FFF2-40B4-BE49-F238E27FC236}">
+                <a16:creationId xmlns:a16="http://schemas.microsoft.com/office/drawing/2014/main" id="{1A3B45B4-54EB-D63C-8B42-A98CADA42C8D}"/>
+              </a:ext>
+            </a:extLst>
+          </p:cNvPr>
+          <p:cNvSpPr txBox="1"/>
+          <p:nvPr/>
+        </p:nvSpPr>
+        <p:spPr>
+          <a:xfrm>
+            <a:off x="5391150" y="2914650"/>
+            <a:ext cx="219075" cy="215444"/>
+          </a:xfrm>
+          <a:prstGeom prst="rect">
+            <a:avLst/>
+          </a:prstGeom>
+          <a:noFill/>
+        </p:spPr>
+        <p:txBody>
+          <a:bodyPr wrap="square">
+            <a:spAutoFit/>
+          </a:bodyPr>
+          <a:lstStyle/>
+          <a:p>
+            <a:pPr algn="r"/>
+            <a:r>
+              <a:rPr lang="en-US" sz="800" dirty="0">
+                <a:solidFill>
+                  <a:srgbClr val="1C1C1A"/>
+                </a:solidFill>
+                <a:latin typeface="Tahoma" panose="020B0604030504040204" pitchFamily="34" charset="0"/>
+                <a:ea typeface="Tahoma" panose="020B0604030504040204" pitchFamily="34" charset="0"/>
+                <a:cs typeface="Tahoma" panose="020B0604030504040204" pitchFamily="34" charset="0"/>
+                <a:sym typeface="Canva Sans"/>
+              </a:rPr>
+              <a:t>1</a:t>
+            </a:r>
+            <a:endParaRPr lang="en-US" sz="800" dirty="0">
+              <a:latin typeface="Tahoma" panose="020B0604030504040204" pitchFamily="34" charset="0"/>
+              <a:ea typeface="Tahoma" panose="020B0604030504040204" pitchFamily="34" charset="0"/>
+              <a:cs typeface="Tahoma" panose="020B0604030504040204" pitchFamily="34" charset="0"/>
+            </a:endParaRPr>
+          </a:p>
+        </p:txBody>
+      </p:sp>
+    </p:spTree>
+  </p:cSld>
+  <p:clrMapOvr>
+    <a:masterClrMapping/>
+  </p:clrMapOvr>
+</p:sld>
+</file>
+
+<file path=ppt/slides/slide20.xml><?xml version="1.0" encoding="utf-8"?>
+<p:sld xmlns:a="http://schemas.openxmlformats.org/drawingml/2006/main" xmlns:r="http://schemas.openxmlformats.org/officeDocument/2006/relationships" xmlns:p="http://schemas.openxmlformats.org/presentationml/2006/main">
+  <p:cSld>
+    <p:spTree>
+      <p:nvGrpSpPr>
+        <p:cNvPr id="1" name="">
+          <a:extLst>
+            <a:ext uri="{FF2B5EF4-FFF2-40B4-BE49-F238E27FC236}">
+              <a16:creationId xmlns:a16="http://schemas.microsoft.com/office/drawing/2014/main" id="{AF8B58FC-7B45-B96D-F0C2-7AFB4277B6D2}"/>
+            </a:ext>
+          </a:extLst>
+        </p:cNvPr>
+        <p:cNvGrpSpPr/>
+        <p:nvPr/>
+      </p:nvGrpSpPr>
+      <p:grpSpPr>
+        <a:xfrm>
+          <a:off x="0" y="0"/>
+          <a:ext cx="0" cy="0"/>
+          <a:chOff x="0" y="0"/>
+          <a:chExt cx="0" cy="0"/>
+        </a:xfrm>
+      </p:grpSpPr>
+      <p:sp>
+        <p:nvSpPr>
+          <p:cNvPr id="2" name="TextBox 2">
+            <a:extLst>
+              <a:ext uri="{FF2B5EF4-FFF2-40B4-BE49-F238E27FC236}">
+                <a16:creationId xmlns:a16="http://schemas.microsoft.com/office/drawing/2014/main" id="{0527B843-ABEB-C4E9-0CC8-81B8ED3B80E8}"/>
+              </a:ext>
+            </a:extLst>
+          </p:cNvPr>
+          <p:cNvSpPr txBox="1"/>
+          <p:nvPr/>
+        </p:nvSpPr>
+        <p:spPr>
+          <a:xfrm>
+            <a:off x="277092" y="277825"/>
+            <a:ext cx="2675658" cy="241476"/>
+          </a:xfrm>
+          <a:prstGeom prst="rect">
+            <a:avLst/>
+          </a:prstGeom>
+        </p:spPr>
+        <p:txBody>
+          <a:bodyPr wrap="square" lIns="0" tIns="0" rIns="0" bIns="0" rtlCol="0" anchor="t">
+            <a:spAutoFit/>
+          </a:bodyPr>
+          <a:lstStyle/>
+          <a:p>
+            <a:pPr algn="l">
+              <a:lnSpc>
+                <a:spcPts val="2100"/>
+              </a:lnSpc>
+            </a:pPr>
+            <a:r>
+              <a:rPr lang="en-US" sz="1500" b="1" spc="-4" dirty="0">
+                <a:solidFill>
+                  <a:srgbClr val="2B4D7B"/>
+                </a:solidFill>
+                <a:latin typeface="Tahoma" panose="020B0604030504040204" pitchFamily="34" charset="0"/>
+                <a:ea typeface="Tahoma" panose="020B0604030504040204" pitchFamily="34" charset="0"/>
+                <a:cs typeface="Tahoma" panose="020B0604030504040204" pitchFamily="34" charset="0"/>
+                <a:sym typeface="Canva Sans Bold"/>
+              </a:rPr>
+              <a:t>5. </a:t>
+            </a:r>
+            <a:r>
+              <a:rPr lang="en-US" sz="1500" b="1" spc="-4" dirty="0" err="1">
+                <a:solidFill>
+                  <a:srgbClr val="2B4D7B"/>
+                </a:solidFill>
+                <a:latin typeface="Tahoma" panose="020B0604030504040204" pitchFamily="34" charset="0"/>
+                <a:ea typeface="Tahoma" panose="020B0604030504040204" pitchFamily="34" charset="0"/>
+                <a:cs typeface="Tahoma" panose="020B0604030504040204" pitchFamily="34" charset="0"/>
+                <a:sym typeface="Canva Sans Bold"/>
+              </a:rPr>
+              <a:t>Kết</a:t>
+            </a:r>
+            <a:r>
+              <a:rPr lang="en-US" sz="1500" b="1" spc="-4" dirty="0">
+                <a:solidFill>
+                  <a:srgbClr val="2B4D7B"/>
+                </a:solidFill>
+                <a:latin typeface="Tahoma" panose="020B0604030504040204" pitchFamily="34" charset="0"/>
+                <a:ea typeface="Tahoma" panose="020B0604030504040204" pitchFamily="34" charset="0"/>
+                <a:cs typeface="Tahoma" panose="020B0604030504040204" pitchFamily="34" charset="0"/>
+                <a:sym typeface="Canva Sans Bold"/>
+              </a:rPr>
+              <a:t> </a:t>
+            </a:r>
+            <a:r>
+              <a:rPr lang="en-US" sz="1500" b="1" spc="-4" dirty="0" err="1">
+                <a:solidFill>
+                  <a:srgbClr val="2B4D7B"/>
+                </a:solidFill>
+                <a:latin typeface="Tahoma" panose="020B0604030504040204" pitchFamily="34" charset="0"/>
+                <a:ea typeface="Tahoma" panose="020B0604030504040204" pitchFamily="34" charset="0"/>
+                <a:cs typeface="Tahoma" panose="020B0604030504040204" pitchFamily="34" charset="0"/>
+                <a:sym typeface="Canva Sans Bold"/>
+              </a:rPr>
+              <a:t>quả</a:t>
+            </a:r>
+            <a:r>
+              <a:rPr lang="en-US" sz="1500" b="1" spc="-4" dirty="0">
+                <a:solidFill>
+                  <a:srgbClr val="2B4D7B"/>
+                </a:solidFill>
+                <a:latin typeface="Tahoma" panose="020B0604030504040204" pitchFamily="34" charset="0"/>
+                <a:ea typeface="Tahoma" panose="020B0604030504040204" pitchFamily="34" charset="0"/>
+                <a:cs typeface="Tahoma" panose="020B0604030504040204" pitchFamily="34" charset="0"/>
+                <a:sym typeface="Canva Sans Bold"/>
+              </a:rPr>
+              <a:t> </a:t>
+            </a:r>
+            <a:r>
+              <a:rPr lang="en-US" sz="1500" b="1" spc="-4" dirty="0" err="1">
+                <a:solidFill>
+                  <a:srgbClr val="2B4D7B"/>
+                </a:solidFill>
+                <a:latin typeface="Tahoma" panose="020B0604030504040204" pitchFamily="34" charset="0"/>
+                <a:ea typeface="Tahoma" panose="020B0604030504040204" pitchFamily="34" charset="0"/>
+                <a:cs typeface="Tahoma" panose="020B0604030504040204" pitchFamily="34" charset="0"/>
+                <a:sym typeface="Canva Sans Bold"/>
+              </a:rPr>
+              <a:t>thực</a:t>
+            </a:r>
+            <a:r>
+              <a:rPr lang="en-US" sz="1500" b="1" spc="-4" dirty="0">
+                <a:solidFill>
+                  <a:srgbClr val="2B4D7B"/>
+                </a:solidFill>
+                <a:latin typeface="Tahoma" panose="020B0604030504040204" pitchFamily="34" charset="0"/>
+                <a:ea typeface="Tahoma" panose="020B0604030504040204" pitchFamily="34" charset="0"/>
+                <a:cs typeface="Tahoma" panose="020B0604030504040204" pitchFamily="34" charset="0"/>
+                <a:sym typeface="Canva Sans Bold"/>
+              </a:rPr>
+              <a:t> </a:t>
+            </a:r>
+            <a:r>
+              <a:rPr lang="en-US" sz="1500" b="1" spc="-4" dirty="0" err="1">
+                <a:solidFill>
+                  <a:srgbClr val="2B4D7B"/>
+                </a:solidFill>
+                <a:latin typeface="Tahoma" panose="020B0604030504040204" pitchFamily="34" charset="0"/>
+                <a:ea typeface="Tahoma" panose="020B0604030504040204" pitchFamily="34" charset="0"/>
+                <a:cs typeface="Tahoma" panose="020B0604030504040204" pitchFamily="34" charset="0"/>
+                <a:sym typeface="Canva Sans Bold"/>
+              </a:rPr>
+              <a:t>nghiệm</a:t>
+            </a:r>
+            <a:endParaRPr lang="en-US" sz="1500" b="1" spc="-4" dirty="0">
+              <a:solidFill>
+                <a:srgbClr val="2B4D7B"/>
+              </a:solidFill>
+              <a:latin typeface="Tahoma" panose="020B0604030504040204" pitchFamily="34" charset="0"/>
+              <a:ea typeface="Tahoma" panose="020B0604030504040204" pitchFamily="34" charset="0"/>
+              <a:cs typeface="Tahoma" panose="020B0604030504040204" pitchFamily="34" charset="0"/>
+              <a:sym typeface="Canva Sans Bold"/>
+            </a:endParaRPr>
+          </a:p>
+        </p:txBody>
+      </p:sp>
+      <p:sp>
+        <p:nvSpPr>
+          <p:cNvPr id="10" name="TextBox 9">
+            <a:extLst>
+              <a:ext uri="{FF2B5EF4-FFF2-40B4-BE49-F238E27FC236}">
+                <a16:creationId xmlns:a16="http://schemas.microsoft.com/office/drawing/2014/main" id="{BA26E1DF-BD1C-BBB8-B8F4-1E560A11DA62}"/>
+              </a:ext>
+            </a:extLst>
+          </p:cNvPr>
+          <p:cNvSpPr txBox="1"/>
+          <p:nvPr/>
+        </p:nvSpPr>
+        <p:spPr>
+          <a:xfrm>
+            <a:off x="5314950" y="2914650"/>
+            <a:ext cx="295275" cy="215444"/>
+          </a:xfrm>
+          <a:prstGeom prst="rect">
+            <a:avLst/>
+          </a:prstGeom>
+          <a:noFill/>
+        </p:spPr>
+        <p:txBody>
+          <a:bodyPr wrap="square">
+            <a:spAutoFit/>
+          </a:bodyPr>
+          <a:lstStyle/>
+          <a:p>
+            <a:pPr algn="r"/>
+            <a:r>
+              <a:rPr lang="en-US" sz="800" dirty="0">
+                <a:solidFill>
+                  <a:srgbClr val="1C1C1A"/>
+                </a:solidFill>
+                <a:latin typeface="Tahoma" panose="020B0604030504040204" pitchFamily="34" charset="0"/>
+                <a:ea typeface="Tahoma" panose="020B0604030504040204" pitchFamily="34" charset="0"/>
+                <a:cs typeface="Tahoma" panose="020B0604030504040204" pitchFamily="34" charset="0"/>
+                <a:sym typeface="Canva Sans"/>
+              </a:rPr>
+              <a:t>19</a:t>
+            </a:r>
+            <a:endParaRPr lang="en-US" sz="800" dirty="0">
+              <a:latin typeface="Tahoma" panose="020B0604030504040204" pitchFamily="34" charset="0"/>
+              <a:ea typeface="Tahoma" panose="020B0604030504040204" pitchFamily="34" charset="0"/>
+              <a:cs typeface="Tahoma" panose="020B0604030504040204" pitchFamily="34" charset="0"/>
+            </a:endParaRPr>
+          </a:p>
+        </p:txBody>
+      </p:sp>
+      <p:sp>
+        <p:nvSpPr>
+          <p:cNvPr id="9" name="TextBox 8">
+            <a:extLst>
+              <a:ext uri="{FF2B5EF4-FFF2-40B4-BE49-F238E27FC236}">
+                <a16:creationId xmlns:a16="http://schemas.microsoft.com/office/drawing/2014/main" id="{A095D90A-20A8-C60F-F2FD-2724C6B14AB5}"/>
+              </a:ext>
+            </a:extLst>
+          </p:cNvPr>
+          <p:cNvSpPr txBox="1"/>
+          <p:nvPr/>
+        </p:nvSpPr>
+        <p:spPr>
+          <a:xfrm>
+            <a:off x="277092" y="519301"/>
+            <a:ext cx="2675658" cy="251094"/>
+          </a:xfrm>
+          <a:prstGeom prst="rect">
+            <a:avLst/>
+          </a:prstGeom>
+          <a:noFill/>
+        </p:spPr>
+        <p:txBody>
+          <a:bodyPr wrap="square" rtlCol="0">
+            <a:spAutoFit/>
+          </a:bodyPr>
+          <a:lstStyle/>
+          <a:p>
+            <a:pPr algn="just">
+              <a:lnSpc>
+                <a:spcPct val="130000"/>
+              </a:lnSpc>
+            </a:pPr>
+            <a:r>
+              <a:rPr lang="en-US" sz="900" u="sng" dirty="0">
+                <a:solidFill>
+                  <a:srgbClr val="00B050"/>
+                </a:solidFill>
+                <a:latin typeface="Tahoma" panose="020B0604030504040204" pitchFamily="34" charset="0"/>
+                <a:ea typeface="Tahoma" panose="020B0604030504040204" pitchFamily="34" charset="0"/>
+                <a:cs typeface="Tahoma" panose="020B0604030504040204" pitchFamily="34" charset="0"/>
+              </a:rPr>
+              <a:t>5.2. Kịch </a:t>
+            </a:r>
+            <a:r>
+              <a:rPr lang="en-US" sz="900" u="sng" dirty="0" err="1">
+                <a:solidFill>
+                  <a:srgbClr val="00B050"/>
+                </a:solidFill>
+                <a:latin typeface="Tahoma" panose="020B0604030504040204" pitchFamily="34" charset="0"/>
+                <a:ea typeface="Tahoma" panose="020B0604030504040204" pitchFamily="34" charset="0"/>
+                <a:cs typeface="Tahoma" panose="020B0604030504040204" pitchFamily="34" charset="0"/>
+              </a:rPr>
+              <a:t>bản</a:t>
+            </a:r>
+            <a:r>
+              <a:rPr lang="en-US" sz="900" u="sng" dirty="0">
+                <a:solidFill>
+                  <a:srgbClr val="00B050"/>
+                </a:solidFill>
+                <a:latin typeface="Tahoma" panose="020B0604030504040204" pitchFamily="34" charset="0"/>
+                <a:ea typeface="Tahoma" panose="020B0604030504040204" pitchFamily="34" charset="0"/>
+                <a:cs typeface="Tahoma" panose="020B0604030504040204" pitchFamily="34" charset="0"/>
+              </a:rPr>
+              <a:t> </a:t>
+            </a:r>
+            <a:r>
+              <a:rPr lang="en-US" sz="900" u="sng" dirty="0" err="1">
+                <a:solidFill>
+                  <a:srgbClr val="00B050"/>
+                </a:solidFill>
+                <a:latin typeface="Tahoma" panose="020B0604030504040204" pitchFamily="34" charset="0"/>
+                <a:ea typeface="Tahoma" panose="020B0604030504040204" pitchFamily="34" charset="0"/>
+                <a:cs typeface="Tahoma" panose="020B0604030504040204" pitchFamily="34" charset="0"/>
+              </a:rPr>
+              <a:t>thử</a:t>
+            </a:r>
+            <a:r>
+              <a:rPr lang="en-US" sz="900" u="sng" dirty="0">
+                <a:solidFill>
+                  <a:srgbClr val="00B050"/>
+                </a:solidFill>
+                <a:latin typeface="Tahoma" panose="020B0604030504040204" pitchFamily="34" charset="0"/>
+                <a:ea typeface="Tahoma" panose="020B0604030504040204" pitchFamily="34" charset="0"/>
+                <a:cs typeface="Tahoma" panose="020B0604030504040204" pitchFamily="34" charset="0"/>
+              </a:rPr>
+              <a:t> </a:t>
+            </a:r>
+            <a:r>
+              <a:rPr lang="en-US" sz="900" u="sng" dirty="0" err="1">
+                <a:solidFill>
+                  <a:srgbClr val="00B050"/>
+                </a:solidFill>
+                <a:latin typeface="Tahoma" panose="020B0604030504040204" pitchFamily="34" charset="0"/>
+                <a:ea typeface="Tahoma" panose="020B0604030504040204" pitchFamily="34" charset="0"/>
+                <a:cs typeface="Tahoma" panose="020B0604030504040204" pitchFamily="34" charset="0"/>
+              </a:rPr>
+              <a:t>nghiệm</a:t>
+            </a:r>
+            <a:r>
+              <a:rPr lang="en-US" sz="900" u="sng" dirty="0">
+                <a:solidFill>
+                  <a:srgbClr val="00B050"/>
+                </a:solidFill>
+                <a:latin typeface="Tahoma" panose="020B0604030504040204" pitchFamily="34" charset="0"/>
+                <a:ea typeface="Tahoma" panose="020B0604030504040204" pitchFamily="34" charset="0"/>
+                <a:cs typeface="Tahoma" panose="020B0604030504040204" pitchFamily="34" charset="0"/>
+              </a:rPr>
+              <a:t> Transformer 1</a:t>
+            </a:r>
+            <a:endParaRPr lang="vi-VN" sz="900" u="sng" dirty="0">
+              <a:solidFill>
+                <a:srgbClr val="00B050"/>
+              </a:solidFill>
+              <a:latin typeface="Tahoma" panose="020B0604030504040204" pitchFamily="34" charset="0"/>
+              <a:ea typeface="Tahoma" panose="020B0604030504040204" pitchFamily="34" charset="0"/>
+              <a:cs typeface="Tahoma" panose="020B0604030504040204" pitchFamily="34" charset="0"/>
+            </a:endParaRPr>
+          </a:p>
+        </p:txBody>
+      </p:sp>
+      <p:sp>
+        <p:nvSpPr>
+          <p:cNvPr id="3" name="TextBox 2">
+            <a:extLst>
+              <a:ext uri="{FF2B5EF4-FFF2-40B4-BE49-F238E27FC236}">
+                <a16:creationId xmlns:a16="http://schemas.microsoft.com/office/drawing/2014/main" id="{D17FB01D-8699-BF9C-2B0C-C04A8266B570}"/>
+              </a:ext>
+            </a:extLst>
+          </p:cNvPr>
+          <p:cNvSpPr txBox="1"/>
+          <p:nvPr/>
+        </p:nvSpPr>
+        <p:spPr>
+          <a:xfrm>
+            <a:off x="277092" y="760777"/>
+            <a:ext cx="2828058" cy="1993879"/>
+          </a:xfrm>
+          <a:prstGeom prst="rect">
+            <a:avLst/>
+          </a:prstGeom>
+          <a:noFill/>
+        </p:spPr>
+        <p:txBody>
+          <a:bodyPr wrap="square" rtlCol="0">
+            <a:spAutoFit/>
+          </a:bodyPr>
+          <a:lstStyle/>
+          <a:p>
+            <a:pPr algn="just">
+              <a:lnSpc>
+                <a:spcPct val="130000"/>
+              </a:lnSpc>
+            </a:pPr>
+            <a:r>
+              <a:rPr lang="en-US" sz="800" dirty="0">
+                <a:latin typeface="Tahoma" panose="020B0604030504040204" pitchFamily="34" charset="0"/>
+                <a:ea typeface="Tahoma" panose="020B0604030504040204" pitchFamily="34" charset="0"/>
+                <a:cs typeface="Tahoma" panose="020B0604030504040204" pitchFamily="34" charset="0"/>
+              </a:rPr>
+              <a:t>Tokenizer: </a:t>
+            </a:r>
+            <a:r>
+              <a:rPr lang="en-US" sz="800" dirty="0" err="1">
+                <a:latin typeface="Tahoma" panose="020B0604030504040204" pitchFamily="34" charset="0"/>
+                <a:ea typeface="Tahoma" panose="020B0604030504040204" pitchFamily="34" charset="0"/>
+                <a:cs typeface="Tahoma" panose="020B0604030504040204" pitchFamily="34" charset="0"/>
+              </a:rPr>
+              <a:t>en_core_web_sm</a:t>
+            </a:r>
+            <a:r>
+              <a:rPr lang="en-US" sz="800" dirty="0">
+                <a:latin typeface="Tahoma" panose="020B0604030504040204" pitchFamily="34" charset="0"/>
+                <a:ea typeface="Tahoma" panose="020B0604030504040204" pitchFamily="34" charset="0"/>
+                <a:cs typeface="Tahoma" panose="020B0604030504040204" pitchFamily="34" charset="0"/>
+              </a:rPr>
+              <a:t> (EN), </a:t>
+            </a:r>
+            <a:r>
+              <a:rPr lang="en-US" sz="800" dirty="0" err="1">
+                <a:latin typeface="Tahoma" panose="020B0604030504040204" pitchFamily="34" charset="0"/>
+                <a:ea typeface="Tahoma" panose="020B0604030504040204" pitchFamily="34" charset="0"/>
+                <a:cs typeface="Tahoma" panose="020B0604030504040204" pitchFamily="34" charset="0"/>
+              </a:rPr>
+              <a:t>vi_core_news_lg</a:t>
+            </a:r>
+            <a:r>
+              <a:rPr lang="en-US" sz="800" dirty="0">
+                <a:latin typeface="Tahoma" panose="020B0604030504040204" pitchFamily="34" charset="0"/>
+                <a:ea typeface="Tahoma" panose="020B0604030504040204" pitchFamily="34" charset="0"/>
+                <a:cs typeface="Tahoma" panose="020B0604030504040204" pitchFamily="34" charset="0"/>
+              </a:rPr>
+              <a:t> (VI)</a:t>
+            </a:r>
+          </a:p>
+          <a:p>
+            <a:pPr algn="just">
+              <a:lnSpc>
+                <a:spcPct val="130000"/>
+              </a:lnSpc>
+            </a:pPr>
+            <a:r>
+              <a:rPr lang="en-US" sz="800" dirty="0">
+                <a:latin typeface="Tahoma" panose="020B0604030504040204" pitchFamily="34" charset="0"/>
+                <a:ea typeface="Tahoma" panose="020B0604030504040204" pitchFamily="34" charset="0"/>
+                <a:cs typeface="Tahoma" panose="020B0604030504040204" pitchFamily="34" charset="0"/>
+              </a:rPr>
+              <a:t>Giới </a:t>
+            </a:r>
+            <a:r>
+              <a:rPr lang="en-US" sz="800" dirty="0" err="1">
+                <a:latin typeface="Tahoma" panose="020B0604030504040204" pitchFamily="34" charset="0"/>
+                <a:ea typeface="Tahoma" panose="020B0604030504040204" pitchFamily="34" charset="0"/>
+                <a:cs typeface="Tahoma" panose="020B0604030504040204" pitchFamily="34" charset="0"/>
+              </a:rPr>
+              <a:t>hạn</a:t>
+            </a:r>
+            <a:r>
+              <a:rPr lang="en-US" sz="800" dirty="0">
+                <a:latin typeface="Tahoma" panose="020B0604030504040204" pitchFamily="34" charset="0"/>
+                <a:ea typeface="Tahoma" panose="020B0604030504040204" pitchFamily="34" charset="0"/>
+                <a:cs typeface="Tahoma" panose="020B0604030504040204" pitchFamily="34" charset="0"/>
+              </a:rPr>
+              <a:t> </a:t>
+            </a:r>
+            <a:r>
+              <a:rPr lang="en-US" sz="800" dirty="0" err="1">
+                <a:latin typeface="Tahoma" panose="020B0604030504040204" pitchFamily="34" charset="0"/>
+                <a:ea typeface="Tahoma" panose="020B0604030504040204" pitchFamily="34" charset="0"/>
+                <a:cs typeface="Tahoma" panose="020B0604030504040204" pitchFamily="34" charset="0"/>
+              </a:rPr>
+              <a:t>độ</a:t>
+            </a:r>
+            <a:r>
+              <a:rPr lang="en-US" sz="800" dirty="0">
+                <a:latin typeface="Tahoma" panose="020B0604030504040204" pitchFamily="34" charset="0"/>
+                <a:ea typeface="Tahoma" panose="020B0604030504040204" pitchFamily="34" charset="0"/>
+                <a:cs typeface="Tahoma" panose="020B0604030504040204" pitchFamily="34" charset="0"/>
+              </a:rPr>
+              <a:t> </a:t>
+            </a:r>
+            <a:r>
+              <a:rPr lang="en-US" sz="800" dirty="0" err="1">
+                <a:latin typeface="Tahoma" panose="020B0604030504040204" pitchFamily="34" charset="0"/>
+                <a:ea typeface="Tahoma" panose="020B0604030504040204" pitchFamily="34" charset="0"/>
+                <a:cs typeface="Tahoma" panose="020B0604030504040204" pitchFamily="34" charset="0"/>
+              </a:rPr>
+              <a:t>dài</a:t>
+            </a:r>
+            <a:r>
+              <a:rPr lang="en-US" sz="800" dirty="0">
+                <a:latin typeface="Tahoma" panose="020B0604030504040204" pitchFamily="34" charset="0"/>
+                <a:ea typeface="Tahoma" panose="020B0604030504040204" pitchFamily="34" charset="0"/>
+                <a:cs typeface="Tahoma" panose="020B0604030504040204" pitchFamily="34" charset="0"/>
+              </a:rPr>
+              <a:t> </a:t>
+            </a:r>
+            <a:r>
+              <a:rPr lang="en-US" sz="800" dirty="0" err="1">
+                <a:latin typeface="Tahoma" panose="020B0604030504040204" pitchFamily="34" charset="0"/>
+                <a:ea typeface="Tahoma" panose="020B0604030504040204" pitchFamily="34" charset="0"/>
+                <a:cs typeface="Tahoma" panose="020B0604030504040204" pitchFamily="34" charset="0"/>
+              </a:rPr>
+              <a:t>câu</a:t>
+            </a:r>
+            <a:r>
+              <a:rPr lang="en-US" sz="800" dirty="0">
+                <a:latin typeface="Tahoma" panose="020B0604030504040204" pitchFamily="34" charset="0"/>
+                <a:ea typeface="Tahoma" panose="020B0604030504040204" pitchFamily="34" charset="0"/>
+                <a:cs typeface="Tahoma" panose="020B0604030504040204" pitchFamily="34" charset="0"/>
+              </a:rPr>
+              <a:t>: 160 token</a:t>
+            </a:r>
+          </a:p>
+          <a:p>
+            <a:pPr algn="just">
+              <a:lnSpc>
+                <a:spcPct val="130000"/>
+              </a:lnSpc>
+            </a:pPr>
+            <a:r>
+              <a:rPr lang="en-US" sz="800" b="1" dirty="0">
+                <a:latin typeface="Tahoma" panose="020B0604030504040204" pitchFamily="34" charset="0"/>
+                <a:ea typeface="Tahoma" panose="020B0604030504040204" pitchFamily="34" charset="0"/>
+                <a:cs typeface="Tahoma" panose="020B0604030504040204" pitchFamily="34" charset="0"/>
+              </a:rPr>
+              <a:t>Batch size: </a:t>
+            </a:r>
+            <a:r>
+              <a:rPr lang="en-US" sz="800" dirty="0">
+                <a:latin typeface="Tahoma" panose="020B0604030504040204" pitchFamily="34" charset="0"/>
+                <a:ea typeface="Tahoma" panose="020B0604030504040204" pitchFamily="34" charset="0"/>
+                <a:cs typeface="Tahoma" panose="020B0604030504040204" pitchFamily="34" charset="0"/>
+              </a:rPr>
+              <a:t>1500, </a:t>
+            </a:r>
+            <a:r>
+              <a:rPr lang="en-US" sz="800" dirty="0" err="1">
+                <a:latin typeface="Tahoma" panose="020B0604030504040204" pitchFamily="34" charset="0"/>
+                <a:ea typeface="Tahoma" panose="020B0604030504040204" pitchFamily="34" charset="0"/>
+                <a:cs typeface="Tahoma" panose="020B0604030504040204" pitchFamily="34" charset="0"/>
+              </a:rPr>
+              <a:t>chạy</a:t>
+            </a:r>
+            <a:r>
+              <a:rPr lang="en-US" sz="800" dirty="0">
+                <a:latin typeface="Tahoma" panose="020B0604030504040204" pitchFamily="34" charset="0"/>
+                <a:ea typeface="Tahoma" panose="020B0604030504040204" pitchFamily="34" charset="0"/>
+                <a:cs typeface="Tahoma" panose="020B0604030504040204" pitchFamily="34" charset="0"/>
+              </a:rPr>
+              <a:t> </a:t>
+            </a:r>
+            <a:r>
+              <a:rPr lang="en-US" sz="800" dirty="0" err="1">
+                <a:latin typeface="Tahoma" panose="020B0604030504040204" pitchFamily="34" charset="0"/>
+                <a:ea typeface="Tahoma" panose="020B0604030504040204" pitchFamily="34" charset="0"/>
+                <a:cs typeface="Tahoma" panose="020B0604030504040204" pitchFamily="34" charset="0"/>
+              </a:rPr>
+              <a:t>trên</a:t>
+            </a:r>
+            <a:r>
+              <a:rPr lang="en-US" sz="800" dirty="0">
+                <a:latin typeface="Tahoma" panose="020B0604030504040204" pitchFamily="34" charset="0"/>
+                <a:ea typeface="Tahoma" panose="020B0604030504040204" pitchFamily="34" charset="0"/>
+                <a:cs typeface="Tahoma" panose="020B0604030504040204" pitchFamily="34" charset="0"/>
+              </a:rPr>
+              <a:t> GPU (CUDA)</a:t>
+            </a:r>
+          </a:p>
+          <a:p>
+            <a:pPr algn="just">
+              <a:lnSpc>
+                <a:spcPct val="130000"/>
+              </a:lnSpc>
+            </a:pPr>
+            <a:r>
+              <a:rPr lang="en-US" sz="800" b="1" i="1" dirty="0" err="1">
+                <a:latin typeface="Tahoma" panose="020B0604030504040204" pitchFamily="34" charset="0"/>
+                <a:ea typeface="Tahoma" panose="020B0604030504040204" pitchFamily="34" charset="0"/>
+                <a:cs typeface="Tahoma" panose="020B0604030504040204" pitchFamily="34" charset="0"/>
+              </a:rPr>
+              <a:t>Kiến</a:t>
+            </a:r>
+            <a:r>
+              <a:rPr lang="en-US" sz="800" b="1" i="1" dirty="0">
+                <a:latin typeface="Tahoma" panose="020B0604030504040204" pitchFamily="34" charset="0"/>
+                <a:ea typeface="Tahoma" panose="020B0604030504040204" pitchFamily="34" charset="0"/>
+                <a:cs typeface="Tahoma" panose="020B0604030504040204" pitchFamily="34" charset="0"/>
+              </a:rPr>
+              <a:t> </a:t>
+            </a:r>
+            <a:r>
+              <a:rPr lang="en-US" sz="800" b="1" i="1" dirty="0" err="1">
+                <a:latin typeface="Tahoma" panose="020B0604030504040204" pitchFamily="34" charset="0"/>
+                <a:ea typeface="Tahoma" panose="020B0604030504040204" pitchFamily="34" charset="0"/>
+                <a:cs typeface="Tahoma" panose="020B0604030504040204" pitchFamily="34" charset="0"/>
+              </a:rPr>
+              <a:t>trúc</a:t>
+            </a:r>
+            <a:r>
+              <a:rPr lang="en-US" sz="800" b="1" i="1" dirty="0">
+                <a:latin typeface="Tahoma" panose="020B0604030504040204" pitchFamily="34" charset="0"/>
+                <a:ea typeface="Tahoma" panose="020B0604030504040204" pitchFamily="34" charset="0"/>
+                <a:cs typeface="Tahoma" panose="020B0604030504040204" pitchFamily="34" charset="0"/>
+              </a:rPr>
+              <a:t> Transformer:</a:t>
+            </a:r>
+          </a:p>
+          <a:p>
+            <a:pPr marL="403225" indent="-171450" algn="just">
+              <a:lnSpc>
+                <a:spcPct val="130000"/>
+              </a:lnSpc>
+              <a:buFont typeface="Arial" panose="020B0604020202020204" pitchFamily="34" charset="0"/>
+              <a:buChar char="•"/>
+            </a:pPr>
+            <a:r>
+              <a:rPr lang="en-US" sz="800" dirty="0">
+                <a:latin typeface="Tahoma" panose="020B0604030504040204" pitchFamily="34" charset="0"/>
+                <a:ea typeface="Tahoma" panose="020B0604030504040204" pitchFamily="34" charset="0"/>
+                <a:cs typeface="Tahoma" panose="020B0604030504040204" pitchFamily="34" charset="0"/>
+              </a:rPr>
+              <a:t>Embedding: </a:t>
+            </a:r>
+            <a:r>
+              <a:rPr lang="en-US" sz="800" dirty="0" err="1">
+                <a:latin typeface="Tahoma" panose="020B0604030504040204" pitchFamily="34" charset="0"/>
+                <a:ea typeface="Tahoma" panose="020B0604030504040204" pitchFamily="34" charset="0"/>
+                <a:cs typeface="Tahoma" panose="020B0604030504040204" pitchFamily="34" charset="0"/>
+              </a:rPr>
+              <a:t>d_model</a:t>
+            </a:r>
+            <a:r>
+              <a:rPr lang="en-US" sz="800" dirty="0">
+                <a:latin typeface="Tahoma" panose="020B0604030504040204" pitchFamily="34" charset="0"/>
+                <a:ea typeface="Tahoma" panose="020B0604030504040204" pitchFamily="34" charset="0"/>
+                <a:cs typeface="Tahoma" panose="020B0604030504040204" pitchFamily="34" charset="0"/>
+              </a:rPr>
+              <a:t> = 512</a:t>
+            </a:r>
+          </a:p>
+          <a:p>
+            <a:pPr marL="403225" indent="-171450" algn="just">
+              <a:lnSpc>
+                <a:spcPct val="130000"/>
+              </a:lnSpc>
+              <a:buFont typeface="Arial" panose="020B0604020202020204" pitchFamily="34" charset="0"/>
+              <a:buChar char="•"/>
+            </a:pPr>
+            <a:r>
+              <a:rPr lang="en-US" sz="800" b="1" dirty="0">
+                <a:latin typeface="Tahoma" panose="020B0604030504040204" pitchFamily="34" charset="0"/>
+                <a:ea typeface="Tahoma" panose="020B0604030504040204" pitchFamily="34" charset="0"/>
+                <a:cs typeface="Tahoma" panose="020B0604030504040204" pitchFamily="34" charset="0"/>
+              </a:rPr>
+              <a:t>6</a:t>
+            </a:r>
+            <a:r>
+              <a:rPr lang="en-US" sz="800" dirty="0">
+                <a:latin typeface="Tahoma" panose="020B0604030504040204" pitchFamily="34" charset="0"/>
+                <a:ea typeface="Tahoma" panose="020B0604030504040204" pitchFamily="34" charset="0"/>
+                <a:cs typeface="Tahoma" panose="020B0604030504040204" pitchFamily="34" charset="0"/>
+              </a:rPr>
+              <a:t> layers Encoder–Decoder</a:t>
+            </a:r>
+          </a:p>
+          <a:p>
+            <a:pPr marL="403225" indent="-171450" algn="just">
+              <a:lnSpc>
+                <a:spcPct val="130000"/>
+              </a:lnSpc>
+              <a:buFont typeface="Arial" panose="020B0604020202020204" pitchFamily="34" charset="0"/>
+              <a:buChar char="•"/>
+            </a:pPr>
+            <a:r>
+              <a:rPr lang="en-US" sz="800" dirty="0">
+                <a:latin typeface="Tahoma" panose="020B0604030504040204" pitchFamily="34" charset="0"/>
+                <a:ea typeface="Tahoma" panose="020B0604030504040204" pitchFamily="34" charset="0"/>
+                <a:cs typeface="Tahoma" panose="020B0604030504040204" pitchFamily="34" charset="0"/>
+              </a:rPr>
+              <a:t>8 attention heads</a:t>
+            </a:r>
+          </a:p>
+          <a:p>
+            <a:pPr marL="403225" indent="-171450" algn="just">
+              <a:lnSpc>
+                <a:spcPct val="130000"/>
+              </a:lnSpc>
+              <a:buFont typeface="Arial" panose="020B0604020202020204" pitchFamily="34" charset="0"/>
+              <a:buChar char="•"/>
+            </a:pPr>
+            <a:r>
+              <a:rPr lang="en-US" sz="800" dirty="0">
+                <a:latin typeface="Tahoma" panose="020B0604030504040204" pitchFamily="34" charset="0"/>
+                <a:ea typeface="Tahoma" panose="020B0604030504040204" pitchFamily="34" charset="0"/>
+                <a:cs typeface="Tahoma" panose="020B0604030504040204" pitchFamily="34" charset="0"/>
+              </a:rPr>
+              <a:t>Dropout: 0.1</a:t>
+            </a:r>
+          </a:p>
+          <a:p>
+            <a:pPr algn="just">
+              <a:lnSpc>
+                <a:spcPct val="130000"/>
+              </a:lnSpc>
+            </a:pPr>
+            <a:r>
+              <a:rPr lang="en-US" sz="800" b="1" i="1" dirty="0" err="1">
+                <a:latin typeface="Tahoma" panose="020B0604030504040204" pitchFamily="34" charset="0"/>
+                <a:ea typeface="Tahoma" panose="020B0604030504040204" pitchFamily="34" charset="0"/>
+                <a:cs typeface="Tahoma" panose="020B0604030504040204" pitchFamily="34" charset="0"/>
+              </a:rPr>
+              <a:t>Huấn</a:t>
+            </a:r>
+            <a:r>
+              <a:rPr lang="en-US" sz="800" b="1" i="1" dirty="0">
+                <a:latin typeface="Tahoma" panose="020B0604030504040204" pitchFamily="34" charset="0"/>
+                <a:ea typeface="Tahoma" panose="020B0604030504040204" pitchFamily="34" charset="0"/>
+                <a:cs typeface="Tahoma" panose="020B0604030504040204" pitchFamily="34" charset="0"/>
+              </a:rPr>
+              <a:t> </a:t>
+            </a:r>
+            <a:r>
+              <a:rPr lang="en-US" sz="800" b="1" i="1" dirty="0" err="1">
+                <a:latin typeface="Tahoma" panose="020B0604030504040204" pitchFamily="34" charset="0"/>
+                <a:ea typeface="Tahoma" panose="020B0604030504040204" pitchFamily="34" charset="0"/>
+                <a:cs typeface="Tahoma" panose="020B0604030504040204" pitchFamily="34" charset="0"/>
+              </a:rPr>
+              <a:t>luyện</a:t>
+            </a:r>
+            <a:r>
+              <a:rPr lang="en-US" sz="800" b="1" i="1" dirty="0">
+                <a:latin typeface="Tahoma" panose="020B0604030504040204" pitchFamily="34" charset="0"/>
+                <a:ea typeface="Tahoma" panose="020B0604030504040204" pitchFamily="34" charset="0"/>
+                <a:cs typeface="Tahoma" panose="020B0604030504040204" pitchFamily="34" charset="0"/>
+              </a:rPr>
+              <a:t>:</a:t>
+            </a:r>
+          </a:p>
+          <a:p>
+            <a:pPr marL="403225" indent="-171450" algn="just">
+              <a:lnSpc>
+                <a:spcPct val="130000"/>
+              </a:lnSpc>
+              <a:buFont typeface="Arial" panose="020B0604020202020204" pitchFamily="34" charset="0"/>
+              <a:buChar char="•"/>
+            </a:pPr>
+            <a:r>
+              <a:rPr lang="en-US" sz="800" dirty="0">
+                <a:latin typeface="Tahoma" panose="020B0604030504040204" pitchFamily="34" charset="0"/>
+                <a:ea typeface="Tahoma" panose="020B0604030504040204" pitchFamily="34" charset="0"/>
+                <a:cs typeface="Tahoma" panose="020B0604030504040204" pitchFamily="34" charset="0"/>
+              </a:rPr>
+              <a:t>Learning rate: 0.0001</a:t>
+            </a:r>
+          </a:p>
+          <a:p>
+            <a:pPr marL="403225" indent="-171450" algn="just">
+              <a:lnSpc>
+                <a:spcPct val="130000"/>
+              </a:lnSpc>
+              <a:buFont typeface="Arial" panose="020B0604020202020204" pitchFamily="34" charset="0"/>
+              <a:buChar char="•"/>
+            </a:pPr>
+            <a:r>
+              <a:rPr lang="en-US" sz="800" dirty="0">
+                <a:latin typeface="Tahoma" panose="020B0604030504040204" pitchFamily="34" charset="0"/>
+                <a:ea typeface="Tahoma" panose="020B0604030504040204" pitchFamily="34" charset="0"/>
+                <a:cs typeface="Tahoma" panose="020B0604030504040204" pitchFamily="34" charset="0"/>
+              </a:rPr>
+              <a:t>Epochs: 12</a:t>
+            </a:r>
+          </a:p>
+          <a:p>
+            <a:pPr algn="just">
+              <a:lnSpc>
+                <a:spcPct val="130000"/>
+              </a:lnSpc>
+            </a:pPr>
+            <a:r>
+              <a:rPr lang="en-US" sz="800" b="1" i="1" dirty="0">
+                <a:latin typeface="Tahoma" panose="020B0604030504040204" pitchFamily="34" charset="0"/>
+                <a:ea typeface="Tahoma" panose="020B0604030504040204" pitchFamily="34" charset="0"/>
+                <a:cs typeface="Tahoma" panose="020B0604030504040204" pitchFamily="34" charset="0"/>
+              </a:rPr>
+              <a:t>Suy </a:t>
+            </a:r>
+            <a:r>
+              <a:rPr lang="en-US" sz="800" b="1" i="1" dirty="0" err="1">
+                <a:latin typeface="Tahoma" panose="020B0604030504040204" pitchFamily="34" charset="0"/>
+                <a:ea typeface="Tahoma" panose="020B0604030504040204" pitchFamily="34" charset="0"/>
+                <a:cs typeface="Tahoma" panose="020B0604030504040204" pitchFamily="34" charset="0"/>
+              </a:rPr>
+              <a:t>luận</a:t>
+            </a:r>
+            <a:r>
+              <a:rPr lang="en-US" sz="800" b="1" i="1" dirty="0">
+                <a:latin typeface="Tahoma" panose="020B0604030504040204" pitchFamily="34" charset="0"/>
+                <a:ea typeface="Tahoma" panose="020B0604030504040204" pitchFamily="34" charset="0"/>
+                <a:cs typeface="Tahoma" panose="020B0604030504040204" pitchFamily="34" charset="0"/>
+              </a:rPr>
+              <a:t>: </a:t>
+            </a:r>
+            <a:r>
+              <a:rPr lang="en-US" sz="800" dirty="0">
+                <a:latin typeface="Tahoma" panose="020B0604030504040204" pitchFamily="34" charset="0"/>
+                <a:ea typeface="Tahoma" panose="020B0604030504040204" pitchFamily="34" charset="0"/>
+                <a:cs typeface="Tahoma" panose="020B0604030504040204" pitchFamily="34" charset="0"/>
+              </a:rPr>
+              <a:t>Beam search (k = 5)</a:t>
+            </a:r>
+            <a:endParaRPr lang="vi-VN" sz="800" dirty="0">
+              <a:latin typeface="Tahoma" panose="020B0604030504040204" pitchFamily="34" charset="0"/>
+              <a:ea typeface="Tahoma" panose="020B0604030504040204" pitchFamily="34" charset="0"/>
+              <a:cs typeface="Tahoma" panose="020B0604030504040204" pitchFamily="34" charset="0"/>
+            </a:endParaRPr>
+          </a:p>
+        </p:txBody>
+      </p:sp>
+      <p:pic>
+        <p:nvPicPr>
+          <p:cNvPr id="6" name="Picture 5">
+            <a:extLst>
+              <a:ext uri="{FF2B5EF4-FFF2-40B4-BE49-F238E27FC236}">
+                <a16:creationId xmlns:a16="http://schemas.microsoft.com/office/drawing/2014/main" id="{9132C024-120D-BC6F-A76C-1155AF85EBB5}"/>
+              </a:ext>
+            </a:extLst>
+          </p:cNvPr>
+          <p:cNvPicPr>
+            <a:picLocks noChangeAspect="1"/>
+          </p:cNvPicPr>
+          <p:nvPr/>
+        </p:nvPicPr>
+        <p:blipFill>
+          <a:blip r:embed="rId3"/>
+          <a:stretch>
+            <a:fillRect/>
+          </a:stretch>
+        </p:blipFill>
+        <p:spPr>
+          <a:xfrm>
+            <a:off x="2026285" y="2104640"/>
+            <a:ext cx="3549650" cy="611941"/>
+          </a:xfrm>
+          <a:prstGeom prst="rect">
+            <a:avLst/>
+          </a:prstGeom>
+        </p:spPr>
+      </p:pic>
+      <p:pic>
+        <p:nvPicPr>
+          <p:cNvPr id="7" name="Picture 6">
+            <a:extLst>
+              <a:ext uri="{FF2B5EF4-FFF2-40B4-BE49-F238E27FC236}">
+                <a16:creationId xmlns:a16="http://schemas.microsoft.com/office/drawing/2014/main" id="{1AF5BBB7-F5A4-EBD4-5A9C-14120FEE27A5}"/>
+              </a:ext>
+            </a:extLst>
+          </p:cNvPr>
+          <p:cNvPicPr>
+            <a:picLocks noChangeAspect="1"/>
+          </p:cNvPicPr>
+          <p:nvPr/>
+        </p:nvPicPr>
+        <p:blipFill>
+          <a:blip r:embed="rId4"/>
+          <a:stretch>
+            <a:fillRect/>
+          </a:stretch>
+        </p:blipFill>
+        <p:spPr>
+          <a:xfrm>
+            <a:off x="2331085" y="1065501"/>
+            <a:ext cx="3244850" cy="841071"/>
+          </a:xfrm>
+          <a:prstGeom prst="rect">
+            <a:avLst/>
+          </a:prstGeom>
+        </p:spPr>
+      </p:pic>
+    </p:spTree>
+    <p:extLst>
+      <p:ext uri="{BB962C8B-B14F-4D97-AF65-F5344CB8AC3E}">
+        <p14:creationId xmlns:p14="http://schemas.microsoft.com/office/powerpoint/2010/main" val="1731427721"/>
+      </p:ext>
+    </p:extLst>
+  </p:cSld>
+  <p:clrMapOvr>
+    <a:masterClrMapping/>
+  </p:clrMapOvr>
+</p:sld>
+</file>
+
+<file path=ppt/slides/slide21.xml><?xml version="1.0" encoding="utf-8"?>
+<p:sld xmlns:a="http://schemas.openxmlformats.org/drawingml/2006/main" xmlns:r="http://schemas.openxmlformats.org/officeDocument/2006/relationships" xmlns:p="http://schemas.openxmlformats.org/presentationml/2006/main">
+  <p:cSld>
+    <p:spTree>
+      <p:nvGrpSpPr>
+        <p:cNvPr id="1" name="">
+          <a:extLst>
+            <a:ext uri="{FF2B5EF4-FFF2-40B4-BE49-F238E27FC236}">
+              <a16:creationId xmlns:a16="http://schemas.microsoft.com/office/drawing/2014/main" id="{E6CEE97B-D196-91C8-7F7D-1A81F95D002F}"/>
+            </a:ext>
+          </a:extLst>
+        </p:cNvPr>
+        <p:cNvGrpSpPr/>
+        <p:nvPr/>
+      </p:nvGrpSpPr>
+      <p:grpSpPr>
+        <a:xfrm>
+          <a:off x="0" y="0"/>
+          <a:ext cx="0" cy="0"/>
+          <a:chOff x="0" y="0"/>
+          <a:chExt cx="0" cy="0"/>
+        </a:xfrm>
+      </p:grpSpPr>
+      <p:sp>
+        <p:nvSpPr>
+          <p:cNvPr id="2" name="TextBox 2">
+            <a:extLst>
+              <a:ext uri="{FF2B5EF4-FFF2-40B4-BE49-F238E27FC236}">
+                <a16:creationId xmlns:a16="http://schemas.microsoft.com/office/drawing/2014/main" id="{AB99015D-387B-D6EC-F2CD-8A4B45586CA4}"/>
+              </a:ext>
+            </a:extLst>
+          </p:cNvPr>
+          <p:cNvSpPr txBox="1"/>
+          <p:nvPr/>
+        </p:nvSpPr>
+        <p:spPr>
+          <a:xfrm>
+            <a:off x="277092" y="277825"/>
+            <a:ext cx="2675658" cy="241476"/>
+          </a:xfrm>
+          <a:prstGeom prst="rect">
+            <a:avLst/>
+          </a:prstGeom>
+        </p:spPr>
+        <p:txBody>
+          <a:bodyPr wrap="square" lIns="0" tIns="0" rIns="0" bIns="0" rtlCol="0" anchor="t">
+            <a:spAutoFit/>
+          </a:bodyPr>
+          <a:lstStyle/>
+          <a:p>
+            <a:pPr algn="l">
+              <a:lnSpc>
+                <a:spcPts val="2100"/>
+              </a:lnSpc>
+            </a:pPr>
+            <a:r>
+              <a:rPr lang="en-US" sz="1500" b="1" spc="-4" dirty="0">
+                <a:solidFill>
+                  <a:srgbClr val="2B4D7B"/>
+                </a:solidFill>
+                <a:latin typeface="Tahoma" panose="020B0604030504040204" pitchFamily="34" charset="0"/>
+                <a:ea typeface="Tahoma" panose="020B0604030504040204" pitchFamily="34" charset="0"/>
+                <a:cs typeface="Tahoma" panose="020B0604030504040204" pitchFamily="34" charset="0"/>
+                <a:sym typeface="Canva Sans Bold"/>
+              </a:rPr>
+              <a:t>5. </a:t>
+            </a:r>
+            <a:r>
+              <a:rPr lang="en-US" sz="1500" b="1" spc="-4" dirty="0" err="1">
+                <a:solidFill>
+                  <a:srgbClr val="2B4D7B"/>
+                </a:solidFill>
+                <a:latin typeface="Tahoma" panose="020B0604030504040204" pitchFamily="34" charset="0"/>
+                <a:ea typeface="Tahoma" panose="020B0604030504040204" pitchFamily="34" charset="0"/>
+                <a:cs typeface="Tahoma" panose="020B0604030504040204" pitchFamily="34" charset="0"/>
+                <a:sym typeface="Canva Sans Bold"/>
+              </a:rPr>
+              <a:t>Kết</a:t>
+            </a:r>
+            <a:r>
+              <a:rPr lang="en-US" sz="1500" b="1" spc="-4" dirty="0">
+                <a:solidFill>
+                  <a:srgbClr val="2B4D7B"/>
+                </a:solidFill>
+                <a:latin typeface="Tahoma" panose="020B0604030504040204" pitchFamily="34" charset="0"/>
+                <a:ea typeface="Tahoma" panose="020B0604030504040204" pitchFamily="34" charset="0"/>
+                <a:cs typeface="Tahoma" panose="020B0604030504040204" pitchFamily="34" charset="0"/>
+                <a:sym typeface="Canva Sans Bold"/>
+              </a:rPr>
+              <a:t> </a:t>
+            </a:r>
+            <a:r>
+              <a:rPr lang="en-US" sz="1500" b="1" spc="-4" dirty="0" err="1">
+                <a:solidFill>
+                  <a:srgbClr val="2B4D7B"/>
+                </a:solidFill>
+                <a:latin typeface="Tahoma" panose="020B0604030504040204" pitchFamily="34" charset="0"/>
+                <a:ea typeface="Tahoma" panose="020B0604030504040204" pitchFamily="34" charset="0"/>
+                <a:cs typeface="Tahoma" panose="020B0604030504040204" pitchFamily="34" charset="0"/>
+                <a:sym typeface="Canva Sans Bold"/>
+              </a:rPr>
+              <a:t>quả</a:t>
+            </a:r>
+            <a:r>
+              <a:rPr lang="en-US" sz="1500" b="1" spc="-4" dirty="0">
+                <a:solidFill>
+                  <a:srgbClr val="2B4D7B"/>
+                </a:solidFill>
+                <a:latin typeface="Tahoma" panose="020B0604030504040204" pitchFamily="34" charset="0"/>
+                <a:ea typeface="Tahoma" panose="020B0604030504040204" pitchFamily="34" charset="0"/>
+                <a:cs typeface="Tahoma" panose="020B0604030504040204" pitchFamily="34" charset="0"/>
+                <a:sym typeface="Canva Sans Bold"/>
+              </a:rPr>
+              <a:t> </a:t>
+            </a:r>
+            <a:r>
+              <a:rPr lang="en-US" sz="1500" b="1" spc="-4" dirty="0" err="1">
+                <a:solidFill>
+                  <a:srgbClr val="2B4D7B"/>
+                </a:solidFill>
+                <a:latin typeface="Tahoma" panose="020B0604030504040204" pitchFamily="34" charset="0"/>
+                <a:ea typeface="Tahoma" panose="020B0604030504040204" pitchFamily="34" charset="0"/>
+                <a:cs typeface="Tahoma" panose="020B0604030504040204" pitchFamily="34" charset="0"/>
+                <a:sym typeface="Canva Sans Bold"/>
+              </a:rPr>
+              <a:t>thực</a:t>
+            </a:r>
+            <a:r>
+              <a:rPr lang="en-US" sz="1500" b="1" spc="-4" dirty="0">
+                <a:solidFill>
+                  <a:srgbClr val="2B4D7B"/>
+                </a:solidFill>
+                <a:latin typeface="Tahoma" panose="020B0604030504040204" pitchFamily="34" charset="0"/>
+                <a:ea typeface="Tahoma" panose="020B0604030504040204" pitchFamily="34" charset="0"/>
+                <a:cs typeface="Tahoma" panose="020B0604030504040204" pitchFamily="34" charset="0"/>
+                <a:sym typeface="Canva Sans Bold"/>
+              </a:rPr>
+              <a:t> </a:t>
+            </a:r>
+            <a:r>
+              <a:rPr lang="en-US" sz="1500" b="1" spc="-4" dirty="0" err="1">
+                <a:solidFill>
+                  <a:srgbClr val="2B4D7B"/>
+                </a:solidFill>
+                <a:latin typeface="Tahoma" panose="020B0604030504040204" pitchFamily="34" charset="0"/>
+                <a:ea typeface="Tahoma" panose="020B0604030504040204" pitchFamily="34" charset="0"/>
+                <a:cs typeface="Tahoma" panose="020B0604030504040204" pitchFamily="34" charset="0"/>
+                <a:sym typeface="Canva Sans Bold"/>
+              </a:rPr>
+              <a:t>nghiệm</a:t>
+            </a:r>
+            <a:endParaRPr lang="en-US" sz="1500" b="1" spc="-4" dirty="0">
+              <a:solidFill>
+                <a:srgbClr val="2B4D7B"/>
+              </a:solidFill>
+              <a:latin typeface="Tahoma" panose="020B0604030504040204" pitchFamily="34" charset="0"/>
+              <a:ea typeface="Tahoma" panose="020B0604030504040204" pitchFamily="34" charset="0"/>
+              <a:cs typeface="Tahoma" panose="020B0604030504040204" pitchFamily="34" charset="0"/>
+              <a:sym typeface="Canva Sans Bold"/>
+            </a:endParaRPr>
+          </a:p>
+        </p:txBody>
+      </p:sp>
+      <p:sp>
+        <p:nvSpPr>
+          <p:cNvPr id="10" name="TextBox 9">
+            <a:extLst>
+              <a:ext uri="{FF2B5EF4-FFF2-40B4-BE49-F238E27FC236}">
+                <a16:creationId xmlns:a16="http://schemas.microsoft.com/office/drawing/2014/main" id="{9B5BF3BB-0874-519B-AA95-06629ACE52A6}"/>
+              </a:ext>
+            </a:extLst>
+          </p:cNvPr>
+          <p:cNvSpPr txBox="1"/>
+          <p:nvPr/>
+        </p:nvSpPr>
+        <p:spPr>
+          <a:xfrm>
+            <a:off x="5314950" y="2914650"/>
+            <a:ext cx="295275" cy="215444"/>
+          </a:xfrm>
+          <a:prstGeom prst="rect">
+            <a:avLst/>
+          </a:prstGeom>
+          <a:noFill/>
+        </p:spPr>
+        <p:txBody>
+          <a:bodyPr wrap="square">
+            <a:spAutoFit/>
+          </a:bodyPr>
+          <a:lstStyle/>
+          <a:p>
+            <a:pPr algn="r"/>
+            <a:r>
+              <a:rPr lang="en-US" sz="800" dirty="0">
+                <a:solidFill>
+                  <a:srgbClr val="1C1C1A"/>
+                </a:solidFill>
+                <a:latin typeface="Tahoma" panose="020B0604030504040204" pitchFamily="34" charset="0"/>
+                <a:ea typeface="Tahoma" panose="020B0604030504040204" pitchFamily="34" charset="0"/>
+                <a:cs typeface="Tahoma" panose="020B0604030504040204" pitchFamily="34" charset="0"/>
+                <a:sym typeface="Canva Sans"/>
+              </a:rPr>
+              <a:t>20</a:t>
+            </a:r>
+            <a:endParaRPr lang="en-US" sz="800" dirty="0">
+              <a:latin typeface="Tahoma" panose="020B0604030504040204" pitchFamily="34" charset="0"/>
+              <a:ea typeface="Tahoma" panose="020B0604030504040204" pitchFamily="34" charset="0"/>
+              <a:cs typeface="Tahoma" panose="020B0604030504040204" pitchFamily="34" charset="0"/>
+            </a:endParaRPr>
+          </a:p>
+        </p:txBody>
+      </p:sp>
+      <p:sp>
+        <p:nvSpPr>
+          <p:cNvPr id="9" name="TextBox 8">
+            <a:extLst>
+              <a:ext uri="{FF2B5EF4-FFF2-40B4-BE49-F238E27FC236}">
+                <a16:creationId xmlns:a16="http://schemas.microsoft.com/office/drawing/2014/main" id="{FB54647A-E492-35B1-FB5A-00C62F43227A}"/>
+              </a:ext>
+            </a:extLst>
+          </p:cNvPr>
+          <p:cNvSpPr txBox="1"/>
+          <p:nvPr/>
+        </p:nvSpPr>
+        <p:spPr>
+          <a:xfrm>
+            <a:off x="277092" y="519301"/>
+            <a:ext cx="2675658" cy="251094"/>
+          </a:xfrm>
+          <a:prstGeom prst="rect">
+            <a:avLst/>
+          </a:prstGeom>
+          <a:noFill/>
+        </p:spPr>
+        <p:txBody>
+          <a:bodyPr wrap="square" rtlCol="0">
+            <a:spAutoFit/>
+          </a:bodyPr>
+          <a:lstStyle/>
+          <a:p>
+            <a:pPr algn="just">
+              <a:lnSpc>
+                <a:spcPct val="130000"/>
+              </a:lnSpc>
+            </a:pPr>
+            <a:r>
+              <a:rPr lang="en-US" sz="900" u="sng" dirty="0">
+                <a:solidFill>
+                  <a:srgbClr val="00B050"/>
+                </a:solidFill>
+                <a:latin typeface="Tahoma" panose="020B0604030504040204" pitchFamily="34" charset="0"/>
+                <a:ea typeface="Tahoma" panose="020B0604030504040204" pitchFamily="34" charset="0"/>
+                <a:cs typeface="Tahoma" panose="020B0604030504040204" pitchFamily="34" charset="0"/>
+              </a:rPr>
+              <a:t>5.3. Kịch </a:t>
+            </a:r>
+            <a:r>
+              <a:rPr lang="en-US" sz="900" u="sng" dirty="0" err="1">
+                <a:solidFill>
+                  <a:srgbClr val="00B050"/>
+                </a:solidFill>
+                <a:latin typeface="Tahoma" panose="020B0604030504040204" pitchFamily="34" charset="0"/>
+                <a:ea typeface="Tahoma" panose="020B0604030504040204" pitchFamily="34" charset="0"/>
+                <a:cs typeface="Tahoma" panose="020B0604030504040204" pitchFamily="34" charset="0"/>
+              </a:rPr>
+              <a:t>bản</a:t>
+            </a:r>
+            <a:r>
+              <a:rPr lang="en-US" sz="900" u="sng" dirty="0">
+                <a:solidFill>
+                  <a:srgbClr val="00B050"/>
+                </a:solidFill>
+                <a:latin typeface="Tahoma" panose="020B0604030504040204" pitchFamily="34" charset="0"/>
+                <a:ea typeface="Tahoma" panose="020B0604030504040204" pitchFamily="34" charset="0"/>
+                <a:cs typeface="Tahoma" panose="020B0604030504040204" pitchFamily="34" charset="0"/>
+              </a:rPr>
+              <a:t> </a:t>
+            </a:r>
+            <a:r>
+              <a:rPr lang="en-US" sz="900" u="sng" dirty="0" err="1">
+                <a:solidFill>
+                  <a:srgbClr val="00B050"/>
+                </a:solidFill>
+                <a:latin typeface="Tahoma" panose="020B0604030504040204" pitchFamily="34" charset="0"/>
+                <a:ea typeface="Tahoma" panose="020B0604030504040204" pitchFamily="34" charset="0"/>
+                <a:cs typeface="Tahoma" panose="020B0604030504040204" pitchFamily="34" charset="0"/>
+              </a:rPr>
+              <a:t>thử</a:t>
+            </a:r>
+            <a:r>
+              <a:rPr lang="en-US" sz="900" u="sng" dirty="0">
+                <a:solidFill>
+                  <a:srgbClr val="00B050"/>
+                </a:solidFill>
+                <a:latin typeface="Tahoma" panose="020B0604030504040204" pitchFamily="34" charset="0"/>
+                <a:ea typeface="Tahoma" panose="020B0604030504040204" pitchFamily="34" charset="0"/>
+                <a:cs typeface="Tahoma" panose="020B0604030504040204" pitchFamily="34" charset="0"/>
+              </a:rPr>
+              <a:t> </a:t>
+            </a:r>
+            <a:r>
+              <a:rPr lang="en-US" sz="900" u="sng" dirty="0" err="1">
+                <a:solidFill>
+                  <a:srgbClr val="00B050"/>
+                </a:solidFill>
+                <a:latin typeface="Tahoma" panose="020B0604030504040204" pitchFamily="34" charset="0"/>
+                <a:ea typeface="Tahoma" panose="020B0604030504040204" pitchFamily="34" charset="0"/>
+                <a:cs typeface="Tahoma" panose="020B0604030504040204" pitchFamily="34" charset="0"/>
+              </a:rPr>
+              <a:t>nghiệm</a:t>
+            </a:r>
+            <a:r>
+              <a:rPr lang="en-US" sz="900" u="sng" dirty="0">
+                <a:solidFill>
+                  <a:srgbClr val="00B050"/>
+                </a:solidFill>
+                <a:latin typeface="Tahoma" panose="020B0604030504040204" pitchFamily="34" charset="0"/>
+                <a:ea typeface="Tahoma" panose="020B0604030504040204" pitchFamily="34" charset="0"/>
+                <a:cs typeface="Tahoma" panose="020B0604030504040204" pitchFamily="34" charset="0"/>
+              </a:rPr>
+              <a:t> Transformer 2</a:t>
+            </a:r>
+            <a:endParaRPr lang="vi-VN" sz="900" u="sng" dirty="0">
+              <a:solidFill>
+                <a:srgbClr val="00B050"/>
+              </a:solidFill>
+              <a:latin typeface="Tahoma" panose="020B0604030504040204" pitchFamily="34" charset="0"/>
+              <a:ea typeface="Tahoma" panose="020B0604030504040204" pitchFamily="34" charset="0"/>
+              <a:cs typeface="Tahoma" panose="020B0604030504040204" pitchFamily="34" charset="0"/>
+            </a:endParaRPr>
+          </a:p>
+        </p:txBody>
+      </p:sp>
+      <p:sp>
+        <p:nvSpPr>
+          <p:cNvPr id="3" name="TextBox 2">
+            <a:extLst>
+              <a:ext uri="{FF2B5EF4-FFF2-40B4-BE49-F238E27FC236}">
+                <a16:creationId xmlns:a16="http://schemas.microsoft.com/office/drawing/2014/main" id="{7E029B24-00E6-B94A-45E6-4EFF651941CB}"/>
+              </a:ext>
+            </a:extLst>
+          </p:cNvPr>
+          <p:cNvSpPr txBox="1"/>
+          <p:nvPr/>
+        </p:nvSpPr>
+        <p:spPr>
+          <a:xfrm>
+            <a:off x="277092" y="760777"/>
+            <a:ext cx="2828058" cy="1993879"/>
+          </a:xfrm>
+          <a:prstGeom prst="rect">
+            <a:avLst/>
+          </a:prstGeom>
+          <a:noFill/>
+        </p:spPr>
+        <p:txBody>
+          <a:bodyPr wrap="square" rtlCol="0">
+            <a:spAutoFit/>
+          </a:bodyPr>
+          <a:lstStyle/>
+          <a:p>
+            <a:pPr algn="just">
+              <a:lnSpc>
+                <a:spcPct val="130000"/>
+              </a:lnSpc>
+            </a:pPr>
+            <a:r>
+              <a:rPr lang="en-US" sz="800" dirty="0">
+                <a:latin typeface="Tahoma" panose="020B0604030504040204" pitchFamily="34" charset="0"/>
+                <a:ea typeface="Tahoma" panose="020B0604030504040204" pitchFamily="34" charset="0"/>
+                <a:cs typeface="Tahoma" panose="020B0604030504040204" pitchFamily="34" charset="0"/>
+              </a:rPr>
+              <a:t>Tokenizer: </a:t>
+            </a:r>
+            <a:r>
+              <a:rPr lang="en-US" sz="800" dirty="0" err="1">
+                <a:latin typeface="Tahoma" panose="020B0604030504040204" pitchFamily="34" charset="0"/>
+                <a:ea typeface="Tahoma" panose="020B0604030504040204" pitchFamily="34" charset="0"/>
+                <a:cs typeface="Tahoma" panose="020B0604030504040204" pitchFamily="34" charset="0"/>
+              </a:rPr>
+              <a:t>en_core_web_sm</a:t>
+            </a:r>
+            <a:r>
+              <a:rPr lang="en-US" sz="800" dirty="0">
+                <a:latin typeface="Tahoma" panose="020B0604030504040204" pitchFamily="34" charset="0"/>
+                <a:ea typeface="Tahoma" panose="020B0604030504040204" pitchFamily="34" charset="0"/>
+                <a:cs typeface="Tahoma" panose="020B0604030504040204" pitchFamily="34" charset="0"/>
+              </a:rPr>
+              <a:t> (EN), </a:t>
+            </a:r>
+            <a:r>
+              <a:rPr lang="en-US" sz="800" dirty="0" err="1">
+                <a:latin typeface="Tahoma" panose="020B0604030504040204" pitchFamily="34" charset="0"/>
+                <a:ea typeface="Tahoma" panose="020B0604030504040204" pitchFamily="34" charset="0"/>
+                <a:cs typeface="Tahoma" panose="020B0604030504040204" pitchFamily="34" charset="0"/>
+              </a:rPr>
+              <a:t>vi_core_news_lg</a:t>
+            </a:r>
+            <a:r>
+              <a:rPr lang="en-US" sz="800" dirty="0">
+                <a:latin typeface="Tahoma" panose="020B0604030504040204" pitchFamily="34" charset="0"/>
+                <a:ea typeface="Tahoma" panose="020B0604030504040204" pitchFamily="34" charset="0"/>
+                <a:cs typeface="Tahoma" panose="020B0604030504040204" pitchFamily="34" charset="0"/>
+              </a:rPr>
+              <a:t> (VI)</a:t>
+            </a:r>
+          </a:p>
+          <a:p>
+            <a:pPr algn="just">
+              <a:lnSpc>
+                <a:spcPct val="130000"/>
+              </a:lnSpc>
+            </a:pPr>
+            <a:r>
+              <a:rPr lang="en-US" sz="800" dirty="0">
+                <a:latin typeface="Tahoma" panose="020B0604030504040204" pitchFamily="34" charset="0"/>
+                <a:ea typeface="Tahoma" panose="020B0604030504040204" pitchFamily="34" charset="0"/>
+                <a:cs typeface="Tahoma" panose="020B0604030504040204" pitchFamily="34" charset="0"/>
+              </a:rPr>
+              <a:t>Giới </a:t>
+            </a:r>
+            <a:r>
+              <a:rPr lang="en-US" sz="800" dirty="0" err="1">
+                <a:latin typeface="Tahoma" panose="020B0604030504040204" pitchFamily="34" charset="0"/>
+                <a:ea typeface="Tahoma" panose="020B0604030504040204" pitchFamily="34" charset="0"/>
+                <a:cs typeface="Tahoma" panose="020B0604030504040204" pitchFamily="34" charset="0"/>
+              </a:rPr>
+              <a:t>hạn</a:t>
+            </a:r>
+            <a:r>
+              <a:rPr lang="en-US" sz="800" dirty="0">
+                <a:latin typeface="Tahoma" panose="020B0604030504040204" pitchFamily="34" charset="0"/>
+                <a:ea typeface="Tahoma" panose="020B0604030504040204" pitchFamily="34" charset="0"/>
+                <a:cs typeface="Tahoma" panose="020B0604030504040204" pitchFamily="34" charset="0"/>
+              </a:rPr>
+              <a:t> </a:t>
+            </a:r>
+            <a:r>
+              <a:rPr lang="en-US" sz="800" dirty="0" err="1">
+                <a:latin typeface="Tahoma" panose="020B0604030504040204" pitchFamily="34" charset="0"/>
+                <a:ea typeface="Tahoma" panose="020B0604030504040204" pitchFamily="34" charset="0"/>
+                <a:cs typeface="Tahoma" panose="020B0604030504040204" pitchFamily="34" charset="0"/>
+              </a:rPr>
+              <a:t>độ</a:t>
+            </a:r>
+            <a:r>
+              <a:rPr lang="en-US" sz="800" dirty="0">
+                <a:latin typeface="Tahoma" panose="020B0604030504040204" pitchFamily="34" charset="0"/>
+                <a:ea typeface="Tahoma" panose="020B0604030504040204" pitchFamily="34" charset="0"/>
+                <a:cs typeface="Tahoma" panose="020B0604030504040204" pitchFamily="34" charset="0"/>
+              </a:rPr>
+              <a:t> </a:t>
+            </a:r>
+            <a:r>
+              <a:rPr lang="en-US" sz="800" dirty="0" err="1">
+                <a:latin typeface="Tahoma" panose="020B0604030504040204" pitchFamily="34" charset="0"/>
+                <a:ea typeface="Tahoma" panose="020B0604030504040204" pitchFamily="34" charset="0"/>
+                <a:cs typeface="Tahoma" panose="020B0604030504040204" pitchFamily="34" charset="0"/>
+              </a:rPr>
+              <a:t>dài</a:t>
+            </a:r>
+            <a:r>
+              <a:rPr lang="en-US" sz="800" dirty="0">
+                <a:latin typeface="Tahoma" panose="020B0604030504040204" pitchFamily="34" charset="0"/>
+                <a:ea typeface="Tahoma" panose="020B0604030504040204" pitchFamily="34" charset="0"/>
+                <a:cs typeface="Tahoma" panose="020B0604030504040204" pitchFamily="34" charset="0"/>
+              </a:rPr>
+              <a:t> </a:t>
+            </a:r>
+            <a:r>
+              <a:rPr lang="en-US" sz="800" dirty="0" err="1">
+                <a:latin typeface="Tahoma" panose="020B0604030504040204" pitchFamily="34" charset="0"/>
+                <a:ea typeface="Tahoma" panose="020B0604030504040204" pitchFamily="34" charset="0"/>
+                <a:cs typeface="Tahoma" panose="020B0604030504040204" pitchFamily="34" charset="0"/>
+              </a:rPr>
+              <a:t>câu</a:t>
+            </a:r>
+            <a:r>
+              <a:rPr lang="en-US" sz="800" dirty="0">
+                <a:latin typeface="Tahoma" panose="020B0604030504040204" pitchFamily="34" charset="0"/>
+                <a:ea typeface="Tahoma" panose="020B0604030504040204" pitchFamily="34" charset="0"/>
+                <a:cs typeface="Tahoma" panose="020B0604030504040204" pitchFamily="34" charset="0"/>
+              </a:rPr>
+              <a:t>: 160 token</a:t>
+            </a:r>
+          </a:p>
+          <a:p>
+            <a:pPr algn="just">
+              <a:lnSpc>
+                <a:spcPct val="130000"/>
+              </a:lnSpc>
+            </a:pPr>
+            <a:r>
+              <a:rPr lang="en-US" sz="800" b="1" dirty="0">
+                <a:latin typeface="Tahoma" panose="020B0604030504040204" pitchFamily="34" charset="0"/>
+                <a:ea typeface="Tahoma" panose="020B0604030504040204" pitchFamily="34" charset="0"/>
+                <a:cs typeface="Tahoma" panose="020B0604030504040204" pitchFamily="34" charset="0"/>
+              </a:rPr>
+              <a:t>Batch size: </a:t>
+            </a:r>
+            <a:r>
+              <a:rPr lang="en-US" sz="800" dirty="0">
+                <a:latin typeface="Tahoma" panose="020B0604030504040204" pitchFamily="34" charset="0"/>
+                <a:ea typeface="Tahoma" panose="020B0604030504040204" pitchFamily="34" charset="0"/>
+                <a:cs typeface="Tahoma" panose="020B0604030504040204" pitchFamily="34" charset="0"/>
+              </a:rPr>
+              <a:t>1500, </a:t>
+            </a:r>
+            <a:r>
+              <a:rPr lang="en-US" sz="800" dirty="0" err="1">
+                <a:latin typeface="Tahoma" panose="020B0604030504040204" pitchFamily="34" charset="0"/>
+                <a:ea typeface="Tahoma" panose="020B0604030504040204" pitchFamily="34" charset="0"/>
+                <a:cs typeface="Tahoma" panose="020B0604030504040204" pitchFamily="34" charset="0"/>
+              </a:rPr>
+              <a:t>chạy</a:t>
+            </a:r>
+            <a:r>
+              <a:rPr lang="en-US" sz="800" dirty="0">
+                <a:latin typeface="Tahoma" panose="020B0604030504040204" pitchFamily="34" charset="0"/>
+                <a:ea typeface="Tahoma" panose="020B0604030504040204" pitchFamily="34" charset="0"/>
+                <a:cs typeface="Tahoma" panose="020B0604030504040204" pitchFamily="34" charset="0"/>
+              </a:rPr>
+              <a:t> </a:t>
+            </a:r>
+            <a:r>
+              <a:rPr lang="en-US" sz="800" dirty="0" err="1">
+                <a:latin typeface="Tahoma" panose="020B0604030504040204" pitchFamily="34" charset="0"/>
+                <a:ea typeface="Tahoma" panose="020B0604030504040204" pitchFamily="34" charset="0"/>
+                <a:cs typeface="Tahoma" panose="020B0604030504040204" pitchFamily="34" charset="0"/>
+              </a:rPr>
+              <a:t>trên</a:t>
+            </a:r>
+            <a:r>
+              <a:rPr lang="en-US" sz="800" dirty="0">
+                <a:latin typeface="Tahoma" panose="020B0604030504040204" pitchFamily="34" charset="0"/>
+                <a:ea typeface="Tahoma" panose="020B0604030504040204" pitchFamily="34" charset="0"/>
+                <a:cs typeface="Tahoma" panose="020B0604030504040204" pitchFamily="34" charset="0"/>
+              </a:rPr>
+              <a:t> GPU (CUDA)</a:t>
+            </a:r>
+          </a:p>
+          <a:p>
+            <a:pPr algn="just">
+              <a:lnSpc>
+                <a:spcPct val="130000"/>
+              </a:lnSpc>
+            </a:pPr>
+            <a:r>
+              <a:rPr lang="en-US" sz="800" b="1" i="1" dirty="0" err="1">
+                <a:latin typeface="Tahoma" panose="020B0604030504040204" pitchFamily="34" charset="0"/>
+                <a:ea typeface="Tahoma" panose="020B0604030504040204" pitchFamily="34" charset="0"/>
+                <a:cs typeface="Tahoma" panose="020B0604030504040204" pitchFamily="34" charset="0"/>
+              </a:rPr>
+              <a:t>Kiến</a:t>
+            </a:r>
+            <a:r>
+              <a:rPr lang="en-US" sz="800" b="1" i="1" dirty="0">
+                <a:latin typeface="Tahoma" panose="020B0604030504040204" pitchFamily="34" charset="0"/>
+                <a:ea typeface="Tahoma" panose="020B0604030504040204" pitchFamily="34" charset="0"/>
+                <a:cs typeface="Tahoma" panose="020B0604030504040204" pitchFamily="34" charset="0"/>
+              </a:rPr>
+              <a:t> </a:t>
+            </a:r>
+            <a:r>
+              <a:rPr lang="en-US" sz="800" b="1" i="1" dirty="0" err="1">
+                <a:latin typeface="Tahoma" panose="020B0604030504040204" pitchFamily="34" charset="0"/>
+                <a:ea typeface="Tahoma" panose="020B0604030504040204" pitchFamily="34" charset="0"/>
+                <a:cs typeface="Tahoma" panose="020B0604030504040204" pitchFamily="34" charset="0"/>
+              </a:rPr>
+              <a:t>trúc</a:t>
+            </a:r>
+            <a:r>
+              <a:rPr lang="en-US" sz="800" b="1" i="1" dirty="0">
+                <a:latin typeface="Tahoma" panose="020B0604030504040204" pitchFamily="34" charset="0"/>
+                <a:ea typeface="Tahoma" panose="020B0604030504040204" pitchFamily="34" charset="0"/>
+                <a:cs typeface="Tahoma" panose="020B0604030504040204" pitchFamily="34" charset="0"/>
+              </a:rPr>
+              <a:t> Transformer:</a:t>
+            </a:r>
+          </a:p>
+          <a:p>
+            <a:pPr marL="403225" indent="-171450" algn="just">
+              <a:lnSpc>
+                <a:spcPct val="130000"/>
+              </a:lnSpc>
+              <a:buFont typeface="Arial" panose="020B0604020202020204" pitchFamily="34" charset="0"/>
+              <a:buChar char="•"/>
+            </a:pPr>
+            <a:r>
+              <a:rPr lang="en-US" sz="800" dirty="0">
+                <a:latin typeface="Tahoma" panose="020B0604030504040204" pitchFamily="34" charset="0"/>
+                <a:ea typeface="Tahoma" panose="020B0604030504040204" pitchFamily="34" charset="0"/>
+                <a:cs typeface="Tahoma" panose="020B0604030504040204" pitchFamily="34" charset="0"/>
+              </a:rPr>
+              <a:t>Embedding: </a:t>
+            </a:r>
+            <a:r>
+              <a:rPr lang="en-US" sz="800" dirty="0" err="1">
+                <a:latin typeface="Tahoma" panose="020B0604030504040204" pitchFamily="34" charset="0"/>
+                <a:ea typeface="Tahoma" panose="020B0604030504040204" pitchFamily="34" charset="0"/>
+                <a:cs typeface="Tahoma" panose="020B0604030504040204" pitchFamily="34" charset="0"/>
+              </a:rPr>
+              <a:t>d_model</a:t>
+            </a:r>
+            <a:r>
+              <a:rPr lang="en-US" sz="800" dirty="0">
+                <a:latin typeface="Tahoma" panose="020B0604030504040204" pitchFamily="34" charset="0"/>
+                <a:ea typeface="Tahoma" panose="020B0604030504040204" pitchFamily="34" charset="0"/>
+                <a:cs typeface="Tahoma" panose="020B0604030504040204" pitchFamily="34" charset="0"/>
+              </a:rPr>
+              <a:t> = 512</a:t>
+            </a:r>
+          </a:p>
+          <a:p>
+            <a:pPr marL="403225" indent="-171450" algn="just">
+              <a:lnSpc>
+                <a:spcPct val="130000"/>
+              </a:lnSpc>
+              <a:buFont typeface="Arial" panose="020B0604020202020204" pitchFamily="34" charset="0"/>
+              <a:buChar char="•"/>
+            </a:pPr>
+            <a:r>
+              <a:rPr lang="en-US" sz="800" b="1" dirty="0">
+                <a:latin typeface="Tahoma" panose="020B0604030504040204" pitchFamily="34" charset="0"/>
+                <a:ea typeface="Tahoma" panose="020B0604030504040204" pitchFamily="34" charset="0"/>
+                <a:cs typeface="Tahoma" panose="020B0604030504040204" pitchFamily="34" charset="0"/>
+              </a:rPr>
+              <a:t>8</a:t>
+            </a:r>
+            <a:r>
+              <a:rPr lang="en-US" sz="800" dirty="0">
+                <a:latin typeface="Tahoma" panose="020B0604030504040204" pitchFamily="34" charset="0"/>
+                <a:ea typeface="Tahoma" panose="020B0604030504040204" pitchFamily="34" charset="0"/>
+                <a:cs typeface="Tahoma" panose="020B0604030504040204" pitchFamily="34" charset="0"/>
+              </a:rPr>
+              <a:t> layers Encoder–Decoder</a:t>
+            </a:r>
+          </a:p>
+          <a:p>
+            <a:pPr marL="403225" indent="-171450" algn="just">
+              <a:lnSpc>
+                <a:spcPct val="130000"/>
+              </a:lnSpc>
+              <a:buFont typeface="Arial" panose="020B0604020202020204" pitchFamily="34" charset="0"/>
+              <a:buChar char="•"/>
+            </a:pPr>
+            <a:r>
+              <a:rPr lang="en-US" sz="800" dirty="0">
+                <a:latin typeface="Tahoma" panose="020B0604030504040204" pitchFamily="34" charset="0"/>
+                <a:ea typeface="Tahoma" panose="020B0604030504040204" pitchFamily="34" charset="0"/>
+                <a:cs typeface="Tahoma" panose="020B0604030504040204" pitchFamily="34" charset="0"/>
+              </a:rPr>
+              <a:t>8 attention heads</a:t>
+            </a:r>
+          </a:p>
+          <a:p>
+            <a:pPr marL="403225" indent="-171450" algn="just">
+              <a:lnSpc>
+                <a:spcPct val="130000"/>
+              </a:lnSpc>
+              <a:buFont typeface="Arial" panose="020B0604020202020204" pitchFamily="34" charset="0"/>
+              <a:buChar char="•"/>
+            </a:pPr>
+            <a:r>
+              <a:rPr lang="en-US" sz="800" dirty="0">
+                <a:latin typeface="Tahoma" panose="020B0604030504040204" pitchFamily="34" charset="0"/>
+                <a:ea typeface="Tahoma" panose="020B0604030504040204" pitchFamily="34" charset="0"/>
+                <a:cs typeface="Tahoma" panose="020B0604030504040204" pitchFamily="34" charset="0"/>
+              </a:rPr>
+              <a:t>Dropout: 0.1</a:t>
+            </a:r>
+          </a:p>
+          <a:p>
+            <a:pPr algn="just">
+              <a:lnSpc>
+                <a:spcPct val="130000"/>
+              </a:lnSpc>
+            </a:pPr>
+            <a:r>
+              <a:rPr lang="en-US" sz="800" b="1" i="1" dirty="0" err="1">
+                <a:latin typeface="Tahoma" panose="020B0604030504040204" pitchFamily="34" charset="0"/>
+                <a:ea typeface="Tahoma" panose="020B0604030504040204" pitchFamily="34" charset="0"/>
+                <a:cs typeface="Tahoma" panose="020B0604030504040204" pitchFamily="34" charset="0"/>
+              </a:rPr>
+              <a:t>Huấn</a:t>
+            </a:r>
+            <a:r>
+              <a:rPr lang="en-US" sz="800" b="1" i="1" dirty="0">
+                <a:latin typeface="Tahoma" panose="020B0604030504040204" pitchFamily="34" charset="0"/>
+                <a:ea typeface="Tahoma" panose="020B0604030504040204" pitchFamily="34" charset="0"/>
+                <a:cs typeface="Tahoma" panose="020B0604030504040204" pitchFamily="34" charset="0"/>
+              </a:rPr>
+              <a:t> </a:t>
+            </a:r>
+            <a:r>
+              <a:rPr lang="en-US" sz="800" b="1" i="1" dirty="0" err="1">
+                <a:latin typeface="Tahoma" panose="020B0604030504040204" pitchFamily="34" charset="0"/>
+                <a:ea typeface="Tahoma" panose="020B0604030504040204" pitchFamily="34" charset="0"/>
+                <a:cs typeface="Tahoma" panose="020B0604030504040204" pitchFamily="34" charset="0"/>
+              </a:rPr>
+              <a:t>luyện</a:t>
+            </a:r>
+            <a:r>
+              <a:rPr lang="en-US" sz="800" b="1" i="1" dirty="0">
+                <a:latin typeface="Tahoma" panose="020B0604030504040204" pitchFamily="34" charset="0"/>
+                <a:ea typeface="Tahoma" panose="020B0604030504040204" pitchFamily="34" charset="0"/>
+                <a:cs typeface="Tahoma" panose="020B0604030504040204" pitchFamily="34" charset="0"/>
+              </a:rPr>
+              <a:t>:</a:t>
+            </a:r>
+          </a:p>
+          <a:p>
+            <a:pPr marL="403225" indent="-171450" algn="just">
+              <a:lnSpc>
+                <a:spcPct val="130000"/>
+              </a:lnSpc>
+              <a:buFont typeface="Arial" panose="020B0604020202020204" pitchFamily="34" charset="0"/>
+              <a:buChar char="•"/>
+            </a:pPr>
+            <a:r>
+              <a:rPr lang="en-US" sz="800" dirty="0">
+                <a:latin typeface="Tahoma" panose="020B0604030504040204" pitchFamily="34" charset="0"/>
+                <a:ea typeface="Tahoma" panose="020B0604030504040204" pitchFamily="34" charset="0"/>
+                <a:cs typeface="Tahoma" panose="020B0604030504040204" pitchFamily="34" charset="0"/>
+              </a:rPr>
+              <a:t>Learning rate: 0.0001</a:t>
+            </a:r>
+          </a:p>
+          <a:p>
+            <a:pPr marL="403225" indent="-171450" algn="just">
+              <a:lnSpc>
+                <a:spcPct val="130000"/>
+              </a:lnSpc>
+              <a:buFont typeface="Arial" panose="020B0604020202020204" pitchFamily="34" charset="0"/>
+              <a:buChar char="•"/>
+            </a:pPr>
+            <a:r>
+              <a:rPr lang="en-US" sz="800" dirty="0">
+                <a:latin typeface="Tahoma" panose="020B0604030504040204" pitchFamily="34" charset="0"/>
+                <a:ea typeface="Tahoma" panose="020B0604030504040204" pitchFamily="34" charset="0"/>
+                <a:cs typeface="Tahoma" panose="020B0604030504040204" pitchFamily="34" charset="0"/>
+              </a:rPr>
+              <a:t>Epochs: 12</a:t>
+            </a:r>
+          </a:p>
+          <a:p>
+            <a:pPr algn="just">
+              <a:lnSpc>
+                <a:spcPct val="130000"/>
+              </a:lnSpc>
+            </a:pPr>
+            <a:r>
+              <a:rPr lang="en-US" sz="800" b="1" i="1" dirty="0">
+                <a:latin typeface="Tahoma" panose="020B0604030504040204" pitchFamily="34" charset="0"/>
+                <a:ea typeface="Tahoma" panose="020B0604030504040204" pitchFamily="34" charset="0"/>
+                <a:cs typeface="Tahoma" panose="020B0604030504040204" pitchFamily="34" charset="0"/>
+              </a:rPr>
+              <a:t>Suy </a:t>
+            </a:r>
+            <a:r>
+              <a:rPr lang="en-US" sz="800" b="1" i="1" dirty="0" err="1">
+                <a:latin typeface="Tahoma" panose="020B0604030504040204" pitchFamily="34" charset="0"/>
+                <a:ea typeface="Tahoma" panose="020B0604030504040204" pitchFamily="34" charset="0"/>
+                <a:cs typeface="Tahoma" panose="020B0604030504040204" pitchFamily="34" charset="0"/>
+              </a:rPr>
+              <a:t>luận</a:t>
+            </a:r>
+            <a:r>
+              <a:rPr lang="en-US" sz="800" b="1" i="1" dirty="0">
+                <a:latin typeface="Tahoma" panose="020B0604030504040204" pitchFamily="34" charset="0"/>
+                <a:ea typeface="Tahoma" panose="020B0604030504040204" pitchFamily="34" charset="0"/>
+                <a:cs typeface="Tahoma" panose="020B0604030504040204" pitchFamily="34" charset="0"/>
+              </a:rPr>
+              <a:t>: </a:t>
+            </a:r>
+            <a:r>
+              <a:rPr lang="en-US" sz="800" dirty="0">
+                <a:latin typeface="Tahoma" panose="020B0604030504040204" pitchFamily="34" charset="0"/>
+                <a:ea typeface="Tahoma" panose="020B0604030504040204" pitchFamily="34" charset="0"/>
+                <a:cs typeface="Tahoma" panose="020B0604030504040204" pitchFamily="34" charset="0"/>
+              </a:rPr>
+              <a:t>Beam search (k = 5)</a:t>
+            </a:r>
+            <a:endParaRPr lang="vi-VN" sz="800" dirty="0">
+              <a:latin typeface="Tahoma" panose="020B0604030504040204" pitchFamily="34" charset="0"/>
+              <a:ea typeface="Tahoma" panose="020B0604030504040204" pitchFamily="34" charset="0"/>
+              <a:cs typeface="Tahoma" panose="020B0604030504040204" pitchFamily="34" charset="0"/>
+            </a:endParaRPr>
+          </a:p>
+        </p:txBody>
+      </p:sp>
+      <p:pic>
+        <p:nvPicPr>
+          <p:cNvPr id="6" name="Picture 5">
+            <a:extLst>
+              <a:ext uri="{FF2B5EF4-FFF2-40B4-BE49-F238E27FC236}">
+                <a16:creationId xmlns:a16="http://schemas.microsoft.com/office/drawing/2014/main" id="{B3D12B16-FCEE-E34F-4B49-0F8A103A8FF0}"/>
+              </a:ext>
+            </a:extLst>
+          </p:cNvPr>
+          <p:cNvPicPr>
+            <a:picLocks noChangeAspect="1"/>
+          </p:cNvPicPr>
+          <p:nvPr/>
+        </p:nvPicPr>
+        <p:blipFill>
+          <a:blip r:embed="rId3"/>
+          <a:stretch>
+            <a:fillRect/>
+          </a:stretch>
+        </p:blipFill>
+        <p:spPr>
+          <a:xfrm>
+            <a:off x="2365375" y="1076930"/>
+            <a:ext cx="3244850" cy="841071"/>
+          </a:xfrm>
+          <a:prstGeom prst="rect">
+            <a:avLst/>
+          </a:prstGeom>
+        </p:spPr>
+      </p:pic>
+      <p:pic>
+        <p:nvPicPr>
+          <p:cNvPr id="7" name="Picture 6">
+            <a:extLst>
+              <a:ext uri="{FF2B5EF4-FFF2-40B4-BE49-F238E27FC236}">
+                <a16:creationId xmlns:a16="http://schemas.microsoft.com/office/drawing/2014/main" id="{57774E55-176E-EFD3-6D31-0A8EA1FDBC3C}"/>
+              </a:ext>
+            </a:extLst>
+          </p:cNvPr>
+          <p:cNvPicPr>
+            <a:picLocks noChangeAspect="1"/>
+          </p:cNvPicPr>
+          <p:nvPr/>
+        </p:nvPicPr>
+        <p:blipFill>
+          <a:blip r:embed="rId4"/>
+          <a:stretch>
+            <a:fillRect/>
+          </a:stretch>
+        </p:blipFill>
+        <p:spPr>
+          <a:xfrm>
+            <a:off x="1922089" y="2083384"/>
+            <a:ext cx="3688136" cy="635815"/>
+          </a:xfrm>
+          <a:prstGeom prst="rect">
+            <a:avLst/>
+          </a:prstGeom>
+        </p:spPr>
+      </p:pic>
+    </p:spTree>
+    <p:extLst>
+      <p:ext uri="{BB962C8B-B14F-4D97-AF65-F5344CB8AC3E}">
+        <p14:creationId xmlns:p14="http://schemas.microsoft.com/office/powerpoint/2010/main" val="4290456926"/>
+      </p:ext>
+    </p:extLst>
+  </p:cSld>
+  <p:clrMapOvr>
+    <a:masterClrMapping/>
+  </p:clrMapOvr>
+</p:sld>
+</file>
+
+<file path=ppt/slides/slide22.xml><?xml version="1.0" encoding="utf-8"?>
+<p:sld xmlns:a="http://schemas.openxmlformats.org/drawingml/2006/main" xmlns:r="http://schemas.openxmlformats.org/officeDocument/2006/relationships" xmlns:p="http://schemas.openxmlformats.org/presentationml/2006/main">
+  <p:cSld>
+    <p:spTree>
+      <p:nvGrpSpPr>
+        <p:cNvPr id="1" name="">
+          <a:extLst>
+            <a:ext uri="{FF2B5EF4-FFF2-40B4-BE49-F238E27FC236}">
+              <a16:creationId xmlns:a16="http://schemas.microsoft.com/office/drawing/2014/main" id="{79CDD62F-7061-6FA1-A36A-056228CC7F50}"/>
+            </a:ext>
+          </a:extLst>
+        </p:cNvPr>
+        <p:cNvGrpSpPr/>
+        <p:nvPr/>
+      </p:nvGrpSpPr>
+      <p:grpSpPr>
+        <a:xfrm>
+          <a:off x="0" y="0"/>
+          <a:ext cx="0" cy="0"/>
+          <a:chOff x="0" y="0"/>
+          <a:chExt cx="0" cy="0"/>
+        </a:xfrm>
+      </p:grpSpPr>
+      <p:sp>
+        <p:nvSpPr>
+          <p:cNvPr id="2" name="TextBox 2">
+            <a:extLst>
+              <a:ext uri="{FF2B5EF4-FFF2-40B4-BE49-F238E27FC236}">
+                <a16:creationId xmlns:a16="http://schemas.microsoft.com/office/drawing/2014/main" id="{17783E79-3B4F-C82F-2587-BDB8ECDBF7BB}"/>
+              </a:ext>
+            </a:extLst>
+          </p:cNvPr>
+          <p:cNvSpPr txBox="1"/>
+          <p:nvPr/>
+        </p:nvSpPr>
+        <p:spPr>
+          <a:xfrm>
+            <a:off x="277092" y="277825"/>
+            <a:ext cx="2675658" cy="241476"/>
+          </a:xfrm>
+          <a:prstGeom prst="rect">
+            <a:avLst/>
+          </a:prstGeom>
+        </p:spPr>
+        <p:txBody>
+          <a:bodyPr wrap="square" lIns="0" tIns="0" rIns="0" bIns="0" rtlCol="0" anchor="t">
+            <a:spAutoFit/>
+          </a:bodyPr>
+          <a:lstStyle/>
+          <a:p>
+            <a:pPr algn="l">
+              <a:lnSpc>
+                <a:spcPts val="2100"/>
+              </a:lnSpc>
+            </a:pPr>
+            <a:r>
+              <a:rPr lang="en-US" sz="1500" b="1" spc="-4" dirty="0">
+                <a:solidFill>
+                  <a:srgbClr val="2B4D7B"/>
+                </a:solidFill>
+                <a:latin typeface="Tahoma" panose="020B0604030504040204" pitchFamily="34" charset="0"/>
+                <a:ea typeface="Tahoma" panose="020B0604030504040204" pitchFamily="34" charset="0"/>
+                <a:cs typeface="Tahoma" panose="020B0604030504040204" pitchFamily="34" charset="0"/>
+                <a:sym typeface="Canva Sans Bold"/>
+              </a:rPr>
+              <a:t>5. </a:t>
+            </a:r>
+            <a:r>
+              <a:rPr lang="en-US" sz="1500" b="1" spc="-4" dirty="0" err="1">
+                <a:solidFill>
+                  <a:srgbClr val="2B4D7B"/>
+                </a:solidFill>
+                <a:latin typeface="Tahoma" panose="020B0604030504040204" pitchFamily="34" charset="0"/>
+                <a:ea typeface="Tahoma" panose="020B0604030504040204" pitchFamily="34" charset="0"/>
+                <a:cs typeface="Tahoma" panose="020B0604030504040204" pitchFamily="34" charset="0"/>
+                <a:sym typeface="Canva Sans Bold"/>
+              </a:rPr>
+              <a:t>Kết</a:t>
+            </a:r>
+            <a:r>
+              <a:rPr lang="en-US" sz="1500" b="1" spc="-4" dirty="0">
+                <a:solidFill>
+                  <a:srgbClr val="2B4D7B"/>
+                </a:solidFill>
+                <a:latin typeface="Tahoma" panose="020B0604030504040204" pitchFamily="34" charset="0"/>
+                <a:ea typeface="Tahoma" panose="020B0604030504040204" pitchFamily="34" charset="0"/>
+                <a:cs typeface="Tahoma" panose="020B0604030504040204" pitchFamily="34" charset="0"/>
+                <a:sym typeface="Canva Sans Bold"/>
+              </a:rPr>
+              <a:t> </a:t>
+            </a:r>
+            <a:r>
+              <a:rPr lang="en-US" sz="1500" b="1" spc="-4" dirty="0" err="1">
+                <a:solidFill>
+                  <a:srgbClr val="2B4D7B"/>
+                </a:solidFill>
+                <a:latin typeface="Tahoma" panose="020B0604030504040204" pitchFamily="34" charset="0"/>
+                <a:ea typeface="Tahoma" panose="020B0604030504040204" pitchFamily="34" charset="0"/>
+                <a:cs typeface="Tahoma" panose="020B0604030504040204" pitchFamily="34" charset="0"/>
+                <a:sym typeface="Canva Sans Bold"/>
+              </a:rPr>
+              <a:t>quả</a:t>
+            </a:r>
+            <a:r>
+              <a:rPr lang="en-US" sz="1500" b="1" spc="-4" dirty="0">
+                <a:solidFill>
+                  <a:srgbClr val="2B4D7B"/>
+                </a:solidFill>
+                <a:latin typeface="Tahoma" panose="020B0604030504040204" pitchFamily="34" charset="0"/>
+                <a:ea typeface="Tahoma" panose="020B0604030504040204" pitchFamily="34" charset="0"/>
+                <a:cs typeface="Tahoma" panose="020B0604030504040204" pitchFamily="34" charset="0"/>
+                <a:sym typeface="Canva Sans Bold"/>
+              </a:rPr>
+              <a:t> </a:t>
+            </a:r>
+            <a:r>
+              <a:rPr lang="en-US" sz="1500" b="1" spc="-4" dirty="0" err="1">
+                <a:solidFill>
+                  <a:srgbClr val="2B4D7B"/>
+                </a:solidFill>
+                <a:latin typeface="Tahoma" panose="020B0604030504040204" pitchFamily="34" charset="0"/>
+                <a:ea typeface="Tahoma" panose="020B0604030504040204" pitchFamily="34" charset="0"/>
+                <a:cs typeface="Tahoma" panose="020B0604030504040204" pitchFamily="34" charset="0"/>
+                <a:sym typeface="Canva Sans Bold"/>
+              </a:rPr>
+              <a:t>thực</a:t>
+            </a:r>
+            <a:r>
+              <a:rPr lang="en-US" sz="1500" b="1" spc="-4" dirty="0">
+                <a:solidFill>
+                  <a:srgbClr val="2B4D7B"/>
+                </a:solidFill>
+                <a:latin typeface="Tahoma" panose="020B0604030504040204" pitchFamily="34" charset="0"/>
+                <a:ea typeface="Tahoma" panose="020B0604030504040204" pitchFamily="34" charset="0"/>
+                <a:cs typeface="Tahoma" panose="020B0604030504040204" pitchFamily="34" charset="0"/>
+                <a:sym typeface="Canva Sans Bold"/>
+              </a:rPr>
+              <a:t> </a:t>
+            </a:r>
+            <a:r>
+              <a:rPr lang="en-US" sz="1500" b="1" spc="-4" dirty="0" err="1">
+                <a:solidFill>
+                  <a:srgbClr val="2B4D7B"/>
+                </a:solidFill>
+                <a:latin typeface="Tahoma" panose="020B0604030504040204" pitchFamily="34" charset="0"/>
+                <a:ea typeface="Tahoma" panose="020B0604030504040204" pitchFamily="34" charset="0"/>
+                <a:cs typeface="Tahoma" panose="020B0604030504040204" pitchFamily="34" charset="0"/>
+                <a:sym typeface="Canva Sans Bold"/>
+              </a:rPr>
+              <a:t>nghiệm</a:t>
+            </a:r>
+            <a:endParaRPr lang="en-US" sz="1500" b="1" spc="-4" dirty="0">
+              <a:solidFill>
+                <a:srgbClr val="2B4D7B"/>
+              </a:solidFill>
+              <a:latin typeface="Tahoma" panose="020B0604030504040204" pitchFamily="34" charset="0"/>
+              <a:ea typeface="Tahoma" panose="020B0604030504040204" pitchFamily="34" charset="0"/>
+              <a:cs typeface="Tahoma" panose="020B0604030504040204" pitchFamily="34" charset="0"/>
+              <a:sym typeface="Canva Sans Bold"/>
+            </a:endParaRPr>
+          </a:p>
+        </p:txBody>
+      </p:sp>
+      <p:sp>
+        <p:nvSpPr>
+          <p:cNvPr id="10" name="TextBox 9">
+            <a:extLst>
+              <a:ext uri="{FF2B5EF4-FFF2-40B4-BE49-F238E27FC236}">
+                <a16:creationId xmlns:a16="http://schemas.microsoft.com/office/drawing/2014/main" id="{B7E85809-8E1A-1C76-C078-0B3906F5C382}"/>
+              </a:ext>
+            </a:extLst>
+          </p:cNvPr>
+          <p:cNvSpPr txBox="1"/>
+          <p:nvPr/>
+        </p:nvSpPr>
+        <p:spPr>
+          <a:xfrm>
+            <a:off x="5314950" y="2914650"/>
+            <a:ext cx="295275" cy="215444"/>
+          </a:xfrm>
+          <a:prstGeom prst="rect">
+            <a:avLst/>
+          </a:prstGeom>
+          <a:noFill/>
+        </p:spPr>
+        <p:txBody>
+          <a:bodyPr wrap="square">
+            <a:spAutoFit/>
+          </a:bodyPr>
+          <a:lstStyle/>
+          <a:p>
+            <a:pPr algn="r"/>
+            <a:r>
+              <a:rPr lang="en-US" sz="800" dirty="0">
+                <a:solidFill>
+                  <a:srgbClr val="1C1C1A"/>
+                </a:solidFill>
+                <a:latin typeface="Tahoma" panose="020B0604030504040204" pitchFamily="34" charset="0"/>
+                <a:ea typeface="Tahoma" panose="020B0604030504040204" pitchFamily="34" charset="0"/>
+                <a:cs typeface="Tahoma" panose="020B0604030504040204" pitchFamily="34" charset="0"/>
+                <a:sym typeface="Canva Sans"/>
+              </a:rPr>
+              <a:t>21</a:t>
+            </a:r>
+            <a:endParaRPr lang="en-US" sz="800" dirty="0">
+              <a:latin typeface="Tahoma" panose="020B0604030504040204" pitchFamily="34" charset="0"/>
+              <a:ea typeface="Tahoma" panose="020B0604030504040204" pitchFamily="34" charset="0"/>
+              <a:cs typeface="Tahoma" panose="020B0604030504040204" pitchFamily="34" charset="0"/>
+            </a:endParaRPr>
+          </a:p>
+        </p:txBody>
+      </p:sp>
+      <p:sp>
+        <p:nvSpPr>
+          <p:cNvPr id="9" name="TextBox 8">
+            <a:extLst>
+              <a:ext uri="{FF2B5EF4-FFF2-40B4-BE49-F238E27FC236}">
+                <a16:creationId xmlns:a16="http://schemas.microsoft.com/office/drawing/2014/main" id="{D606A9A9-8D53-CC14-31CB-7D6228D11CAE}"/>
+              </a:ext>
+            </a:extLst>
+          </p:cNvPr>
+          <p:cNvSpPr txBox="1"/>
+          <p:nvPr/>
+        </p:nvSpPr>
+        <p:spPr>
+          <a:xfrm>
+            <a:off x="277092" y="519301"/>
+            <a:ext cx="2675658" cy="251094"/>
+          </a:xfrm>
+          <a:prstGeom prst="rect">
+            <a:avLst/>
+          </a:prstGeom>
+          <a:noFill/>
+        </p:spPr>
+        <p:txBody>
+          <a:bodyPr wrap="square" rtlCol="0">
+            <a:spAutoFit/>
+          </a:bodyPr>
+          <a:lstStyle/>
+          <a:p>
+            <a:pPr algn="just">
+              <a:lnSpc>
+                <a:spcPct val="130000"/>
+              </a:lnSpc>
+            </a:pPr>
+            <a:r>
+              <a:rPr lang="en-US" sz="900" u="sng" dirty="0">
+                <a:solidFill>
+                  <a:srgbClr val="00B050"/>
+                </a:solidFill>
+                <a:latin typeface="Tahoma" panose="020B0604030504040204" pitchFamily="34" charset="0"/>
+                <a:ea typeface="Tahoma" panose="020B0604030504040204" pitchFamily="34" charset="0"/>
+                <a:cs typeface="Tahoma" panose="020B0604030504040204" pitchFamily="34" charset="0"/>
+              </a:rPr>
+              <a:t>5.4. So </a:t>
+            </a:r>
+            <a:r>
+              <a:rPr lang="en-US" sz="900" u="sng" dirty="0" err="1">
+                <a:solidFill>
+                  <a:srgbClr val="00B050"/>
+                </a:solidFill>
+                <a:latin typeface="Tahoma" panose="020B0604030504040204" pitchFamily="34" charset="0"/>
+                <a:ea typeface="Tahoma" panose="020B0604030504040204" pitchFamily="34" charset="0"/>
+                <a:cs typeface="Tahoma" panose="020B0604030504040204" pitchFamily="34" charset="0"/>
+              </a:rPr>
+              <a:t>sánh</a:t>
+            </a:r>
+            <a:r>
+              <a:rPr lang="en-US" sz="900" u="sng" dirty="0">
+                <a:solidFill>
+                  <a:srgbClr val="00B050"/>
+                </a:solidFill>
+                <a:latin typeface="Tahoma" panose="020B0604030504040204" pitchFamily="34" charset="0"/>
+                <a:ea typeface="Tahoma" panose="020B0604030504040204" pitchFamily="34" charset="0"/>
+                <a:cs typeface="Tahoma" panose="020B0604030504040204" pitchFamily="34" charset="0"/>
+              </a:rPr>
+              <a:t> </a:t>
+            </a:r>
+            <a:r>
+              <a:rPr lang="en-US" sz="900" u="sng" dirty="0" err="1">
+                <a:solidFill>
+                  <a:srgbClr val="00B050"/>
+                </a:solidFill>
+                <a:latin typeface="Tahoma" panose="020B0604030504040204" pitchFamily="34" charset="0"/>
+                <a:ea typeface="Tahoma" panose="020B0604030504040204" pitchFamily="34" charset="0"/>
+                <a:cs typeface="Tahoma" panose="020B0604030504040204" pitchFamily="34" charset="0"/>
+              </a:rPr>
+              <a:t>kết</a:t>
+            </a:r>
+            <a:r>
+              <a:rPr lang="en-US" sz="900" u="sng" dirty="0">
+                <a:solidFill>
+                  <a:srgbClr val="00B050"/>
+                </a:solidFill>
+                <a:latin typeface="Tahoma" panose="020B0604030504040204" pitchFamily="34" charset="0"/>
+                <a:ea typeface="Tahoma" panose="020B0604030504040204" pitchFamily="34" charset="0"/>
+                <a:cs typeface="Tahoma" panose="020B0604030504040204" pitchFamily="34" charset="0"/>
+              </a:rPr>
+              <a:t> </a:t>
+            </a:r>
+            <a:r>
+              <a:rPr lang="en-US" sz="900" u="sng" dirty="0" err="1">
+                <a:solidFill>
+                  <a:srgbClr val="00B050"/>
+                </a:solidFill>
+                <a:latin typeface="Tahoma" panose="020B0604030504040204" pitchFamily="34" charset="0"/>
+                <a:ea typeface="Tahoma" panose="020B0604030504040204" pitchFamily="34" charset="0"/>
+                <a:cs typeface="Tahoma" panose="020B0604030504040204" pitchFamily="34" charset="0"/>
+              </a:rPr>
+              <a:t>quả</a:t>
+            </a:r>
+            <a:r>
+              <a:rPr lang="en-US" sz="900" u="sng" dirty="0">
+                <a:solidFill>
+                  <a:srgbClr val="00B050"/>
+                </a:solidFill>
+                <a:latin typeface="Tahoma" panose="020B0604030504040204" pitchFamily="34" charset="0"/>
+                <a:ea typeface="Tahoma" panose="020B0604030504040204" pitchFamily="34" charset="0"/>
+                <a:cs typeface="Tahoma" panose="020B0604030504040204" pitchFamily="34" charset="0"/>
+              </a:rPr>
+              <a:t> </a:t>
+            </a:r>
+            <a:r>
+              <a:rPr lang="en-US" sz="900" u="sng" dirty="0" err="1">
+                <a:solidFill>
+                  <a:srgbClr val="00B050"/>
+                </a:solidFill>
+                <a:latin typeface="Tahoma" panose="020B0604030504040204" pitchFamily="34" charset="0"/>
+                <a:ea typeface="Tahoma" panose="020B0604030504040204" pitchFamily="34" charset="0"/>
+                <a:cs typeface="Tahoma" panose="020B0604030504040204" pitchFamily="34" charset="0"/>
+              </a:rPr>
+              <a:t>các</a:t>
+            </a:r>
+            <a:r>
+              <a:rPr lang="en-US" sz="900" u="sng" dirty="0">
+                <a:solidFill>
+                  <a:srgbClr val="00B050"/>
+                </a:solidFill>
+                <a:latin typeface="Tahoma" panose="020B0604030504040204" pitchFamily="34" charset="0"/>
+                <a:ea typeface="Tahoma" panose="020B0604030504040204" pitchFamily="34" charset="0"/>
+                <a:cs typeface="Tahoma" panose="020B0604030504040204" pitchFamily="34" charset="0"/>
+              </a:rPr>
+              <a:t> </a:t>
+            </a:r>
+            <a:r>
+              <a:rPr lang="en-US" sz="900" u="sng" dirty="0" err="1">
+                <a:solidFill>
+                  <a:srgbClr val="00B050"/>
+                </a:solidFill>
+                <a:latin typeface="Tahoma" panose="020B0604030504040204" pitchFamily="34" charset="0"/>
+                <a:ea typeface="Tahoma" panose="020B0604030504040204" pitchFamily="34" charset="0"/>
+                <a:cs typeface="Tahoma" panose="020B0604030504040204" pitchFamily="34" charset="0"/>
+              </a:rPr>
+              <a:t>thực</a:t>
+            </a:r>
+            <a:r>
+              <a:rPr lang="en-US" sz="900" u="sng" dirty="0">
+                <a:solidFill>
+                  <a:srgbClr val="00B050"/>
+                </a:solidFill>
+                <a:latin typeface="Tahoma" panose="020B0604030504040204" pitchFamily="34" charset="0"/>
+                <a:ea typeface="Tahoma" panose="020B0604030504040204" pitchFamily="34" charset="0"/>
+                <a:cs typeface="Tahoma" panose="020B0604030504040204" pitchFamily="34" charset="0"/>
+              </a:rPr>
+              <a:t> </a:t>
+            </a:r>
+            <a:r>
+              <a:rPr lang="en-US" sz="900" u="sng" dirty="0" err="1">
+                <a:solidFill>
+                  <a:srgbClr val="00B050"/>
+                </a:solidFill>
+                <a:latin typeface="Tahoma" panose="020B0604030504040204" pitchFamily="34" charset="0"/>
+                <a:ea typeface="Tahoma" panose="020B0604030504040204" pitchFamily="34" charset="0"/>
+                <a:cs typeface="Tahoma" panose="020B0604030504040204" pitchFamily="34" charset="0"/>
+              </a:rPr>
+              <a:t>nghiệm</a:t>
+            </a:r>
+            <a:endParaRPr lang="vi-VN" sz="900" u="sng" dirty="0">
+              <a:solidFill>
+                <a:srgbClr val="00B050"/>
+              </a:solidFill>
+              <a:latin typeface="Tahoma" panose="020B0604030504040204" pitchFamily="34" charset="0"/>
+              <a:ea typeface="Tahoma" panose="020B0604030504040204" pitchFamily="34" charset="0"/>
+              <a:cs typeface="Tahoma" panose="020B0604030504040204" pitchFamily="34" charset="0"/>
+            </a:endParaRPr>
+          </a:p>
+        </p:txBody>
+      </p:sp>
+      <p:pic>
+        <p:nvPicPr>
+          <p:cNvPr id="4" name="Picture 3">
+            <a:extLst>
+              <a:ext uri="{FF2B5EF4-FFF2-40B4-BE49-F238E27FC236}">
+                <a16:creationId xmlns:a16="http://schemas.microsoft.com/office/drawing/2014/main" id="{46E047B3-718C-B04D-D2DC-3DC5832226CE}"/>
+              </a:ext>
+            </a:extLst>
+          </p:cNvPr>
+          <p:cNvPicPr>
+            <a:picLocks noChangeAspect="1"/>
+          </p:cNvPicPr>
+          <p:nvPr/>
+        </p:nvPicPr>
+        <p:blipFill>
+          <a:blip r:embed="rId3">
+            <a:extLst>
+              <a:ext uri="{28A0092B-C50C-407E-A947-70E740481C1C}">
+                <a14:useLocalDpi xmlns:a14="http://schemas.microsoft.com/office/drawing/2010/main" val="0"/>
+              </a:ext>
+            </a:extLst>
+          </a:blip>
+          <a:srcRect/>
+          <a:stretch>
+            <a:fillRect/>
+          </a:stretch>
+        </p:blipFill>
+        <p:spPr bwMode="auto">
+          <a:xfrm>
+            <a:off x="1504950" y="812787"/>
+            <a:ext cx="2743200" cy="2147888"/>
+          </a:xfrm>
+          <a:prstGeom prst="rect">
+            <a:avLst/>
+          </a:prstGeom>
+          <a:noFill/>
+          <a:ln>
+            <a:noFill/>
+          </a:ln>
+        </p:spPr>
+      </p:pic>
+    </p:spTree>
+    <p:extLst>
+      <p:ext uri="{BB962C8B-B14F-4D97-AF65-F5344CB8AC3E}">
+        <p14:creationId xmlns:p14="http://schemas.microsoft.com/office/powerpoint/2010/main" val="1581991716"/>
+      </p:ext>
+    </p:extLst>
+  </p:cSld>
+  <p:clrMapOvr>
+    <a:masterClrMapping/>
+  </p:clrMapOvr>
+</p:sld>
+</file>
+
+<file path=ppt/slides/slide23.xml><?xml version="1.0" encoding="utf-8"?>
 <p:sld xmlns:a="http://schemas.openxmlformats.org/drawingml/2006/main" xmlns:r="http://schemas.openxmlformats.org/officeDocument/2006/relationships" xmlns:p="http://schemas.openxmlformats.org/presentationml/2006/main">
   <p:cSld>
     <p:spTree>
@@ -9845,13 +15518,8 @@
                 <a:cs typeface="Tahoma" panose="020B0604030504040204" pitchFamily="34" charset="0"/>
                 <a:sym typeface="Canva Sans"/>
               </a:rPr>
-              <a:t>10</a:t>
-            </a:r>
-            <a:endParaRPr lang="en-US" sz="800" dirty="0">
-              <a:latin typeface="Tahoma" panose="020B0604030504040204" pitchFamily="34" charset="0"/>
-              <a:ea typeface="Tahoma" panose="020B0604030504040204" pitchFamily="34" charset="0"/>
-              <a:cs typeface="Tahoma" panose="020B0604030504040204" pitchFamily="34" charset="0"/>
-            </a:endParaRPr>
+              <a:t>22</a:t>
+            </a:r>
           </a:p>
         </p:txBody>
       </p:sp>
@@ -9868,20 +15536,18 @@
 </p:sld>
 </file>
 
-<file path=ppt/slides/slide2.xml><?xml version="1.0" encoding="utf-8"?>
+<file path=ppt/slides/slide24.xml><?xml version="1.0" encoding="utf-8"?>
 <p:sld xmlns:a="http://schemas.openxmlformats.org/drawingml/2006/main" xmlns:r="http://schemas.openxmlformats.org/officeDocument/2006/relationships" xmlns:p="http://schemas.openxmlformats.org/presentationml/2006/main">
   <p:cSld>
-    <p:bg>
-      <p:bgPr>
-        <a:solidFill>
-          <a:srgbClr val="F4F8FF"/>
-        </a:solidFill>
-        <a:effectLst/>
-      </p:bgPr>
-    </p:bg>
     <p:spTree>
       <p:nvGrpSpPr>
-        <p:cNvPr id="1" name=""/>
+        <p:cNvPr id="1" name="">
+          <a:extLst>
+            <a:ext uri="{FF2B5EF4-FFF2-40B4-BE49-F238E27FC236}">
+              <a16:creationId xmlns:a16="http://schemas.microsoft.com/office/drawing/2014/main" id="{CC1A04D0-1453-AB26-B4D8-BB6B2C5E55B3}"/>
+            </a:ext>
+          </a:extLst>
+        </p:cNvPr>
         <p:cNvGrpSpPr/>
         <p:nvPr/>
       </p:nvGrpSpPr>
@@ -9895,14 +15561,20 @@
       </p:grpSpPr>
       <p:sp>
         <p:nvSpPr>
-          <p:cNvPr id="2" name="TextBox 2"/>
+          <p:cNvPr id="2" name="TextBox 2">
+            <a:extLst>
+              <a:ext uri="{FF2B5EF4-FFF2-40B4-BE49-F238E27FC236}">
+                <a16:creationId xmlns:a16="http://schemas.microsoft.com/office/drawing/2014/main" id="{2441AF70-3F24-693E-6FF7-2B0425A38223}"/>
+              </a:ext>
+            </a:extLst>
+          </p:cNvPr>
           <p:cNvSpPr txBox="1"/>
           <p:nvPr/>
         </p:nvSpPr>
         <p:spPr>
           <a:xfrm>
-            <a:off x="323849" y="182553"/>
-            <a:ext cx="1562101" cy="332848"/>
+            <a:off x="277092" y="277825"/>
+            <a:ext cx="2675658" cy="241476"/>
           </a:xfrm>
           <a:prstGeom prst="rect">
             <a:avLst/>
@@ -9916,11 +15588,11 @@
           <a:p>
             <a:pPr algn="l">
               <a:lnSpc>
-                <a:spcPts val="2869"/>
+                <a:spcPts val="2100"/>
               </a:lnSpc>
             </a:pPr>
             <a:r>
-              <a:rPr lang="en-US" sz="2049" b="1" dirty="0" err="1">
+              <a:rPr lang="en-US" sz="1500" b="1" spc="-4" dirty="0">
                 <a:solidFill>
                   <a:srgbClr val="2B4D7B"/>
                 </a:solidFill>
@@ -9929,10 +15601,10 @@
                 <a:cs typeface="Tahoma" panose="020B0604030504040204" pitchFamily="34" charset="0"/>
                 <a:sym typeface="Canva Sans Bold"/>
               </a:rPr>
-              <a:t>Nội</a:t>
-            </a:r>
-            <a:r>
-              <a:rPr lang="en-US" sz="2049" b="1" dirty="0">
+              <a:t>6. </a:t>
+            </a:r>
+            <a:r>
+              <a:rPr lang="en-US" sz="1500" b="1" spc="-4" dirty="0" err="1">
                 <a:solidFill>
                   <a:srgbClr val="2B4D7B"/>
                 </a:solidFill>
@@ -9941,40 +15613,10 @@
                 <a:cs typeface="Tahoma" panose="020B0604030504040204" pitchFamily="34" charset="0"/>
                 <a:sym typeface="Canva Sans Bold"/>
               </a:rPr>
-              <a:t> dung</a:t>
-            </a:r>
-          </a:p>
-        </p:txBody>
-      </p:sp>
-      <p:sp>
-        <p:nvSpPr>
-          <p:cNvPr id="3" name="TextBox 3"/>
-          <p:cNvSpPr txBox="1"/>
-          <p:nvPr/>
-        </p:nvSpPr>
-        <p:spPr>
-          <a:xfrm>
-            <a:off x="349411" y="731635"/>
-            <a:ext cx="3227945" cy="1736437"/>
-          </a:xfrm>
-          <a:prstGeom prst="rect">
-            <a:avLst/>
-          </a:prstGeom>
-        </p:spPr>
-        <p:txBody>
-          <a:bodyPr wrap="square" lIns="0" tIns="0" rIns="0" bIns="0" rtlCol="0" anchor="t">
-            <a:spAutoFit/>
-          </a:bodyPr>
-          <a:lstStyle/>
-          <a:p>
-            <a:pPr marL="228600" indent="-228600" algn="l">
-              <a:lnSpc>
-                <a:spcPts val="2304"/>
-              </a:lnSpc>
-              <a:buAutoNum type="arabicPeriod"/>
-            </a:pPr>
-            <a:r>
-              <a:rPr lang="en-US" sz="1200" b="1" dirty="0" err="1">
+              <a:t>Kết</a:t>
+            </a:r>
+            <a:r>
+              <a:rPr lang="en-US" sz="1500" b="1" spc="-4" dirty="0">
                 <a:solidFill>
                   <a:srgbClr val="2B4D7B"/>
                 </a:solidFill>
@@ -9983,10 +15625,10 @@
                 <a:cs typeface="Tahoma" panose="020B0604030504040204" pitchFamily="34" charset="0"/>
                 <a:sym typeface="Canva Sans Bold"/>
               </a:rPr>
-              <a:t>Giới</a:t>
-            </a:r>
-            <a:r>
-              <a:rPr lang="en-US" sz="1200" b="1" dirty="0">
+              <a:t> </a:t>
+            </a:r>
+            <a:r>
+              <a:rPr lang="en-US" sz="1500" b="1" spc="-4" dirty="0" err="1">
                 <a:solidFill>
                   <a:srgbClr val="2B4D7B"/>
                 </a:solidFill>
@@ -9995,21 +15637,9 @@
                 <a:cs typeface="Tahoma" panose="020B0604030504040204" pitchFamily="34" charset="0"/>
                 <a:sym typeface="Canva Sans Bold"/>
               </a:rPr>
-              <a:t> </a:t>
-            </a:r>
-            <a:r>
-              <a:rPr lang="en-US" sz="1200" b="1" dirty="0" err="1">
-                <a:solidFill>
-                  <a:srgbClr val="2B4D7B"/>
-                </a:solidFill>
-                <a:latin typeface="Tahoma" panose="020B0604030504040204" pitchFamily="34" charset="0"/>
-                <a:ea typeface="Tahoma" panose="020B0604030504040204" pitchFamily="34" charset="0"/>
-                <a:cs typeface="Tahoma" panose="020B0604030504040204" pitchFamily="34" charset="0"/>
-                <a:sym typeface="Canva Sans Bold"/>
-              </a:rPr>
-              <a:t>thiệu</a:t>
-            </a:r>
-            <a:endParaRPr lang="en-US" sz="1200" b="1" dirty="0">
+              <a:t>luận</a:t>
+            </a:r>
+            <a:endParaRPr lang="en-US" sz="1500" b="1" spc="-4" dirty="0">
               <a:solidFill>
                 <a:srgbClr val="2B4D7B"/>
               </a:solidFill>
@@ -10019,387 +15649,14 @@
               <a:sym typeface="Canva Sans Bold"/>
             </a:endParaRPr>
           </a:p>
-          <a:p>
-            <a:pPr marL="228600" indent="-228600" algn="l">
-              <a:lnSpc>
-                <a:spcPts val="2304"/>
-              </a:lnSpc>
-              <a:buAutoNum type="arabicPeriod"/>
-            </a:pPr>
-            <a:r>
-              <a:rPr lang="en-US" sz="1200" b="1" dirty="0" err="1">
-                <a:solidFill>
-                  <a:srgbClr val="2B4D7B"/>
-                </a:solidFill>
-                <a:latin typeface="Tahoma" panose="020B0604030504040204" pitchFamily="34" charset="0"/>
-                <a:ea typeface="Tahoma" panose="020B0604030504040204" pitchFamily="34" charset="0"/>
-                <a:cs typeface="Tahoma" panose="020B0604030504040204" pitchFamily="34" charset="0"/>
-                <a:sym typeface="Canva Sans Bold"/>
-              </a:rPr>
-              <a:t>Bộ</a:t>
-            </a:r>
-            <a:r>
-              <a:rPr lang="en-US" sz="1200" b="1" dirty="0">
-                <a:solidFill>
-                  <a:srgbClr val="2B4D7B"/>
-                </a:solidFill>
-                <a:latin typeface="Tahoma" panose="020B0604030504040204" pitchFamily="34" charset="0"/>
-                <a:ea typeface="Tahoma" panose="020B0604030504040204" pitchFamily="34" charset="0"/>
-                <a:cs typeface="Tahoma" panose="020B0604030504040204" pitchFamily="34" charset="0"/>
-                <a:sym typeface="Canva Sans Bold"/>
-              </a:rPr>
-              <a:t> </a:t>
-            </a:r>
-            <a:r>
-              <a:rPr lang="en-US" sz="1200" b="1" dirty="0" err="1">
-                <a:solidFill>
-                  <a:srgbClr val="2B4D7B"/>
-                </a:solidFill>
-                <a:latin typeface="Tahoma" panose="020B0604030504040204" pitchFamily="34" charset="0"/>
-                <a:ea typeface="Tahoma" panose="020B0604030504040204" pitchFamily="34" charset="0"/>
-                <a:cs typeface="Tahoma" panose="020B0604030504040204" pitchFamily="34" charset="0"/>
-                <a:sym typeface="Canva Sans Bold"/>
-              </a:rPr>
-              <a:t>dữ</a:t>
-            </a:r>
-            <a:r>
-              <a:rPr lang="en-US" sz="1200" b="1" dirty="0">
-                <a:solidFill>
-                  <a:srgbClr val="2B4D7B"/>
-                </a:solidFill>
-                <a:latin typeface="Tahoma" panose="020B0604030504040204" pitchFamily="34" charset="0"/>
-                <a:ea typeface="Tahoma" panose="020B0604030504040204" pitchFamily="34" charset="0"/>
-                <a:cs typeface="Tahoma" panose="020B0604030504040204" pitchFamily="34" charset="0"/>
-                <a:sym typeface="Canva Sans Bold"/>
-              </a:rPr>
-              <a:t> </a:t>
-            </a:r>
-            <a:r>
-              <a:rPr lang="en-US" sz="1200" b="1" dirty="0" err="1">
-                <a:solidFill>
-                  <a:srgbClr val="2B4D7B"/>
-                </a:solidFill>
-                <a:latin typeface="Tahoma" panose="020B0604030504040204" pitchFamily="34" charset="0"/>
-                <a:ea typeface="Tahoma" panose="020B0604030504040204" pitchFamily="34" charset="0"/>
-                <a:cs typeface="Tahoma" panose="020B0604030504040204" pitchFamily="34" charset="0"/>
-                <a:sym typeface="Canva Sans Bold"/>
-              </a:rPr>
-              <a:t>liệu</a:t>
-            </a:r>
-            <a:endParaRPr lang="en-US" sz="1200" b="1" dirty="0">
-              <a:solidFill>
-                <a:srgbClr val="2B4D7B"/>
-              </a:solidFill>
-              <a:latin typeface="Tahoma" panose="020B0604030504040204" pitchFamily="34" charset="0"/>
-              <a:ea typeface="Tahoma" panose="020B0604030504040204" pitchFamily="34" charset="0"/>
-              <a:cs typeface="Tahoma" panose="020B0604030504040204" pitchFamily="34" charset="0"/>
-              <a:sym typeface="Canva Sans Bold"/>
-            </a:endParaRPr>
-          </a:p>
-          <a:p>
-            <a:pPr marL="228600" indent="-228600" algn="l">
-              <a:lnSpc>
-                <a:spcPts val="2304"/>
-              </a:lnSpc>
-              <a:buAutoNum type="arabicPeriod"/>
-            </a:pPr>
-            <a:r>
-              <a:rPr lang="en-US" sz="1200" b="1" dirty="0" err="1">
-                <a:solidFill>
-                  <a:srgbClr val="2B4D7B"/>
-                </a:solidFill>
-                <a:latin typeface="Tahoma" panose="020B0604030504040204" pitchFamily="34" charset="0"/>
-                <a:ea typeface="Tahoma" panose="020B0604030504040204" pitchFamily="34" charset="0"/>
-                <a:cs typeface="Tahoma" panose="020B0604030504040204" pitchFamily="34" charset="0"/>
-                <a:sym typeface="Canva Sans Bold"/>
-              </a:rPr>
-              <a:t>Chỉ</a:t>
-            </a:r>
-            <a:r>
-              <a:rPr lang="en-US" sz="1200" b="1" dirty="0">
-                <a:solidFill>
-                  <a:srgbClr val="2B4D7B"/>
-                </a:solidFill>
-                <a:latin typeface="Tahoma" panose="020B0604030504040204" pitchFamily="34" charset="0"/>
-                <a:ea typeface="Tahoma" panose="020B0604030504040204" pitchFamily="34" charset="0"/>
-                <a:cs typeface="Tahoma" panose="020B0604030504040204" pitchFamily="34" charset="0"/>
-                <a:sym typeface="Canva Sans Bold"/>
-              </a:rPr>
-              <a:t> </a:t>
-            </a:r>
-            <a:r>
-              <a:rPr lang="en-US" sz="1200" b="1" dirty="0" err="1">
-                <a:solidFill>
-                  <a:srgbClr val="2B4D7B"/>
-                </a:solidFill>
-                <a:latin typeface="Tahoma" panose="020B0604030504040204" pitchFamily="34" charset="0"/>
-                <a:ea typeface="Tahoma" panose="020B0604030504040204" pitchFamily="34" charset="0"/>
-                <a:cs typeface="Tahoma" panose="020B0604030504040204" pitchFamily="34" charset="0"/>
-                <a:sym typeface="Canva Sans Bold"/>
-              </a:rPr>
-              <a:t>số</a:t>
-            </a:r>
-            <a:r>
-              <a:rPr lang="en-US" sz="1200" b="1" dirty="0">
-                <a:solidFill>
-                  <a:srgbClr val="2B4D7B"/>
-                </a:solidFill>
-                <a:latin typeface="Tahoma" panose="020B0604030504040204" pitchFamily="34" charset="0"/>
-                <a:ea typeface="Tahoma" panose="020B0604030504040204" pitchFamily="34" charset="0"/>
-                <a:cs typeface="Tahoma" panose="020B0604030504040204" pitchFamily="34" charset="0"/>
-                <a:sym typeface="Canva Sans Bold"/>
-              </a:rPr>
-              <a:t> </a:t>
-            </a:r>
-            <a:r>
-              <a:rPr lang="en-US" sz="1200" b="1" dirty="0" err="1">
-                <a:solidFill>
-                  <a:srgbClr val="2B4D7B"/>
-                </a:solidFill>
-                <a:latin typeface="Tahoma" panose="020B0604030504040204" pitchFamily="34" charset="0"/>
-                <a:ea typeface="Tahoma" panose="020B0604030504040204" pitchFamily="34" charset="0"/>
-                <a:cs typeface="Tahoma" panose="020B0604030504040204" pitchFamily="34" charset="0"/>
-                <a:sym typeface="Canva Sans Bold"/>
-              </a:rPr>
-              <a:t>đánh</a:t>
-            </a:r>
-            <a:r>
-              <a:rPr lang="en-US" sz="1200" b="1" dirty="0">
-                <a:solidFill>
-                  <a:srgbClr val="2B4D7B"/>
-                </a:solidFill>
-                <a:latin typeface="Tahoma" panose="020B0604030504040204" pitchFamily="34" charset="0"/>
-                <a:ea typeface="Tahoma" panose="020B0604030504040204" pitchFamily="34" charset="0"/>
-                <a:cs typeface="Tahoma" panose="020B0604030504040204" pitchFamily="34" charset="0"/>
-                <a:sym typeface="Canva Sans Bold"/>
-              </a:rPr>
-              <a:t> </a:t>
-            </a:r>
-            <a:r>
-              <a:rPr lang="en-US" sz="1200" b="1" dirty="0" err="1">
-                <a:solidFill>
-                  <a:srgbClr val="2B4D7B"/>
-                </a:solidFill>
-                <a:latin typeface="Tahoma" panose="020B0604030504040204" pitchFamily="34" charset="0"/>
-                <a:ea typeface="Tahoma" panose="020B0604030504040204" pitchFamily="34" charset="0"/>
-                <a:cs typeface="Tahoma" panose="020B0604030504040204" pitchFamily="34" charset="0"/>
-                <a:sym typeface="Canva Sans Bold"/>
-              </a:rPr>
-              <a:t>giá</a:t>
-            </a:r>
-            <a:endParaRPr lang="en-US" sz="1200" b="1" dirty="0">
-              <a:solidFill>
-                <a:srgbClr val="2B4D7B"/>
-              </a:solidFill>
-              <a:latin typeface="Tahoma" panose="020B0604030504040204" pitchFamily="34" charset="0"/>
-              <a:ea typeface="Tahoma" panose="020B0604030504040204" pitchFamily="34" charset="0"/>
-              <a:cs typeface="Tahoma" panose="020B0604030504040204" pitchFamily="34" charset="0"/>
-              <a:sym typeface="Canva Sans Bold"/>
-            </a:endParaRPr>
-          </a:p>
-          <a:p>
-            <a:pPr marL="228600" indent="-228600" algn="l">
-              <a:lnSpc>
-                <a:spcPts val="2304"/>
-              </a:lnSpc>
-              <a:buAutoNum type="arabicPeriod"/>
-            </a:pPr>
-            <a:r>
-              <a:rPr lang="en-US" sz="1200" b="1" dirty="0">
-                <a:solidFill>
-                  <a:srgbClr val="2B4D7B"/>
-                </a:solidFill>
-                <a:latin typeface="Tahoma" panose="020B0604030504040204" pitchFamily="34" charset="0"/>
-                <a:ea typeface="Tahoma" panose="020B0604030504040204" pitchFamily="34" charset="0"/>
-                <a:cs typeface="Tahoma" panose="020B0604030504040204" pitchFamily="34" charset="0"/>
-                <a:sym typeface="Canva Sans Bold"/>
-              </a:rPr>
-              <a:t>Phương </a:t>
-            </a:r>
-            <a:r>
-              <a:rPr lang="en-US" sz="1200" b="1" dirty="0" err="1">
-                <a:solidFill>
-                  <a:srgbClr val="2B4D7B"/>
-                </a:solidFill>
-                <a:latin typeface="Tahoma" panose="020B0604030504040204" pitchFamily="34" charset="0"/>
-                <a:ea typeface="Tahoma" panose="020B0604030504040204" pitchFamily="34" charset="0"/>
-                <a:cs typeface="Tahoma" panose="020B0604030504040204" pitchFamily="34" charset="0"/>
-                <a:sym typeface="Canva Sans Bold"/>
-              </a:rPr>
-              <a:t>pháp</a:t>
-            </a:r>
-            <a:endParaRPr lang="en-US" sz="1200" b="1" dirty="0">
-              <a:solidFill>
-                <a:srgbClr val="2B4D7B"/>
-              </a:solidFill>
-              <a:latin typeface="Tahoma" panose="020B0604030504040204" pitchFamily="34" charset="0"/>
-              <a:ea typeface="Tahoma" panose="020B0604030504040204" pitchFamily="34" charset="0"/>
-              <a:cs typeface="Tahoma" panose="020B0604030504040204" pitchFamily="34" charset="0"/>
-              <a:sym typeface="Canva Sans Bold"/>
-            </a:endParaRPr>
-          </a:p>
-          <a:p>
-            <a:pPr marL="228600" indent="-228600" algn="l">
-              <a:lnSpc>
-                <a:spcPts val="2304"/>
-              </a:lnSpc>
-              <a:buAutoNum type="arabicPeriod"/>
-            </a:pPr>
-            <a:r>
-              <a:rPr lang="en-US" sz="1200" b="1" dirty="0" err="1">
-                <a:solidFill>
-                  <a:srgbClr val="2B4D7B"/>
-                </a:solidFill>
-                <a:latin typeface="Tahoma" panose="020B0604030504040204" pitchFamily="34" charset="0"/>
-                <a:ea typeface="Tahoma" panose="020B0604030504040204" pitchFamily="34" charset="0"/>
-                <a:cs typeface="Tahoma" panose="020B0604030504040204" pitchFamily="34" charset="0"/>
-                <a:sym typeface="Canva Sans Bold"/>
-              </a:rPr>
-              <a:t>Kết</a:t>
-            </a:r>
-            <a:r>
-              <a:rPr lang="en-US" sz="1200" b="1" dirty="0">
-                <a:solidFill>
-                  <a:srgbClr val="2B4D7B"/>
-                </a:solidFill>
-                <a:latin typeface="Tahoma" panose="020B0604030504040204" pitchFamily="34" charset="0"/>
-                <a:ea typeface="Tahoma" panose="020B0604030504040204" pitchFamily="34" charset="0"/>
-                <a:cs typeface="Tahoma" panose="020B0604030504040204" pitchFamily="34" charset="0"/>
-                <a:sym typeface="Canva Sans Bold"/>
-              </a:rPr>
-              <a:t> </a:t>
-            </a:r>
-            <a:r>
-              <a:rPr lang="en-US" sz="1200" b="1" dirty="0" err="1">
-                <a:solidFill>
-                  <a:srgbClr val="2B4D7B"/>
-                </a:solidFill>
-                <a:latin typeface="Tahoma" panose="020B0604030504040204" pitchFamily="34" charset="0"/>
-                <a:ea typeface="Tahoma" panose="020B0604030504040204" pitchFamily="34" charset="0"/>
-                <a:cs typeface="Tahoma" panose="020B0604030504040204" pitchFamily="34" charset="0"/>
-                <a:sym typeface="Canva Sans Bold"/>
-              </a:rPr>
-              <a:t>quả</a:t>
-            </a:r>
-            <a:r>
-              <a:rPr lang="en-US" sz="1200" b="1" dirty="0">
-                <a:solidFill>
-                  <a:srgbClr val="2B4D7B"/>
-                </a:solidFill>
-                <a:latin typeface="Tahoma" panose="020B0604030504040204" pitchFamily="34" charset="0"/>
-                <a:ea typeface="Tahoma" panose="020B0604030504040204" pitchFamily="34" charset="0"/>
-                <a:cs typeface="Tahoma" panose="020B0604030504040204" pitchFamily="34" charset="0"/>
-                <a:sym typeface="Canva Sans Bold"/>
-              </a:rPr>
-              <a:t> </a:t>
-            </a:r>
-            <a:r>
-              <a:rPr lang="en-US" sz="1200" b="1" dirty="0" err="1">
-                <a:solidFill>
-                  <a:srgbClr val="2B4D7B"/>
-                </a:solidFill>
-                <a:latin typeface="Tahoma" panose="020B0604030504040204" pitchFamily="34" charset="0"/>
-                <a:ea typeface="Tahoma" panose="020B0604030504040204" pitchFamily="34" charset="0"/>
-                <a:cs typeface="Tahoma" panose="020B0604030504040204" pitchFamily="34" charset="0"/>
-                <a:sym typeface="Canva Sans Bold"/>
-              </a:rPr>
-              <a:t>thực</a:t>
-            </a:r>
-            <a:r>
-              <a:rPr lang="en-US" sz="1200" b="1" dirty="0">
-                <a:solidFill>
-                  <a:srgbClr val="2B4D7B"/>
-                </a:solidFill>
-                <a:latin typeface="Tahoma" panose="020B0604030504040204" pitchFamily="34" charset="0"/>
-                <a:ea typeface="Tahoma" panose="020B0604030504040204" pitchFamily="34" charset="0"/>
-                <a:cs typeface="Tahoma" panose="020B0604030504040204" pitchFamily="34" charset="0"/>
-                <a:sym typeface="Canva Sans Bold"/>
-              </a:rPr>
-              <a:t> </a:t>
-            </a:r>
-            <a:r>
-              <a:rPr lang="en-US" sz="1200" b="1" dirty="0" err="1">
-                <a:solidFill>
-                  <a:srgbClr val="2B4D7B"/>
-                </a:solidFill>
-                <a:latin typeface="Tahoma" panose="020B0604030504040204" pitchFamily="34" charset="0"/>
-                <a:ea typeface="Tahoma" panose="020B0604030504040204" pitchFamily="34" charset="0"/>
-                <a:cs typeface="Tahoma" panose="020B0604030504040204" pitchFamily="34" charset="0"/>
-                <a:sym typeface="Canva Sans Bold"/>
-              </a:rPr>
-              <a:t>nghiệm</a:t>
-            </a:r>
-            <a:endParaRPr lang="en-US" sz="1200" b="1" dirty="0">
-              <a:solidFill>
-                <a:srgbClr val="2B4D7B"/>
-              </a:solidFill>
-              <a:latin typeface="Tahoma" panose="020B0604030504040204" pitchFamily="34" charset="0"/>
-              <a:ea typeface="Tahoma" panose="020B0604030504040204" pitchFamily="34" charset="0"/>
-              <a:cs typeface="Tahoma" panose="020B0604030504040204" pitchFamily="34" charset="0"/>
-              <a:sym typeface="Canva Sans Bold"/>
-            </a:endParaRPr>
-          </a:p>
-          <a:p>
-            <a:pPr marL="228600" indent="-228600" algn="l">
-              <a:lnSpc>
-                <a:spcPts val="2304"/>
-              </a:lnSpc>
-              <a:buAutoNum type="arabicPeriod"/>
-            </a:pPr>
-            <a:r>
-              <a:rPr lang="en-US" sz="1200" b="1" dirty="0" err="1">
-                <a:solidFill>
-                  <a:srgbClr val="2B4D7B"/>
-                </a:solidFill>
-                <a:latin typeface="Tahoma" panose="020B0604030504040204" pitchFamily="34" charset="0"/>
-                <a:ea typeface="Tahoma" panose="020B0604030504040204" pitchFamily="34" charset="0"/>
-                <a:cs typeface="Tahoma" panose="020B0604030504040204" pitchFamily="34" charset="0"/>
-                <a:sym typeface="Canva Sans Bold"/>
-              </a:rPr>
-              <a:t>Kết</a:t>
-            </a:r>
-            <a:r>
-              <a:rPr lang="en-US" sz="1200" b="1" dirty="0">
-                <a:solidFill>
-                  <a:srgbClr val="2B4D7B"/>
-                </a:solidFill>
-                <a:latin typeface="Tahoma" panose="020B0604030504040204" pitchFamily="34" charset="0"/>
-                <a:ea typeface="Tahoma" panose="020B0604030504040204" pitchFamily="34" charset="0"/>
-                <a:cs typeface="Tahoma" panose="020B0604030504040204" pitchFamily="34" charset="0"/>
-                <a:sym typeface="Canva Sans Bold"/>
-              </a:rPr>
-              <a:t> </a:t>
-            </a:r>
-            <a:r>
-              <a:rPr lang="en-US" sz="1200" b="1" dirty="0" err="1">
-                <a:solidFill>
-                  <a:srgbClr val="2B4D7B"/>
-                </a:solidFill>
-                <a:latin typeface="Tahoma" panose="020B0604030504040204" pitchFamily="34" charset="0"/>
-                <a:ea typeface="Tahoma" panose="020B0604030504040204" pitchFamily="34" charset="0"/>
-                <a:cs typeface="Tahoma" panose="020B0604030504040204" pitchFamily="34" charset="0"/>
-                <a:sym typeface="Canva Sans Bold"/>
-              </a:rPr>
-              <a:t>luận</a:t>
-            </a:r>
-            <a:endParaRPr lang="en-US" sz="1200" b="1" dirty="0">
-              <a:solidFill>
-                <a:srgbClr val="2B4D7B"/>
-              </a:solidFill>
-              <a:latin typeface="Tahoma" panose="020B0604030504040204" pitchFamily="34" charset="0"/>
-              <a:ea typeface="Tahoma" panose="020B0604030504040204" pitchFamily="34" charset="0"/>
-              <a:cs typeface="Tahoma" panose="020B0604030504040204" pitchFamily="34" charset="0"/>
-              <a:sym typeface="Canva Sans Bold"/>
-            </a:endParaRPr>
-          </a:p>
         </p:txBody>
       </p:sp>
       <p:sp>
         <p:nvSpPr>
-          <p:cNvPr id="6" name="TextBox 5">
+          <p:cNvPr id="10" name="TextBox 9">
             <a:extLst>
               <a:ext uri="{FF2B5EF4-FFF2-40B4-BE49-F238E27FC236}">
-                <a16:creationId xmlns:a16="http://schemas.microsoft.com/office/drawing/2014/main" id="{1A3B45B4-54EB-D63C-8B42-A98CADA42C8D}"/>
+                <a16:creationId xmlns:a16="http://schemas.microsoft.com/office/drawing/2014/main" id="{BFFFFA02-4CC5-75EA-B1FA-41B20A419C57}"/>
               </a:ext>
             </a:extLst>
           </p:cNvPr>
@@ -10408,8 +15665,8 @@
         </p:nvSpPr>
         <p:spPr>
           <a:xfrm>
-            <a:off x="5391150" y="2914650"/>
-            <a:ext cx="219075" cy="215444"/>
+            <a:off x="5314950" y="2914650"/>
+            <a:ext cx="295275" cy="215444"/>
           </a:xfrm>
           <a:prstGeom prst="rect">
             <a:avLst/>
@@ -10433,7 +15690,7 @@
                 <a:cs typeface="Tahoma" panose="020B0604030504040204" pitchFamily="34" charset="0"/>
                 <a:sym typeface="Canva Sans"/>
               </a:rPr>
-              <a:t>1</a:t>
+              <a:t>23</a:t>
             </a:r>
             <a:endParaRPr lang="en-US" sz="800" dirty="0">
               <a:latin typeface="Tahoma" panose="020B0604030504040204" pitchFamily="34" charset="0"/>
@@ -10443,7 +15700,112 @@
           </a:p>
         </p:txBody>
       </p:sp>
+      <p:sp>
+        <p:nvSpPr>
+          <p:cNvPr id="4" name="Rectangle: Rounded Corners 3">
+            <a:extLst>
+              <a:ext uri="{FF2B5EF4-FFF2-40B4-BE49-F238E27FC236}">
+                <a16:creationId xmlns:a16="http://schemas.microsoft.com/office/drawing/2014/main" id="{3B52617E-8D38-BD13-D0A9-BFF94415DAA4}"/>
+              </a:ext>
+            </a:extLst>
+          </p:cNvPr>
+          <p:cNvSpPr/>
+          <p:nvPr/>
+        </p:nvSpPr>
+        <p:spPr>
+          <a:xfrm>
+            <a:off x="400050" y="704850"/>
+            <a:ext cx="4953000" cy="2070276"/>
+          </a:xfrm>
+          <a:prstGeom prst="roundRect">
+            <a:avLst>
+              <a:gd name="adj" fmla="val 32019"/>
+            </a:avLst>
+          </a:prstGeom>
+          <a:solidFill>
+            <a:schemeClr val="accent6">
+              <a:lumMod val="40000"/>
+              <a:lumOff val="60000"/>
+            </a:schemeClr>
+          </a:solidFill>
+          <a:ln>
+            <a:noFill/>
+          </a:ln>
+        </p:spPr>
+        <p:style>
+          <a:lnRef idx="2">
+            <a:schemeClr val="accent1">
+              <a:shade val="15000"/>
+            </a:schemeClr>
+          </a:lnRef>
+          <a:fillRef idx="1">
+            <a:schemeClr val="accent1"/>
+          </a:fillRef>
+          <a:effectRef idx="0">
+            <a:schemeClr val="accent1"/>
+          </a:effectRef>
+          <a:fontRef idx="minor">
+            <a:schemeClr val="lt1"/>
+          </a:fontRef>
+        </p:style>
+        <p:txBody>
+          <a:bodyPr rtlCol="0" anchor="ctr"/>
+          <a:lstStyle/>
+          <a:p>
+            <a:pPr algn="just"/>
+            <a:r>
+              <a:rPr lang="vi-VN" sz="1050" dirty="0">
+                <a:solidFill>
+                  <a:schemeClr val="tx1"/>
+                </a:solidFill>
+                <a:latin typeface="Tahoma" panose="020B0604030504040204" pitchFamily="34" charset="0"/>
+                <a:ea typeface="Tahoma" panose="020B0604030504040204" pitchFamily="34" charset="0"/>
+                <a:cs typeface="Tahoma" panose="020B0604030504040204" pitchFamily="34" charset="0"/>
+              </a:rPr>
+              <a:t>Quá trình thử nghiệm cho thấy việc sử dụng mô hình Transformer cho bài toán dịch máy từ tiếng Anh sang tiếng Việt có kết quả cao hơn hẳn so với việc sử dụng mô hình Sequence to Sequence.</a:t>
+            </a:r>
+            <a:endParaRPr lang="en-US" sz="1050" dirty="0">
+              <a:solidFill>
+                <a:schemeClr val="tx1"/>
+              </a:solidFill>
+              <a:latin typeface="Tahoma" panose="020B0604030504040204" pitchFamily="34" charset="0"/>
+              <a:ea typeface="Tahoma" panose="020B0604030504040204" pitchFamily="34" charset="0"/>
+              <a:cs typeface="Tahoma" panose="020B0604030504040204" pitchFamily="34" charset="0"/>
+            </a:endParaRPr>
+          </a:p>
+          <a:p>
+            <a:pPr algn="just"/>
+            <a:endParaRPr lang="vi-VN" sz="1050" dirty="0">
+              <a:solidFill>
+                <a:schemeClr val="tx1"/>
+              </a:solidFill>
+              <a:latin typeface="Tahoma" panose="020B0604030504040204" pitchFamily="34" charset="0"/>
+              <a:ea typeface="Tahoma" panose="020B0604030504040204" pitchFamily="34" charset="0"/>
+              <a:cs typeface="Tahoma" panose="020B0604030504040204" pitchFamily="34" charset="0"/>
+            </a:endParaRPr>
+          </a:p>
+          <a:p>
+            <a:pPr algn="just"/>
+            <a:r>
+              <a:rPr lang="vi-VN" sz="1050" dirty="0">
+                <a:solidFill>
+                  <a:schemeClr val="tx1"/>
+                </a:solidFill>
+                <a:latin typeface="Tahoma" panose="020B0604030504040204" pitchFamily="34" charset="0"/>
+                <a:ea typeface="Tahoma" panose="020B0604030504040204" pitchFamily="34" charset="0"/>
+                <a:cs typeface="Tahoma" panose="020B0604030504040204" pitchFamily="34" charset="0"/>
+              </a:rPr>
+              <a:t>Kết quả thử nghiệm hiện tại ở mức demo tính khả thi, trong tương lai nhóm em sẽ thử nghiệm các kịch bản mới để tăng độ chính xác cho mô hình. Ví dụ như sử dụng phương pháp tokenizer mới, tăng số lượng tham số của mô hình.</a:t>
+            </a:r>
+          </a:p>
+        </p:txBody>
+      </p:sp>
     </p:spTree>
+    <p:extLst>
+      <p:ext uri="{BB962C8B-B14F-4D97-AF65-F5344CB8AC3E}">
+        <p14:creationId xmlns:p14="http://schemas.microsoft.com/office/powerpoint/2010/main" val="56679973"/>
+      </p:ext>
+    </p:extLst>
   </p:cSld>
   <p:clrMapOvr>
     <a:masterClrMapping/>
@@ -10451,7 +15813,7 @@
 </p:sld>
 </file>
 
-<file path=ppt/slides/slide20.xml><?xml version="1.0" encoding="utf-8"?>
+<file path=ppt/slides/slide25.xml><?xml version="1.0" encoding="utf-8"?>
 <p:sld xmlns:a="http://schemas.openxmlformats.org/drawingml/2006/main" xmlns:r="http://schemas.openxmlformats.org/officeDocument/2006/relationships" xmlns:p="http://schemas.openxmlformats.org/presentationml/2006/main">
   <p:cSld>
     <p:spTree>
@@ -11544,7 +16906,39 @@
                 <a:ea typeface="Tahoma" panose="020B0604030504040204" pitchFamily="34" charset="0"/>
                 <a:cs typeface="Tahoma" panose="020B0604030504040204" pitchFamily="34" charset="0"/>
               </a:rPr>
-              <a:t>Bài toán English–Vietnamese Machine Translation là bài toán chuyển đổi tự động một câu hoặc đoạn văn từ ngôn ngữ nguồn (tiếng Anh) sang ngôn ngữ đích (tiếng Việt), sao cho nội dung được bảo toàn và cách diễn đạt phù hợp với ngữ pháp của ngôn ngữ đích.</a:t>
+              <a:t>Bài toán English</a:t>
+            </a:r>
+            <a:r>
+              <a:rPr lang="en-US" sz="900" dirty="0">
+                <a:latin typeface="Tahoma" panose="020B0604030504040204" pitchFamily="34" charset="0"/>
+                <a:ea typeface="Tahoma" panose="020B0604030504040204" pitchFamily="34" charset="0"/>
+                <a:cs typeface="Tahoma" panose="020B0604030504040204" pitchFamily="34" charset="0"/>
+              </a:rPr>
+              <a:t> </a:t>
+            </a:r>
+            <a:r>
+              <a:rPr lang="vi-VN" sz="900" dirty="0">
+                <a:latin typeface="Tahoma" panose="020B0604030504040204" pitchFamily="34" charset="0"/>
+                <a:ea typeface="Tahoma" panose="020B0604030504040204" pitchFamily="34" charset="0"/>
+                <a:cs typeface="Tahoma" panose="020B0604030504040204" pitchFamily="34" charset="0"/>
+              </a:rPr>
+              <a:t>–</a:t>
+            </a:r>
+            <a:r>
+              <a:rPr lang="en-US" sz="900" dirty="0">
+                <a:latin typeface="Tahoma" panose="020B0604030504040204" pitchFamily="34" charset="0"/>
+                <a:ea typeface="Tahoma" panose="020B0604030504040204" pitchFamily="34" charset="0"/>
+                <a:cs typeface="Tahoma" panose="020B0604030504040204" pitchFamily="34" charset="0"/>
+              </a:rPr>
+              <a:t> </a:t>
+            </a:r>
+            <a:r>
+              <a:rPr lang="vi-VN" sz="900" dirty="0">
+                <a:latin typeface="Tahoma" panose="020B0604030504040204" pitchFamily="34" charset="0"/>
+                <a:ea typeface="Tahoma" panose="020B0604030504040204" pitchFamily="34" charset="0"/>
+                <a:cs typeface="Tahoma" panose="020B0604030504040204" pitchFamily="34" charset="0"/>
+              </a:rPr>
+              <a:t>Vietnamese Machine Translation là bài toán chuyển đổi tự động một câu hoặc đoạn văn từ ngôn ngữ nguồn (tiếng Anh) sang ngôn ngữ đích (tiếng Việt), sao cho nội dung được bảo toàn và cách diễn đạt phù hợp với ngữ pháp của ngôn ngữ đích.</a:t>
             </a:r>
             <a:r>
               <a:rPr lang="en-US" sz="900" dirty="0">
